--- a/input/Algorithmik.pptx
+++ b/input/Algorithmik.pptx
@@ -819,7 +819,7 @@
                 </a:lnSpc>
                 <a:defRPr/>
               </a:pPr>
-              <a:t>19.12.2025</a:t>
+              <a:t>09.01.2026</a:t>
             </a:fld>
             <a:endParaRPr lang="de-DE" sz="900" dirty="0"/>
           </a:p>
@@ -1804,7 +1804,7 @@
                 </a:lnSpc>
                 <a:defRPr/>
               </a:pPr>
-              <a:t>19.12.2025</a:t>
+              <a:t>09.01.2026</a:t>
             </a:fld>
             <a:endParaRPr lang="de-DE" sz="900" dirty="0"/>
           </a:p>
@@ -3318,7 +3318,7 @@
             </a:pPr>
             <a:fld id="{C9048784-7281-4837-A1AE-FC4A34A747D6}" type="datetime1">
               <a:rPr lang="de-DE" smtClean="0"/>
-              <a:t>19.12.2025</a:t>
+              <a:t>09.01.2026</a:t>
             </a:fld>
             <a:endParaRPr lang="de-DE" dirty="0"/>
           </a:p>
@@ -4799,7 +4799,7 @@
             </a:pPr>
             <a:fld id="{29E1D907-3A8C-4FA0-AF32-FB476100B44A}" type="datetime1">
               <a:rPr lang="de-DE" smtClean="0"/>
-              <a:t>19.12.2025</a:t>
+              <a:t>09.01.2026</a:t>
             </a:fld>
             <a:endParaRPr lang="de-DE" dirty="0"/>
           </a:p>
@@ -5210,7 +5210,7 @@
             </a:pPr>
             <a:fld id="{0D5930E3-AAC2-4ADF-925B-A037BED539BF}" type="datetime1">
               <a:rPr lang="de-DE" smtClean="0"/>
-              <a:t>19.12.2025</a:t>
+              <a:t>09.01.2026</a:t>
             </a:fld>
             <a:endParaRPr lang="en-US"/>
           </a:p>
@@ -5519,7 +5519,7 @@
             </a:pPr>
             <a:fld id="{77078B80-CC76-49E8-922A-90B2CBA19035}" type="datetime1">
               <a:rPr lang="de-DE" smtClean="0"/>
-              <a:t>19.12.2025</a:t>
+              <a:t>09.01.2026</a:t>
             </a:fld>
             <a:endParaRPr lang="en-US"/>
           </a:p>
@@ -6020,7 +6020,7 @@
             </a:pPr>
             <a:fld id="{410F1620-6991-468A-986C-DEA71AF2A6A8}" type="datetime1">
               <a:rPr lang="de-DE" smtClean="0"/>
-              <a:t>19.12.2025</a:t>
+              <a:t>09.01.2026</a:t>
             </a:fld>
             <a:endParaRPr lang="en-US"/>
           </a:p>
@@ -6418,7 +6418,7 @@
             </a:pPr>
             <a:fld id="{2A021128-E3BC-4510-A597-24FCB75D3A75}" type="datetime1">
               <a:rPr lang="de-DE" smtClean="0"/>
-              <a:t>19.12.2025</a:t>
+              <a:t>09.01.2026</a:t>
             </a:fld>
             <a:endParaRPr lang="de-DE" dirty="0"/>
           </a:p>
@@ -6675,7 +6675,7 @@
             </a:pPr>
             <a:fld id="{204B419C-6100-4ECC-A14C-29389AFC3646}" type="datetime1">
               <a:rPr lang="de-DE" smtClean="0"/>
-              <a:t>19.12.2025</a:t>
+              <a:t>09.01.2026</a:t>
             </a:fld>
             <a:endParaRPr lang="de-DE" dirty="0"/>
           </a:p>
@@ -7066,7 +7066,7 @@
             </a:pPr>
             <a:fld id="{17D379B7-331E-424B-A45F-F03D5981C976}" type="datetime1">
               <a:rPr lang="de-DE" smtClean="0"/>
-              <a:t>19.12.2025</a:t>
+              <a:t>09.01.2026</a:t>
             </a:fld>
             <a:endParaRPr lang="de-DE" dirty="0"/>
           </a:p>
@@ -7608,7 +7608,7 @@
             </a:pPr>
             <a:fld id="{F95F7EFE-EEF9-40C5-9AEC-F07BD35586E4}" type="datetime1">
               <a:rPr lang="de-DE" smtClean="0"/>
-              <a:t>19.12.2025</a:t>
+              <a:t>09.01.2026</a:t>
             </a:fld>
             <a:endParaRPr lang="de-DE" dirty="0"/>
           </a:p>
@@ -7864,7 +7864,7 @@
             </a:pPr>
             <a:fld id="{29F603B7-878E-43D0-A9A1-FA3C2AF87C58}" type="datetime1">
               <a:rPr lang="de-DE" smtClean="0"/>
-              <a:t>19.12.2025</a:t>
+              <a:t>09.01.2026</a:t>
             </a:fld>
             <a:endParaRPr lang="de-DE" dirty="0"/>
           </a:p>
@@ -7961,7 +7961,7 @@
             </a:pPr>
             <a:fld id="{64985212-05E7-49A7-ABD6-673A483CDAE3}" type="datetime1">
               <a:rPr lang="de-DE" smtClean="0"/>
-              <a:t>19.12.2025</a:t>
+              <a:t>09.01.2026</a:t>
             </a:fld>
             <a:endParaRPr lang="de-DE" dirty="0"/>
           </a:p>
@@ -8931,7 +8931,7 @@
             </a:pPr>
             <a:fld id="{8ED535EE-90AE-4348-98D3-AFE064A78180}" type="datetime1">
               <a:rPr lang="de-DE" smtClean="0"/>
-              <a:t>19.12.2025</a:t>
+              <a:t>09.01.2026</a:t>
             </a:fld>
             <a:endParaRPr lang="de-DE" dirty="0"/>
           </a:p>
@@ -9701,7 +9701,7 @@
             </a:pPr>
             <a:fld id="{9C590BB0-1566-4728-8689-C18D1116058A}" type="datetime1">
               <a:rPr lang="de-DE" smtClean="0"/>
-              <a:t>19.12.2025</a:t>
+              <a:t>09.01.2026</a:t>
             </a:fld>
             <a:endParaRPr lang="de-DE" dirty="0"/>
           </a:p>
@@ -10434,7 +10434,7 @@
             <a:fld id="{97C55095-590B-4AAB-8606-0F86796D070A}" type="datetime1">
               <a:rPr lang="de-DE" smtClean="0"/>
               <a:pPr/>
-              <a:t>19.12.2025</a:t>
+              <a:t>09.01.2026</a:t>
             </a:fld>
             <a:endParaRPr lang="de-DE" dirty="0"/>
           </a:p>
@@ -10990,7 +10990,7 @@
             <a:fld id="{F2D06E3F-368B-43DC-96F3-4B8E65027050}" type="datetime1">
               <a:rPr lang="de-DE" smtClean="0"/>
               <a:pPr/>
-              <a:t>19.12.2025</a:t>
+              <a:t>09.01.2026</a:t>
             </a:fld>
             <a:endParaRPr lang="de-DE" dirty="0"/>
           </a:p>
@@ -14240,7 +14240,7 @@
             <a:fld id="{97C55095-590B-4AAB-8606-0F86796D070A}" type="datetime1">
               <a:rPr lang="de-DE" smtClean="0"/>
               <a:pPr/>
-              <a:t>19.12.2025</a:t>
+              <a:t>09.01.2026</a:t>
             </a:fld>
             <a:endParaRPr lang="de-DE" dirty="0"/>
           </a:p>
@@ -15429,7 +15429,7 @@
             <a:fld id="{97C55095-590B-4AAB-8606-0F86796D070A}" type="datetime1">
               <a:rPr lang="de-DE" smtClean="0"/>
               <a:pPr/>
-              <a:t>19.12.2025</a:t>
+              <a:t>09.01.2026</a:t>
             </a:fld>
             <a:endParaRPr lang="de-DE" dirty="0"/>
           </a:p>
@@ -18058,7 +18058,7 @@
             <a:fld id="{97C55095-590B-4AAB-8606-0F86796D070A}" type="datetime1">
               <a:rPr lang="de-DE" smtClean="0"/>
               <a:pPr/>
-              <a:t>19.12.2025</a:t>
+              <a:t>09.01.2026</a:t>
             </a:fld>
             <a:endParaRPr lang="de-DE" dirty="0"/>
           </a:p>
@@ -20315,7 +20315,7 @@
               <a:buNone/>
             </a:pPr>
             <a:r>
-              <a:rPr lang="en-US" sz="2000" b="1">
+              <a:rPr lang="en-US" sz="2000" b="1" dirty="0">
                 <a:solidFill>
                   <a:schemeClr val="lt1"/>
                 </a:solidFill>
@@ -20326,7 +20326,7 @@
               </a:rPr>
               <a:t>+1</a:t>
             </a:r>
-            <a:endParaRPr/>
+            <a:endParaRPr dirty="0"/>
           </a:p>
         </p:txBody>
       </p:sp>
@@ -20802,7 +20802,7 @@
               <a:buNone/>
             </a:pPr>
             <a:r>
-              <a:rPr lang="en-US" sz="2400">
+              <a:rPr lang="en-US" sz="2400" dirty="0">
                 <a:solidFill>
                   <a:schemeClr val="lt1"/>
                 </a:solidFill>
@@ -20813,7 +20813,7 @@
               </a:rPr>
               <a:t>f(n) = (9n+4)n + 3</a:t>
             </a:r>
-            <a:endParaRPr/>
+            <a:endParaRPr dirty="0"/>
           </a:p>
         </p:txBody>
       </p:sp>
@@ -21295,7 +21295,7 @@
                 <a:buNone/>
               </a:pPr>
               <a:r>
-                <a:rPr lang="en-US" sz="1800" b="1">
+                <a:rPr lang="en-US" sz="1800" b="1" dirty="0">
                   <a:solidFill>
                     <a:schemeClr val="lt1"/>
                   </a:solidFill>
@@ -21306,7 +21306,7 @@
                 </a:rPr>
                 <a:t>*n</a:t>
               </a:r>
-              <a:endParaRPr/>
+              <a:endParaRPr dirty="0"/>
             </a:p>
           </p:txBody>
         </p:sp>
@@ -21777,7 +21777,7 @@
             <a:fld id="{97C55095-590B-4AAB-8606-0F86796D070A}" type="datetime1">
               <a:rPr lang="de-DE" smtClean="0"/>
               <a:pPr/>
-              <a:t>19.12.2025</a:t>
+              <a:t>09.01.2026</a:t>
             </a:fld>
             <a:endParaRPr lang="de-DE" dirty="0"/>
           </a:p>
@@ -24858,7 +24858,7 @@
             <a:fld id="{F2D06E3F-368B-43DC-96F3-4B8E65027050}" type="datetime1">
               <a:rPr lang="de-DE" smtClean="0"/>
               <a:pPr/>
-              <a:t>19.12.2025</a:t>
+              <a:t>09.01.2026</a:t>
             </a:fld>
             <a:endParaRPr lang="de-DE" dirty="0"/>
           </a:p>
@@ -29117,7 +29117,7 @@
             <a:fld id="{F2D06E3F-368B-43DC-96F3-4B8E65027050}" type="datetime1">
               <a:rPr lang="de-DE" smtClean="0"/>
               <a:pPr/>
-              <a:t>19.12.2025</a:t>
+              <a:t>09.01.2026</a:t>
             </a:fld>
             <a:endParaRPr lang="de-DE" dirty="0"/>
           </a:p>

--- a/input/Algorithmik.pptx
+++ b/input/Algorithmik.pptx
@@ -5,20 +5,16 @@
     <p:sldMasterId id="2147483648" r:id="rId1"/>
   </p:sldMasterIdLst>
   <p:notesMasterIdLst>
-    <p:notesMasterId r:id="rId10"/>
+    <p:notesMasterId r:id="rId6"/>
   </p:notesMasterIdLst>
   <p:handoutMasterIdLst>
-    <p:handoutMasterId r:id="rId11"/>
+    <p:handoutMasterId r:id="rId7"/>
   </p:handoutMasterIdLst>
   <p:sldIdLst>
-    <p:sldId id="1031" r:id="rId2"/>
-    <p:sldId id="1037" r:id="rId3"/>
-    <p:sldId id="278" r:id="rId4"/>
-    <p:sldId id="279" r:id="rId5"/>
-    <p:sldId id="280" r:id="rId6"/>
-    <p:sldId id="283" r:id="rId7"/>
-    <p:sldId id="257" r:id="rId8"/>
-    <p:sldId id="1017" r:id="rId9"/>
+    <p:sldId id="1037" r:id="rId2"/>
+    <p:sldId id="279" r:id="rId3"/>
+    <p:sldId id="283" r:id="rId4"/>
+    <p:sldId id="257" r:id="rId5"/>
   </p:sldIdLst>
   <p:sldSz cx="12192000" cy="6858000"/>
   <p:notesSz cx="6797675" cy="9928225"/>
@@ -819,7 +815,7 @@
                 </a:lnSpc>
                 <a:defRPr/>
               </a:pPr>
-              <a:t>09.01.2026</a:t>
+              <a:t>30.01.2026</a:t>
             </a:fld>
             <a:endParaRPr lang="de-DE" sz="900" dirty="0"/>
           </a:p>
@@ -1804,7 +1800,7 @@
                 </a:lnSpc>
                 <a:defRPr/>
               </a:pPr>
-              <a:t>09.01.2026</a:t>
+              <a:t>30.01.2026</a:t>
             </a:fld>
             <a:endParaRPr lang="de-DE" sz="900" dirty="0"/>
           </a:p>
@@ -2177,67 +2173,6 @@
 </file>
 
 <file path=ppt/notesSlides/notesSlide1.xml><?xml version="1.0" encoding="utf-8"?>
-<p:notes xmlns:a="http://schemas.openxmlformats.org/drawingml/2006/main" xmlns:r="http://schemas.openxmlformats.org/officeDocument/2006/relationships" xmlns:p="http://schemas.openxmlformats.org/presentationml/2006/main">
-  <p:cSld>
-    <p:spTree>
-      <p:nvGrpSpPr>
-        <p:cNvPr id="1" name=""/>
-        <p:cNvGrpSpPr/>
-        <p:nvPr/>
-      </p:nvGrpSpPr>
-      <p:grpSpPr>
-        <a:xfrm>
-          <a:off x="0" y="0"/>
-          <a:ext cx="0" cy="0"/>
-          <a:chOff x="0" y="0"/>
-          <a:chExt cx="0" cy="0"/>
-        </a:xfrm>
-      </p:grpSpPr>
-      <p:sp>
-        <p:nvSpPr>
-          <p:cNvPr id="2" name="Folienbildplatzhalter 1"/>
-          <p:cNvSpPr>
-            <a:spLocks noGrp="1" noRot="1" noChangeAspect="1"/>
-          </p:cNvSpPr>
-          <p:nvPr>
-            <p:ph type="sldImg"/>
-          </p:nvPr>
-        </p:nvSpPr>
-        <p:spPr/>
-      </p:sp>
-      <p:sp>
-        <p:nvSpPr>
-          <p:cNvPr id="3" name="Notizenplatzhalter 2"/>
-          <p:cNvSpPr>
-            <a:spLocks noGrp="1"/>
-          </p:cNvSpPr>
-          <p:nvPr>
-            <p:ph type="body" idx="1"/>
-          </p:nvPr>
-        </p:nvSpPr>
-        <p:spPr/>
-        <p:txBody>
-          <a:bodyPr/>
-          <a:lstStyle/>
-          <a:p>
-            <a:endParaRPr lang="de-DE" dirty="0"/>
-          </a:p>
-        </p:txBody>
-      </p:sp>
-    </p:spTree>
-    <p:extLst>
-      <p:ext uri="{BB962C8B-B14F-4D97-AF65-F5344CB8AC3E}">
-        <p14:creationId xmlns:p14="http://schemas.microsoft.com/office/powerpoint/2010/main" val="3130216680"/>
-      </p:ext>
-    </p:extLst>
-  </p:cSld>
-  <p:clrMapOvr>
-    <a:masterClrMapping/>
-  </p:clrMapOvr>
-</p:notes>
-</file>
-
-<file path=ppt/notesSlides/notesSlide2.xml><?xml version="1.0" encoding="utf-8"?>
 <p:notes xmlns:a="http://schemas.openxmlformats.org/drawingml/2006/main" xmlns:r="http://schemas.openxmlformats.org/officeDocument/2006/relationships" xmlns:p="http://schemas.openxmlformats.org/presentationml/2006/main" showMasterSp="0" showMasterPhAnim="0">
   <p:cSld>
     <p:spTree>
@@ -2387,7 +2322,7 @@
             </a:pPr>
             <a:fld id="{00000000-1234-1234-1234-123412341234}" type="slidenum">
               <a:rPr lang="en-US"/>
-              <a:t>2</a:t>
+              <a:t>1</a:t>
             </a:fld>
             <a:endParaRPr/>
           </a:p>
@@ -2401,111 +2336,7 @@
 </p:notes>
 </file>
 
-<file path=ppt/notesSlides/notesSlide3.xml><?xml version="1.0" encoding="utf-8"?>
-<p:notes xmlns:a="http://schemas.openxmlformats.org/drawingml/2006/main" xmlns:r="http://schemas.openxmlformats.org/officeDocument/2006/relationships" xmlns:p="http://schemas.openxmlformats.org/presentationml/2006/main" showMasterSp="0" showMasterPhAnim="0">
-  <p:cSld>
-    <p:spTree>
-      <p:nvGrpSpPr>
-        <p:cNvPr id="1" name="Shape 633"/>
-        <p:cNvGrpSpPr/>
-        <p:nvPr/>
-      </p:nvGrpSpPr>
-      <p:grpSpPr>
-        <a:xfrm>
-          <a:off x="0" y="0"/>
-          <a:ext cx="0" cy="0"/>
-          <a:chOff x="0" y="0"/>
-          <a:chExt cx="0" cy="0"/>
-        </a:xfrm>
-      </p:grpSpPr>
-      <p:sp>
-        <p:nvSpPr>
-          <p:cNvPr id="634" name="Google Shape;634;p17:notes"/>
-          <p:cNvSpPr txBox="1">
-            <a:spLocks noGrp="1"/>
-          </p:cNvSpPr>
-          <p:nvPr>
-            <p:ph type="body" idx="1"/>
-          </p:nvPr>
-        </p:nvSpPr>
-        <p:spPr>
-          <a:xfrm>
-            <a:off x="685800" y="4400550"/>
-            <a:ext cx="5486400" cy="3600450"/>
-          </a:xfrm>
-          <a:prstGeom prst="rect">
-            <a:avLst/>
-          </a:prstGeom>
-        </p:spPr>
-        <p:txBody>
-          <a:bodyPr spcFirstLastPara="1" wrap="square" lIns="91425" tIns="45700" rIns="91425" bIns="45700" anchor="t" anchorCtr="0">
-            <a:noAutofit/>
-          </a:bodyPr>
-          <a:lstStyle/>
-          <a:p>
-            <a:pPr marL="0" lvl="0" indent="0" algn="l" rtl="0">
-              <a:spcBef>
-                <a:spcPts val="0"/>
-              </a:spcBef>
-              <a:spcAft>
-                <a:spcPts val="0"/>
-              </a:spcAft>
-              <a:buNone/>
-            </a:pPr>
-            <a:endParaRPr/>
-          </a:p>
-        </p:txBody>
-      </p:sp>
-      <p:sp>
-        <p:nvSpPr>
-          <p:cNvPr id="635" name="Google Shape;635;p17:notes"/>
-          <p:cNvSpPr>
-            <a:spLocks noGrp="1" noRot="1" noChangeAspect="1"/>
-          </p:cNvSpPr>
-          <p:nvPr>
-            <p:ph type="sldImg" idx="2"/>
-          </p:nvPr>
-        </p:nvSpPr>
-        <p:spPr>
-          <a:xfrm>
-            <a:off x="685800" y="1143000"/>
-            <a:ext cx="5486400" cy="3086100"/>
-          </a:xfrm>
-          <a:custGeom>
-            <a:avLst/>
-            <a:gdLst/>
-            <a:ahLst/>
-            <a:cxnLst/>
-            <a:rect l="l" t="t" r="r" b="b"/>
-            <a:pathLst>
-              <a:path w="120000" h="120000" extrusionOk="0">
-                <a:moveTo>
-                  <a:pt x="0" y="0"/>
-                </a:moveTo>
-                <a:lnTo>
-                  <a:pt x="120000" y="0"/>
-                </a:lnTo>
-                <a:lnTo>
-                  <a:pt x="120000" y="120000"/>
-                </a:lnTo>
-                <a:lnTo>
-                  <a:pt x="0" y="120000"/>
-                </a:lnTo>
-                <a:close/>
-              </a:path>
-            </a:pathLst>
-          </a:custGeom>
-        </p:spPr>
-      </p:sp>
-    </p:spTree>
-  </p:cSld>
-  <p:clrMapOvr>
-    <a:masterClrMapping/>
-  </p:clrMapOvr>
-</p:notes>
-</file>
-
-<file path=ppt/notesSlides/notesSlide4.xml><?xml version="1.0" encoding="utf-8"?>
+<file path=ppt/notesSlides/notesSlide2.xml><?xml version="1.0" encoding="utf-8"?>
 <p:notes xmlns:a="http://schemas.openxmlformats.org/drawingml/2006/main" xmlns:r="http://schemas.openxmlformats.org/officeDocument/2006/relationships" xmlns:p="http://schemas.openxmlformats.org/presentationml/2006/main" showMasterSp="0" showMasterPhAnim="0">
   <p:cSld>
     <p:spTree>
@@ -2609,111 +2440,7 @@
 </p:notes>
 </file>
 
-<file path=ppt/notesSlides/notesSlide5.xml><?xml version="1.0" encoding="utf-8"?>
-<p:notes xmlns:a="http://schemas.openxmlformats.org/drawingml/2006/main" xmlns:r="http://schemas.openxmlformats.org/officeDocument/2006/relationships" xmlns:p="http://schemas.openxmlformats.org/presentationml/2006/main" showMasterSp="0" showMasterPhAnim="0">
-  <p:cSld>
-    <p:spTree>
-      <p:nvGrpSpPr>
-        <p:cNvPr id="1" name="Shape 692"/>
-        <p:cNvGrpSpPr/>
-        <p:nvPr/>
-      </p:nvGrpSpPr>
-      <p:grpSpPr>
-        <a:xfrm>
-          <a:off x="0" y="0"/>
-          <a:ext cx="0" cy="0"/>
-          <a:chOff x="0" y="0"/>
-          <a:chExt cx="0" cy="0"/>
-        </a:xfrm>
-      </p:grpSpPr>
-      <p:sp>
-        <p:nvSpPr>
-          <p:cNvPr id="693" name="Google Shape;693;p19:notes"/>
-          <p:cNvSpPr txBox="1">
-            <a:spLocks noGrp="1"/>
-          </p:cNvSpPr>
-          <p:nvPr>
-            <p:ph type="body" idx="1"/>
-          </p:nvPr>
-        </p:nvSpPr>
-        <p:spPr>
-          <a:xfrm>
-            <a:off x="685800" y="4400550"/>
-            <a:ext cx="5486400" cy="3600450"/>
-          </a:xfrm>
-          <a:prstGeom prst="rect">
-            <a:avLst/>
-          </a:prstGeom>
-        </p:spPr>
-        <p:txBody>
-          <a:bodyPr spcFirstLastPara="1" wrap="square" lIns="91425" tIns="45700" rIns="91425" bIns="45700" anchor="t" anchorCtr="0">
-            <a:noAutofit/>
-          </a:bodyPr>
-          <a:lstStyle/>
-          <a:p>
-            <a:pPr marL="0" lvl="0" indent="0" algn="l" rtl="0">
-              <a:spcBef>
-                <a:spcPts val="0"/>
-              </a:spcBef>
-              <a:spcAft>
-                <a:spcPts val="0"/>
-              </a:spcAft>
-              <a:buNone/>
-            </a:pPr>
-            <a:endParaRPr/>
-          </a:p>
-        </p:txBody>
-      </p:sp>
-      <p:sp>
-        <p:nvSpPr>
-          <p:cNvPr id="694" name="Google Shape;694;p19:notes"/>
-          <p:cNvSpPr>
-            <a:spLocks noGrp="1" noRot="1" noChangeAspect="1"/>
-          </p:cNvSpPr>
-          <p:nvPr>
-            <p:ph type="sldImg" idx="2"/>
-          </p:nvPr>
-        </p:nvSpPr>
-        <p:spPr>
-          <a:xfrm>
-            <a:off x="685800" y="1143000"/>
-            <a:ext cx="5486400" cy="3086100"/>
-          </a:xfrm>
-          <a:custGeom>
-            <a:avLst/>
-            <a:gdLst/>
-            <a:ahLst/>
-            <a:cxnLst/>
-            <a:rect l="l" t="t" r="r" b="b"/>
-            <a:pathLst>
-              <a:path w="120000" h="120000" extrusionOk="0">
-                <a:moveTo>
-                  <a:pt x="0" y="0"/>
-                </a:moveTo>
-                <a:lnTo>
-                  <a:pt x="120000" y="0"/>
-                </a:lnTo>
-                <a:lnTo>
-                  <a:pt x="120000" y="120000"/>
-                </a:lnTo>
-                <a:lnTo>
-                  <a:pt x="0" y="120000"/>
-                </a:lnTo>
-                <a:close/>
-              </a:path>
-            </a:pathLst>
-          </a:custGeom>
-        </p:spPr>
-      </p:sp>
-    </p:spTree>
-  </p:cSld>
-  <p:clrMapOvr>
-    <a:masterClrMapping/>
-  </p:clrMapOvr>
-</p:notes>
-</file>
-
-<file path=ppt/notesSlides/notesSlide6.xml><?xml version="1.0" encoding="utf-8"?>
+<file path=ppt/notesSlides/notesSlide3.xml><?xml version="1.0" encoding="utf-8"?>
 <p:notes xmlns:a="http://schemas.openxmlformats.org/drawingml/2006/main" xmlns:r="http://schemas.openxmlformats.org/officeDocument/2006/relationships" xmlns:p="http://schemas.openxmlformats.org/presentationml/2006/main" showMasterSp="0" showMasterPhAnim="0">
   <p:cSld>
     <p:spTree>
@@ -2817,7 +2544,7 @@
 </p:notes>
 </file>
 
-<file path=ppt/notesSlides/notesSlide7.xml><?xml version="1.0" encoding="utf-8"?>
+<file path=ppt/notesSlides/notesSlide4.xml><?xml version="1.0" encoding="utf-8"?>
 <p:notes xmlns:a="http://schemas.openxmlformats.org/drawingml/2006/main" xmlns:r="http://schemas.openxmlformats.org/officeDocument/2006/relationships" xmlns:p="http://schemas.openxmlformats.org/presentationml/2006/main" showMasterSp="0" showMasterPhAnim="0">
   <p:cSld>
     <p:spTree>
@@ -2939,178 +2666,6 @@
 </p:notes>
 </file>
 
-<file path=ppt/notesSlides/notesSlide8.xml><?xml version="1.0" encoding="utf-8"?>
-<p:notes xmlns:a="http://schemas.openxmlformats.org/drawingml/2006/main" xmlns:r="http://schemas.openxmlformats.org/officeDocument/2006/relationships" xmlns:p="http://schemas.openxmlformats.org/presentationml/2006/main" showMasterSp="0" showMasterPhAnim="0">
-  <p:cSld>
-    <p:spTree>
-      <p:nvGrpSpPr>
-        <p:cNvPr id="1" name="Shape 542"/>
-        <p:cNvGrpSpPr/>
-        <p:nvPr/>
-      </p:nvGrpSpPr>
-      <p:grpSpPr>
-        <a:xfrm>
-          <a:off x="0" y="0"/>
-          <a:ext cx="0" cy="0"/>
-          <a:chOff x="0" y="0"/>
-          <a:chExt cx="0" cy="0"/>
-        </a:xfrm>
-      </p:grpSpPr>
-      <p:sp>
-        <p:nvSpPr>
-          <p:cNvPr id="543" name="Google Shape;543;p26:notes"/>
-          <p:cNvSpPr>
-            <a:spLocks noGrp="1" noRot="1" noChangeAspect="1"/>
-          </p:cNvSpPr>
-          <p:nvPr>
-            <p:ph type="sldImg" idx="2"/>
-          </p:nvPr>
-        </p:nvSpPr>
-        <p:spPr>
-          <a:xfrm>
-            <a:off x="685800" y="1143000"/>
-            <a:ext cx="5486400" cy="3086100"/>
-          </a:xfrm>
-          <a:custGeom>
-            <a:avLst/>
-            <a:gdLst/>
-            <a:ahLst/>
-            <a:cxnLst/>
-            <a:rect l="l" t="t" r="r" b="b"/>
-            <a:pathLst>
-              <a:path w="120000" h="120000" extrusionOk="0">
-                <a:moveTo>
-                  <a:pt x="0" y="0"/>
-                </a:moveTo>
-                <a:lnTo>
-                  <a:pt x="120000" y="0"/>
-                </a:lnTo>
-                <a:lnTo>
-                  <a:pt x="120000" y="120000"/>
-                </a:lnTo>
-                <a:lnTo>
-                  <a:pt x="0" y="120000"/>
-                </a:lnTo>
-                <a:close/>
-              </a:path>
-            </a:pathLst>
-          </a:custGeom>
-          <a:noFill/>
-          <a:ln w="12700" cap="flat" cmpd="sng">
-            <a:solidFill>
-              <a:srgbClr val="000000"/>
-            </a:solidFill>
-            <a:prstDash val="solid"/>
-            <a:round/>
-            <a:headEnd type="none" w="sm" len="sm"/>
-            <a:tailEnd type="none" w="sm" len="sm"/>
-          </a:ln>
-        </p:spPr>
-      </p:sp>
-      <p:sp>
-        <p:nvSpPr>
-          <p:cNvPr id="544" name="Google Shape;544;p26:notes"/>
-          <p:cNvSpPr txBox="1">
-            <a:spLocks noGrp="1"/>
-          </p:cNvSpPr>
-          <p:nvPr>
-            <p:ph type="body" idx="1"/>
-          </p:nvPr>
-        </p:nvSpPr>
-        <p:spPr>
-          <a:xfrm>
-            <a:off x="685800" y="4400550"/>
-            <a:ext cx="5486400" cy="3600450"/>
-          </a:xfrm>
-          <a:prstGeom prst="rect">
-            <a:avLst/>
-          </a:prstGeom>
-          <a:noFill/>
-          <a:ln>
-            <a:noFill/>
-          </a:ln>
-        </p:spPr>
-        <p:txBody>
-          <a:bodyPr spcFirstLastPara="1" wrap="square" lIns="91425" tIns="45700" rIns="91425" bIns="45700" anchor="t" anchorCtr="0">
-            <a:noAutofit/>
-          </a:bodyPr>
-          <a:lstStyle/>
-          <a:p>
-            <a:pPr marL="0" lvl="0" indent="0" algn="l" rtl="0">
-              <a:lnSpc>
-                <a:spcPct val="100000"/>
-              </a:lnSpc>
-              <a:spcBef>
-                <a:spcPts val="0"/>
-              </a:spcBef>
-              <a:spcAft>
-                <a:spcPts val="0"/>
-              </a:spcAft>
-              <a:buSzPts val="1400"/>
-              <a:buNone/>
-            </a:pPr>
-            <a:endParaRPr/>
-          </a:p>
-        </p:txBody>
-      </p:sp>
-      <p:sp>
-        <p:nvSpPr>
-          <p:cNvPr id="545" name="Google Shape;545;p26:notes"/>
-          <p:cNvSpPr txBox="1">
-            <a:spLocks noGrp="1"/>
-          </p:cNvSpPr>
-          <p:nvPr>
-            <p:ph type="sldNum" idx="12"/>
-          </p:nvPr>
-        </p:nvSpPr>
-        <p:spPr>
-          <a:xfrm>
-            <a:off x="3884613" y="8685213"/>
-            <a:ext cx="2971800" cy="458787"/>
-          </a:xfrm>
-          <a:prstGeom prst="rect">
-            <a:avLst/>
-          </a:prstGeom>
-          <a:noFill/>
-          <a:ln>
-            <a:noFill/>
-          </a:ln>
-        </p:spPr>
-        <p:txBody>
-          <a:bodyPr spcFirstLastPara="1" wrap="square" lIns="91425" tIns="45700" rIns="91425" bIns="45700" anchor="b" anchorCtr="0">
-            <a:noAutofit/>
-          </a:bodyPr>
-          <a:lstStyle/>
-          <a:p>
-            <a:pPr marL="0" lvl="0" indent="0" algn="r" rtl="0">
-              <a:lnSpc>
-                <a:spcPct val="100000"/>
-              </a:lnSpc>
-              <a:spcBef>
-                <a:spcPts val="0"/>
-              </a:spcBef>
-              <a:spcAft>
-                <a:spcPts val="0"/>
-              </a:spcAft>
-              <a:buSzPts val="1400"/>
-              <a:buNone/>
-            </a:pPr>
-            <a:fld id="{00000000-1234-1234-1234-123412341234}" type="slidenum">
-              <a:rPr lang="en-US"/>
-              <a:t>8</a:t>
-            </a:fld>
-            <a:endParaRPr/>
-          </a:p>
-        </p:txBody>
-      </p:sp>
-    </p:spTree>
-  </p:cSld>
-  <p:clrMapOvr>
-    <a:masterClrMapping/>
-  </p:clrMapOvr>
-</p:notes>
-</file>
-
 <file path=ppt/slideLayouts/slideLayout1.xml><?xml version="1.0" encoding="utf-8"?>
 <p:sldLayout xmlns:a="http://schemas.openxmlformats.org/drawingml/2006/main" xmlns:r="http://schemas.openxmlformats.org/officeDocument/2006/relationships" xmlns:p="http://schemas.openxmlformats.org/presentationml/2006/main" preserve="1" userDrawn="1">
   <p:cSld name="1_Titelseite mit großem Bild">
@@ -3318,7 +2873,7 @@
             </a:pPr>
             <a:fld id="{C9048784-7281-4837-A1AE-FC4A34A747D6}" type="datetime1">
               <a:rPr lang="de-DE" smtClean="0"/>
-              <a:t>09.01.2026</a:t>
+              <a:t>30.01.2026</a:t>
             </a:fld>
             <a:endParaRPr lang="de-DE" dirty="0"/>
           </a:p>
@@ -4799,7 +4354,7 @@
             </a:pPr>
             <a:fld id="{29E1D907-3A8C-4FA0-AF32-FB476100B44A}" type="datetime1">
               <a:rPr lang="de-DE" smtClean="0"/>
-              <a:t>09.01.2026</a:t>
+              <a:t>30.01.2026</a:t>
             </a:fld>
             <a:endParaRPr lang="de-DE" dirty="0"/>
           </a:p>
@@ -5210,7 +4765,7 @@
             </a:pPr>
             <a:fld id="{0D5930E3-AAC2-4ADF-925B-A037BED539BF}" type="datetime1">
               <a:rPr lang="de-DE" smtClean="0"/>
-              <a:t>09.01.2026</a:t>
+              <a:t>30.01.2026</a:t>
             </a:fld>
             <a:endParaRPr lang="en-US"/>
           </a:p>
@@ -5519,7 +5074,7 @@
             </a:pPr>
             <a:fld id="{77078B80-CC76-49E8-922A-90B2CBA19035}" type="datetime1">
               <a:rPr lang="de-DE" smtClean="0"/>
-              <a:t>09.01.2026</a:t>
+              <a:t>30.01.2026</a:t>
             </a:fld>
             <a:endParaRPr lang="en-US"/>
           </a:p>
@@ -6020,7 +5575,7 @@
             </a:pPr>
             <a:fld id="{410F1620-6991-468A-986C-DEA71AF2A6A8}" type="datetime1">
               <a:rPr lang="de-DE" smtClean="0"/>
-              <a:t>09.01.2026</a:t>
+              <a:t>30.01.2026</a:t>
             </a:fld>
             <a:endParaRPr lang="en-US"/>
           </a:p>
@@ -6418,7 +5973,7 @@
             </a:pPr>
             <a:fld id="{2A021128-E3BC-4510-A597-24FCB75D3A75}" type="datetime1">
               <a:rPr lang="de-DE" smtClean="0"/>
-              <a:t>09.01.2026</a:t>
+              <a:t>30.01.2026</a:t>
             </a:fld>
             <a:endParaRPr lang="de-DE" dirty="0"/>
           </a:p>
@@ -6675,7 +6230,7 @@
             </a:pPr>
             <a:fld id="{204B419C-6100-4ECC-A14C-29389AFC3646}" type="datetime1">
               <a:rPr lang="de-DE" smtClean="0"/>
-              <a:t>09.01.2026</a:t>
+              <a:t>30.01.2026</a:t>
             </a:fld>
             <a:endParaRPr lang="de-DE" dirty="0"/>
           </a:p>
@@ -7066,7 +6621,7 @@
             </a:pPr>
             <a:fld id="{17D379B7-331E-424B-A45F-F03D5981C976}" type="datetime1">
               <a:rPr lang="de-DE" smtClean="0"/>
-              <a:t>09.01.2026</a:t>
+              <a:t>30.01.2026</a:t>
             </a:fld>
             <a:endParaRPr lang="de-DE" dirty="0"/>
           </a:p>
@@ -7608,7 +7163,7 @@
             </a:pPr>
             <a:fld id="{F95F7EFE-EEF9-40C5-9AEC-F07BD35586E4}" type="datetime1">
               <a:rPr lang="de-DE" smtClean="0"/>
-              <a:t>09.01.2026</a:t>
+              <a:t>30.01.2026</a:t>
             </a:fld>
             <a:endParaRPr lang="de-DE" dirty="0"/>
           </a:p>
@@ -7864,7 +7419,7 @@
             </a:pPr>
             <a:fld id="{29F603B7-878E-43D0-A9A1-FA3C2AF87C58}" type="datetime1">
               <a:rPr lang="de-DE" smtClean="0"/>
-              <a:t>09.01.2026</a:t>
+              <a:t>30.01.2026</a:t>
             </a:fld>
             <a:endParaRPr lang="de-DE" dirty="0"/>
           </a:p>
@@ -7961,7 +7516,7 @@
             </a:pPr>
             <a:fld id="{64985212-05E7-49A7-ABD6-673A483CDAE3}" type="datetime1">
               <a:rPr lang="de-DE" smtClean="0"/>
-              <a:t>09.01.2026</a:t>
+              <a:t>30.01.2026</a:t>
             </a:fld>
             <a:endParaRPr lang="de-DE" dirty="0"/>
           </a:p>
@@ -8931,7 +8486,7 @@
             </a:pPr>
             <a:fld id="{8ED535EE-90AE-4348-98D3-AFE064A78180}" type="datetime1">
               <a:rPr lang="de-DE" smtClean="0"/>
-              <a:t>09.01.2026</a:t>
+              <a:t>30.01.2026</a:t>
             </a:fld>
             <a:endParaRPr lang="de-DE" dirty="0"/>
           </a:p>
@@ -9701,7 +9256,7 @@
             </a:pPr>
             <a:fld id="{9C590BB0-1566-4728-8689-C18D1116058A}" type="datetime1">
               <a:rPr lang="de-DE" smtClean="0"/>
-              <a:t>09.01.2026</a:t>
+              <a:t>30.01.2026</a:t>
             </a:fld>
             <a:endParaRPr lang="de-DE" dirty="0"/>
           </a:p>
@@ -10225,630 +9780,6 @@
   <p:cSld>
     <p:spTree>
       <p:nvGrpSpPr>
-        <p:cNvPr id="1" name=""/>
-        <p:cNvGrpSpPr/>
-        <p:nvPr/>
-      </p:nvGrpSpPr>
-      <p:grpSpPr>
-        <a:xfrm>
-          <a:off x="0" y="0"/>
-          <a:ext cx="0" cy="0"/>
-          <a:chOff x="0" y="0"/>
-          <a:chExt cx="0" cy="0"/>
-        </a:xfrm>
-      </p:grpSpPr>
-      <p:sp>
-        <p:nvSpPr>
-          <p:cNvPr id="2" name="Titel 1"/>
-          <p:cNvSpPr>
-            <a:spLocks noGrp="1"/>
-          </p:cNvSpPr>
-          <p:nvPr>
-            <p:ph type="title"/>
-          </p:nvPr>
-        </p:nvSpPr>
-        <p:spPr/>
-        <p:txBody>
-          <a:bodyPr/>
-          <a:lstStyle/>
-          <a:p>
-            <a:r>
-              <a:rPr lang="de-DE" noProof="0" dirty="0"/>
-              <a:t>Lernraum I: Abstrakte Datentypen, Datenstrukturen und Asymptotische Notation</a:t>
-            </a:r>
-          </a:p>
-        </p:txBody>
-      </p:sp>
-      <p:sp>
-        <p:nvSpPr>
-          <p:cNvPr id="3" name="Inhaltsplatzhalter 2"/>
-          <p:cNvSpPr>
-            <a:spLocks noGrp="1"/>
-          </p:cNvSpPr>
-          <p:nvPr>
-            <p:ph sz="quarter" idx="12"/>
-          </p:nvPr>
-        </p:nvSpPr>
-        <p:spPr/>
-        <p:txBody>
-          <a:bodyPr/>
-          <a:lstStyle/>
-          <a:p>
-            <a:pPr lvl="1"/>
-            <a:r>
-              <a:rPr lang="de-DE" noProof="0" dirty="0"/>
-              <a:t>Abstrakte Datentypen</a:t>
-            </a:r>
-          </a:p>
-          <a:p>
-            <a:pPr lvl="2"/>
-            <a:r>
-              <a:rPr lang="de-DE" noProof="0" dirty="0"/>
-              <a:t>Liste, Stapel, Warteschlange, Tabelle (Dictionary)</a:t>
-            </a:r>
-          </a:p>
-          <a:p>
-            <a:pPr lvl="1"/>
-            <a:r>
-              <a:rPr lang="de-DE" noProof="0" dirty="0"/>
-              <a:t>Datenstrukturen</a:t>
-            </a:r>
-          </a:p>
-          <a:p>
-            <a:pPr lvl="2"/>
-            <a:r>
-              <a:rPr lang="de-DE" noProof="0" dirty="0"/>
-              <a:t>Array, Verkettete Liste</a:t>
-            </a:r>
-          </a:p>
-          <a:p>
-            <a:pPr lvl="1"/>
-            <a:r>
-              <a:rPr lang="de-DE" noProof="0" dirty="0"/>
-              <a:t>Implementierungen der Abstrakten Datentypen mit den Datenstrukturen …</a:t>
-            </a:r>
-          </a:p>
-          <a:p>
-            <a:pPr lvl="2"/>
-            <a:r>
-              <a:rPr lang="de-DE" noProof="0" dirty="0"/>
-              <a:t>Array</a:t>
-            </a:r>
-          </a:p>
-          <a:p>
-            <a:pPr lvl="2"/>
-            <a:r>
-              <a:rPr lang="de-DE" noProof="0" dirty="0"/>
-              <a:t>Verkettete Listen</a:t>
-            </a:r>
-          </a:p>
-          <a:p>
-            <a:pPr lvl="1"/>
-            <a:r>
-              <a:rPr lang="de-DE" noProof="0" dirty="0"/>
-              <a:t>Analyse von Laufzeit und Speicherbedarf der Implementierungen</a:t>
-            </a:r>
-          </a:p>
-          <a:p>
-            <a:pPr lvl="2"/>
-            <a:r>
-              <a:rPr lang="de-DE" noProof="0" dirty="0"/>
-              <a:t>O-Notation</a:t>
-            </a:r>
-          </a:p>
-          <a:p>
-            <a:pPr lvl="1"/>
-            <a:r>
-              <a:rPr lang="de-DE" noProof="0" dirty="0">
-                <a:solidFill>
-                  <a:srgbClr val="002060"/>
-                </a:solidFill>
-              </a:rPr>
-              <a:t>Laufzeitanalyse von Algorithmen durch Asymptotische Notation</a:t>
-            </a:r>
-          </a:p>
-          <a:p>
-            <a:pPr lvl="2"/>
-            <a:r>
-              <a:rPr lang="de-DE" noProof="0" dirty="0">
-                <a:solidFill>
-                  <a:srgbClr val="002060"/>
-                </a:solidFill>
-              </a:rPr>
-              <a:t>O-Notation, Ω-Notation, Θ-Notation</a:t>
-            </a:r>
-          </a:p>
-          <a:p>
-            <a:pPr lvl="2"/>
-            <a:r>
-              <a:rPr lang="de-DE" noProof="0" dirty="0">
-                <a:solidFill>
-                  <a:srgbClr val="002060"/>
-                </a:solidFill>
-              </a:rPr>
-              <a:t>Fallanalyse: </a:t>
-            </a:r>
-            <a:r>
-              <a:rPr lang="de-DE" noProof="0" dirty="0" err="1">
-                <a:solidFill>
-                  <a:srgbClr val="002060"/>
-                </a:solidFill>
-              </a:rPr>
-              <a:t>Worst</a:t>
-            </a:r>
-            <a:r>
-              <a:rPr lang="de-DE" noProof="0" dirty="0">
-                <a:solidFill>
-                  <a:srgbClr val="002060"/>
-                </a:solidFill>
-              </a:rPr>
-              <a:t> Case, Best Case Analyse</a:t>
-            </a:r>
-          </a:p>
-          <a:p>
-            <a:pPr lvl="1"/>
-            <a:r>
-              <a:rPr lang="de-DE" noProof="0" dirty="0"/>
-              <a:t>Laufzeitanalyse von Rekursiven Algorithmen durch Asymptotische Notation</a:t>
-            </a:r>
-          </a:p>
-        </p:txBody>
-      </p:sp>
-      <p:sp>
-        <p:nvSpPr>
-          <p:cNvPr id="4" name="Textplatzhalter 3"/>
-          <p:cNvSpPr>
-            <a:spLocks noGrp="1"/>
-          </p:cNvSpPr>
-          <p:nvPr>
-            <p:ph type="body" idx="13"/>
-          </p:nvPr>
-        </p:nvSpPr>
-        <p:spPr/>
-        <p:txBody>
-          <a:bodyPr/>
-          <a:lstStyle/>
-          <a:p>
-            <a:r>
-              <a:rPr lang="de-DE" noProof="0" dirty="0"/>
-              <a:t>Algorithmik – Laufzeitanalyse von Algorithmen durch Asymptotische Notation</a:t>
-            </a:r>
-          </a:p>
-        </p:txBody>
-      </p:sp>
-      <p:sp>
-        <p:nvSpPr>
-          <p:cNvPr id="5" name="Datumsplatzhalter 4"/>
-          <p:cNvSpPr>
-            <a:spLocks noGrp="1"/>
-          </p:cNvSpPr>
-          <p:nvPr>
-            <p:ph type="dt" sz="half" idx="14"/>
-          </p:nvPr>
-        </p:nvSpPr>
-        <p:spPr/>
-        <p:txBody>
-          <a:bodyPr/>
-          <a:lstStyle/>
-          <a:p>
-            <a:fld id="{97C55095-590B-4AAB-8606-0F86796D070A}" type="datetime1">
-              <a:rPr lang="de-DE" smtClean="0"/>
-              <a:pPr/>
-              <a:t>09.01.2026</a:t>
-            </a:fld>
-            <a:endParaRPr lang="de-DE" dirty="0"/>
-          </a:p>
-        </p:txBody>
-      </p:sp>
-      <p:sp>
-        <p:nvSpPr>
-          <p:cNvPr id="6" name="Foliennummernplatzhalter 5"/>
-          <p:cNvSpPr>
-            <a:spLocks noGrp="1"/>
-          </p:cNvSpPr>
-          <p:nvPr>
-            <p:ph type="sldNum" sz="quarter" idx="15"/>
-          </p:nvPr>
-        </p:nvSpPr>
-        <p:spPr/>
-        <p:txBody>
-          <a:bodyPr/>
-          <a:lstStyle/>
-          <a:p>
-            <a:r>
-              <a:rPr lang="de-DE"/>
-              <a:t>Seite </a:t>
-            </a:r>
-            <a:fld id="{43310F81-32EE-4F95-9E9C-0BDC6AD52EEC}" type="slidenum">
-              <a:rPr lang="de-DE" smtClean="0"/>
-              <a:pPr/>
-              <a:t>1</a:t>
-            </a:fld>
-            <a:endParaRPr lang="de-DE"/>
-          </a:p>
-        </p:txBody>
-      </p:sp>
-    </p:spTree>
-    <p:extLst>
-      <p:ext uri="{BB962C8B-B14F-4D97-AF65-F5344CB8AC3E}">
-        <p14:creationId xmlns:p14="http://schemas.microsoft.com/office/powerpoint/2010/main" val="2556114085"/>
-      </p:ext>
-    </p:extLst>
-  </p:cSld>
-  <p:clrMapOvr>
-    <a:masterClrMapping/>
-  </p:clrMapOvr>
-  <p:timing>
-    <p:tnLst>
-      <p:par>
-        <p:cTn id="1" dur="indefinite" restart="never" nodeType="tmRoot">
-          <p:childTnLst>
-            <p:seq concurrent="1" nextAc="seek">
-              <p:cTn id="2" dur="indefinite" nodeType="mainSeq">
-                <p:childTnLst>
-                  <p:par>
-                    <p:cTn id="3" fill="hold">
-                      <p:stCondLst>
-                        <p:cond delay="indefinite"/>
-                      </p:stCondLst>
-                      <p:childTnLst>
-                        <p:par>
-                          <p:cTn id="4" fill="hold">
-                            <p:stCondLst>
-                              <p:cond delay="0"/>
-                            </p:stCondLst>
-                            <p:childTnLst>
-                              <p:par>
-                                <p:cTn id="5" presetID="1" presetClass="entr" presetSubtype="0" fill="hold" nodeType="clickEffect">
-                                  <p:stCondLst>
-                                    <p:cond delay="0"/>
-                                  </p:stCondLst>
-                                  <p:childTnLst>
-                                    <p:set>
-                                      <p:cBhvr>
-                                        <p:cTn id="6" dur="1" fill="hold">
-                                          <p:stCondLst>
-                                            <p:cond delay="0"/>
-                                          </p:stCondLst>
-                                        </p:cTn>
-                                        <p:tgtEl>
-                                          <p:spTgt spid="3">
-                                            <p:txEl>
-                                              <p:pRg st="4" end="4"/>
-                                            </p:txEl>
-                                          </p:spTgt>
-                                        </p:tgtEl>
-                                        <p:attrNameLst>
-                                          <p:attrName>style.visibility</p:attrName>
-                                        </p:attrNameLst>
-                                      </p:cBhvr>
-                                      <p:to>
-                                        <p:strVal val="visible"/>
-                                      </p:to>
-                                    </p:set>
-                                  </p:childTnLst>
-                                </p:cTn>
-                              </p:par>
-                              <p:par>
-                                <p:cTn id="7" presetID="1" presetClass="entr" presetSubtype="0" fill="hold" nodeType="withEffect">
-                                  <p:stCondLst>
-                                    <p:cond delay="0"/>
-                                  </p:stCondLst>
-                                  <p:childTnLst>
-                                    <p:set>
-                                      <p:cBhvr>
-                                        <p:cTn id="8" dur="1" fill="hold">
-                                          <p:stCondLst>
-                                            <p:cond delay="0"/>
-                                          </p:stCondLst>
-                                        </p:cTn>
-                                        <p:tgtEl>
-                                          <p:spTgt spid="3">
-                                            <p:txEl>
-                                              <p:pRg st="5" end="5"/>
-                                            </p:txEl>
-                                          </p:spTgt>
-                                        </p:tgtEl>
-                                        <p:attrNameLst>
-                                          <p:attrName>style.visibility</p:attrName>
-                                        </p:attrNameLst>
-                                      </p:cBhvr>
-                                      <p:to>
-                                        <p:strVal val="visible"/>
-                                      </p:to>
-                                    </p:set>
-                                  </p:childTnLst>
-                                </p:cTn>
-                              </p:par>
-                              <p:par>
-                                <p:cTn id="9" presetID="1" presetClass="entr" presetSubtype="0" fill="hold" nodeType="withEffect">
-                                  <p:stCondLst>
-                                    <p:cond delay="0"/>
-                                  </p:stCondLst>
-                                  <p:childTnLst>
-                                    <p:set>
-                                      <p:cBhvr>
-                                        <p:cTn id="10" dur="1" fill="hold">
-                                          <p:stCondLst>
-                                            <p:cond delay="0"/>
-                                          </p:stCondLst>
-                                        </p:cTn>
-                                        <p:tgtEl>
-                                          <p:spTgt spid="3">
-                                            <p:txEl>
-                                              <p:pRg st="6" end="6"/>
-                                            </p:txEl>
-                                          </p:spTgt>
-                                        </p:tgtEl>
-                                        <p:attrNameLst>
-                                          <p:attrName>style.visibility</p:attrName>
-                                        </p:attrNameLst>
-                                      </p:cBhvr>
-                                      <p:to>
-                                        <p:strVal val="visible"/>
-                                      </p:to>
-                                    </p:set>
-                                  </p:childTnLst>
-                                </p:cTn>
-                              </p:par>
-                              <p:par>
-                                <p:cTn id="11" presetID="1" presetClass="entr" presetSubtype="0" fill="hold" nodeType="withEffect">
-                                  <p:stCondLst>
-                                    <p:cond delay="0"/>
-                                  </p:stCondLst>
-                                  <p:childTnLst>
-                                    <p:set>
-                                      <p:cBhvr>
-                                        <p:cTn id="12" dur="1" fill="hold">
-                                          <p:stCondLst>
-                                            <p:cond delay="0"/>
-                                          </p:stCondLst>
-                                        </p:cTn>
-                                        <p:tgtEl>
-                                          <p:spTgt spid="3">
-                                            <p:txEl>
-                                              <p:pRg st="7" end="7"/>
-                                            </p:txEl>
-                                          </p:spTgt>
-                                        </p:tgtEl>
-                                        <p:attrNameLst>
-                                          <p:attrName>style.visibility</p:attrName>
-                                        </p:attrNameLst>
-                                      </p:cBhvr>
-                                      <p:to>
-                                        <p:strVal val="visible"/>
-                                      </p:to>
-                                    </p:set>
-                                  </p:childTnLst>
-                                </p:cTn>
-                              </p:par>
-                              <p:par>
-                                <p:cTn id="13" presetID="1" presetClass="entr" presetSubtype="0" fill="hold" nodeType="withEffect">
-                                  <p:stCondLst>
-                                    <p:cond delay="0"/>
-                                  </p:stCondLst>
-                                  <p:childTnLst>
-                                    <p:set>
-                                      <p:cBhvr>
-                                        <p:cTn id="14" dur="1" fill="hold">
-                                          <p:stCondLst>
-                                            <p:cond delay="0"/>
-                                          </p:stCondLst>
-                                        </p:cTn>
-                                        <p:tgtEl>
-                                          <p:spTgt spid="3">
-                                            <p:txEl>
-                                              <p:pRg st="8" end="8"/>
-                                            </p:txEl>
-                                          </p:spTgt>
-                                        </p:tgtEl>
-                                        <p:attrNameLst>
-                                          <p:attrName>style.visibility</p:attrName>
-                                        </p:attrNameLst>
-                                      </p:cBhvr>
-                                      <p:to>
-                                        <p:strVal val="visible"/>
-                                      </p:to>
-                                    </p:set>
-                                  </p:childTnLst>
-                                </p:cTn>
-                              </p:par>
-                            </p:childTnLst>
-                          </p:cTn>
-                        </p:par>
-                      </p:childTnLst>
-                    </p:cTn>
-                  </p:par>
-                  <p:par>
-                    <p:cTn id="15" fill="hold">
-                      <p:stCondLst>
-                        <p:cond delay="indefinite"/>
-                      </p:stCondLst>
-                      <p:childTnLst>
-                        <p:par>
-                          <p:cTn id="16" fill="hold">
-                            <p:stCondLst>
-                              <p:cond delay="0"/>
-                            </p:stCondLst>
-                            <p:childTnLst>
-                              <p:par>
-                                <p:cTn id="17" presetID="1" presetClass="entr" presetSubtype="0" fill="hold" nodeType="clickEffect">
-                                  <p:stCondLst>
-                                    <p:cond delay="0"/>
-                                  </p:stCondLst>
-                                  <p:childTnLst>
-                                    <p:set>
-                                      <p:cBhvr>
-                                        <p:cTn id="18" dur="1" fill="hold">
-                                          <p:stCondLst>
-                                            <p:cond delay="0"/>
-                                          </p:stCondLst>
-                                        </p:cTn>
-                                        <p:tgtEl>
-                                          <p:spTgt spid="3">
-                                            <p:txEl>
-                                              <p:pRg st="9" end="9"/>
-                                            </p:txEl>
-                                          </p:spTgt>
-                                        </p:tgtEl>
-                                        <p:attrNameLst>
-                                          <p:attrName>style.visibility</p:attrName>
-                                        </p:attrNameLst>
-                                      </p:cBhvr>
-                                      <p:to>
-                                        <p:strVal val="visible"/>
-                                      </p:to>
-                                    </p:set>
-                                  </p:childTnLst>
-                                </p:cTn>
-                              </p:par>
-                              <p:par>
-                                <p:cTn id="19" presetID="1" presetClass="entr" presetSubtype="0" fill="hold" nodeType="withEffect">
-                                  <p:stCondLst>
-                                    <p:cond delay="0"/>
-                                  </p:stCondLst>
-                                  <p:childTnLst>
-                                    <p:set>
-                                      <p:cBhvr>
-                                        <p:cTn id="20" dur="1" fill="hold">
-                                          <p:stCondLst>
-                                            <p:cond delay="0"/>
-                                          </p:stCondLst>
-                                        </p:cTn>
-                                        <p:tgtEl>
-                                          <p:spTgt spid="3">
-                                            <p:txEl>
-                                              <p:pRg st="10" end="10"/>
-                                            </p:txEl>
-                                          </p:spTgt>
-                                        </p:tgtEl>
-                                        <p:attrNameLst>
-                                          <p:attrName>style.visibility</p:attrName>
-                                        </p:attrNameLst>
-                                      </p:cBhvr>
-                                      <p:to>
-                                        <p:strVal val="visible"/>
-                                      </p:to>
-                                    </p:set>
-                                  </p:childTnLst>
-                                </p:cTn>
-                              </p:par>
-                              <p:par>
-                                <p:cTn id="21" presetID="1" presetClass="entr" presetSubtype="0" fill="hold" nodeType="withEffect">
-                                  <p:stCondLst>
-                                    <p:cond delay="0"/>
-                                  </p:stCondLst>
-                                  <p:childTnLst>
-                                    <p:set>
-                                      <p:cBhvr>
-                                        <p:cTn id="22" dur="1" fill="hold">
-                                          <p:stCondLst>
-                                            <p:cond delay="0"/>
-                                          </p:stCondLst>
-                                        </p:cTn>
-                                        <p:tgtEl>
-                                          <p:spTgt spid="3">
-                                            <p:txEl>
-                                              <p:pRg st="11" end="11"/>
-                                            </p:txEl>
-                                          </p:spTgt>
-                                        </p:tgtEl>
-                                        <p:attrNameLst>
-                                          <p:attrName>style.visibility</p:attrName>
-                                        </p:attrNameLst>
-                                      </p:cBhvr>
-                                      <p:to>
-                                        <p:strVal val="visible"/>
-                                      </p:to>
-                                    </p:set>
-                                  </p:childTnLst>
-                                </p:cTn>
-                              </p:par>
-                            </p:childTnLst>
-                          </p:cTn>
-                        </p:par>
-                      </p:childTnLst>
-                    </p:cTn>
-                  </p:par>
-                  <p:par>
-                    <p:cTn id="23" fill="hold">
-                      <p:stCondLst>
-                        <p:cond delay="indefinite"/>
-                      </p:stCondLst>
-                      <p:childTnLst>
-                        <p:par>
-                          <p:cTn id="24" fill="hold">
-                            <p:stCondLst>
-                              <p:cond delay="0"/>
-                            </p:stCondLst>
-                            <p:childTnLst>
-                              <p:par>
-                                <p:cTn id="25" presetID="1" presetClass="entr" presetSubtype="0" fill="hold" nodeType="clickEffect">
-                                  <p:stCondLst>
-                                    <p:cond delay="0"/>
-                                  </p:stCondLst>
-                                  <p:childTnLst>
-                                    <p:set>
-                                      <p:cBhvr>
-                                        <p:cTn id="26" dur="1" fill="hold">
-                                          <p:stCondLst>
-                                            <p:cond delay="0"/>
-                                          </p:stCondLst>
-                                        </p:cTn>
-                                        <p:tgtEl>
-                                          <p:spTgt spid="3">
-                                            <p:txEl>
-                                              <p:pRg st="12" end="12"/>
-                                            </p:txEl>
-                                          </p:spTgt>
-                                        </p:tgtEl>
-                                        <p:attrNameLst>
-                                          <p:attrName>style.visibility</p:attrName>
-                                        </p:attrNameLst>
-                                      </p:cBhvr>
-                                      <p:to>
-                                        <p:strVal val="visible"/>
-                                      </p:to>
-                                    </p:set>
-                                  </p:childTnLst>
-                                </p:cTn>
-                              </p:par>
-                            </p:childTnLst>
-                          </p:cTn>
-                        </p:par>
-                      </p:childTnLst>
-                    </p:cTn>
-                  </p:par>
-                </p:childTnLst>
-              </p:cTn>
-              <p:prevCondLst>
-                <p:cond evt="onPrev" delay="0">
-                  <p:tgtEl>
-                    <p:sldTgt/>
-                  </p:tgtEl>
-                </p:cond>
-              </p:prevCondLst>
-              <p:nextCondLst>
-                <p:cond evt="onNext" delay="0">
-                  <p:tgtEl>
-                    <p:sldTgt/>
-                  </p:tgtEl>
-                </p:cond>
-              </p:nextCondLst>
-            </p:seq>
-          </p:childTnLst>
-        </p:cTn>
-      </p:par>
-    </p:tnLst>
-  </p:timing>
-</p:sld>
-</file>
-
-<file path=ppt/slides/slide2.xml><?xml version="1.0" encoding="utf-8"?>
-<p:sld xmlns:a="http://schemas.openxmlformats.org/drawingml/2006/main" xmlns:r="http://schemas.openxmlformats.org/officeDocument/2006/relationships" xmlns:p="http://schemas.openxmlformats.org/presentationml/2006/main">
-  <p:cSld>
-    <p:spTree>
-      <p:nvGrpSpPr>
         <p:cNvPr id="1" name="Shape 758"/>
         <p:cNvGrpSpPr/>
         <p:nvPr/>
@@ -10990,7 +9921,7 @@
             <a:fld id="{F2D06E3F-368B-43DC-96F3-4B8E65027050}" type="datetime1">
               <a:rPr lang="de-DE" smtClean="0"/>
               <a:pPr/>
-              <a:t>09.01.2026</a:t>
+              <a:t>30.01.2026</a:t>
             </a:fld>
             <a:endParaRPr lang="de-DE" dirty="0"/>
           </a:p>
@@ -11024,7 +9955,7 @@
             <a:fld id="{43310F81-32EE-4F95-9E9C-0BDC6AD52EEC}" type="slidenum">
               <a:rPr lang="de-DE" smtClean="0"/>
               <a:pPr/>
-              <a:t>2</a:t>
+              <a:t>1</a:t>
             </a:fld>
             <a:endParaRPr lang="de-DE" dirty="0"/>
           </a:p>
@@ -14066,1165 +12997,7 @@
 </p:sld>
 </file>
 
-<file path=ppt/slides/slide3.xml><?xml version="1.0" encoding="utf-8"?>
-<p:sld xmlns:a="http://schemas.openxmlformats.org/drawingml/2006/main" xmlns:r="http://schemas.openxmlformats.org/officeDocument/2006/relationships" xmlns:p="http://schemas.openxmlformats.org/presentationml/2006/main">
-  <p:cSld>
-    <p:spTree>
-      <p:nvGrpSpPr>
-        <p:cNvPr id="1" name="Shape 636"/>
-        <p:cNvGrpSpPr/>
-        <p:nvPr/>
-      </p:nvGrpSpPr>
-      <p:grpSpPr>
-        <a:xfrm>
-          <a:off x="0" y="0"/>
-          <a:ext cx="0" cy="0"/>
-          <a:chOff x="0" y="0"/>
-          <a:chExt cx="0" cy="0"/>
-        </a:xfrm>
-      </p:grpSpPr>
-      <p:sp>
-        <p:nvSpPr>
-          <p:cNvPr id="4" name="Titel 3">
-            <a:extLst>
-              <a:ext uri="{FF2B5EF4-FFF2-40B4-BE49-F238E27FC236}">
-                <a16:creationId xmlns:a16="http://schemas.microsoft.com/office/drawing/2014/main" id="{96CC7B3D-4080-4B83-AC42-CCFDD12CF264}"/>
-              </a:ext>
-            </a:extLst>
-          </p:cNvPr>
-          <p:cNvSpPr>
-            <a:spLocks noGrp="1"/>
-          </p:cNvSpPr>
-          <p:nvPr>
-            <p:ph type="title"/>
-          </p:nvPr>
-        </p:nvSpPr>
-        <p:spPr/>
-        <p:txBody>
-          <a:bodyPr/>
-          <a:lstStyle/>
-          <a:p>
-            <a:r>
-              <a:rPr lang="de-DE" noProof="0" dirty="0"/>
-              <a:t>Code in O-Notation umwandeln</a:t>
-            </a:r>
-          </a:p>
-        </p:txBody>
-      </p:sp>
-      <p:sp>
-        <p:nvSpPr>
-          <p:cNvPr id="2" name="Inhaltsplatzhalter 1">
-            <a:extLst>
-              <a:ext uri="{FF2B5EF4-FFF2-40B4-BE49-F238E27FC236}">
-                <a16:creationId xmlns:a16="http://schemas.microsoft.com/office/drawing/2014/main" id="{B270EAB6-3E9B-4BB1-9A90-F6D344A3570F}"/>
-              </a:ext>
-            </a:extLst>
-          </p:cNvPr>
-          <p:cNvSpPr>
-            <a:spLocks noGrp="1"/>
-          </p:cNvSpPr>
-          <p:nvPr>
-            <p:ph sz="quarter" idx="12"/>
-          </p:nvPr>
-        </p:nvSpPr>
-        <p:spPr/>
-        <p:txBody>
-          <a:bodyPr/>
-          <a:lstStyle/>
-          <a:p>
-            <a:endParaRPr lang="de-DE" noProof="0" dirty="0"/>
-          </a:p>
-          <a:p>
-            <a:endParaRPr lang="de-DE" noProof="0" dirty="0"/>
-          </a:p>
-          <a:p>
-            <a:endParaRPr lang="de-DE" noProof="0" dirty="0"/>
-          </a:p>
-          <a:p>
-            <a:endParaRPr lang="de-DE" noProof="0" dirty="0"/>
-          </a:p>
-          <a:p>
-            <a:endParaRPr lang="de-DE" noProof="0" dirty="0"/>
-          </a:p>
-          <a:p>
-            <a:endParaRPr lang="de-DE" noProof="0" dirty="0"/>
-          </a:p>
-          <a:p>
-            <a:endParaRPr lang="de-DE" noProof="0" dirty="0"/>
-          </a:p>
-          <a:p>
-            <a:endParaRPr lang="de-DE" noProof="0" dirty="0"/>
-          </a:p>
-          <a:p>
-            <a:r>
-              <a:rPr lang="de-DE" noProof="0" dirty="0"/>
-              <a:t>Bisher: “O(1) bedeutet keine Schleifen, O(n) ist eine Schleife, O(n</a:t>
-            </a:r>
-            <a:r>
-              <a:rPr lang="de-DE" baseline="30000" noProof="0" dirty="0"/>
-              <a:t>2</a:t>
-            </a:r>
-            <a:r>
-              <a:rPr lang="de-DE" noProof="0" dirty="0"/>
-              <a:t>) ist verschachtelte Schleife”</a:t>
-            </a:r>
-          </a:p>
-          <a:p>
-            <a:pPr lvl="1"/>
-            <a:r>
-              <a:rPr lang="de-DE" noProof="0" dirty="0"/>
-              <a:t>Das ist weiterhin nützlich!</a:t>
-            </a:r>
-          </a:p>
-          <a:p>
-            <a:pPr lvl="1"/>
-            <a:r>
-              <a:rPr lang="de-DE" noProof="0" dirty="0"/>
-              <a:t>In diesem Modul gehen wir mehr ins Detail: Damit wir auch komplizierteren Code in die O-Notation umwandeln können</a:t>
-            </a:r>
-          </a:p>
-          <a:p>
-            <a:endParaRPr lang="de-DE" noProof="0" dirty="0"/>
-          </a:p>
-        </p:txBody>
-      </p:sp>
-      <p:sp>
-        <p:nvSpPr>
-          <p:cNvPr id="5" name="Textplatzhalter 4">
-            <a:extLst>
-              <a:ext uri="{FF2B5EF4-FFF2-40B4-BE49-F238E27FC236}">
-                <a16:creationId xmlns:a16="http://schemas.microsoft.com/office/drawing/2014/main" id="{28A238EC-29FE-40B3-A04F-8D8B9DF6AE62}"/>
-              </a:ext>
-            </a:extLst>
-          </p:cNvPr>
-          <p:cNvSpPr>
-            <a:spLocks noGrp="1"/>
-          </p:cNvSpPr>
-          <p:nvPr>
-            <p:ph type="body" idx="13"/>
-          </p:nvPr>
-        </p:nvSpPr>
-        <p:spPr/>
-        <p:txBody>
-          <a:bodyPr/>
-          <a:lstStyle/>
-          <a:p>
-            <a:r>
-              <a:rPr lang="de-DE" noProof="0" dirty="0"/>
-              <a:t>Algorithmik – Laufzeitanalyse von Algorithmen durch Asymptotische Notation</a:t>
-            </a:r>
-          </a:p>
-        </p:txBody>
-      </p:sp>
-      <p:sp>
-        <p:nvSpPr>
-          <p:cNvPr id="16" name="Datumsplatzhalter 4">
-            <a:extLst>
-              <a:ext uri="{FF2B5EF4-FFF2-40B4-BE49-F238E27FC236}">
-                <a16:creationId xmlns:a16="http://schemas.microsoft.com/office/drawing/2014/main" id="{1239DAA0-ADA5-486A-9B09-2647D7872B21}"/>
-              </a:ext>
-            </a:extLst>
-          </p:cNvPr>
-          <p:cNvSpPr>
-            <a:spLocks noGrp="1"/>
-          </p:cNvSpPr>
-          <p:nvPr>
-            <p:ph type="dt" sz="half" idx="14"/>
-          </p:nvPr>
-        </p:nvSpPr>
-        <p:spPr/>
-        <p:txBody>
-          <a:bodyPr/>
-          <a:lstStyle/>
-          <a:p>
-            <a:fld id="{97C55095-590B-4AAB-8606-0F86796D070A}" type="datetime1">
-              <a:rPr lang="de-DE" smtClean="0"/>
-              <a:pPr/>
-              <a:t>09.01.2026</a:t>
-            </a:fld>
-            <a:endParaRPr lang="de-DE" dirty="0"/>
-          </a:p>
-        </p:txBody>
-      </p:sp>
-      <p:sp>
-        <p:nvSpPr>
-          <p:cNvPr id="17" name="Foliennummernplatzhalter 5">
-            <a:extLst>
-              <a:ext uri="{FF2B5EF4-FFF2-40B4-BE49-F238E27FC236}">
-                <a16:creationId xmlns:a16="http://schemas.microsoft.com/office/drawing/2014/main" id="{63C5F54C-8400-49FE-A6AE-03F11E0FEFC5}"/>
-              </a:ext>
-            </a:extLst>
-          </p:cNvPr>
-          <p:cNvSpPr>
-            <a:spLocks noGrp="1"/>
-          </p:cNvSpPr>
-          <p:nvPr>
-            <p:ph type="sldNum" sz="quarter" idx="15"/>
-          </p:nvPr>
-        </p:nvSpPr>
-        <p:spPr/>
-        <p:txBody>
-          <a:bodyPr/>
-          <a:lstStyle/>
-          <a:p>
-            <a:r>
-              <a:rPr lang="de-DE"/>
-              <a:t>Seite </a:t>
-            </a:r>
-            <a:fld id="{43310F81-32EE-4F95-9E9C-0BDC6AD52EEC}" type="slidenum">
-              <a:rPr lang="de-DE" smtClean="0"/>
-              <a:pPr/>
-              <a:t>3</a:t>
-            </a:fld>
-            <a:endParaRPr lang="de-DE"/>
-          </a:p>
-        </p:txBody>
-      </p:sp>
-      <p:sp>
-        <p:nvSpPr>
-          <p:cNvPr id="640" name="Google Shape;640;p17"/>
-          <p:cNvSpPr/>
-          <p:nvPr/>
-        </p:nvSpPr>
-        <p:spPr>
-          <a:xfrm>
-            <a:off x="3961081" y="2300906"/>
-            <a:ext cx="5474525" cy="521742"/>
-          </a:xfrm>
-          <a:prstGeom prst="rightArrow">
-            <a:avLst>
-              <a:gd name="adj1" fmla="val 50000"/>
-              <a:gd name="adj2" fmla="val 50000"/>
-            </a:avLst>
-          </a:prstGeom>
-          <a:solidFill>
-            <a:srgbClr val="B6A479"/>
-          </a:solidFill>
-          <a:ln>
-            <a:noFill/>
-          </a:ln>
-        </p:spPr>
-        <p:txBody>
-          <a:bodyPr spcFirstLastPara="1" wrap="square" lIns="91425" tIns="45700" rIns="91425" bIns="45700" anchor="ctr" anchorCtr="0">
-            <a:noAutofit/>
-          </a:bodyPr>
-          <a:lstStyle/>
-          <a:p>
-            <a:pPr marL="0" marR="0" lvl="0" indent="0" algn="ctr" rtl="0">
-              <a:spcBef>
-                <a:spcPts val="0"/>
-              </a:spcBef>
-              <a:spcAft>
-                <a:spcPts val="0"/>
-              </a:spcAft>
-              <a:buNone/>
-            </a:pPr>
-            <a:endParaRPr sz="1800">
-              <a:solidFill>
-                <a:schemeClr val="lt1"/>
-              </a:solidFill>
-              <a:latin typeface="Twentieth Century"/>
-              <a:ea typeface="Twentieth Century"/>
-              <a:cs typeface="Twentieth Century"/>
-              <a:sym typeface="Twentieth Century"/>
-            </a:endParaRPr>
-          </a:p>
-        </p:txBody>
-      </p:sp>
-      <p:sp>
-        <p:nvSpPr>
-          <p:cNvPr id="642" name="Google Shape;642;p17"/>
-          <p:cNvSpPr/>
-          <p:nvPr/>
-        </p:nvSpPr>
-        <p:spPr>
-          <a:xfrm>
-            <a:off x="1711196" y="1905819"/>
-            <a:ext cx="1878856" cy="1105786"/>
-          </a:xfrm>
-          <a:prstGeom prst="rect">
-            <a:avLst/>
-          </a:prstGeom>
-          <a:solidFill>
-            <a:srgbClr val="4C3282"/>
-          </a:solidFill>
-          <a:ln>
-            <a:noFill/>
-          </a:ln>
-        </p:spPr>
-        <p:txBody>
-          <a:bodyPr spcFirstLastPara="1" wrap="square" lIns="91425" tIns="45700" rIns="91425" bIns="45700" anchor="ctr" anchorCtr="0">
-            <a:noAutofit/>
-          </a:bodyPr>
-          <a:lstStyle/>
-          <a:p>
-            <a:pPr marL="0" marR="0" lvl="0" indent="0" algn="ctr" rtl="0">
-              <a:spcBef>
-                <a:spcPts val="0"/>
-              </a:spcBef>
-              <a:spcAft>
-                <a:spcPts val="0"/>
-              </a:spcAft>
-              <a:buNone/>
-            </a:pPr>
-            <a:r>
-              <a:rPr lang="en-US" sz="2000" b="1">
-                <a:solidFill>
-                  <a:schemeClr val="lt1"/>
-                </a:solidFill>
-                <a:latin typeface="Twentieth Century"/>
-                <a:ea typeface="Twentieth Century"/>
-                <a:cs typeface="Twentieth Century"/>
-                <a:sym typeface="Twentieth Century"/>
-              </a:rPr>
-              <a:t>CODE</a:t>
-            </a:r>
-            <a:endParaRPr/>
-          </a:p>
-        </p:txBody>
-      </p:sp>
-      <p:sp>
-        <p:nvSpPr>
-          <p:cNvPr id="643" name="Google Shape;643;p17"/>
-          <p:cNvSpPr/>
-          <p:nvPr/>
-        </p:nvSpPr>
-        <p:spPr>
-          <a:xfrm>
-            <a:off x="9636422" y="1901156"/>
-            <a:ext cx="1878856" cy="1105786"/>
-          </a:xfrm>
-          <a:prstGeom prst="rect">
-            <a:avLst/>
-          </a:prstGeom>
-          <a:solidFill>
-            <a:srgbClr val="9B8ABE"/>
-          </a:solidFill>
-          <a:ln>
-            <a:noFill/>
-          </a:ln>
-        </p:spPr>
-        <p:txBody>
-          <a:bodyPr spcFirstLastPara="1" wrap="square" lIns="91425" tIns="45700" rIns="91425" bIns="45700" anchor="ctr" anchorCtr="0">
-            <a:noAutofit/>
-          </a:bodyPr>
-          <a:lstStyle/>
-          <a:p>
-            <a:pPr marL="0" marR="0" lvl="0" indent="0" algn="ctr" rtl="0">
-              <a:spcBef>
-                <a:spcPts val="0"/>
-              </a:spcBef>
-              <a:spcAft>
-                <a:spcPts val="0"/>
-              </a:spcAft>
-              <a:buNone/>
-            </a:pPr>
-            <a:r>
-              <a:rPr lang="en-US" sz="2000" b="1" dirty="0">
-                <a:solidFill>
-                  <a:schemeClr val="lt1"/>
-                </a:solidFill>
-                <a:latin typeface="Twentieth Century"/>
-                <a:ea typeface="Twentieth Century"/>
-                <a:cs typeface="Twentieth Century"/>
-                <a:sym typeface="Twentieth Century"/>
-              </a:rPr>
-              <a:t>O-Notation</a:t>
-            </a:r>
-            <a:endParaRPr dirty="0"/>
-          </a:p>
-        </p:txBody>
-      </p:sp>
-      <p:sp>
-        <p:nvSpPr>
-          <p:cNvPr id="644" name="Google Shape;644;p17"/>
-          <p:cNvSpPr/>
-          <p:nvPr/>
-        </p:nvSpPr>
-        <p:spPr>
-          <a:xfrm>
-            <a:off x="4938446" y="1323171"/>
-            <a:ext cx="3349582" cy="2431473"/>
-          </a:xfrm>
-          <a:prstGeom prst="cloud">
-            <a:avLst/>
-          </a:prstGeom>
-          <a:solidFill>
-            <a:srgbClr val="B6A479"/>
-          </a:solidFill>
-          <a:ln>
-            <a:noFill/>
-          </a:ln>
-        </p:spPr>
-        <p:txBody>
-          <a:bodyPr spcFirstLastPara="1" wrap="square" lIns="91425" tIns="45700" rIns="91425" bIns="45700" anchor="ctr" anchorCtr="0">
-            <a:noAutofit/>
-          </a:bodyPr>
-          <a:lstStyle/>
-          <a:p>
-            <a:pPr marL="0" marR="0" lvl="0" indent="0" algn="ctr" rtl="0">
-              <a:spcBef>
-                <a:spcPts val="0"/>
-              </a:spcBef>
-              <a:spcAft>
-                <a:spcPts val="0"/>
-              </a:spcAft>
-              <a:buNone/>
-            </a:pPr>
-            <a:endParaRPr sz="1800">
-              <a:solidFill>
-                <a:schemeClr val="lt1"/>
-              </a:solidFill>
-              <a:latin typeface="Twentieth Century"/>
-              <a:ea typeface="Twentieth Century"/>
-              <a:cs typeface="Twentieth Century"/>
-              <a:sym typeface="Twentieth Century"/>
-            </a:endParaRPr>
-          </a:p>
-        </p:txBody>
-      </p:sp>
-      <p:pic>
-        <p:nvPicPr>
-          <p:cNvPr id="645" name="Google Shape;645;p17"/>
-          <p:cNvPicPr preferRelativeResize="0"/>
-          <p:nvPr/>
-        </p:nvPicPr>
-        <p:blipFill rotWithShape="1">
-          <a:blip r:embed="rId3">
-            <a:alphaModFix/>
-          </a:blip>
-          <a:srcRect/>
-          <a:stretch/>
-        </p:blipFill>
-        <p:spPr>
-          <a:xfrm>
-            <a:off x="5385099" y="1887398"/>
-            <a:ext cx="2376086" cy="1335360"/>
-          </a:xfrm>
-          <a:prstGeom prst="rect">
-            <a:avLst/>
-          </a:prstGeom>
-          <a:noFill/>
-          <a:ln>
-            <a:noFill/>
-          </a:ln>
-        </p:spPr>
-      </p:pic>
-      <p:sp>
-        <p:nvSpPr>
-          <p:cNvPr id="646" name="Google Shape;646;p17"/>
-          <p:cNvSpPr txBox="1"/>
-          <p:nvPr/>
-        </p:nvSpPr>
-        <p:spPr>
-          <a:xfrm>
-            <a:off x="1155663" y="3230585"/>
-            <a:ext cx="3402482" cy="1077178"/>
-          </a:xfrm>
-          <a:prstGeom prst="rect">
-            <a:avLst/>
-          </a:prstGeom>
-          <a:noFill/>
-          <a:ln>
-            <a:noFill/>
-          </a:ln>
-        </p:spPr>
-        <p:txBody>
-          <a:bodyPr spcFirstLastPara="1" wrap="square" lIns="91425" tIns="45700" rIns="91425" bIns="45700" anchor="t" anchorCtr="0">
-            <a:spAutoFit/>
-          </a:bodyPr>
-          <a:lstStyle/>
-          <a:p>
-            <a:pPr marL="0" marR="0" lvl="0" indent="0" algn="l" rtl="0">
-              <a:spcBef>
-                <a:spcPts val="0"/>
-              </a:spcBef>
-              <a:spcAft>
-                <a:spcPts val="0"/>
-              </a:spcAft>
-              <a:buNone/>
-            </a:pPr>
-            <a:r>
-              <a:rPr lang="en-US" sz="1600" dirty="0">
-                <a:solidFill>
-                  <a:schemeClr val="dk1"/>
-                </a:solidFill>
-                <a:latin typeface="Courier New" panose="02070309020205020404" pitchFamily="49" charset="0"/>
-                <a:ea typeface="Consolas"/>
-                <a:cs typeface="Courier New" panose="02070309020205020404" pitchFamily="49" charset="0"/>
-                <a:sym typeface="Consolas"/>
-              </a:rPr>
-              <a:t>for (</a:t>
-            </a:r>
-            <a:r>
-              <a:rPr lang="en-US" sz="1600" dirty="0" err="1">
-                <a:solidFill>
-                  <a:schemeClr val="dk1"/>
-                </a:solidFill>
-                <a:latin typeface="Courier New" panose="02070309020205020404" pitchFamily="49" charset="0"/>
-                <a:ea typeface="Consolas"/>
-                <a:cs typeface="Courier New" panose="02070309020205020404" pitchFamily="49" charset="0"/>
-                <a:sym typeface="Consolas"/>
-              </a:rPr>
-              <a:t>i</a:t>
-            </a:r>
-            <a:r>
-              <a:rPr lang="en-US" sz="1600" dirty="0">
-                <a:solidFill>
-                  <a:schemeClr val="dk1"/>
-                </a:solidFill>
-                <a:latin typeface="Courier New" panose="02070309020205020404" pitchFamily="49" charset="0"/>
-                <a:ea typeface="Consolas"/>
-                <a:cs typeface="Courier New" panose="02070309020205020404" pitchFamily="49" charset="0"/>
-                <a:sym typeface="Consolas"/>
-              </a:rPr>
-              <a:t> = 0; </a:t>
-            </a:r>
-            <a:r>
-              <a:rPr lang="en-US" sz="1600" dirty="0" err="1">
-                <a:solidFill>
-                  <a:schemeClr val="dk1"/>
-                </a:solidFill>
-                <a:latin typeface="Courier New" panose="02070309020205020404" pitchFamily="49" charset="0"/>
-                <a:ea typeface="Consolas"/>
-                <a:cs typeface="Courier New" panose="02070309020205020404" pitchFamily="49" charset="0"/>
-                <a:sym typeface="Consolas"/>
-              </a:rPr>
-              <a:t>i</a:t>
-            </a:r>
-            <a:r>
-              <a:rPr lang="en-US" sz="1600" dirty="0">
-                <a:solidFill>
-                  <a:schemeClr val="dk1"/>
-                </a:solidFill>
-                <a:latin typeface="Courier New" panose="02070309020205020404" pitchFamily="49" charset="0"/>
-                <a:ea typeface="Consolas"/>
-                <a:cs typeface="Courier New" panose="02070309020205020404" pitchFamily="49" charset="0"/>
-                <a:sym typeface="Consolas"/>
-              </a:rPr>
-              <a:t> &lt; n; </a:t>
-            </a:r>
-            <a:r>
-              <a:rPr lang="en-US" sz="1600" dirty="0" err="1">
-                <a:solidFill>
-                  <a:schemeClr val="dk1"/>
-                </a:solidFill>
-                <a:latin typeface="Courier New" panose="02070309020205020404" pitchFamily="49" charset="0"/>
-                <a:ea typeface="Consolas"/>
-                <a:cs typeface="Courier New" panose="02070309020205020404" pitchFamily="49" charset="0"/>
-                <a:sym typeface="Consolas"/>
-              </a:rPr>
-              <a:t>i</a:t>
-            </a:r>
-            <a:r>
-              <a:rPr lang="en-US" sz="1600" dirty="0">
-                <a:solidFill>
-                  <a:schemeClr val="dk1"/>
-                </a:solidFill>
-                <a:latin typeface="Courier New" panose="02070309020205020404" pitchFamily="49" charset="0"/>
-                <a:ea typeface="Consolas"/>
-                <a:cs typeface="Courier New" panose="02070309020205020404" pitchFamily="49" charset="0"/>
-                <a:sym typeface="Consolas"/>
-              </a:rPr>
-              <a:t>++) {</a:t>
-            </a:r>
-            <a:endParaRPr sz="1600" dirty="0">
-              <a:latin typeface="Courier New" panose="02070309020205020404" pitchFamily="49" charset="0"/>
-              <a:cs typeface="Courier New" panose="02070309020205020404" pitchFamily="49" charset="0"/>
-            </a:endParaRPr>
-          </a:p>
-          <a:p>
-            <a:pPr marL="0" marR="0" lvl="0" indent="0" algn="l" rtl="0">
-              <a:spcBef>
-                <a:spcPts val="0"/>
-              </a:spcBef>
-              <a:spcAft>
-                <a:spcPts val="0"/>
-              </a:spcAft>
-              <a:buNone/>
-            </a:pPr>
-            <a:r>
-              <a:rPr lang="en-US" sz="1600" dirty="0">
-                <a:solidFill>
-                  <a:schemeClr val="dk1"/>
-                </a:solidFill>
-                <a:latin typeface="Courier New" panose="02070309020205020404" pitchFamily="49" charset="0"/>
-                <a:ea typeface="Consolas"/>
-                <a:cs typeface="Courier New" panose="02070309020205020404" pitchFamily="49" charset="0"/>
-                <a:sym typeface="Consolas"/>
-              </a:rPr>
-              <a:t>  a[</a:t>
-            </a:r>
-            <a:r>
-              <a:rPr lang="en-US" sz="1600" dirty="0" err="1">
-                <a:solidFill>
-                  <a:schemeClr val="dk1"/>
-                </a:solidFill>
-                <a:latin typeface="Courier New" panose="02070309020205020404" pitchFamily="49" charset="0"/>
-                <a:ea typeface="Consolas"/>
-                <a:cs typeface="Courier New" panose="02070309020205020404" pitchFamily="49" charset="0"/>
-                <a:sym typeface="Consolas"/>
-              </a:rPr>
-              <a:t>i</a:t>
-            </a:r>
-            <a:r>
-              <a:rPr lang="en-US" sz="1600" dirty="0">
-                <a:solidFill>
-                  <a:schemeClr val="dk1"/>
-                </a:solidFill>
-                <a:latin typeface="Courier New" panose="02070309020205020404" pitchFamily="49" charset="0"/>
-                <a:ea typeface="Consolas"/>
-                <a:cs typeface="Courier New" panose="02070309020205020404" pitchFamily="49" charset="0"/>
-                <a:sym typeface="Consolas"/>
-              </a:rPr>
-              <a:t>] = 1;</a:t>
-            </a:r>
-            <a:endParaRPr sz="1600" dirty="0">
-              <a:latin typeface="Courier New" panose="02070309020205020404" pitchFamily="49" charset="0"/>
-              <a:cs typeface="Courier New" panose="02070309020205020404" pitchFamily="49" charset="0"/>
-            </a:endParaRPr>
-          </a:p>
-          <a:p>
-            <a:pPr marL="0" marR="0" lvl="0" indent="0" algn="l" rtl="0">
-              <a:spcBef>
-                <a:spcPts val="0"/>
-              </a:spcBef>
-              <a:spcAft>
-                <a:spcPts val="0"/>
-              </a:spcAft>
-              <a:buNone/>
-            </a:pPr>
-            <a:r>
-              <a:rPr lang="en-US" sz="1600" dirty="0">
-                <a:solidFill>
-                  <a:schemeClr val="dk1"/>
-                </a:solidFill>
-                <a:latin typeface="Courier New" panose="02070309020205020404" pitchFamily="49" charset="0"/>
-                <a:ea typeface="Consolas"/>
-                <a:cs typeface="Courier New" panose="02070309020205020404" pitchFamily="49" charset="0"/>
-                <a:sym typeface="Consolas"/>
-              </a:rPr>
-              <a:t>  b[</a:t>
-            </a:r>
-            <a:r>
-              <a:rPr lang="en-US" sz="1600" dirty="0" err="1">
-                <a:solidFill>
-                  <a:schemeClr val="dk1"/>
-                </a:solidFill>
-                <a:latin typeface="Courier New" panose="02070309020205020404" pitchFamily="49" charset="0"/>
-                <a:ea typeface="Consolas"/>
-                <a:cs typeface="Courier New" panose="02070309020205020404" pitchFamily="49" charset="0"/>
-                <a:sym typeface="Consolas"/>
-              </a:rPr>
-              <a:t>i</a:t>
-            </a:r>
-            <a:r>
-              <a:rPr lang="en-US" sz="1600" dirty="0">
-                <a:solidFill>
-                  <a:schemeClr val="dk1"/>
-                </a:solidFill>
-                <a:latin typeface="Courier New" panose="02070309020205020404" pitchFamily="49" charset="0"/>
-                <a:ea typeface="Consolas"/>
-                <a:cs typeface="Courier New" panose="02070309020205020404" pitchFamily="49" charset="0"/>
-                <a:sym typeface="Consolas"/>
-              </a:rPr>
-              <a:t>] = 2;</a:t>
-            </a:r>
-            <a:endParaRPr sz="1600" dirty="0">
-              <a:latin typeface="Courier New" panose="02070309020205020404" pitchFamily="49" charset="0"/>
-              <a:cs typeface="Courier New" panose="02070309020205020404" pitchFamily="49" charset="0"/>
-            </a:endParaRPr>
-          </a:p>
-          <a:p>
-            <a:pPr marL="0" marR="0" lvl="0" indent="0" algn="l" rtl="0">
-              <a:spcBef>
-                <a:spcPts val="0"/>
-              </a:spcBef>
-              <a:spcAft>
-                <a:spcPts val="0"/>
-              </a:spcAft>
-              <a:buNone/>
-            </a:pPr>
-            <a:r>
-              <a:rPr lang="en-US" sz="1600" dirty="0">
-                <a:solidFill>
-                  <a:schemeClr val="dk1"/>
-                </a:solidFill>
-                <a:latin typeface="Courier New" panose="02070309020205020404" pitchFamily="49" charset="0"/>
-                <a:ea typeface="Consolas"/>
-                <a:cs typeface="Courier New" panose="02070309020205020404" pitchFamily="49" charset="0"/>
-                <a:sym typeface="Consolas"/>
-              </a:rPr>
-              <a:t>}</a:t>
-            </a:r>
-            <a:endParaRPr sz="1600" dirty="0">
-              <a:latin typeface="Courier New" panose="02070309020205020404" pitchFamily="49" charset="0"/>
-              <a:cs typeface="Courier New" panose="02070309020205020404" pitchFamily="49" charset="0"/>
-            </a:endParaRPr>
-          </a:p>
-        </p:txBody>
-      </p:sp>
-      <p:sp>
-        <p:nvSpPr>
-          <p:cNvPr id="647" name="Google Shape;647;p17"/>
-          <p:cNvSpPr txBox="1"/>
-          <p:nvPr/>
-        </p:nvSpPr>
-        <p:spPr>
-          <a:xfrm>
-            <a:off x="10252684" y="3124923"/>
-            <a:ext cx="646331" cy="400110"/>
-          </a:xfrm>
-          <a:prstGeom prst="rect">
-            <a:avLst/>
-          </a:prstGeom>
-          <a:noFill/>
-          <a:ln>
-            <a:noFill/>
-          </a:ln>
-        </p:spPr>
-        <p:txBody>
-          <a:bodyPr spcFirstLastPara="1" wrap="square" lIns="91425" tIns="45700" rIns="91425" bIns="45700" anchor="t" anchorCtr="0">
-            <a:spAutoFit/>
-          </a:bodyPr>
-          <a:lstStyle/>
-          <a:p>
-            <a:pPr marL="0" marR="0" lvl="0" indent="0" algn="l" rtl="0">
-              <a:spcBef>
-                <a:spcPts val="0"/>
-              </a:spcBef>
-              <a:spcAft>
-                <a:spcPts val="0"/>
-              </a:spcAft>
-              <a:buNone/>
-            </a:pPr>
-            <a:r>
-              <a:rPr lang="en-US" sz="2000" dirty="0">
-                <a:solidFill>
-                  <a:schemeClr val="dk1"/>
-                </a:solidFill>
-                <a:latin typeface="Twentieth Century"/>
-                <a:ea typeface="Twentieth Century"/>
-                <a:cs typeface="Twentieth Century"/>
-                <a:sym typeface="Twentieth Century"/>
-              </a:rPr>
-              <a:t>O(n)</a:t>
-            </a:r>
-            <a:endParaRPr dirty="0"/>
-          </a:p>
-        </p:txBody>
-      </p:sp>
-      <p:sp>
-        <p:nvSpPr>
-          <p:cNvPr id="648" name="Google Shape;648;p17"/>
-          <p:cNvSpPr txBox="1"/>
-          <p:nvPr/>
-        </p:nvSpPr>
-        <p:spPr>
-          <a:xfrm>
-            <a:off x="6773681" y="2165262"/>
-            <a:ext cx="1514347" cy="2646878"/>
-          </a:xfrm>
-          <a:prstGeom prst="rect">
-            <a:avLst/>
-          </a:prstGeom>
-          <a:noFill/>
-          <a:ln>
-            <a:noFill/>
-          </a:ln>
-        </p:spPr>
-        <p:txBody>
-          <a:bodyPr spcFirstLastPara="1" wrap="square" lIns="91425" tIns="45700" rIns="91425" bIns="45700" anchor="t" anchorCtr="0">
-            <a:spAutoFit/>
-          </a:bodyPr>
-          <a:lstStyle/>
-          <a:p>
-            <a:pPr marL="0" marR="0" lvl="0" indent="0" algn="l" rtl="0">
-              <a:spcBef>
-                <a:spcPts val="0"/>
-              </a:spcBef>
-              <a:spcAft>
-                <a:spcPts val="0"/>
-              </a:spcAft>
-              <a:buNone/>
-            </a:pPr>
-            <a:r>
-              <a:rPr lang="en-US" sz="16600" b="1">
-                <a:solidFill>
-                  <a:srgbClr val="4C3282"/>
-                </a:solidFill>
-                <a:latin typeface="Helvetica Neue"/>
-                <a:ea typeface="Helvetica Neue"/>
-                <a:cs typeface="Helvetica Neue"/>
-                <a:sym typeface="Helvetica Neue"/>
-              </a:rPr>
-              <a:t>?</a:t>
-            </a:r>
-            <a:endParaRPr/>
-          </a:p>
-        </p:txBody>
-      </p:sp>
-      <p:sp>
-        <p:nvSpPr>
-          <p:cNvPr id="14" name="Google Shape;257;p13">
-            <a:extLst>
-              <a:ext uri="{FF2B5EF4-FFF2-40B4-BE49-F238E27FC236}">
-                <a16:creationId xmlns:a16="http://schemas.microsoft.com/office/drawing/2014/main" id="{9A5AA8DF-7AFA-4BB7-84FB-2626353650C4}"/>
-              </a:ext>
-            </a:extLst>
-          </p:cNvPr>
-          <p:cNvSpPr txBox="1">
-            <a:spLocks/>
-          </p:cNvSpPr>
-          <p:nvPr/>
-        </p:nvSpPr>
-        <p:spPr>
-          <a:xfrm>
-            <a:off x="7499928" y="6407294"/>
-            <a:ext cx="2193636" cy="219798"/>
-          </a:xfrm>
-          <a:prstGeom prst="rect">
-            <a:avLst/>
-          </a:prstGeom>
-          <a:noFill/>
-          <a:ln>
-            <a:noFill/>
-          </a:ln>
-        </p:spPr>
-        <p:txBody>
-          <a:bodyPr spcFirstLastPara="1" wrap="square" lIns="91425" tIns="45700" rIns="91425" bIns="45700" anchor="ctr" anchorCtr="0">
-            <a:noAutofit/>
-          </a:bodyPr>
-          <a:lstStyle>
-            <a:defPPr>
-              <a:defRPr lang="de-DE"/>
-            </a:defPPr>
-            <a:lvl1pPr algn="l" defTabSz="457200" rtl="0" fontAlgn="base">
-              <a:spcBef>
-                <a:spcPct val="0"/>
-              </a:spcBef>
-              <a:spcAft>
-                <a:spcPct val="0"/>
-              </a:spcAft>
-              <a:defRPr kern="1200">
-                <a:solidFill>
-                  <a:schemeClr val="tx1"/>
-                </a:solidFill>
-                <a:latin typeface="Arial" pitchFamily="34" charset="0"/>
-                <a:ea typeface="+mn-ea"/>
-                <a:cs typeface="Arial" pitchFamily="34" charset="0"/>
-              </a:defRPr>
-            </a:lvl1pPr>
-            <a:lvl2pPr marL="457200" algn="l" defTabSz="457200" rtl="0" fontAlgn="base">
-              <a:spcBef>
-                <a:spcPct val="0"/>
-              </a:spcBef>
-              <a:spcAft>
-                <a:spcPct val="0"/>
-              </a:spcAft>
-              <a:defRPr kern="1200">
-                <a:solidFill>
-                  <a:schemeClr val="tx1"/>
-                </a:solidFill>
-                <a:latin typeface="Arial" pitchFamily="34" charset="0"/>
-                <a:ea typeface="+mn-ea"/>
-                <a:cs typeface="Arial" pitchFamily="34" charset="0"/>
-              </a:defRPr>
-            </a:lvl2pPr>
-            <a:lvl3pPr marL="914400" algn="l" defTabSz="457200" rtl="0" fontAlgn="base">
-              <a:spcBef>
-                <a:spcPct val="0"/>
-              </a:spcBef>
-              <a:spcAft>
-                <a:spcPct val="0"/>
-              </a:spcAft>
-              <a:defRPr kern="1200">
-                <a:solidFill>
-                  <a:schemeClr val="tx1"/>
-                </a:solidFill>
-                <a:latin typeface="Arial" pitchFamily="34" charset="0"/>
-                <a:ea typeface="+mn-ea"/>
-                <a:cs typeface="Arial" pitchFamily="34" charset="0"/>
-              </a:defRPr>
-            </a:lvl3pPr>
-            <a:lvl4pPr marL="1371600" algn="l" defTabSz="457200" rtl="0" fontAlgn="base">
-              <a:spcBef>
-                <a:spcPct val="0"/>
-              </a:spcBef>
-              <a:spcAft>
-                <a:spcPct val="0"/>
-              </a:spcAft>
-              <a:defRPr kern="1200">
-                <a:solidFill>
-                  <a:schemeClr val="tx1"/>
-                </a:solidFill>
-                <a:latin typeface="Arial" pitchFamily="34" charset="0"/>
-                <a:ea typeface="+mn-ea"/>
-                <a:cs typeface="Arial" pitchFamily="34" charset="0"/>
-              </a:defRPr>
-            </a:lvl4pPr>
-            <a:lvl5pPr marL="1828800" algn="l" defTabSz="457200" rtl="0" fontAlgn="base">
-              <a:spcBef>
-                <a:spcPct val="0"/>
-              </a:spcBef>
-              <a:spcAft>
-                <a:spcPct val="0"/>
-              </a:spcAft>
-              <a:defRPr kern="1200">
-                <a:solidFill>
-                  <a:schemeClr val="tx1"/>
-                </a:solidFill>
-                <a:latin typeface="Arial" pitchFamily="34" charset="0"/>
-                <a:ea typeface="+mn-ea"/>
-                <a:cs typeface="Arial" pitchFamily="34" charset="0"/>
-              </a:defRPr>
-            </a:lvl5pPr>
-            <a:lvl6pPr marL="2286000" algn="l" defTabSz="914400" rtl="0" eaLnBrk="1" latinLnBrk="0" hangingPunct="1">
-              <a:defRPr kern="1200">
-                <a:solidFill>
-                  <a:schemeClr val="tx1"/>
-                </a:solidFill>
-                <a:latin typeface="Arial" pitchFamily="34" charset="0"/>
-                <a:ea typeface="+mn-ea"/>
-                <a:cs typeface="Arial" pitchFamily="34" charset="0"/>
-              </a:defRPr>
-            </a:lvl6pPr>
-            <a:lvl7pPr marL="2743200" algn="l" defTabSz="914400" rtl="0" eaLnBrk="1" latinLnBrk="0" hangingPunct="1">
-              <a:defRPr kern="1200">
-                <a:solidFill>
-                  <a:schemeClr val="tx1"/>
-                </a:solidFill>
-                <a:latin typeface="Arial" pitchFamily="34" charset="0"/>
-                <a:ea typeface="+mn-ea"/>
-                <a:cs typeface="Arial" pitchFamily="34" charset="0"/>
-              </a:defRPr>
-            </a:lvl7pPr>
-            <a:lvl8pPr marL="3200400" algn="l" defTabSz="914400" rtl="0" eaLnBrk="1" latinLnBrk="0" hangingPunct="1">
-              <a:defRPr kern="1200">
-                <a:solidFill>
-                  <a:schemeClr val="tx1"/>
-                </a:solidFill>
-                <a:latin typeface="Arial" pitchFamily="34" charset="0"/>
-                <a:ea typeface="+mn-ea"/>
-                <a:cs typeface="Arial" pitchFamily="34" charset="0"/>
-              </a:defRPr>
-            </a:lvl8pPr>
-            <a:lvl9pPr marL="3657600" algn="l" defTabSz="914400" rtl="0" eaLnBrk="1" latinLnBrk="0" hangingPunct="1">
-              <a:defRPr kern="1200">
-                <a:solidFill>
-                  <a:schemeClr val="tx1"/>
-                </a:solidFill>
-                <a:latin typeface="Arial" pitchFamily="34" charset="0"/>
-                <a:ea typeface="+mn-ea"/>
-                <a:cs typeface="Arial" pitchFamily="34" charset="0"/>
-              </a:defRPr>
-            </a:lvl9pPr>
-          </a:lstStyle>
-          <a:p>
-            <a:pPr algn="r">
-              <a:spcBef>
-                <a:spcPts val="0"/>
-              </a:spcBef>
-              <a:spcAft>
-                <a:spcPts val="0"/>
-              </a:spcAft>
-            </a:pPr>
-            <a:r>
-              <a:rPr lang="fr-FR" sz="800" dirty="0"/>
-              <a:t>CSE 373 20 AU – SCHAFER</a:t>
-            </a:r>
-          </a:p>
-        </p:txBody>
-      </p:sp>
-      <p:sp>
-        <p:nvSpPr>
-          <p:cNvPr id="15" name="Google Shape;257;p13">
-            <a:extLst>
-              <a:ext uri="{FF2B5EF4-FFF2-40B4-BE49-F238E27FC236}">
-                <a16:creationId xmlns:a16="http://schemas.microsoft.com/office/drawing/2014/main" id="{3F9CD9BC-3DE3-4ED5-909F-D074E6AB7946}"/>
-              </a:ext>
-            </a:extLst>
-          </p:cNvPr>
-          <p:cNvSpPr txBox="1">
-            <a:spLocks/>
-          </p:cNvSpPr>
-          <p:nvPr/>
-        </p:nvSpPr>
-        <p:spPr>
-          <a:xfrm>
-            <a:off x="6881091" y="6150552"/>
-            <a:ext cx="2812473" cy="219798"/>
-          </a:xfrm>
-          <a:prstGeom prst="rect">
-            <a:avLst/>
-          </a:prstGeom>
-          <a:noFill/>
-          <a:ln>
-            <a:noFill/>
-          </a:ln>
-        </p:spPr>
-        <p:txBody>
-          <a:bodyPr spcFirstLastPara="1" wrap="square" lIns="91425" tIns="45700" rIns="91425" bIns="45700" anchor="ctr" anchorCtr="0">
-            <a:noAutofit/>
-          </a:bodyPr>
-          <a:lstStyle>
-            <a:defPPr>
-              <a:defRPr lang="de-DE"/>
-            </a:defPPr>
-            <a:lvl1pPr algn="l" defTabSz="457200" rtl="0" fontAlgn="base">
-              <a:spcBef>
-                <a:spcPct val="0"/>
-              </a:spcBef>
-              <a:spcAft>
-                <a:spcPct val="0"/>
-              </a:spcAft>
-              <a:defRPr kern="1200">
-                <a:solidFill>
-                  <a:schemeClr val="tx1"/>
-                </a:solidFill>
-                <a:latin typeface="Arial" pitchFamily="34" charset="0"/>
-                <a:ea typeface="+mn-ea"/>
-                <a:cs typeface="Arial" pitchFamily="34" charset="0"/>
-              </a:defRPr>
-            </a:lvl1pPr>
-            <a:lvl2pPr marL="457200" algn="l" defTabSz="457200" rtl="0" fontAlgn="base">
-              <a:spcBef>
-                <a:spcPct val="0"/>
-              </a:spcBef>
-              <a:spcAft>
-                <a:spcPct val="0"/>
-              </a:spcAft>
-              <a:defRPr kern="1200">
-                <a:solidFill>
-                  <a:schemeClr val="tx1"/>
-                </a:solidFill>
-                <a:latin typeface="Arial" pitchFamily="34" charset="0"/>
-                <a:ea typeface="+mn-ea"/>
-                <a:cs typeface="Arial" pitchFamily="34" charset="0"/>
-              </a:defRPr>
-            </a:lvl2pPr>
-            <a:lvl3pPr marL="914400" algn="l" defTabSz="457200" rtl="0" fontAlgn="base">
-              <a:spcBef>
-                <a:spcPct val="0"/>
-              </a:spcBef>
-              <a:spcAft>
-                <a:spcPct val="0"/>
-              </a:spcAft>
-              <a:defRPr kern="1200">
-                <a:solidFill>
-                  <a:schemeClr val="tx1"/>
-                </a:solidFill>
-                <a:latin typeface="Arial" pitchFamily="34" charset="0"/>
-                <a:ea typeface="+mn-ea"/>
-                <a:cs typeface="Arial" pitchFamily="34" charset="0"/>
-              </a:defRPr>
-            </a:lvl3pPr>
-            <a:lvl4pPr marL="1371600" algn="l" defTabSz="457200" rtl="0" fontAlgn="base">
-              <a:spcBef>
-                <a:spcPct val="0"/>
-              </a:spcBef>
-              <a:spcAft>
-                <a:spcPct val="0"/>
-              </a:spcAft>
-              <a:defRPr kern="1200">
-                <a:solidFill>
-                  <a:schemeClr val="tx1"/>
-                </a:solidFill>
-                <a:latin typeface="Arial" pitchFamily="34" charset="0"/>
-                <a:ea typeface="+mn-ea"/>
-                <a:cs typeface="Arial" pitchFamily="34" charset="0"/>
-              </a:defRPr>
-            </a:lvl4pPr>
-            <a:lvl5pPr marL="1828800" algn="l" defTabSz="457200" rtl="0" fontAlgn="base">
-              <a:spcBef>
-                <a:spcPct val="0"/>
-              </a:spcBef>
-              <a:spcAft>
-                <a:spcPct val="0"/>
-              </a:spcAft>
-              <a:defRPr kern="1200">
-                <a:solidFill>
-                  <a:schemeClr val="tx1"/>
-                </a:solidFill>
-                <a:latin typeface="Arial" pitchFamily="34" charset="0"/>
-                <a:ea typeface="+mn-ea"/>
-                <a:cs typeface="Arial" pitchFamily="34" charset="0"/>
-              </a:defRPr>
-            </a:lvl5pPr>
-            <a:lvl6pPr marL="2286000" algn="l" defTabSz="914400" rtl="0" eaLnBrk="1" latinLnBrk="0" hangingPunct="1">
-              <a:defRPr kern="1200">
-                <a:solidFill>
-                  <a:schemeClr val="tx1"/>
-                </a:solidFill>
-                <a:latin typeface="Arial" pitchFamily="34" charset="0"/>
-                <a:ea typeface="+mn-ea"/>
-                <a:cs typeface="Arial" pitchFamily="34" charset="0"/>
-              </a:defRPr>
-            </a:lvl6pPr>
-            <a:lvl7pPr marL="2743200" algn="l" defTabSz="914400" rtl="0" eaLnBrk="1" latinLnBrk="0" hangingPunct="1">
-              <a:defRPr kern="1200">
-                <a:solidFill>
-                  <a:schemeClr val="tx1"/>
-                </a:solidFill>
-                <a:latin typeface="Arial" pitchFamily="34" charset="0"/>
-                <a:ea typeface="+mn-ea"/>
-                <a:cs typeface="Arial" pitchFamily="34" charset="0"/>
-              </a:defRPr>
-            </a:lvl7pPr>
-            <a:lvl8pPr marL="3200400" algn="l" defTabSz="914400" rtl="0" eaLnBrk="1" latinLnBrk="0" hangingPunct="1">
-              <a:defRPr kern="1200">
-                <a:solidFill>
-                  <a:schemeClr val="tx1"/>
-                </a:solidFill>
-                <a:latin typeface="Arial" pitchFamily="34" charset="0"/>
-                <a:ea typeface="+mn-ea"/>
-                <a:cs typeface="Arial" pitchFamily="34" charset="0"/>
-              </a:defRPr>
-            </a:lvl8pPr>
-            <a:lvl9pPr marL="3657600" algn="l" defTabSz="914400" rtl="0" eaLnBrk="1" latinLnBrk="0" hangingPunct="1">
-              <a:defRPr kern="1200">
-                <a:solidFill>
-                  <a:schemeClr val="tx1"/>
-                </a:solidFill>
-                <a:latin typeface="Arial" pitchFamily="34" charset="0"/>
-                <a:ea typeface="+mn-ea"/>
-                <a:cs typeface="Arial" pitchFamily="34" charset="0"/>
-              </a:defRPr>
-            </a:lvl9pPr>
-          </a:lstStyle>
-          <a:p>
-            <a:pPr algn="r">
-              <a:spcBef>
-                <a:spcPts val="0"/>
-              </a:spcBef>
-              <a:spcAft>
-                <a:spcPts val="0"/>
-              </a:spcAft>
-            </a:pPr>
-            <a:r>
-              <a:rPr lang="fr-FR" sz="800" dirty="0"/>
-              <a:t>Quelle: Data Structures and </a:t>
-            </a:r>
-            <a:r>
-              <a:rPr lang="fr-FR" sz="800" dirty="0" err="1"/>
-              <a:t>Algorithms</a:t>
-            </a:r>
-            <a:r>
-              <a:rPr lang="fr-FR" sz="800" dirty="0"/>
-              <a:t> (CSE 373), University of Washington, Spring 2022</a:t>
-            </a:r>
-          </a:p>
-        </p:txBody>
-      </p:sp>
-    </p:spTree>
-  </p:cSld>
-  <p:clrMapOvr>
-    <a:masterClrMapping/>
-  </p:clrMapOvr>
-</p:sld>
-</file>
-
-<file path=ppt/slides/slide4.xml><?xml version="1.0" encoding="utf-8"?>
+<file path=ppt/slides/slide2.xml><?xml version="1.0" encoding="utf-8"?>
 <p:sld xmlns:a="http://schemas.openxmlformats.org/drawingml/2006/main" xmlns:r="http://schemas.openxmlformats.org/officeDocument/2006/relationships" xmlns:p="http://schemas.openxmlformats.org/presentationml/2006/main">
   <p:cSld>
     <p:spTree>
@@ -15429,7 +13202,7 @@
             <a:fld id="{97C55095-590B-4AAB-8606-0F86796D070A}" type="datetime1">
               <a:rPr lang="de-DE" smtClean="0"/>
               <a:pPr/>
-              <a:t>09.01.2026</a:t>
+              <a:t>30.01.2026</a:t>
             </a:fld>
             <a:endParaRPr lang="de-DE" dirty="0"/>
           </a:p>
@@ -15463,7 +13236,7 @@
             <a:fld id="{43310F81-32EE-4F95-9E9C-0BDC6AD52EEC}" type="slidenum">
               <a:rPr lang="de-DE" smtClean="0"/>
               <a:pPr/>
-              <a:t>4</a:t>
+              <a:t>2</a:t>
             </a:fld>
             <a:endParaRPr lang="de-DE"/>
           </a:p>
@@ -17897,1539 +15670,7 @@
 </p:sld>
 </file>
 
-<file path=ppt/slides/slide5.xml><?xml version="1.0" encoding="utf-8"?>
-<p:sld xmlns:a="http://schemas.openxmlformats.org/drawingml/2006/main" xmlns:r="http://schemas.openxmlformats.org/officeDocument/2006/relationships" xmlns:p="http://schemas.openxmlformats.org/presentationml/2006/main">
-  <p:cSld>
-    <p:spTree>
-      <p:nvGrpSpPr>
-        <p:cNvPr id="1" name="Shape 695"/>
-        <p:cNvGrpSpPr/>
-        <p:nvPr/>
-      </p:nvGrpSpPr>
-      <p:grpSpPr>
-        <a:xfrm>
-          <a:off x="0" y="0"/>
-          <a:ext cx="0" cy="0"/>
-          <a:chOff x="0" y="0"/>
-          <a:chExt cx="0" cy="0"/>
-        </a:xfrm>
-      </p:grpSpPr>
-      <p:sp>
-        <p:nvSpPr>
-          <p:cNvPr id="4" name="Titel 3">
-            <a:extLst>
-              <a:ext uri="{FF2B5EF4-FFF2-40B4-BE49-F238E27FC236}">
-                <a16:creationId xmlns:a16="http://schemas.microsoft.com/office/drawing/2014/main" id="{B30BCCD3-DABA-4DC4-A9E5-9094D1BE08FF}"/>
-              </a:ext>
-            </a:extLst>
-          </p:cNvPr>
-          <p:cNvSpPr>
-            <a:spLocks noGrp="1"/>
-          </p:cNvSpPr>
-          <p:nvPr>
-            <p:ph type="title"/>
-          </p:nvPr>
-        </p:nvSpPr>
-        <p:spPr/>
-        <p:txBody>
-          <a:bodyPr/>
-          <a:lstStyle/>
-          <a:p>
-            <a:r>
-              <a:rPr lang="de-DE" noProof="0" dirty="0"/>
-              <a:t>Code Modellierung</a:t>
-            </a:r>
-          </a:p>
-        </p:txBody>
-      </p:sp>
-      <p:sp>
-        <p:nvSpPr>
-          <p:cNvPr id="2" name="Inhaltsplatzhalter 1">
-            <a:extLst>
-              <a:ext uri="{FF2B5EF4-FFF2-40B4-BE49-F238E27FC236}">
-                <a16:creationId xmlns:a16="http://schemas.microsoft.com/office/drawing/2014/main" id="{162F0D7F-8D49-4349-8DF4-1229E57B9AA0}"/>
-              </a:ext>
-            </a:extLst>
-          </p:cNvPr>
-          <p:cNvSpPr>
-            <a:spLocks noGrp="1"/>
-          </p:cNvSpPr>
-          <p:nvPr>
-            <p:ph sz="quarter" idx="12"/>
-          </p:nvPr>
-        </p:nvSpPr>
-        <p:spPr/>
-        <p:txBody>
-          <a:bodyPr/>
-          <a:lstStyle/>
-          <a:p>
-            <a:endParaRPr lang="de-DE" noProof="0" dirty="0"/>
-          </a:p>
-          <a:p>
-            <a:endParaRPr lang="de-DE" noProof="0" dirty="0"/>
-          </a:p>
-          <a:p>
-            <a:endParaRPr lang="de-DE" noProof="0" dirty="0"/>
-          </a:p>
-          <a:p>
-            <a:endParaRPr lang="de-DE" noProof="0" dirty="0"/>
-          </a:p>
-          <a:p>
-            <a:endParaRPr lang="de-DE" noProof="0" dirty="0"/>
-          </a:p>
-          <a:p>
-            <a:endParaRPr lang="de-DE" noProof="0" dirty="0"/>
-          </a:p>
-          <a:p>
-            <a:endParaRPr lang="de-DE" noProof="0" dirty="0"/>
-          </a:p>
-          <a:p>
-            <a:r>
-              <a:rPr lang="de-DE" noProof="0" dirty="0"/>
-              <a:t>Code Modellierung - der Prozess der mathematischen Darstellung, wie viele Operationen ein Stück Code im Verhältnis zur Eingabegröße </a:t>
-            </a:r>
-            <a:r>
-              <a:rPr lang="de-DE" b="1" noProof="0" dirty="0"/>
-              <a:t>n</a:t>
-            </a:r>
-            <a:r>
-              <a:rPr lang="de-DE" noProof="0" dirty="0"/>
-              <a:t> ausführt.</a:t>
-            </a:r>
-          </a:p>
-          <a:p>
-            <a:pPr lvl="1"/>
-            <a:r>
-              <a:rPr lang="de-DE" noProof="0" dirty="0"/>
-              <a:t>Umwandlung von Code in eine Laufzeitfunktion, die seine Laufzeit darstellt</a:t>
-            </a:r>
-          </a:p>
-        </p:txBody>
-      </p:sp>
-      <p:sp>
-        <p:nvSpPr>
-          <p:cNvPr id="5" name="Textplatzhalter 4">
-            <a:extLst>
-              <a:ext uri="{FF2B5EF4-FFF2-40B4-BE49-F238E27FC236}">
-                <a16:creationId xmlns:a16="http://schemas.microsoft.com/office/drawing/2014/main" id="{26A9218C-2217-4A42-95E0-72897F6C7DAD}"/>
-              </a:ext>
-            </a:extLst>
-          </p:cNvPr>
-          <p:cNvSpPr>
-            <a:spLocks noGrp="1"/>
-          </p:cNvSpPr>
-          <p:nvPr>
-            <p:ph type="body" idx="13"/>
-          </p:nvPr>
-        </p:nvSpPr>
-        <p:spPr/>
-        <p:txBody>
-          <a:bodyPr/>
-          <a:lstStyle/>
-          <a:p>
-            <a:r>
-              <a:rPr lang="de-DE" noProof="0" dirty="0"/>
-              <a:t>Algorithmik – Laufzeitanalyse von Algorithmen durch Asymptotische Notation</a:t>
-            </a:r>
-          </a:p>
-        </p:txBody>
-      </p:sp>
-      <p:sp>
-        <p:nvSpPr>
-          <p:cNvPr id="27" name="Datumsplatzhalter 4">
-            <a:extLst>
-              <a:ext uri="{FF2B5EF4-FFF2-40B4-BE49-F238E27FC236}">
-                <a16:creationId xmlns:a16="http://schemas.microsoft.com/office/drawing/2014/main" id="{A1F25C3C-FE9F-4152-8782-7757E99D7A81}"/>
-              </a:ext>
-            </a:extLst>
-          </p:cNvPr>
-          <p:cNvSpPr>
-            <a:spLocks noGrp="1"/>
-          </p:cNvSpPr>
-          <p:nvPr>
-            <p:ph type="dt" sz="half" idx="14"/>
-          </p:nvPr>
-        </p:nvSpPr>
-        <p:spPr/>
-        <p:txBody>
-          <a:bodyPr/>
-          <a:lstStyle/>
-          <a:p>
-            <a:fld id="{97C55095-590B-4AAB-8606-0F86796D070A}" type="datetime1">
-              <a:rPr lang="de-DE" smtClean="0"/>
-              <a:pPr/>
-              <a:t>09.01.2026</a:t>
-            </a:fld>
-            <a:endParaRPr lang="de-DE" dirty="0"/>
-          </a:p>
-        </p:txBody>
-      </p:sp>
-      <p:sp>
-        <p:nvSpPr>
-          <p:cNvPr id="28" name="Foliennummernplatzhalter 5">
-            <a:extLst>
-              <a:ext uri="{FF2B5EF4-FFF2-40B4-BE49-F238E27FC236}">
-                <a16:creationId xmlns:a16="http://schemas.microsoft.com/office/drawing/2014/main" id="{0005C9F9-9BE4-492C-958A-5F4E6DC90EB0}"/>
-              </a:ext>
-            </a:extLst>
-          </p:cNvPr>
-          <p:cNvSpPr>
-            <a:spLocks noGrp="1"/>
-          </p:cNvSpPr>
-          <p:nvPr>
-            <p:ph type="sldNum" sz="quarter" idx="15"/>
-          </p:nvPr>
-        </p:nvSpPr>
-        <p:spPr/>
-        <p:txBody>
-          <a:bodyPr/>
-          <a:lstStyle/>
-          <a:p>
-            <a:r>
-              <a:rPr lang="de-DE"/>
-              <a:t>Seite </a:t>
-            </a:r>
-            <a:fld id="{43310F81-32EE-4F95-9E9C-0BDC6AD52EEC}" type="slidenum">
-              <a:rPr lang="de-DE" smtClean="0"/>
-              <a:pPr/>
-              <a:t>5</a:t>
-            </a:fld>
-            <a:endParaRPr lang="de-DE"/>
-          </a:p>
-        </p:txBody>
-      </p:sp>
-      <p:sp>
-        <p:nvSpPr>
-          <p:cNvPr id="700" name="Google Shape;700;p19"/>
-          <p:cNvSpPr/>
-          <p:nvPr/>
-        </p:nvSpPr>
-        <p:spPr>
-          <a:xfrm>
-            <a:off x="4533753" y="2127604"/>
-            <a:ext cx="365760" cy="365760"/>
-          </a:xfrm>
-          <a:prstGeom prst="rect">
-            <a:avLst/>
-          </a:prstGeom>
-          <a:solidFill>
-            <a:srgbClr val="9EC0D5"/>
-          </a:solidFill>
-          <a:ln>
-            <a:noFill/>
-          </a:ln>
-        </p:spPr>
-        <p:txBody>
-          <a:bodyPr spcFirstLastPara="1" wrap="square" lIns="91425" tIns="45700" rIns="91425" bIns="45700" anchor="ctr" anchorCtr="0">
-            <a:noAutofit/>
-          </a:bodyPr>
-          <a:lstStyle/>
-          <a:p>
-            <a:pPr marL="0" marR="0" lvl="0" indent="0" algn="ctr" rtl="0">
-              <a:spcBef>
-                <a:spcPts val="0"/>
-              </a:spcBef>
-              <a:spcAft>
-                <a:spcPts val="0"/>
-              </a:spcAft>
-              <a:buNone/>
-            </a:pPr>
-            <a:endParaRPr sz="1800">
-              <a:solidFill>
-                <a:schemeClr val="lt1"/>
-              </a:solidFill>
-              <a:latin typeface="Twentieth Century"/>
-              <a:ea typeface="Twentieth Century"/>
-              <a:cs typeface="Twentieth Century"/>
-              <a:sym typeface="Twentieth Century"/>
-            </a:endParaRPr>
-          </a:p>
-        </p:txBody>
-      </p:sp>
-      <p:sp>
-        <p:nvSpPr>
-          <p:cNvPr id="701" name="Google Shape;701;p19"/>
-          <p:cNvSpPr/>
-          <p:nvPr/>
-        </p:nvSpPr>
-        <p:spPr>
-          <a:xfrm>
-            <a:off x="4533753" y="2867630"/>
-            <a:ext cx="365760" cy="365760"/>
-          </a:xfrm>
-          <a:prstGeom prst="rect">
-            <a:avLst/>
-          </a:prstGeom>
-          <a:solidFill>
-            <a:srgbClr val="9EC0D5"/>
-          </a:solidFill>
-          <a:ln>
-            <a:noFill/>
-          </a:ln>
-        </p:spPr>
-        <p:txBody>
-          <a:bodyPr spcFirstLastPara="1" wrap="square" lIns="91425" tIns="45700" rIns="91425" bIns="45700" anchor="ctr" anchorCtr="0">
-            <a:noAutofit/>
-          </a:bodyPr>
-          <a:lstStyle/>
-          <a:p>
-            <a:pPr marL="0" marR="0" lvl="0" indent="0" algn="ctr" rtl="0">
-              <a:spcBef>
-                <a:spcPts val="0"/>
-              </a:spcBef>
-              <a:spcAft>
-                <a:spcPts val="0"/>
-              </a:spcAft>
-              <a:buNone/>
-            </a:pPr>
-            <a:endParaRPr sz="1800">
-              <a:solidFill>
-                <a:schemeClr val="lt1"/>
-              </a:solidFill>
-              <a:latin typeface="Twentieth Century"/>
-              <a:ea typeface="Twentieth Century"/>
-              <a:cs typeface="Twentieth Century"/>
-              <a:sym typeface="Twentieth Century"/>
-            </a:endParaRPr>
-          </a:p>
-        </p:txBody>
-      </p:sp>
-      <p:sp>
-        <p:nvSpPr>
-          <p:cNvPr id="702" name="Google Shape;702;p19"/>
-          <p:cNvSpPr/>
-          <p:nvPr/>
-        </p:nvSpPr>
-        <p:spPr>
-          <a:xfrm>
-            <a:off x="4899513" y="2127604"/>
-            <a:ext cx="2455665" cy="1105786"/>
-          </a:xfrm>
-          <a:prstGeom prst="rect">
-            <a:avLst/>
-          </a:prstGeom>
-          <a:solidFill>
-            <a:srgbClr val="9EC0D5"/>
-          </a:solidFill>
-          <a:ln>
-            <a:noFill/>
-          </a:ln>
-        </p:spPr>
-        <p:txBody>
-          <a:bodyPr spcFirstLastPara="1" wrap="square" lIns="91425" tIns="45700" rIns="91425" bIns="45700" anchor="ctr" anchorCtr="0">
-            <a:noAutofit/>
-          </a:bodyPr>
-          <a:lstStyle/>
-          <a:p>
-            <a:pPr marL="0" marR="0" lvl="0" indent="0" algn="ctr" rtl="0">
-              <a:spcBef>
-                <a:spcPts val="0"/>
-              </a:spcBef>
-              <a:spcAft>
-                <a:spcPts val="0"/>
-              </a:spcAft>
-              <a:buNone/>
-            </a:pPr>
-            <a:endParaRPr sz="1800">
-              <a:solidFill>
-                <a:schemeClr val="lt1"/>
-              </a:solidFill>
-              <a:latin typeface="Twentieth Century"/>
-              <a:ea typeface="Twentieth Century"/>
-              <a:cs typeface="Twentieth Century"/>
-              <a:sym typeface="Twentieth Century"/>
-            </a:endParaRPr>
-          </a:p>
-        </p:txBody>
-      </p:sp>
-      <p:sp>
-        <p:nvSpPr>
-          <p:cNvPr id="703" name="Google Shape;703;p19"/>
-          <p:cNvSpPr/>
-          <p:nvPr/>
-        </p:nvSpPr>
-        <p:spPr>
-          <a:xfrm>
-            <a:off x="9670644" y="2144869"/>
-            <a:ext cx="365760" cy="365760"/>
-          </a:xfrm>
-          <a:prstGeom prst="rect">
-            <a:avLst/>
-          </a:prstGeom>
-          <a:solidFill>
-            <a:srgbClr val="9EC0D5"/>
-          </a:solidFill>
-          <a:ln>
-            <a:noFill/>
-          </a:ln>
-        </p:spPr>
-        <p:txBody>
-          <a:bodyPr spcFirstLastPara="1" wrap="square" lIns="91425" tIns="45700" rIns="91425" bIns="45700" anchor="ctr" anchorCtr="0">
-            <a:noAutofit/>
-          </a:bodyPr>
-          <a:lstStyle/>
-          <a:p>
-            <a:pPr marL="0" marR="0" lvl="0" indent="0" algn="ctr" rtl="0">
-              <a:spcBef>
-                <a:spcPts val="0"/>
-              </a:spcBef>
-              <a:spcAft>
-                <a:spcPts val="0"/>
-              </a:spcAft>
-              <a:buNone/>
-            </a:pPr>
-            <a:endParaRPr sz="1800">
-              <a:solidFill>
-                <a:schemeClr val="lt1"/>
-              </a:solidFill>
-              <a:latin typeface="Twentieth Century"/>
-              <a:ea typeface="Twentieth Century"/>
-              <a:cs typeface="Twentieth Century"/>
-              <a:sym typeface="Twentieth Century"/>
-            </a:endParaRPr>
-          </a:p>
-        </p:txBody>
-      </p:sp>
-      <p:sp>
-        <p:nvSpPr>
-          <p:cNvPr id="704" name="Google Shape;704;p19"/>
-          <p:cNvSpPr/>
-          <p:nvPr/>
-        </p:nvSpPr>
-        <p:spPr>
-          <a:xfrm>
-            <a:off x="9670644" y="2884895"/>
-            <a:ext cx="365760" cy="365760"/>
-          </a:xfrm>
-          <a:prstGeom prst="rect">
-            <a:avLst/>
-          </a:prstGeom>
-          <a:solidFill>
-            <a:srgbClr val="9EC0D5"/>
-          </a:solidFill>
-          <a:ln>
-            <a:noFill/>
-          </a:ln>
-        </p:spPr>
-        <p:txBody>
-          <a:bodyPr spcFirstLastPara="1" wrap="square" lIns="91425" tIns="45700" rIns="91425" bIns="45700" anchor="ctr" anchorCtr="0">
-            <a:noAutofit/>
-          </a:bodyPr>
-          <a:lstStyle/>
-          <a:p>
-            <a:pPr marL="0" marR="0" lvl="0" indent="0" algn="ctr" rtl="0">
-              <a:spcBef>
-                <a:spcPts val="0"/>
-              </a:spcBef>
-              <a:spcAft>
-                <a:spcPts val="0"/>
-              </a:spcAft>
-              <a:buNone/>
-            </a:pPr>
-            <a:endParaRPr sz="1800">
-              <a:solidFill>
-                <a:schemeClr val="lt1"/>
-              </a:solidFill>
-              <a:latin typeface="Twentieth Century"/>
-              <a:ea typeface="Twentieth Century"/>
-              <a:cs typeface="Twentieth Century"/>
-              <a:sym typeface="Twentieth Century"/>
-            </a:endParaRPr>
-          </a:p>
-        </p:txBody>
-      </p:sp>
-      <p:sp>
-        <p:nvSpPr>
-          <p:cNvPr id="705" name="Google Shape;705;p19"/>
-          <p:cNvSpPr/>
-          <p:nvPr/>
-        </p:nvSpPr>
-        <p:spPr>
-          <a:xfrm flipH="1">
-            <a:off x="9322618" y="2516297"/>
-            <a:ext cx="1061359" cy="357006"/>
-          </a:xfrm>
-          <a:prstGeom prst="flowChartOnlineStorage">
-            <a:avLst/>
-          </a:prstGeom>
-          <a:solidFill>
-            <a:schemeClr val="accent6"/>
-          </a:solidFill>
-          <a:ln>
-            <a:noFill/>
-          </a:ln>
-        </p:spPr>
-        <p:txBody>
-          <a:bodyPr spcFirstLastPara="1" wrap="square" lIns="91425" tIns="45700" rIns="91425" bIns="45700" anchor="ctr" anchorCtr="0">
-            <a:noAutofit/>
-          </a:bodyPr>
-          <a:lstStyle/>
-          <a:p>
-            <a:pPr marL="0" marR="0" lvl="0" indent="0" algn="ctr" rtl="0">
-              <a:spcBef>
-                <a:spcPts val="0"/>
-              </a:spcBef>
-              <a:spcAft>
-                <a:spcPts val="0"/>
-              </a:spcAft>
-              <a:buNone/>
-            </a:pPr>
-            <a:endParaRPr sz="1800">
-              <a:solidFill>
-                <a:schemeClr val="lt1"/>
-              </a:solidFill>
-              <a:latin typeface="Twentieth Century"/>
-              <a:ea typeface="Twentieth Century"/>
-              <a:cs typeface="Twentieth Century"/>
-              <a:sym typeface="Twentieth Century"/>
-            </a:endParaRPr>
-          </a:p>
-        </p:txBody>
-      </p:sp>
-      <p:sp>
-        <p:nvSpPr>
-          <p:cNvPr id="706" name="Google Shape;706;p19"/>
-          <p:cNvSpPr/>
-          <p:nvPr/>
-        </p:nvSpPr>
-        <p:spPr>
-          <a:xfrm flipH="1">
-            <a:off x="6698564" y="2493364"/>
-            <a:ext cx="965902" cy="381164"/>
-          </a:xfrm>
-          <a:prstGeom prst="flowChartOnlineStorage">
-            <a:avLst/>
-          </a:prstGeom>
-          <a:solidFill>
-            <a:srgbClr val="9EC0D5"/>
-          </a:solidFill>
-          <a:ln>
-            <a:noFill/>
-          </a:ln>
-        </p:spPr>
-        <p:txBody>
-          <a:bodyPr spcFirstLastPara="1" wrap="square" lIns="91425" tIns="45700" rIns="91425" bIns="45700" anchor="ctr" anchorCtr="0">
-            <a:noAutofit/>
-          </a:bodyPr>
-          <a:lstStyle/>
-          <a:p>
-            <a:pPr marL="0" marR="0" lvl="0" indent="0" algn="ctr" rtl="0">
-              <a:spcBef>
-                <a:spcPts val="0"/>
-              </a:spcBef>
-              <a:spcAft>
-                <a:spcPts val="0"/>
-              </a:spcAft>
-              <a:buNone/>
-            </a:pPr>
-            <a:endParaRPr sz="1800">
-              <a:solidFill>
-                <a:schemeClr val="lt1"/>
-              </a:solidFill>
-              <a:latin typeface="Twentieth Century"/>
-              <a:ea typeface="Twentieth Century"/>
-              <a:cs typeface="Twentieth Century"/>
-              <a:sym typeface="Twentieth Century"/>
-            </a:endParaRPr>
-          </a:p>
-        </p:txBody>
-      </p:sp>
-      <p:sp>
-        <p:nvSpPr>
-          <p:cNvPr id="707" name="Google Shape;707;p19"/>
-          <p:cNvSpPr/>
-          <p:nvPr/>
-        </p:nvSpPr>
-        <p:spPr>
-          <a:xfrm flipH="1">
-            <a:off x="8177156" y="2508184"/>
-            <a:ext cx="1119941" cy="376711"/>
-          </a:xfrm>
-          <a:prstGeom prst="flowChartOnlineStorage">
-            <a:avLst/>
-          </a:prstGeom>
-          <a:solidFill>
-            <a:schemeClr val="accent6"/>
-          </a:solidFill>
-          <a:ln>
-            <a:noFill/>
-          </a:ln>
-        </p:spPr>
-        <p:txBody>
-          <a:bodyPr spcFirstLastPara="1" wrap="square" lIns="91425" tIns="45700" rIns="91425" bIns="45700" anchor="ctr" anchorCtr="0">
-            <a:noAutofit/>
-          </a:bodyPr>
-          <a:lstStyle/>
-          <a:p>
-            <a:pPr marL="0" marR="0" lvl="0" indent="0" algn="ctr" rtl="0">
-              <a:spcBef>
-                <a:spcPts val="0"/>
-              </a:spcBef>
-              <a:spcAft>
-                <a:spcPts val="0"/>
-              </a:spcAft>
-              <a:buNone/>
-            </a:pPr>
-            <a:endParaRPr sz="1800">
-              <a:solidFill>
-                <a:schemeClr val="lt1"/>
-              </a:solidFill>
-              <a:latin typeface="Twentieth Century"/>
-              <a:ea typeface="Twentieth Century"/>
-              <a:cs typeface="Twentieth Century"/>
-              <a:sym typeface="Twentieth Century"/>
-            </a:endParaRPr>
-          </a:p>
-        </p:txBody>
-      </p:sp>
-      <p:sp>
-        <p:nvSpPr>
-          <p:cNvPr id="708" name="Google Shape;708;p19"/>
-          <p:cNvSpPr/>
-          <p:nvPr/>
-        </p:nvSpPr>
-        <p:spPr>
-          <a:xfrm>
-            <a:off x="8047272" y="2143647"/>
-            <a:ext cx="365760" cy="365760"/>
-          </a:xfrm>
-          <a:prstGeom prst="rect">
-            <a:avLst/>
-          </a:prstGeom>
-          <a:solidFill>
-            <a:schemeClr val="accent6"/>
-          </a:solidFill>
-          <a:ln>
-            <a:noFill/>
-          </a:ln>
-        </p:spPr>
-        <p:txBody>
-          <a:bodyPr spcFirstLastPara="1" wrap="square" lIns="91425" tIns="45700" rIns="91425" bIns="45700" anchor="ctr" anchorCtr="0">
-            <a:noAutofit/>
-          </a:bodyPr>
-          <a:lstStyle/>
-          <a:p>
-            <a:pPr marL="0" marR="0" lvl="0" indent="0" algn="ctr" rtl="0">
-              <a:spcBef>
-                <a:spcPts val="0"/>
-              </a:spcBef>
-              <a:spcAft>
-                <a:spcPts val="0"/>
-              </a:spcAft>
-              <a:buNone/>
-            </a:pPr>
-            <a:endParaRPr sz="1800">
-              <a:solidFill>
-                <a:schemeClr val="lt1"/>
-              </a:solidFill>
-              <a:latin typeface="Twentieth Century"/>
-              <a:ea typeface="Twentieth Century"/>
-              <a:cs typeface="Twentieth Century"/>
-              <a:sym typeface="Twentieth Century"/>
-            </a:endParaRPr>
-          </a:p>
-        </p:txBody>
-      </p:sp>
-      <p:sp>
-        <p:nvSpPr>
-          <p:cNvPr id="709" name="Google Shape;709;p19"/>
-          <p:cNvSpPr/>
-          <p:nvPr/>
-        </p:nvSpPr>
-        <p:spPr>
-          <a:xfrm>
-            <a:off x="8047272" y="2884895"/>
-            <a:ext cx="365760" cy="365760"/>
-          </a:xfrm>
-          <a:prstGeom prst="rect">
-            <a:avLst/>
-          </a:prstGeom>
-          <a:solidFill>
-            <a:schemeClr val="accent6"/>
-          </a:solidFill>
-          <a:ln>
-            <a:noFill/>
-          </a:ln>
-        </p:spPr>
-        <p:txBody>
-          <a:bodyPr spcFirstLastPara="1" wrap="square" lIns="91425" tIns="45700" rIns="91425" bIns="45700" anchor="ctr" anchorCtr="0">
-            <a:noAutofit/>
-          </a:bodyPr>
-          <a:lstStyle/>
-          <a:p>
-            <a:pPr marL="0" marR="0" lvl="0" indent="0" algn="ctr" rtl="0">
-              <a:spcBef>
-                <a:spcPts val="0"/>
-              </a:spcBef>
-              <a:spcAft>
-                <a:spcPts val="0"/>
-              </a:spcAft>
-              <a:buNone/>
-            </a:pPr>
-            <a:endParaRPr sz="1800">
-              <a:solidFill>
-                <a:schemeClr val="lt1"/>
-              </a:solidFill>
-              <a:latin typeface="Twentieth Century"/>
-              <a:ea typeface="Twentieth Century"/>
-              <a:cs typeface="Twentieth Century"/>
-              <a:sym typeface="Twentieth Century"/>
-            </a:endParaRPr>
-          </a:p>
-        </p:txBody>
-      </p:sp>
-      <p:sp>
-        <p:nvSpPr>
-          <p:cNvPr id="710" name="Google Shape;710;p19"/>
-          <p:cNvSpPr/>
-          <p:nvPr/>
-        </p:nvSpPr>
-        <p:spPr>
-          <a:xfrm>
-            <a:off x="2734165" y="2144869"/>
-            <a:ext cx="1121652" cy="1105786"/>
-          </a:xfrm>
-          <a:prstGeom prst="rect">
-            <a:avLst/>
-          </a:prstGeom>
-          <a:solidFill>
-            <a:schemeClr val="accent2"/>
-          </a:solidFill>
-          <a:ln>
-            <a:noFill/>
-          </a:ln>
-        </p:spPr>
-        <p:txBody>
-          <a:bodyPr spcFirstLastPara="1" wrap="square" lIns="91425" tIns="45700" rIns="91425" bIns="45700" anchor="ctr" anchorCtr="0">
-            <a:noAutofit/>
-          </a:bodyPr>
-          <a:lstStyle/>
-          <a:p>
-            <a:pPr marL="0" marR="0" lvl="0" indent="0" algn="ctr" rtl="0">
-              <a:spcBef>
-                <a:spcPts val="0"/>
-              </a:spcBef>
-              <a:spcAft>
-                <a:spcPts val="0"/>
-              </a:spcAft>
-              <a:buNone/>
-            </a:pPr>
-            <a:r>
-              <a:rPr lang="en-US" sz="1800" b="1">
-                <a:solidFill>
-                  <a:schemeClr val="lt1"/>
-                </a:solidFill>
-                <a:latin typeface="Twentieth Century"/>
-                <a:ea typeface="Twentieth Century"/>
-                <a:cs typeface="Twentieth Century"/>
-                <a:sym typeface="Twentieth Century"/>
-              </a:rPr>
-              <a:t>CODE</a:t>
-            </a:r>
-            <a:endParaRPr/>
-          </a:p>
-        </p:txBody>
-      </p:sp>
-      <p:sp>
-        <p:nvSpPr>
-          <p:cNvPr id="711" name="Google Shape;711;p19"/>
-          <p:cNvSpPr/>
-          <p:nvPr/>
-        </p:nvSpPr>
-        <p:spPr>
-          <a:xfrm>
-            <a:off x="3802093" y="2494575"/>
-            <a:ext cx="418989" cy="396807"/>
-          </a:xfrm>
-          <a:prstGeom prst="rect">
-            <a:avLst/>
-          </a:prstGeom>
-          <a:solidFill>
-            <a:schemeClr val="accent2"/>
-          </a:solidFill>
-          <a:ln>
-            <a:noFill/>
-          </a:ln>
-        </p:spPr>
-        <p:txBody>
-          <a:bodyPr spcFirstLastPara="1" wrap="square" lIns="91425" tIns="45700" rIns="91425" bIns="45700" anchor="ctr" anchorCtr="0">
-            <a:noAutofit/>
-          </a:bodyPr>
-          <a:lstStyle/>
-          <a:p>
-            <a:pPr marL="0" marR="0" lvl="0" indent="0" algn="ctr" rtl="0">
-              <a:spcBef>
-                <a:spcPts val="0"/>
-              </a:spcBef>
-              <a:spcAft>
-                <a:spcPts val="0"/>
-              </a:spcAft>
-              <a:buNone/>
-            </a:pPr>
-            <a:endParaRPr sz="1800">
-              <a:solidFill>
-                <a:schemeClr val="lt1"/>
-              </a:solidFill>
-              <a:latin typeface="Twentieth Century"/>
-              <a:ea typeface="Twentieth Century"/>
-              <a:cs typeface="Twentieth Century"/>
-              <a:sym typeface="Twentieth Century"/>
-            </a:endParaRPr>
-          </a:p>
-        </p:txBody>
-      </p:sp>
-      <p:sp>
-        <p:nvSpPr>
-          <p:cNvPr id="712" name="Google Shape;712;p19"/>
-          <p:cNvSpPr/>
-          <p:nvPr/>
-        </p:nvSpPr>
-        <p:spPr>
-          <a:xfrm>
-            <a:off x="2367905" y="2144869"/>
-            <a:ext cx="365760" cy="365760"/>
-          </a:xfrm>
-          <a:prstGeom prst="rect">
-            <a:avLst/>
-          </a:prstGeom>
-          <a:solidFill>
-            <a:schemeClr val="accent2"/>
-          </a:solidFill>
-          <a:ln>
-            <a:noFill/>
-          </a:ln>
-        </p:spPr>
-        <p:txBody>
-          <a:bodyPr spcFirstLastPara="1" wrap="square" lIns="91425" tIns="45700" rIns="91425" bIns="45700" anchor="ctr" anchorCtr="0">
-            <a:noAutofit/>
-          </a:bodyPr>
-          <a:lstStyle/>
-          <a:p>
-            <a:pPr marL="0" marR="0" lvl="0" indent="0" algn="ctr" rtl="0">
-              <a:spcBef>
-                <a:spcPts val="0"/>
-              </a:spcBef>
-              <a:spcAft>
-                <a:spcPts val="0"/>
-              </a:spcAft>
-              <a:buNone/>
-            </a:pPr>
-            <a:endParaRPr sz="1800">
-              <a:solidFill>
-                <a:schemeClr val="lt1"/>
-              </a:solidFill>
-              <a:latin typeface="Twentieth Century"/>
-              <a:ea typeface="Twentieth Century"/>
-              <a:cs typeface="Twentieth Century"/>
-              <a:sym typeface="Twentieth Century"/>
-            </a:endParaRPr>
-          </a:p>
-        </p:txBody>
-      </p:sp>
-      <p:sp>
-        <p:nvSpPr>
-          <p:cNvPr id="713" name="Google Shape;713;p19"/>
-          <p:cNvSpPr/>
-          <p:nvPr/>
-        </p:nvSpPr>
-        <p:spPr>
-          <a:xfrm>
-            <a:off x="2367904" y="2884895"/>
-            <a:ext cx="365760" cy="365760"/>
-          </a:xfrm>
-          <a:prstGeom prst="rect">
-            <a:avLst/>
-          </a:prstGeom>
-          <a:solidFill>
-            <a:schemeClr val="accent2"/>
-          </a:solidFill>
-          <a:ln>
-            <a:noFill/>
-          </a:ln>
-        </p:spPr>
-        <p:txBody>
-          <a:bodyPr spcFirstLastPara="1" wrap="square" lIns="91425" tIns="45700" rIns="91425" bIns="45700" anchor="ctr" anchorCtr="0">
-            <a:noAutofit/>
-          </a:bodyPr>
-          <a:lstStyle/>
-          <a:p>
-            <a:pPr marL="0" marR="0" lvl="0" indent="0" algn="ctr" rtl="0">
-              <a:spcBef>
-                <a:spcPts val="0"/>
-              </a:spcBef>
-              <a:spcAft>
-                <a:spcPts val="0"/>
-              </a:spcAft>
-              <a:buNone/>
-            </a:pPr>
-            <a:endParaRPr sz="1800">
-              <a:solidFill>
-                <a:schemeClr val="lt1"/>
-              </a:solidFill>
-              <a:latin typeface="Twentieth Century"/>
-              <a:ea typeface="Twentieth Century"/>
-              <a:cs typeface="Twentieth Century"/>
-              <a:sym typeface="Twentieth Century"/>
-            </a:endParaRPr>
-          </a:p>
-        </p:txBody>
-      </p:sp>
-      <p:sp>
-        <p:nvSpPr>
-          <p:cNvPr id="714" name="Google Shape;714;p19"/>
-          <p:cNvSpPr/>
-          <p:nvPr/>
-        </p:nvSpPr>
-        <p:spPr>
-          <a:xfrm>
-            <a:off x="5122601" y="2269692"/>
-            <a:ext cx="2044962" cy="792969"/>
-          </a:xfrm>
-          <a:prstGeom prst="rightArrow">
-            <a:avLst>
-              <a:gd name="adj1" fmla="val 50000"/>
-              <a:gd name="adj2" fmla="val 50000"/>
-            </a:avLst>
-          </a:prstGeom>
-          <a:solidFill>
-            <a:srgbClr val="BAC7DA"/>
-          </a:solidFill>
-          <a:ln>
-            <a:noFill/>
-          </a:ln>
-        </p:spPr>
-        <p:txBody>
-          <a:bodyPr spcFirstLastPara="1" wrap="square" lIns="91425" tIns="45700" rIns="91425" bIns="45700" anchor="ctr" anchorCtr="0">
-            <a:noAutofit/>
-          </a:bodyPr>
-          <a:lstStyle/>
-          <a:p>
-            <a:pPr marL="0" marR="0" lvl="0" indent="0" algn="ctr" rtl="0">
-              <a:spcBef>
-                <a:spcPts val="0"/>
-              </a:spcBef>
-              <a:spcAft>
-                <a:spcPts val="0"/>
-              </a:spcAft>
-              <a:buNone/>
-            </a:pPr>
-            <a:endParaRPr sz="1800">
-              <a:solidFill>
-                <a:schemeClr val="lt1"/>
-              </a:solidFill>
-              <a:latin typeface="Twentieth Century"/>
-              <a:ea typeface="Twentieth Century"/>
-              <a:cs typeface="Twentieth Century"/>
-              <a:sym typeface="Twentieth Century"/>
-            </a:endParaRPr>
-          </a:p>
-        </p:txBody>
-      </p:sp>
-      <p:sp>
-        <p:nvSpPr>
-          <p:cNvPr id="715" name="Google Shape;715;p19"/>
-          <p:cNvSpPr txBox="1"/>
-          <p:nvPr/>
-        </p:nvSpPr>
-        <p:spPr>
-          <a:xfrm>
-            <a:off x="5103093" y="2477078"/>
-            <a:ext cx="2025339" cy="369291"/>
-          </a:xfrm>
-          <a:prstGeom prst="rect">
-            <a:avLst/>
-          </a:prstGeom>
-          <a:noFill/>
-          <a:ln>
-            <a:noFill/>
-          </a:ln>
-        </p:spPr>
-        <p:txBody>
-          <a:bodyPr spcFirstLastPara="1" wrap="square" lIns="91425" tIns="45700" rIns="91425" bIns="45700" anchor="t" anchorCtr="0">
-            <a:spAutoFit/>
-          </a:bodyPr>
-          <a:lstStyle/>
-          <a:p>
-            <a:pPr marL="0" marR="0" lvl="0" indent="0" algn="l" rtl="0">
-              <a:spcBef>
-                <a:spcPts val="0"/>
-              </a:spcBef>
-              <a:spcAft>
-                <a:spcPts val="0"/>
-              </a:spcAft>
-              <a:buNone/>
-            </a:pPr>
-            <a:r>
-              <a:rPr lang="en-US" sz="1800" b="1" dirty="0">
-                <a:solidFill>
-                  <a:schemeClr val="dk1"/>
-                </a:solidFill>
-                <a:latin typeface="Calibri"/>
-                <a:ea typeface="Calibri"/>
-                <a:cs typeface="Calibri"/>
-                <a:sym typeface="Calibri"/>
-              </a:rPr>
-              <a:t>Code </a:t>
-            </a:r>
-            <a:r>
-              <a:rPr lang="en-US" sz="1800" b="1" dirty="0" err="1">
-                <a:solidFill>
-                  <a:schemeClr val="dk1"/>
-                </a:solidFill>
-                <a:latin typeface="Calibri"/>
-                <a:ea typeface="Calibri"/>
-                <a:cs typeface="Calibri"/>
-                <a:sym typeface="Calibri"/>
-              </a:rPr>
-              <a:t>Modellierung</a:t>
-            </a:r>
-            <a:endParaRPr dirty="0"/>
-          </a:p>
-        </p:txBody>
-      </p:sp>
-      <p:sp>
-        <p:nvSpPr>
-          <p:cNvPr id="716" name="Google Shape;716;p19"/>
-          <p:cNvSpPr/>
-          <p:nvPr/>
-        </p:nvSpPr>
-        <p:spPr>
-          <a:xfrm flipH="1">
-            <a:off x="8910130" y="2505602"/>
-            <a:ext cx="1119941" cy="376711"/>
-          </a:xfrm>
-          <a:prstGeom prst="flowChartOnlineStorage">
-            <a:avLst/>
-          </a:prstGeom>
-          <a:solidFill>
-            <a:schemeClr val="accent3"/>
-          </a:solidFill>
-          <a:ln>
-            <a:noFill/>
-          </a:ln>
-        </p:spPr>
-        <p:txBody>
-          <a:bodyPr spcFirstLastPara="1" wrap="square" lIns="91425" tIns="45700" rIns="91425" bIns="45700" anchor="ctr" anchorCtr="0">
-            <a:noAutofit/>
-          </a:bodyPr>
-          <a:lstStyle/>
-          <a:p>
-            <a:pPr marL="0" marR="0" lvl="0" indent="0" algn="ctr" rtl="0">
-              <a:spcBef>
-                <a:spcPts val="0"/>
-              </a:spcBef>
-              <a:spcAft>
-                <a:spcPts val="0"/>
-              </a:spcAft>
-              <a:buNone/>
-            </a:pPr>
-            <a:endParaRPr sz="1800">
-              <a:solidFill>
-                <a:schemeClr val="lt1"/>
-              </a:solidFill>
-              <a:latin typeface="Twentieth Century"/>
-              <a:ea typeface="Twentieth Century"/>
-              <a:cs typeface="Twentieth Century"/>
-              <a:sym typeface="Twentieth Century"/>
-            </a:endParaRPr>
-          </a:p>
-        </p:txBody>
-      </p:sp>
-      <p:sp>
-        <p:nvSpPr>
-          <p:cNvPr id="717" name="Google Shape;717;p19"/>
-          <p:cNvSpPr/>
-          <p:nvPr/>
-        </p:nvSpPr>
-        <p:spPr>
-          <a:xfrm>
-            <a:off x="8409410" y="2144869"/>
-            <a:ext cx="1662037" cy="1105786"/>
-          </a:xfrm>
-          <a:prstGeom prst="rect">
-            <a:avLst/>
-          </a:prstGeom>
-          <a:solidFill>
-            <a:schemeClr val="accent6"/>
-          </a:solidFill>
-          <a:ln>
-            <a:noFill/>
-          </a:ln>
-        </p:spPr>
-        <p:txBody>
-          <a:bodyPr spcFirstLastPara="1" wrap="square" lIns="91425" tIns="45700" rIns="91425" bIns="45700" anchor="ctr" anchorCtr="0">
-            <a:noAutofit/>
-          </a:bodyPr>
-          <a:lstStyle/>
-          <a:p>
-            <a:pPr marL="0" marR="0" lvl="0" indent="0" algn="ctr" rtl="0">
-              <a:spcBef>
-                <a:spcPts val="0"/>
-              </a:spcBef>
-              <a:spcAft>
-                <a:spcPts val="0"/>
-              </a:spcAft>
-              <a:buNone/>
-            </a:pPr>
-            <a:r>
-              <a:rPr lang="de-DE" sz="1400" b="1" dirty="0">
-                <a:solidFill>
-                  <a:schemeClr val="lt1"/>
-                </a:solidFill>
-                <a:latin typeface="Twentieth Century"/>
-                <a:ea typeface="Twentieth Century"/>
-                <a:cs typeface="Twentieth Century"/>
-                <a:sym typeface="Twentieth Century"/>
-              </a:rPr>
-              <a:t>LAUFZEIT</a:t>
-            </a:r>
-            <a:endParaRPr lang="de-DE" b="1" dirty="0">
-              <a:solidFill>
-                <a:schemeClr val="lt1"/>
-              </a:solidFill>
-              <a:latin typeface="Twentieth Century"/>
-              <a:ea typeface="Twentieth Century"/>
-              <a:cs typeface="Twentieth Century"/>
-              <a:sym typeface="Twentieth Century"/>
-            </a:endParaRPr>
-          </a:p>
-          <a:p>
-            <a:pPr marL="0" marR="0" lvl="0" indent="0" algn="ctr" rtl="0">
-              <a:spcBef>
-                <a:spcPts val="0"/>
-              </a:spcBef>
-              <a:spcAft>
-                <a:spcPts val="0"/>
-              </a:spcAft>
-              <a:buNone/>
-            </a:pPr>
-            <a:r>
-              <a:rPr lang="de-DE" b="1" dirty="0">
-                <a:solidFill>
-                  <a:schemeClr val="lt1"/>
-                </a:solidFill>
-                <a:latin typeface="Twentieth Century"/>
-                <a:sym typeface="Twentieth Century"/>
-              </a:rPr>
-              <a:t>FUNKTION</a:t>
-            </a:r>
-            <a:endParaRPr dirty="0"/>
-          </a:p>
-        </p:txBody>
-      </p:sp>
-      <p:sp>
-        <p:nvSpPr>
-          <p:cNvPr id="718" name="Google Shape;718;p19"/>
-          <p:cNvSpPr/>
-          <p:nvPr/>
-        </p:nvSpPr>
-        <p:spPr>
-          <a:xfrm>
-            <a:off x="5577449" y="1560940"/>
-            <a:ext cx="762636" cy="762636"/>
-          </a:xfrm>
-          <a:prstGeom prst="ellipse">
-            <a:avLst/>
-          </a:prstGeom>
-          <a:solidFill>
-            <a:srgbClr val="4C3282"/>
-          </a:solidFill>
-          <a:ln>
-            <a:noFill/>
-          </a:ln>
-        </p:spPr>
-        <p:txBody>
-          <a:bodyPr spcFirstLastPara="1" wrap="square" lIns="91425" tIns="45700" rIns="91425" bIns="45700" anchor="ctr" anchorCtr="0">
-            <a:noAutofit/>
-          </a:bodyPr>
-          <a:lstStyle/>
-          <a:p>
-            <a:pPr marL="0" marR="0" lvl="0" indent="0" algn="ctr" rtl="0">
-              <a:spcBef>
-                <a:spcPts val="0"/>
-              </a:spcBef>
-              <a:spcAft>
-                <a:spcPts val="0"/>
-              </a:spcAft>
-              <a:buNone/>
-            </a:pPr>
-            <a:r>
-              <a:rPr lang="en-US" sz="2800" b="1">
-                <a:solidFill>
-                  <a:schemeClr val="lt1"/>
-                </a:solidFill>
-                <a:latin typeface="Montserrat"/>
-                <a:ea typeface="Montserrat"/>
-                <a:cs typeface="Montserrat"/>
-                <a:sym typeface="Montserrat"/>
-              </a:rPr>
-              <a:t>1</a:t>
-            </a:r>
-            <a:endParaRPr/>
-          </a:p>
-        </p:txBody>
-      </p:sp>
-      <p:sp>
-        <p:nvSpPr>
-          <p:cNvPr id="25" name="Google Shape;257;p13">
-            <a:extLst>
-              <a:ext uri="{FF2B5EF4-FFF2-40B4-BE49-F238E27FC236}">
-                <a16:creationId xmlns:a16="http://schemas.microsoft.com/office/drawing/2014/main" id="{11EA8824-AC42-4A57-85EE-9A4AAB7B65ED}"/>
-              </a:ext>
-            </a:extLst>
-          </p:cNvPr>
-          <p:cNvSpPr txBox="1">
-            <a:spLocks/>
-          </p:cNvSpPr>
-          <p:nvPr/>
-        </p:nvSpPr>
-        <p:spPr>
-          <a:xfrm>
-            <a:off x="7499928" y="6407294"/>
-            <a:ext cx="2193636" cy="219798"/>
-          </a:xfrm>
-          <a:prstGeom prst="rect">
-            <a:avLst/>
-          </a:prstGeom>
-          <a:noFill/>
-          <a:ln>
-            <a:noFill/>
-          </a:ln>
-        </p:spPr>
-        <p:txBody>
-          <a:bodyPr spcFirstLastPara="1" wrap="square" lIns="91425" tIns="45700" rIns="91425" bIns="45700" anchor="ctr" anchorCtr="0">
-            <a:noAutofit/>
-          </a:bodyPr>
-          <a:lstStyle>
-            <a:defPPr>
-              <a:defRPr lang="de-DE"/>
-            </a:defPPr>
-            <a:lvl1pPr algn="l" defTabSz="457200" rtl="0" fontAlgn="base">
-              <a:spcBef>
-                <a:spcPct val="0"/>
-              </a:spcBef>
-              <a:spcAft>
-                <a:spcPct val="0"/>
-              </a:spcAft>
-              <a:defRPr kern="1200">
-                <a:solidFill>
-                  <a:schemeClr val="tx1"/>
-                </a:solidFill>
-                <a:latin typeface="Arial" pitchFamily="34" charset="0"/>
-                <a:ea typeface="+mn-ea"/>
-                <a:cs typeface="Arial" pitchFamily="34" charset="0"/>
-              </a:defRPr>
-            </a:lvl1pPr>
-            <a:lvl2pPr marL="457200" algn="l" defTabSz="457200" rtl="0" fontAlgn="base">
-              <a:spcBef>
-                <a:spcPct val="0"/>
-              </a:spcBef>
-              <a:spcAft>
-                <a:spcPct val="0"/>
-              </a:spcAft>
-              <a:defRPr kern="1200">
-                <a:solidFill>
-                  <a:schemeClr val="tx1"/>
-                </a:solidFill>
-                <a:latin typeface="Arial" pitchFamily="34" charset="0"/>
-                <a:ea typeface="+mn-ea"/>
-                <a:cs typeface="Arial" pitchFamily="34" charset="0"/>
-              </a:defRPr>
-            </a:lvl2pPr>
-            <a:lvl3pPr marL="914400" algn="l" defTabSz="457200" rtl="0" fontAlgn="base">
-              <a:spcBef>
-                <a:spcPct val="0"/>
-              </a:spcBef>
-              <a:spcAft>
-                <a:spcPct val="0"/>
-              </a:spcAft>
-              <a:defRPr kern="1200">
-                <a:solidFill>
-                  <a:schemeClr val="tx1"/>
-                </a:solidFill>
-                <a:latin typeface="Arial" pitchFamily="34" charset="0"/>
-                <a:ea typeface="+mn-ea"/>
-                <a:cs typeface="Arial" pitchFamily="34" charset="0"/>
-              </a:defRPr>
-            </a:lvl3pPr>
-            <a:lvl4pPr marL="1371600" algn="l" defTabSz="457200" rtl="0" fontAlgn="base">
-              <a:spcBef>
-                <a:spcPct val="0"/>
-              </a:spcBef>
-              <a:spcAft>
-                <a:spcPct val="0"/>
-              </a:spcAft>
-              <a:defRPr kern="1200">
-                <a:solidFill>
-                  <a:schemeClr val="tx1"/>
-                </a:solidFill>
-                <a:latin typeface="Arial" pitchFamily="34" charset="0"/>
-                <a:ea typeface="+mn-ea"/>
-                <a:cs typeface="Arial" pitchFamily="34" charset="0"/>
-              </a:defRPr>
-            </a:lvl4pPr>
-            <a:lvl5pPr marL="1828800" algn="l" defTabSz="457200" rtl="0" fontAlgn="base">
-              <a:spcBef>
-                <a:spcPct val="0"/>
-              </a:spcBef>
-              <a:spcAft>
-                <a:spcPct val="0"/>
-              </a:spcAft>
-              <a:defRPr kern="1200">
-                <a:solidFill>
-                  <a:schemeClr val="tx1"/>
-                </a:solidFill>
-                <a:latin typeface="Arial" pitchFamily="34" charset="0"/>
-                <a:ea typeface="+mn-ea"/>
-                <a:cs typeface="Arial" pitchFamily="34" charset="0"/>
-              </a:defRPr>
-            </a:lvl5pPr>
-            <a:lvl6pPr marL="2286000" algn="l" defTabSz="914400" rtl="0" eaLnBrk="1" latinLnBrk="0" hangingPunct="1">
-              <a:defRPr kern="1200">
-                <a:solidFill>
-                  <a:schemeClr val="tx1"/>
-                </a:solidFill>
-                <a:latin typeface="Arial" pitchFamily="34" charset="0"/>
-                <a:ea typeface="+mn-ea"/>
-                <a:cs typeface="Arial" pitchFamily="34" charset="0"/>
-              </a:defRPr>
-            </a:lvl6pPr>
-            <a:lvl7pPr marL="2743200" algn="l" defTabSz="914400" rtl="0" eaLnBrk="1" latinLnBrk="0" hangingPunct="1">
-              <a:defRPr kern="1200">
-                <a:solidFill>
-                  <a:schemeClr val="tx1"/>
-                </a:solidFill>
-                <a:latin typeface="Arial" pitchFamily="34" charset="0"/>
-                <a:ea typeface="+mn-ea"/>
-                <a:cs typeface="Arial" pitchFamily="34" charset="0"/>
-              </a:defRPr>
-            </a:lvl7pPr>
-            <a:lvl8pPr marL="3200400" algn="l" defTabSz="914400" rtl="0" eaLnBrk="1" latinLnBrk="0" hangingPunct="1">
-              <a:defRPr kern="1200">
-                <a:solidFill>
-                  <a:schemeClr val="tx1"/>
-                </a:solidFill>
-                <a:latin typeface="Arial" pitchFamily="34" charset="0"/>
-                <a:ea typeface="+mn-ea"/>
-                <a:cs typeface="Arial" pitchFamily="34" charset="0"/>
-              </a:defRPr>
-            </a:lvl8pPr>
-            <a:lvl9pPr marL="3657600" algn="l" defTabSz="914400" rtl="0" eaLnBrk="1" latinLnBrk="0" hangingPunct="1">
-              <a:defRPr kern="1200">
-                <a:solidFill>
-                  <a:schemeClr val="tx1"/>
-                </a:solidFill>
-                <a:latin typeface="Arial" pitchFamily="34" charset="0"/>
-                <a:ea typeface="+mn-ea"/>
-                <a:cs typeface="Arial" pitchFamily="34" charset="0"/>
-              </a:defRPr>
-            </a:lvl9pPr>
-          </a:lstStyle>
-          <a:p>
-            <a:pPr algn="r">
-              <a:spcBef>
-                <a:spcPts val="0"/>
-              </a:spcBef>
-              <a:spcAft>
-                <a:spcPts val="0"/>
-              </a:spcAft>
-            </a:pPr>
-            <a:r>
-              <a:rPr lang="fr-FR" sz="800" dirty="0"/>
-              <a:t>CSE 373 20 AU – SCHAFER</a:t>
-            </a:r>
-          </a:p>
-        </p:txBody>
-      </p:sp>
-      <p:sp>
-        <p:nvSpPr>
-          <p:cNvPr id="26" name="Google Shape;257;p13">
-            <a:extLst>
-              <a:ext uri="{FF2B5EF4-FFF2-40B4-BE49-F238E27FC236}">
-                <a16:creationId xmlns:a16="http://schemas.microsoft.com/office/drawing/2014/main" id="{BB036449-F13B-4324-B1CF-97D0C6A4FD84}"/>
-              </a:ext>
-            </a:extLst>
-          </p:cNvPr>
-          <p:cNvSpPr txBox="1">
-            <a:spLocks/>
-          </p:cNvSpPr>
-          <p:nvPr/>
-        </p:nvSpPr>
-        <p:spPr>
-          <a:xfrm>
-            <a:off x="6881091" y="6150552"/>
-            <a:ext cx="2812473" cy="219798"/>
-          </a:xfrm>
-          <a:prstGeom prst="rect">
-            <a:avLst/>
-          </a:prstGeom>
-          <a:noFill/>
-          <a:ln>
-            <a:noFill/>
-          </a:ln>
-        </p:spPr>
-        <p:txBody>
-          <a:bodyPr spcFirstLastPara="1" wrap="square" lIns="91425" tIns="45700" rIns="91425" bIns="45700" anchor="ctr" anchorCtr="0">
-            <a:noAutofit/>
-          </a:bodyPr>
-          <a:lstStyle>
-            <a:defPPr>
-              <a:defRPr lang="de-DE"/>
-            </a:defPPr>
-            <a:lvl1pPr algn="l" defTabSz="457200" rtl="0" fontAlgn="base">
-              <a:spcBef>
-                <a:spcPct val="0"/>
-              </a:spcBef>
-              <a:spcAft>
-                <a:spcPct val="0"/>
-              </a:spcAft>
-              <a:defRPr kern="1200">
-                <a:solidFill>
-                  <a:schemeClr val="tx1"/>
-                </a:solidFill>
-                <a:latin typeface="Arial" pitchFamily="34" charset="0"/>
-                <a:ea typeface="+mn-ea"/>
-                <a:cs typeface="Arial" pitchFamily="34" charset="0"/>
-              </a:defRPr>
-            </a:lvl1pPr>
-            <a:lvl2pPr marL="457200" algn="l" defTabSz="457200" rtl="0" fontAlgn="base">
-              <a:spcBef>
-                <a:spcPct val="0"/>
-              </a:spcBef>
-              <a:spcAft>
-                <a:spcPct val="0"/>
-              </a:spcAft>
-              <a:defRPr kern="1200">
-                <a:solidFill>
-                  <a:schemeClr val="tx1"/>
-                </a:solidFill>
-                <a:latin typeface="Arial" pitchFamily="34" charset="0"/>
-                <a:ea typeface="+mn-ea"/>
-                <a:cs typeface="Arial" pitchFamily="34" charset="0"/>
-              </a:defRPr>
-            </a:lvl2pPr>
-            <a:lvl3pPr marL="914400" algn="l" defTabSz="457200" rtl="0" fontAlgn="base">
-              <a:spcBef>
-                <a:spcPct val="0"/>
-              </a:spcBef>
-              <a:spcAft>
-                <a:spcPct val="0"/>
-              </a:spcAft>
-              <a:defRPr kern="1200">
-                <a:solidFill>
-                  <a:schemeClr val="tx1"/>
-                </a:solidFill>
-                <a:latin typeface="Arial" pitchFamily="34" charset="0"/>
-                <a:ea typeface="+mn-ea"/>
-                <a:cs typeface="Arial" pitchFamily="34" charset="0"/>
-              </a:defRPr>
-            </a:lvl3pPr>
-            <a:lvl4pPr marL="1371600" algn="l" defTabSz="457200" rtl="0" fontAlgn="base">
-              <a:spcBef>
-                <a:spcPct val="0"/>
-              </a:spcBef>
-              <a:spcAft>
-                <a:spcPct val="0"/>
-              </a:spcAft>
-              <a:defRPr kern="1200">
-                <a:solidFill>
-                  <a:schemeClr val="tx1"/>
-                </a:solidFill>
-                <a:latin typeface="Arial" pitchFamily="34" charset="0"/>
-                <a:ea typeface="+mn-ea"/>
-                <a:cs typeface="Arial" pitchFamily="34" charset="0"/>
-              </a:defRPr>
-            </a:lvl4pPr>
-            <a:lvl5pPr marL="1828800" algn="l" defTabSz="457200" rtl="0" fontAlgn="base">
-              <a:spcBef>
-                <a:spcPct val="0"/>
-              </a:spcBef>
-              <a:spcAft>
-                <a:spcPct val="0"/>
-              </a:spcAft>
-              <a:defRPr kern="1200">
-                <a:solidFill>
-                  <a:schemeClr val="tx1"/>
-                </a:solidFill>
-                <a:latin typeface="Arial" pitchFamily="34" charset="0"/>
-                <a:ea typeface="+mn-ea"/>
-                <a:cs typeface="Arial" pitchFamily="34" charset="0"/>
-              </a:defRPr>
-            </a:lvl5pPr>
-            <a:lvl6pPr marL="2286000" algn="l" defTabSz="914400" rtl="0" eaLnBrk="1" latinLnBrk="0" hangingPunct="1">
-              <a:defRPr kern="1200">
-                <a:solidFill>
-                  <a:schemeClr val="tx1"/>
-                </a:solidFill>
-                <a:latin typeface="Arial" pitchFamily="34" charset="0"/>
-                <a:ea typeface="+mn-ea"/>
-                <a:cs typeface="Arial" pitchFamily="34" charset="0"/>
-              </a:defRPr>
-            </a:lvl6pPr>
-            <a:lvl7pPr marL="2743200" algn="l" defTabSz="914400" rtl="0" eaLnBrk="1" latinLnBrk="0" hangingPunct="1">
-              <a:defRPr kern="1200">
-                <a:solidFill>
-                  <a:schemeClr val="tx1"/>
-                </a:solidFill>
-                <a:latin typeface="Arial" pitchFamily="34" charset="0"/>
-                <a:ea typeface="+mn-ea"/>
-                <a:cs typeface="Arial" pitchFamily="34" charset="0"/>
-              </a:defRPr>
-            </a:lvl7pPr>
-            <a:lvl8pPr marL="3200400" algn="l" defTabSz="914400" rtl="0" eaLnBrk="1" latinLnBrk="0" hangingPunct="1">
-              <a:defRPr kern="1200">
-                <a:solidFill>
-                  <a:schemeClr val="tx1"/>
-                </a:solidFill>
-                <a:latin typeface="Arial" pitchFamily="34" charset="0"/>
-                <a:ea typeface="+mn-ea"/>
-                <a:cs typeface="Arial" pitchFamily="34" charset="0"/>
-              </a:defRPr>
-            </a:lvl8pPr>
-            <a:lvl9pPr marL="3657600" algn="l" defTabSz="914400" rtl="0" eaLnBrk="1" latinLnBrk="0" hangingPunct="1">
-              <a:defRPr kern="1200">
-                <a:solidFill>
-                  <a:schemeClr val="tx1"/>
-                </a:solidFill>
-                <a:latin typeface="Arial" pitchFamily="34" charset="0"/>
-                <a:ea typeface="+mn-ea"/>
-                <a:cs typeface="Arial" pitchFamily="34" charset="0"/>
-              </a:defRPr>
-            </a:lvl9pPr>
-          </a:lstStyle>
-          <a:p>
-            <a:pPr algn="r">
-              <a:spcBef>
-                <a:spcPts val="0"/>
-              </a:spcBef>
-              <a:spcAft>
-                <a:spcPts val="0"/>
-              </a:spcAft>
-            </a:pPr>
-            <a:r>
-              <a:rPr lang="fr-FR" sz="800" dirty="0"/>
-              <a:t>Quelle: Data Structures and </a:t>
-            </a:r>
-            <a:r>
-              <a:rPr lang="fr-FR" sz="800" dirty="0" err="1"/>
-              <a:t>Algorithms</a:t>
-            </a:r>
-            <a:r>
-              <a:rPr lang="fr-FR" sz="800" dirty="0"/>
-              <a:t> (CSE 373), University of Washington, Spring 2022</a:t>
-            </a:r>
-          </a:p>
-        </p:txBody>
-      </p:sp>
-    </p:spTree>
-  </p:cSld>
-  <p:clrMapOvr>
-    <a:masterClrMapping/>
-  </p:clrMapOvr>
-</p:sld>
-</file>
-
-<file path=ppt/slides/slide6.xml><?xml version="1.0" encoding="utf-8"?>
+<file path=ppt/slides/slide3.xml><?xml version="1.0" encoding="utf-8"?>
 <p:sld xmlns:a="http://schemas.openxmlformats.org/drawingml/2006/main" xmlns:r="http://schemas.openxmlformats.org/officeDocument/2006/relationships" xmlns:p="http://schemas.openxmlformats.org/presentationml/2006/main">
   <p:cSld>
     <p:spTree>
@@ -21777,7 +18018,7 @@
             <a:fld id="{97C55095-590B-4AAB-8606-0F86796D070A}" type="datetime1">
               <a:rPr lang="de-DE" smtClean="0"/>
               <a:pPr/>
-              <a:t>09.01.2026</a:t>
+              <a:t>30.01.2026</a:t>
             </a:fld>
             <a:endParaRPr lang="de-DE" dirty="0"/>
           </a:p>
@@ -21816,7 +18057,7 @@
             <a:fld id="{43310F81-32EE-4F95-9E9C-0BDC6AD52EEC}" type="slidenum">
               <a:rPr lang="de-DE" smtClean="0"/>
               <a:pPr/>
-              <a:t>6</a:t>
+              <a:t>3</a:t>
             </a:fld>
             <a:endParaRPr lang="de-DE"/>
           </a:p>
@@ -22679,7 +18920,7 @@
 </p:sld>
 </file>
 
-<file path=ppt/slides/slide7.xml><?xml version="1.0" encoding="utf-8"?>
+<file path=ppt/slides/slide4.xml><?xml version="1.0" encoding="utf-8"?>
 <p:sld xmlns:a="http://schemas.openxmlformats.org/drawingml/2006/main" xmlns:r="http://schemas.openxmlformats.org/officeDocument/2006/relationships" xmlns:p="http://schemas.openxmlformats.org/presentationml/2006/main">
   <p:cSld>
     <p:spTree>
@@ -24858,7 +21099,7 @@
             <a:fld id="{F2D06E3F-368B-43DC-96F3-4B8E65027050}" type="datetime1">
               <a:rPr lang="de-DE" smtClean="0"/>
               <a:pPr/>
-              <a:t>09.01.2026</a:t>
+              <a:t>30.01.2026</a:t>
             </a:fld>
             <a:endParaRPr lang="de-DE" dirty="0"/>
           </a:p>
@@ -24897,7 +21138,7 @@
             <a:fld id="{43310F81-32EE-4F95-9E9C-0BDC6AD52EEC}" type="slidenum">
               <a:rPr lang="de-DE" smtClean="0"/>
               <a:pPr/>
-              <a:t>7</a:t>
+              <a:t>4</a:t>
             </a:fld>
             <a:endParaRPr lang="de-DE" dirty="0"/>
           </a:p>
@@ -25278,4038 +21519,6 @@
                                         </p:tgtEl>
                                       </p:cBhvr>
                                     </p:animEffect>
-                                  </p:childTnLst>
-                                </p:cTn>
-                              </p:par>
-                            </p:childTnLst>
-                          </p:cTn>
-                        </p:par>
-                      </p:childTnLst>
-                    </p:cTn>
-                  </p:par>
-                </p:childTnLst>
-              </p:cTn>
-              <p:prevCondLst>
-                <p:cond evt="onPrev" delay="0">
-                  <p:tgtEl>
-                    <p:sldTgt/>
-                  </p:tgtEl>
-                </p:cond>
-              </p:prevCondLst>
-              <p:nextCondLst>
-                <p:cond evt="onNext" delay="0">
-                  <p:tgtEl>
-                    <p:sldTgt/>
-                  </p:tgtEl>
-                </p:cond>
-              </p:nextCondLst>
-            </p:seq>
-          </p:childTnLst>
-        </p:cTn>
-      </p:par>
-    </p:tnLst>
-  </p:timing>
-</p:sld>
-</file>
-
-<file path=ppt/slides/slide8.xml><?xml version="1.0" encoding="utf-8"?>
-<p:sld xmlns:a="http://schemas.openxmlformats.org/drawingml/2006/main" xmlns:r="http://schemas.openxmlformats.org/officeDocument/2006/relationships" xmlns:p="http://schemas.openxmlformats.org/presentationml/2006/main">
-  <p:cSld>
-    <p:spTree>
-      <p:nvGrpSpPr>
-        <p:cNvPr id="1" name="Shape 546"/>
-        <p:cNvGrpSpPr/>
-        <p:nvPr/>
-      </p:nvGrpSpPr>
-      <p:grpSpPr>
-        <a:xfrm>
-          <a:off x="0" y="0"/>
-          <a:ext cx="0" cy="0"/>
-          <a:chOff x="0" y="0"/>
-          <a:chExt cx="0" cy="0"/>
-        </a:xfrm>
-      </p:grpSpPr>
-      <p:sp>
-        <p:nvSpPr>
-          <p:cNvPr id="2" name="Inhaltsplatzhalter 1">
-            <a:extLst>
-              <a:ext uri="{FF2B5EF4-FFF2-40B4-BE49-F238E27FC236}">
-                <a16:creationId xmlns:a16="http://schemas.microsoft.com/office/drawing/2014/main" id="{6E01CDBB-62BB-4D4A-9EFC-1664E20EBDEA}"/>
-              </a:ext>
-            </a:extLst>
-          </p:cNvPr>
-          <p:cNvSpPr>
-            <a:spLocks noGrp="1"/>
-          </p:cNvSpPr>
-          <p:nvPr>
-            <p:ph sz="quarter" idx="12"/>
-          </p:nvPr>
-        </p:nvSpPr>
-        <p:spPr/>
-        <p:txBody>
-          <a:bodyPr/>
-          <a:lstStyle/>
-          <a:p>
-            <a:endParaRPr lang="de-DE"/>
-          </a:p>
-        </p:txBody>
-      </p:sp>
-      <p:sp>
-        <p:nvSpPr>
-          <p:cNvPr id="3" name="Textplatzhalter 2">
-            <a:extLst>
-              <a:ext uri="{FF2B5EF4-FFF2-40B4-BE49-F238E27FC236}">
-                <a16:creationId xmlns:a16="http://schemas.microsoft.com/office/drawing/2014/main" id="{B8DA8BDD-77A6-4BCD-A68E-EF3DD5D26B1D}"/>
-              </a:ext>
-            </a:extLst>
-          </p:cNvPr>
-          <p:cNvSpPr>
-            <a:spLocks noGrp="1"/>
-          </p:cNvSpPr>
-          <p:nvPr>
-            <p:ph type="body" idx="13"/>
-          </p:nvPr>
-        </p:nvSpPr>
-        <p:spPr/>
-        <p:txBody>
-          <a:bodyPr/>
-          <a:lstStyle/>
-          <a:p>
-            <a:r>
-              <a:rPr lang="de-DE" noProof="0" dirty="0"/>
-              <a:t>Algorithmik – Laufzeitanalyse von Algorithmen durch Asymptotische Notation</a:t>
-            </a:r>
-          </a:p>
-        </p:txBody>
-      </p:sp>
-      <p:sp>
-        <p:nvSpPr>
-          <p:cNvPr id="548" name="Google Shape;548;p26"/>
-          <p:cNvSpPr/>
-          <p:nvPr/>
-        </p:nvSpPr>
-        <p:spPr>
-          <a:xfrm>
-            <a:off x="1706108" y="2294546"/>
-            <a:ext cx="365760" cy="365760"/>
-          </a:xfrm>
-          <a:prstGeom prst="rect">
-            <a:avLst/>
-          </a:prstGeom>
-          <a:solidFill>
-            <a:srgbClr val="9EC0D5"/>
-          </a:solidFill>
-          <a:ln>
-            <a:noFill/>
-          </a:ln>
-        </p:spPr>
-        <p:txBody>
-          <a:bodyPr spcFirstLastPara="1" wrap="square" lIns="91425" tIns="45700" rIns="91425" bIns="45700" anchor="ctr" anchorCtr="0">
-            <a:noAutofit/>
-          </a:bodyPr>
-          <a:lstStyle/>
-          <a:p>
-            <a:pPr marL="0" marR="0" lvl="0" indent="0" algn="ctr" rtl="0">
-              <a:lnSpc>
-                <a:spcPct val="100000"/>
-              </a:lnSpc>
-              <a:spcBef>
-                <a:spcPts val="0"/>
-              </a:spcBef>
-              <a:spcAft>
-                <a:spcPts val="0"/>
-              </a:spcAft>
-              <a:buClr>
-                <a:srgbClr val="000000"/>
-              </a:buClr>
-              <a:buSzPts val="1800"/>
-              <a:buFont typeface="Arial"/>
-              <a:buNone/>
-            </a:pPr>
-            <a:endParaRPr sz="1800" b="0" i="0" u="none" strike="noStrike" cap="none">
-              <a:solidFill>
-                <a:schemeClr val="lt1"/>
-              </a:solidFill>
-              <a:latin typeface="Twentieth Century"/>
-              <a:ea typeface="Twentieth Century"/>
-              <a:cs typeface="Twentieth Century"/>
-              <a:sym typeface="Twentieth Century"/>
-            </a:endParaRPr>
-          </a:p>
-        </p:txBody>
-      </p:sp>
-      <p:sp>
-        <p:nvSpPr>
-          <p:cNvPr id="549" name="Google Shape;549;p26"/>
-          <p:cNvSpPr/>
-          <p:nvPr/>
-        </p:nvSpPr>
-        <p:spPr>
-          <a:xfrm>
-            <a:off x="1706108" y="3034572"/>
-            <a:ext cx="365760" cy="365760"/>
-          </a:xfrm>
-          <a:prstGeom prst="rect">
-            <a:avLst/>
-          </a:prstGeom>
-          <a:solidFill>
-            <a:srgbClr val="9EC0D5"/>
-          </a:solidFill>
-          <a:ln>
-            <a:noFill/>
-          </a:ln>
-        </p:spPr>
-        <p:txBody>
-          <a:bodyPr spcFirstLastPara="1" wrap="square" lIns="91425" tIns="45700" rIns="91425" bIns="45700" anchor="ctr" anchorCtr="0">
-            <a:noAutofit/>
-          </a:bodyPr>
-          <a:lstStyle/>
-          <a:p>
-            <a:pPr marL="0" marR="0" lvl="0" indent="0" algn="ctr" rtl="0">
-              <a:lnSpc>
-                <a:spcPct val="100000"/>
-              </a:lnSpc>
-              <a:spcBef>
-                <a:spcPts val="0"/>
-              </a:spcBef>
-              <a:spcAft>
-                <a:spcPts val="0"/>
-              </a:spcAft>
-              <a:buClr>
-                <a:srgbClr val="000000"/>
-              </a:buClr>
-              <a:buSzPts val="1800"/>
-              <a:buFont typeface="Arial"/>
-              <a:buNone/>
-            </a:pPr>
-            <a:endParaRPr sz="1800" b="0" i="0" u="none" strike="noStrike" cap="none">
-              <a:solidFill>
-                <a:schemeClr val="lt1"/>
-              </a:solidFill>
-              <a:latin typeface="Twentieth Century"/>
-              <a:ea typeface="Twentieth Century"/>
-              <a:cs typeface="Twentieth Century"/>
-              <a:sym typeface="Twentieth Century"/>
-            </a:endParaRPr>
-          </a:p>
-        </p:txBody>
-      </p:sp>
-      <p:sp>
-        <p:nvSpPr>
-          <p:cNvPr id="550" name="Google Shape;550;p26"/>
-          <p:cNvSpPr/>
-          <p:nvPr/>
-        </p:nvSpPr>
-        <p:spPr>
-          <a:xfrm>
-            <a:off x="2071868" y="2294546"/>
-            <a:ext cx="2455665" cy="1105786"/>
-          </a:xfrm>
-          <a:prstGeom prst="rect">
-            <a:avLst/>
-          </a:prstGeom>
-          <a:solidFill>
-            <a:srgbClr val="9EC0D5"/>
-          </a:solidFill>
-          <a:ln>
-            <a:noFill/>
-          </a:ln>
-        </p:spPr>
-        <p:txBody>
-          <a:bodyPr spcFirstLastPara="1" wrap="square" lIns="91425" tIns="45700" rIns="91425" bIns="45700" anchor="ctr" anchorCtr="0">
-            <a:noAutofit/>
-          </a:bodyPr>
-          <a:lstStyle/>
-          <a:p>
-            <a:pPr marL="0" marR="0" lvl="0" indent="0" algn="ctr" rtl="0">
-              <a:lnSpc>
-                <a:spcPct val="100000"/>
-              </a:lnSpc>
-              <a:spcBef>
-                <a:spcPts val="0"/>
-              </a:spcBef>
-              <a:spcAft>
-                <a:spcPts val="0"/>
-              </a:spcAft>
-              <a:buClr>
-                <a:srgbClr val="000000"/>
-              </a:buClr>
-              <a:buSzPts val="1800"/>
-              <a:buFont typeface="Arial"/>
-              <a:buNone/>
-            </a:pPr>
-            <a:endParaRPr sz="1800" b="0" i="0" u="none" strike="noStrike" cap="none">
-              <a:solidFill>
-                <a:schemeClr val="lt1"/>
-              </a:solidFill>
-              <a:latin typeface="Twentieth Century"/>
-              <a:ea typeface="Twentieth Century"/>
-              <a:cs typeface="Twentieth Century"/>
-              <a:sym typeface="Twentieth Century"/>
-            </a:endParaRPr>
-          </a:p>
-        </p:txBody>
-      </p:sp>
-      <p:sp>
-        <p:nvSpPr>
-          <p:cNvPr id="551" name="Google Shape;551;p26"/>
-          <p:cNvSpPr/>
-          <p:nvPr/>
-        </p:nvSpPr>
-        <p:spPr>
-          <a:xfrm>
-            <a:off x="6145936" y="2294546"/>
-            <a:ext cx="365760" cy="365760"/>
-          </a:xfrm>
-          <a:prstGeom prst="rect">
-            <a:avLst/>
-          </a:prstGeom>
-          <a:solidFill>
-            <a:srgbClr val="9EC0D5"/>
-          </a:solidFill>
-          <a:ln>
-            <a:noFill/>
-          </a:ln>
-        </p:spPr>
-        <p:txBody>
-          <a:bodyPr spcFirstLastPara="1" wrap="square" lIns="91425" tIns="45700" rIns="91425" bIns="45700" anchor="ctr" anchorCtr="0">
-            <a:noAutofit/>
-          </a:bodyPr>
-          <a:lstStyle/>
-          <a:p>
-            <a:pPr marL="0" marR="0" lvl="0" indent="0" algn="ctr" rtl="0">
-              <a:lnSpc>
-                <a:spcPct val="100000"/>
-              </a:lnSpc>
-              <a:spcBef>
-                <a:spcPts val="0"/>
-              </a:spcBef>
-              <a:spcAft>
-                <a:spcPts val="0"/>
-              </a:spcAft>
-              <a:buClr>
-                <a:srgbClr val="000000"/>
-              </a:buClr>
-              <a:buSzPts val="1800"/>
-              <a:buFont typeface="Arial"/>
-              <a:buNone/>
-            </a:pPr>
-            <a:endParaRPr sz="1800" b="0" i="0" u="none" strike="noStrike" cap="none">
-              <a:solidFill>
-                <a:schemeClr val="lt1"/>
-              </a:solidFill>
-              <a:latin typeface="Twentieth Century"/>
-              <a:ea typeface="Twentieth Century"/>
-              <a:cs typeface="Twentieth Century"/>
-              <a:sym typeface="Twentieth Century"/>
-            </a:endParaRPr>
-          </a:p>
-        </p:txBody>
-      </p:sp>
-      <p:sp>
-        <p:nvSpPr>
-          <p:cNvPr id="552" name="Google Shape;552;p26"/>
-          <p:cNvSpPr/>
-          <p:nvPr/>
-        </p:nvSpPr>
-        <p:spPr>
-          <a:xfrm>
-            <a:off x="6145936" y="3034572"/>
-            <a:ext cx="365760" cy="365760"/>
-          </a:xfrm>
-          <a:prstGeom prst="rect">
-            <a:avLst/>
-          </a:prstGeom>
-          <a:solidFill>
-            <a:srgbClr val="9EC0D5"/>
-          </a:solidFill>
-          <a:ln>
-            <a:noFill/>
-          </a:ln>
-        </p:spPr>
-        <p:txBody>
-          <a:bodyPr spcFirstLastPara="1" wrap="square" lIns="91425" tIns="45700" rIns="91425" bIns="45700" anchor="ctr" anchorCtr="0">
-            <a:noAutofit/>
-          </a:bodyPr>
-          <a:lstStyle/>
-          <a:p>
-            <a:pPr marL="0" marR="0" lvl="0" indent="0" algn="ctr" rtl="0">
-              <a:lnSpc>
-                <a:spcPct val="100000"/>
-              </a:lnSpc>
-              <a:spcBef>
-                <a:spcPts val="0"/>
-              </a:spcBef>
-              <a:spcAft>
-                <a:spcPts val="0"/>
-              </a:spcAft>
-              <a:buClr>
-                <a:srgbClr val="000000"/>
-              </a:buClr>
-              <a:buSzPts val="1800"/>
-              <a:buFont typeface="Arial"/>
-              <a:buNone/>
-            </a:pPr>
-            <a:endParaRPr sz="1800" b="0" i="0" u="none" strike="noStrike" cap="none">
-              <a:solidFill>
-                <a:schemeClr val="lt1"/>
-              </a:solidFill>
-              <a:latin typeface="Twentieth Century"/>
-              <a:ea typeface="Twentieth Century"/>
-              <a:cs typeface="Twentieth Century"/>
-              <a:sym typeface="Twentieth Century"/>
-            </a:endParaRPr>
-          </a:p>
-        </p:txBody>
-      </p:sp>
-      <p:sp>
-        <p:nvSpPr>
-          <p:cNvPr id="553" name="Google Shape;553;p26"/>
-          <p:cNvSpPr/>
-          <p:nvPr/>
-        </p:nvSpPr>
-        <p:spPr>
-          <a:xfrm flipH="1">
-            <a:off x="5797910" y="2665974"/>
-            <a:ext cx="1061359" cy="357006"/>
-          </a:xfrm>
-          <a:prstGeom prst="flowChartOnlineStorage">
-            <a:avLst/>
-          </a:prstGeom>
-          <a:solidFill>
-            <a:schemeClr val="accent6"/>
-          </a:solidFill>
-          <a:ln>
-            <a:noFill/>
-          </a:ln>
-        </p:spPr>
-        <p:txBody>
-          <a:bodyPr spcFirstLastPara="1" wrap="square" lIns="91425" tIns="45700" rIns="91425" bIns="45700" anchor="ctr" anchorCtr="0">
-            <a:noAutofit/>
-          </a:bodyPr>
-          <a:lstStyle/>
-          <a:p>
-            <a:pPr marL="0" marR="0" lvl="0" indent="0" algn="ctr" rtl="0">
-              <a:lnSpc>
-                <a:spcPct val="100000"/>
-              </a:lnSpc>
-              <a:spcBef>
-                <a:spcPts val="0"/>
-              </a:spcBef>
-              <a:spcAft>
-                <a:spcPts val="0"/>
-              </a:spcAft>
-              <a:buClr>
-                <a:srgbClr val="000000"/>
-              </a:buClr>
-              <a:buSzPts val="1800"/>
-              <a:buFont typeface="Arial"/>
-              <a:buNone/>
-            </a:pPr>
-            <a:endParaRPr sz="1800" b="0" i="0" u="none" strike="noStrike" cap="none">
-              <a:solidFill>
-                <a:schemeClr val="lt1"/>
-              </a:solidFill>
-              <a:latin typeface="Twentieth Century"/>
-              <a:ea typeface="Twentieth Century"/>
-              <a:cs typeface="Twentieth Century"/>
-              <a:sym typeface="Twentieth Century"/>
-            </a:endParaRPr>
-          </a:p>
-        </p:txBody>
-      </p:sp>
-      <p:sp>
-        <p:nvSpPr>
-          <p:cNvPr id="554" name="Google Shape;554;p26"/>
-          <p:cNvSpPr/>
-          <p:nvPr/>
-        </p:nvSpPr>
-        <p:spPr>
-          <a:xfrm flipH="1">
-            <a:off x="3870919" y="2660306"/>
-            <a:ext cx="965902" cy="381164"/>
-          </a:xfrm>
-          <a:prstGeom prst="flowChartOnlineStorage">
-            <a:avLst/>
-          </a:prstGeom>
-          <a:solidFill>
-            <a:srgbClr val="9EC0D5"/>
-          </a:solidFill>
-          <a:ln>
-            <a:noFill/>
-          </a:ln>
-        </p:spPr>
-        <p:txBody>
-          <a:bodyPr spcFirstLastPara="1" wrap="square" lIns="91425" tIns="45700" rIns="91425" bIns="45700" anchor="ctr" anchorCtr="0">
-            <a:noAutofit/>
-          </a:bodyPr>
-          <a:lstStyle/>
-          <a:p>
-            <a:pPr marL="0" marR="0" lvl="0" indent="0" algn="ctr" rtl="0">
-              <a:lnSpc>
-                <a:spcPct val="100000"/>
-              </a:lnSpc>
-              <a:spcBef>
-                <a:spcPts val="0"/>
-              </a:spcBef>
-              <a:spcAft>
-                <a:spcPts val="0"/>
-              </a:spcAft>
-              <a:buClr>
-                <a:srgbClr val="000000"/>
-              </a:buClr>
-              <a:buSzPts val="1800"/>
-              <a:buFont typeface="Arial"/>
-              <a:buNone/>
-            </a:pPr>
-            <a:endParaRPr sz="1800" b="0" i="0" u="none" strike="noStrike" cap="none">
-              <a:solidFill>
-                <a:schemeClr val="lt1"/>
-              </a:solidFill>
-              <a:latin typeface="Twentieth Century"/>
-              <a:ea typeface="Twentieth Century"/>
-              <a:cs typeface="Twentieth Century"/>
-              <a:sym typeface="Twentieth Century"/>
-            </a:endParaRPr>
-          </a:p>
-        </p:txBody>
-      </p:sp>
-      <p:sp>
-        <p:nvSpPr>
-          <p:cNvPr id="555" name="Google Shape;555;p26"/>
-          <p:cNvSpPr/>
-          <p:nvPr/>
-        </p:nvSpPr>
-        <p:spPr>
-          <a:xfrm flipH="1">
-            <a:off x="4652448" y="2657861"/>
-            <a:ext cx="1119941" cy="376711"/>
-          </a:xfrm>
-          <a:prstGeom prst="flowChartOnlineStorage">
-            <a:avLst/>
-          </a:prstGeom>
-          <a:solidFill>
-            <a:schemeClr val="accent6"/>
-          </a:solidFill>
-          <a:ln>
-            <a:noFill/>
-          </a:ln>
-        </p:spPr>
-        <p:txBody>
-          <a:bodyPr spcFirstLastPara="1" wrap="square" lIns="91425" tIns="45700" rIns="91425" bIns="45700" anchor="ctr" anchorCtr="0">
-            <a:noAutofit/>
-          </a:bodyPr>
-          <a:lstStyle/>
-          <a:p>
-            <a:pPr marL="0" marR="0" lvl="0" indent="0" algn="ctr" rtl="0">
-              <a:lnSpc>
-                <a:spcPct val="100000"/>
-              </a:lnSpc>
-              <a:spcBef>
-                <a:spcPts val="0"/>
-              </a:spcBef>
-              <a:spcAft>
-                <a:spcPts val="0"/>
-              </a:spcAft>
-              <a:buClr>
-                <a:srgbClr val="000000"/>
-              </a:buClr>
-              <a:buSzPts val="1800"/>
-              <a:buFont typeface="Arial"/>
-              <a:buNone/>
-            </a:pPr>
-            <a:endParaRPr sz="1800" b="0" i="0" u="none" strike="noStrike" cap="none">
-              <a:solidFill>
-                <a:schemeClr val="lt1"/>
-              </a:solidFill>
-              <a:latin typeface="Twentieth Century"/>
-              <a:ea typeface="Twentieth Century"/>
-              <a:cs typeface="Twentieth Century"/>
-              <a:sym typeface="Twentieth Century"/>
-            </a:endParaRPr>
-          </a:p>
-        </p:txBody>
-      </p:sp>
-      <p:sp>
-        <p:nvSpPr>
-          <p:cNvPr id="556" name="Google Shape;556;p26"/>
-          <p:cNvSpPr/>
-          <p:nvPr/>
-        </p:nvSpPr>
-        <p:spPr>
-          <a:xfrm>
-            <a:off x="4522564" y="2293324"/>
-            <a:ext cx="365760" cy="365760"/>
-          </a:xfrm>
-          <a:prstGeom prst="rect">
-            <a:avLst/>
-          </a:prstGeom>
-          <a:solidFill>
-            <a:schemeClr val="accent6"/>
-          </a:solidFill>
-          <a:ln>
-            <a:noFill/>
-          </a:ln>
-        </p:spPr>
-        <p:txBody>
-          <a:bodyPr spcFirstLastPara="1" wrap="square" lIns="91425" tIns="45700" rIns="91425" bIns="45700" anchor="ctr" anchorCtr="0">
-            <a:noAutofit/>
-          </a:bodyPr>
-          <a:lstStyle/>
-          <a:p>
-            <a:pPr marL="0" marR="0" lvl="0" indent="0" algn="ctr" rtl="0">
-              <a:lnSpc>
-                <a:spcPct val="100000"/>
-              </a:lnSpc>
-              <a:spcBef>
-                <a:spcPts val="0"/>
-              </a:spcBef>
-              <a:spcAft>
-                <a:spcPts val="0"/>
-              </a:spcAft>
-              <a:buClr>
-                <a:srgbClr val="000000"/>
-              </a:buClr>
-              <a:buSzPts val="1800"/>
-              <a:buFont typeface="Arial"/>
-              <a:buNone/>
-            </a:pPr>
-            <a:endParaRPr sz="1800" b="0" i="0" u="none" strike="noStrike" cap="none">
-              <a:solidFill>
-                <a:schemeClr val="lt1"/>
-              </a:solidFill>
-              <a:latin typeface="Twentieth Century"/>
-              <a:ea typeface="Twentieth Century"/>
-              <a:cs typeface="Twentieth Century"/>
-              <a:sym typeface="Twentieth Century"/>
-            </a:endParaRPr>
-          </a:p>
-        </p:txBody>
-      </p:sp>
-      <p:sp>
-        <p:nvSpPr>
-          <p:cNvPr id="557" name="Google Shape;557;p26"/>
-          <p:cNvSpPr/>
-          <p:nvPr/>
-        </p:nvSpPr>
-        <p:spPr>
-          <a:xfrm>
-            <a:off x="4522564" y="3034572"/>
-            <a:ext cx="365760" cy="365760"/>
-          </a:xfrm>
-          <a:prstGeom prst="rect">
-            <a:avLst/>
-          </a:prstGeom>
-          <a:solidFill>
-            <a:schemeClr val="accent6"/>
-          </a:solidFill>
-          <a:ln>
-            <a:noFill/>
-          </a:ln>
-        </p:spPr>
-        <p:txBody>
-          <a:bodyPr spcFirstLastPara="1" wrap="square" lIns="91425" tIns="45700" rIns="91425" bIns="45700" anchor="ctr" anchorCtr="0">
-            <a:noAutofit/>
-          </a:bodyPr>
-          <a:lstStyle/>
-          <a:p>
-            <a:pPr marL="0" marR="0" lvl="0" indent="0" algn="ctr" rtl="0">
-              <a:lnSpc>
-                <a:spcPct val="100000"/>
-              </a:lnSpc>
-              <a:spcBef>
-                <a:spcPts val="0"/>
-              </a:spcBef>
-              <a:spcAft>
-                <a:spcPts val="0"/>
-              </a:spcAft>
-              <a:buClr>
-                <a:srgbClr val="000000"/>
-              </a:buClr>
-              <a:buSzPts val="1800"/>
-              <a:buFont typeface="Arial"/>
-              <a:buNone/>
-            </a:pPr>
-            <a:endParaRPr sz="1800" b="0" i="0" u="none" strike="noStrike" cap="none">
-              <a:solidFill>
-                <a:schemeClr val="lt1"/>
-              </a:solidFill>
-              <a:latin typeface="Twentieth Century"/>
-              <a:ea typeface="Twentieth Century"/>
-              <a:cs typeface="Twentieth Century"/>
-              <a:sym typeface="Twentieth Century"/>
-            </a:endParaRPr>
-          </a:p>
-        </p:txBody>
-      </p:sp>
-      <p:sp>
-        <p:nvSpPr>
-          <p:cNvPr id="558" name="Google Shape;558;p26"/>
-          <p:cNvSpPr/>
-          <p:nvPr/>
-        </p:nvSpPr>
-        <p:spPr>
-          <a:xfrm>
-            <a:off x="589008" y="2294546"/>
-            <a:ext cx="1121652" cy="1105786"/>
-          </a:xfrm>
-          <a:prstGeom prst="rect">
-            <a:avLst/>
-          </a:prstGeom>
-          <a:solidFill>
-            <a:schemeClr val="accent2"/>
-          </a:solidFill>
-          <a:ln>
-            <a:noFill/>
-          </a:ln>
-        </p:spPr>
-        <p:txBody>
-          <a:bodyPr spcFirstLastPara="1" wrap="square" lIns="91425" tIns="45700" rIns="91425" bIns="45700" anchor="ctr" anchorCtr="0">
-            <a:noAutofit/>
-          </a:bodyPr>
-          <a:lstStyle/>
-          <a:p>
-            <a:pPr marL="0" marR="0" lvl="0" indent="0" algn="ctr" rtl="0">
-              <a:lnSpc>
-                <a:spcPct val="100000"/>
-              </a:lnSpc>
-              <a:spcBef>
-                <a:spcPts val="0"/>
-              </a:spcBef>
-              <a:spcAft>
-                <a:spcPts val="0"/>
-              </a:spcAft>
-              <a:buClr>
-                <a:srgbClr val="000000"/>
-              </a:buClr>
-              <a:buSzPts val="1800"/>
-              <a:buFont typeface="Arial"/>
-              <a:buNone/>
-            </a:pPr>
-            <a:r>
-              <a:rPr lang="en-US" sz="1800" b="1" i="0" u="none" strike="noStrike" cap="none">
-                <a:solidFill>
-                  <a:schemeClr val="lt1"/>
-                </a:solidFill>
-                <a:latin typeface="Twentieth Century"/>
-                <a:ea typeface="Twentieth Century"/>
-                <a:cs typeface="Twentieth Century"/>
-                <a:sym typeface="Twentieth Century"/>
-              </a:rPr>
-              <a:t>CODE</a:t>
-            </a:r>
-            <a:endParaRPr sz="1400" b="0" i="0" u="none" strike="noStrike" cap="none">
-              <a:solidFill>
-                <a:srgbClr val="000000"/>
-              </a:solidFill>
-              <a:latin typeface="Arial"/>
-              <a:ea typeface="Arial"/>
-              <a:cs typeface="Arial"/>
-              <a:sym typeface="Arial"/>
-            </a:endParaRPr>
-          </a:p>
-        </p:txBody>
-      </p:sp>
-      <p:sp>
-        <p:nvSpPr>
-          <p:cNvPr id="559" name="Google Shape;559;p26"/>
-          <p:cNvSpPr/>
-          <p:nvPr/>
-        </p:nvSpPr>
-        <p:spPr>
-          <a:xfrm>
-            <a:off x="1656936" y="2644252"/>
-            <a:ext cx="418989" cy="396807"/>
-          </a:xfrm>
-          <a:prstGeom prst="rect">
-            <a:avLst/>
-          </a:prstGeom>
-          <a:solidFill>
-            <a:schemeClr val="accent2"/>
-          </a:solidFill>
-          <a:ln>
-            <a:noFill/>
-          </a:ln>
-        </p:spPr>
-        <p:txBody>
-          <a:bodyPr spcFirstLastPara="1" wrap="square" lIns="91425" tIns="45700" rIns="91425" bIns="45700" anchor="ctr" anchorCtr="0">
-            <a:noAutofit/>
-          </a:bodyPr>
-          <a:lstStyle/>
-          <a:p>
-            <a:pPr marL="0" marR="0" lvl="0" indent="0" algn="ctr" rtl="0">
-              <a:lnSpc>
-                <a:spcPct val="100000"/>
-              </a:lnSpc>
-              <a:spcBef>
-                <a:spcPts val="0"/>
-              </a:spcBef>
-              <a:spcAft>
-                <a:spcPts val="0"/>
-              </a:spcAft>
-              <a:buClr>
-                <a:srgbClr val="000000"/>
-              </a:buClr>
-              <a:buSzPts val="1800"/>
-              <a:buFont typeface="Arial"/>
-              <a:buNone/>
-            </a:pPr>
-            <a:endParaRPr sz="1800" b="0" i="0" u="none" strike="noStrike" cap="none">
-              <a:solidFill>
-                <a:schemeClr val="lt1"/>
-              </a:solidFill>
-              <a:latin typeface="Twentieth Century"/>
-              <a:ea typeface="Twentieth Century"/>
-              <a:cs typeface="Twentieth Century"/>
-              <a:sym typeface="Twentieth Century"/>
-            </a:endParaRPr>
-          </a:p>
-        </p:txBody>
-      </p:sp>
-      <p:sp>
-        <p:nvSpPr>
-          <p:cNvPr id="560" name="Google Shape;560;p26"/>
-          <p:cNvSpPr/>
-          <p:nvPr/>
-        </p:nvSpPr>
-        <p:spPr>
-          <a:xfrm>
-            <a:off x="222748" y="2294546"/>
-            <a:ext cx="365760" cy="365760"/>
-          </a:xfrm>
-          <a:prstGeom prst="rect">
-            <a:avLst/>
-          </a:prstGeom>
-          <a:solidFill>
-            <a:schemeClr val="accent2"/>
-          </a:solidFill>
-          <a:ln>
-            <a:noFill/>
-          </a:ln>
-        </p:spPr>
-        <p:txBody>
-          <a:bodyPr spcFirstLastPara="1" wrap="square" lIns="91425" tIns="45700" rIns="91425" bIns="45700" anchor="ctr" anchorCtr="0">
-            <a:noAutofit/>
-          </a:bodyPr>
-          <a:lstStyle/>
-          <a:p>
-            <a:pPr marL="0" marR="0" lvl="0" indent="0" algn="ctr" rtl="0">
-              <a:lnSpc>
-                <a:spcPct val="100000"/>
-              </a:lnSpc>
-              <a:spcBef>
-                <a:spcPts val="0"/>
-              </a:spcBef>
-              <a:spcAft>
-                <a:spcPts val="0"/>
-              </a:spcAft>
-              <a:buClr>
-                <a:srgbClr val="000000"/>
-              </a:buClr>
-              <a:buSzPts val="1800"/>
-              <a:buFont typeface="Arial"/>
-              <a:buNone/>
-            </a:pPr>
-            <a:endParaRPr sz="1800" b="0" i="0" u="none" strike="noStrike" cap="none">
-              <a:solidFill>
-                <a:schemeClr val="lt1"/>
-              </a:solidFill>
-              <a:latin typeface="Twentieth Century"/>
-              <a:ea typeface="Twentieth Century"/>
-              <a:cs typeface="Twentieth Century"/>
-              <a:sym typeface="Twentieth Century"/>
-            </a:endParaRPr>
-          </a:p>
-        </p:txBody>
-      </p:sp>
-      <p:sp>
-        <p:nvSpPr>
-          <p:cNvPr id="561" name="Google Shape;561;p26"/>
-          <p:cNvSpPr/>
-          <p:nvPr/>
-        </p:nvSpPr>
-        <p:spPr>
-          <a:xfrm>
-            <a:off x="222747" y="3034572"/>
-            <a:ext cx="365760" cy="365760"/>
-          </a:xfrm>
-          <a:prstGeom prst="rect">
-            <a:avLst/>
-          </a:prstGeom>
-          <a:solidFill>
-            <a:schemeClr val="accent2"/>
-          </a:solidFill>
-          <a:ln>
-            <a:noFill/>
-          </a:ln>
-        </p:spPr>
-        <p:txBody>
-          <a:bodyPr spcFirstLastPara="1" wrap="square" lIns="91425" tIns="45700" rIns="91425" bIns="45700" anchor="ctr" anchorCtr="0">
-            <a:noAutofit/>
-          </a:bodyPr>
-          <a:lstStyle/>
-          <a:p>
-            <a:pPr marL="0" marR="0" lvl="0" indent="0" algn="ctr" rtl="0">
-              <a:lnSpc>
-                <a:spcPct val="100000"/>
-              </a:lnSpc>
-              <a:spcBef>
-                <a:spcPts val="0"/>
-              </a:spcBef>
-              <a:spcAft>
-                <a:spcPts val="0"/>
-              </a:spcAft>
-              <a:buClr>
-                <a:srgbClr val="000000"/>
-              </a:buClr>
-              <a:buSzPts val="1800"/>
-              <a:buFont typeface="Arial"/>
-              <a:buNone/>
-            </a:pPr>
-            <a:endParaRPr sz="1800" b="0" i="0" u="none" strike="noStrike" cap="none">
-              <a:solidFill>
-                <a:schemeClr val="lt1"/>
-              </a:solidFill>
-              <a:latin typeface="Twentieth Century"/>
-              <a:ea typeface="Twentieth Century"/>
-              <a:cs typeface="Twentieth Century"/>
-              <a:sym typeface="Twentieth Century"/>
-            </a:endParaRPr>
-          </a:p>
-        </p:txBody>
-      </p:sp>
-      <p:sp>
-        <p:nvSpPr>
-          <p:cNvPr id="562" name="Google Shape;562;p26"/>
-          <p:cNvSpPr/>
-          <p:nvPr/>
-        </p:nvSpPr>
-        <p:spPr>
-          <a:xfrm>
-            <a:off x="2294956" y="2436634"/>
-            <a:ext cx="2044962" cy="792969"/>
-          </a:xfrm>
-          <a:prstGeom prst="rightArrow">
-            <a:avLst>
-              <a:gd name="adj1" fmla="val 50000"/>
-              <a:gd name="adj2" fmla="val 50000"/>
-            </a:avLst>
-          </a:prstGeom>
-          <a:solidFill>
-            <a:srgbClr val="BAC7DA"/>
-          </a:solidFill>
-          <a:ln>
-            <a:noFill/>
-          </a:ln>
-        </p:spPr>
-        <p:txBody>
-          <a:bodyPr spcFirstLastPara="1" wrap="square" lIns="91425" tIns="45700" rIns="91425" bIns="45700" anchor="ctr" anchorCtr="0">
-            <a:noAutofit/>
-          </a:bodyPr>
-          <a:lstStyle/>
-          <a:p>
-            <a:pPr marL="0" marR="0" lvl="0" indent="0" algn="ctr" rtl="0">
-              <a:lnSpc>
-                <a:spcPct val="100000"/>
-              </a:lnSpc>
-              <a:spcBef>
-                <a:spcPts val="0"/>
-              </a:spcBef>
-              <a:spcAft>
-                <a:spcPts val="0"/>
-              </a:spcAft>
-              <a:buClr>
-                <a:srgbClr val="000000"/>
-              </a:buClr>
-              <a:buSzPts val="1800"/>
-              <a:buFont typeface="Arial"/>
-              <a:buNone/>
-            </a:pPr>
-            <a:endParaRPr sz="1800" b="0" i="0" u="none" strike="noStrike" cap="none">
-              <a:solidFill>
-                <a:schemeClr val="lt1"/>
-              </a:solidFill>
-              <a:latin typeface="Twentieth Century"/>
-              <a:ea typeface="Twentieth Century"/>
-              <a:cs typeface="Twentieth Century"/>
-              <a:sym typeface="Twentieth Century"/>
-            </a:endParaRPr>
-          </a:p>
-        </p:txBody>
-      </p:sp>
-      <p:sp>
-        <p:nvSpPr>
-          <p:cNvPr id="563" name="Google Shape;563;p26"/>
-          <p:cNvSpPr txBox="1"/>
-          <p:nvPr/>
-        </p:nvSpPr>
-        <p:spPr>
-          <a:xfrm>
-            <a:off x="2253974" y="2671728"/>
-            <a:ext cx="2120105" cy="369291"/>
-          </a:xfrm>
-          <a:prstGeom prst="rect">
-            <a:avLst/>
-          </a:prstGeom>
-          <a:noFill/>
-          <a:ln>
-            <a:noFill/>
-          </a:ln>
-        </p:spPr>
-        <p:txBody>
-          <a:bodyPr spcFirstLastPara="1" wrap="square" lIns="91425" tIns="45700" rIns="91425" bIns="45700" anchor="t" anchorCtr="0">
-            <a:spAutoFit/>
-          </a:bodyPr>
-          <a:lstStyle/>
-          <a:p>
-            <a:pPr marL="0" marR="0" lvl="0" indent="0" algn="l" rtl="0">
-              <a:lnSpc>
-                <a:spcPct val="100000"/>
-              </a:lnSpc>
-              <a:spcBef>
-                <a:spcPts val="0"/>
-              </a:spcBef>
-              <a:spcAft>
-                <a:spcPts val="0"/>
-              </a:spcAft>
-              <a:buClr>
-                <a:srgbClr val="000000"/>
-              </a:buClr>
-              <a:buSzPts val="1800"/>
-              <a:buFont typeface="Arial"/>
-              <a:buNone/>
-            </a:pPr>
-            <a:r>
-              <a:rPr lang="de-DE" sz="1800" b="1" i="0" u="none" strike="noStrike" cap="none" dirty="0">
-                <a:solidFill>
-                  <a:schemeClr val="dk1"/>
-                </a:solidFill>
-                <a:latin typeface="Twentieth Century"/>
-                <a:ea typeface="Twentieth Century"/>
-                <a:cs typeface="Twentieth Century"/>
-                <a:sym typeface="Twentieth Century"/>
-              </a:rPr>
-              <a:t>Code Modellierung</a:t>
-            </a:r>
-            <a:endParaRPr lang="de-DE" sz="1400" b="0" i="0" u="none" strike="noStrike" cap="none" dirty="0">
-              <a:solidFill>
-                <a:srgbClr val="000000"/>
-              </a:solidFill>
-              <a:latin typeface="Arial"/>
-              <a:ea typeface="Arial"/>
-              <a:cs typeface="Arial"/>
-              <a:sym typeface="Arial"/>
-            </a:endParaRPr>
-          </a:p>
-        </p:txBody>
-      </p:sp>
-      <p:sp>
-        <p:nvSpPr>
-          <p:cNvPr id="564" name="Google Shape;564;p26"/>
-          <p:cNvSpPr/>
-          <p:nvPr/>
-        </p:nvSpPr>
-        <p:spPr>
-          <a:xfrm flipH="1">
-            <a:off x="5385422" y="2655279"/>
-            <a:ext cx="1119941" cy="376711"/>
-          </a:xfrm>
-          <a:prstGeom prst="flowChartOnlineStorage">
-            <a:avLst/>
-          </a:prstGeom>
-          <a:solidFill>
-            <a:schemeClr val="accent3"/>
-          </a:solidFill>
-          <a:ln>
-            <a:noFill/>
-          </a:ln>
-        </p:spPr>
-        <p:txBody>
-          <a:bodyPr spcFirstLastPara="1" wrap="square" lIns="91425" tIns="45700" rIns="91425" bIns="45700" anchor="ctr" anchorCtr="0">
-            <a:noAutofit/>
-          </a:bodyPr>
-          <a:lstStyle/>
-          <a:p>
-            <a:pPr marL="0" marR="0" lvl="0" indent="0" algn="ctr" rtl="0">
-              <a:lnSpc>
-                <a:spcPct val="100000"/>
-              </a:lnSpc>
-              <a:spcBef>
-                <a:spcPts val="0"/>
-              </a:spcBef>
-              <a:spcAft>
-                <a:spcPts val="0"/>
-              </a:spcAft>
-              <a:buClr>
-                <a:srgbClr val="000000"/>
-              </a:buClr>
-              <a:buSzPts val="1800"/>
-              <a:buFont typeface="Arial"/>
-              <a:buNone/>
-            </a:pPr>
-            <a:endParaRPr sz="1800" b="0" i="0" u="none" strike="noStrike" cap="none">
-              <a:solidFill>
-                <a:schemeClr val="lt1"/>
-              </a:solidFill>
-              <a:latin typeface="Twentieth Century"/>
-              <a:ea typeface="Twentieth Century"/>
-              <a:cs typeface="Twentieth Century"/>
-              <a:sym typeface="Twentieth Century"/>
-            </a:endParaRPr>
-          </a:p>
-        </p:txBody>
-      </p:sp>
-      <p:sp>
-        <p:nvSpPr>
-          <p:cNvPr id="565" name="Google Shape;565;p26"/>
-          <p:cNvSpPr/>
-          <p:nvPr/>
-        </p:nvSpPr>
-        <p:spPr>
-          <a:xfrm>
-            <a:off x="4884702" y="2294546"/>
-            <a:ext cx="1662037" cy="1105786"/>
-          </a:xfrm>
-          <a:prstGeom prst="rect">
-            <a:avLst/>
-          </a:prstGeom>
-          <a:solidFill>
-            <a:schemeClr val="accent6"/>
-          </a:solidFill>
-          <a:ln>
-            <a:noFill/>
-          </a:ln>
-        </p:spPr>
-        <p:txBody>
-          <a:bodyPr spcFirstLastPara="1" wrap="square" lIns="91425" tIns="45700" rIns="91425" bIns="45700" anchor="ctr" anchorCtr="0">
-            <a:noAutofit/>
-          </a:bodyPr>
-          <a:lstStyle/>
-          <a:p>
-            <a:pPr marL="0" marR="0" lvl="0" indent="0" algn="ctr" rtl="0">
-              <a:lnSpc>
-                <a:spcPct val="100000"/>
-              </a:lnSpc>
-              <a:spcBef>
-                <a:spcPts val="0"/>
-              </a:spcBef>
-              <a:spcAft>
-                <a:spcPts val="0"/>
-              </a:spcAft>
-              <a:buClr>
-                <a:srgbClr val="000000"/>
-              </a:buClr>
-              <a:buSzPts val="1400"/>
-              <a:buFont typeface="Arial"/>
-              <a:buNone/>
-            </a:pPr>
-            <a:r>
-              <a:rPr lang="en-US" sz="1400" b="1" i="0" u="none" strike="noStrike" cap="none" dirty="0">
-                <a:solidFill>
-                  <a:schemeClr val="lt1"/>
-                </a:solidFill>
-                <a:latin typeface="Twentieth Century"/>
-                <a:ea typeface="Twentieth Century"/>
-                <a:cs typeface="Twentieth Century"/>
-                <a:sym typeface="Twentieth Century"/>
-              </a:rPr>
-              <a:t>LAUFZEIT</a:t>
-            </a:r>
-            <a:endParaRPr sz="1400" b="0" i="0" u="none" strike="noStrike" cap="none" dirty="0">
-              <a:solidFill>
-                <a:srgbClr val="000000"/>
-              </a:solidFill>
-              <a:latin typeface="Arial"/>
-              <a:ea typeface="Arial"/>
-              <a:cs typeface="Arial"/>
-              <a:sym typeface="Arial"/>
-            </a:endParaRPr>
-          </a:p>
-          <a:p>
-            <a:pPr marL="0" marR="0" lvl="0" indent="0" algn="ctr" rtl="0">
-              <a:lnSpc>
-                <a:spcPct val="100000"/>
-              </a:lnSpc>
-              <a:spcBef>
-                <a:spcPts val="0"/>
-              </a:spcBef>
-              <a:spcAft>
-                <a:spcPts val="0"/>
-              </a:spcAft>
-              <a:buClr>
-                <a:srgbClr val="000000"/>
-              </a:buClr>
-              <a:buSzPts val="1800"/>
-              <a:buFont typeface="Arial"/>
-              <a:buNone/>
-            </a:pPr>
-            <a:r>
-              <a:rPr lang="en-US" sz="1800" b="1" i="0" u="none" strike="noStrike" cap="none" dirty="0">
-                <a:solidFill>
-                  <a:schemeClr val="lt1"/>
-                </a:solidFill>
-                <a:latin typeface="Twentieth Century"/>
-                <a:ea typeface="Twentieth Century"/>
-                <a:cs typeface="Twentieth Century"/>
-                <a:sym typeface="Twentieth Century"/>
-              </a:rPr>
-              <a:t>FUNKTION</a:t>
-            </a:r>
-            <a:endParaRPr sz="1400" b="0" i="0" u="none" strike="noStrike" cap="none" dirty="0">
-              <a:solidFill>
-                <a:srgbClr val="000000"/>
-              </a:solidFill>
-              <a:latin typeface="Arial"/>
-              <a:ea typeface="Arial"/>
-              <a:cs typeface="Arial"/>
-              <a:sym typeface="Arial"/>
-            </a:endParaRPr>
-          </a:p>
-        </p:txBody>
-      </p:sp>
-      <p:sp>
-        <p:nvSpPr>
-          <p:cNvPr id="566" name="Google Shape;566;p26"/>
-          <p:cNvSpPr/>
-          <p:nvPr/>
-        </p:nvSpPr>
-        <p:spPr>
-          <a:xfrm>
-            <a:off x="2749804" y="1727882"/>
-            <a:ext cx="762636" cy="762636"/>
-          </a:xfrm>
-          <a:prstGeom prst="ellipse">
-            <a:avLst/>
-          </a:prstGeom>
-          <a:solidFill>
-            <a:srgbClr val="4C3282"/>
-          </a:solidFill>
-          <a:ln>
-            <a:noFill/>
-          </a:ln>
-        </p:spPr>
-        <p:txBody>
-          <a:bodyPr spcFirstLastPara="1" wrap="square" lIns="91425" tIns="45700" rIns="91425" bIns="45700" anchor="ctr" anchorCtr="0">
-            <a:noAutofit/>
-          </a:bodyPr>
-          <a:lstStyle/>
-          <a:p>
-            <a:pPr marL="0" marR="0" lvl="0" indent="0" algn="ctr" rtl="0">
-              <a:lnSpc>
-                <a:spcPct val="100000"/>
-              </a:lnSpc>
-              <a:spcBef>
-                <a:spcPts val="0"/>
-              </a:spcBef>
-              <a:spcAft>
-                <a:spcPts val="0"/>
-              </a:spcAft>
-              <a:buClr>
-                <a:srgbClr val="000000"/>
-              </a:buClr>
-              <a:buSzPts val="2800"/>
-              <a:buFont typeface="Arial"/>
-              <a:buNone/>
-            </a:pPr>
-            <a:r>
-              <a:rPr lang="en-US" sz="2800" b="1" i="0" u="none" strike="noStrike" cap="none">
-                <a:solidFill>
-                  <a:schemeClr val="lt1"/>
-                </a:solidFill>
-                <a:latin typeface="Montserrat"/>
-                <a:ea typeface="Montserrat"/>
-                <a:cs typeface="Montserrat"/>
-                <a:sym typeface="Montserrat"/>
-              </a:rPr>
-              <a:t>1</a:t>
-            </a:r>
-            <a:endParaRPr sz="1400" b="0" i="0" u="none" strike="noStrike" cap="none">
-              <a:solidFill>
-                <a:srgbClr val="000000"/>
-              </a:solidFill>
-              <a:latin typeface="Arial"/>
-              <a:ea typeface="Arial"/>
-              <a:cs typeface="Arial"/>
-              <a:sym typeface="Arial"/>
-            </a:endParaRPr>
-          </a:p>
-        </p:txBody>
-      </p:sp>
-      <p:sp>
-        <p:nvSpPr>
-          <p:cNvPr id="567" name="Google Shape;567;p26"/>
-          <p:cNvSpPr txBox="1"/>
-          <p:nvPr/>
-        </p:nvSpPr>
-        <p:spPr>
-          <a:xfrm>
-            <a:off x="180932" y="3478151"/>
-            <a:ext cx="2669320" cy="954107"/>
-          </a:xfrm>
-          <a:prstGeom prst="rect">
-            <a:avLst/>
-          </a:prstGeom>
-          <a:noFill/>
-          <a:ln>
-            <a:noFill/>
-          </a:ln>
-        </p:spPr>
-        <p:txBody>
-          <a:bodyPr spcFirstLastPara="1" wrap="square" lIns="91425" tIns="45700" rIns="91425" bIns="45700" anchor="t" anchorCtr="0">
-            <a:spAutoFit/>
-          </a:bodyPr>
-          <a:lstStyle/>
-          <a:p>
-            <a:pPr marL="0" marR="0" lvl="0" indent="0" algn="l" rtl="0">
-              <a:lnSpc>
-                <a:spcPct val="100000"/>
-              </a:lnSpc>
-              <a:spcBef>
-                <a:spcPts val="0"/>
-              </a:spcBef>
-              <a:spcAft>
-                <a:spcPts val="0"/>
-              </a:spcAft>
-              <a:buClr>
-                <a:srgbClr val="000000"/>
-              </a:buClr>
-              <a:buSzPts val="1400"/>
-              <a:buFont typeface="Arial"/>
-              <a:buNone/>
-            </a:pPr>
-            <a:r>
-              <a:rPr lang="en-US" sz="1400" b="0" i="0" u="none" strike="noStrike" cap="none">
-                <a:solidFill>
-                  <a:schemeClr val="dk1"/>
-                </a:solidFill>
-                <a:latin typeface="Consolas"/>
-                <a:ea typeface="Consolas"/>
-                <a:cs typeface="Consolas"/>
-                <a:sym typeface="Consolas"/>
-              </a:rPr>
-              <a:t>for (i = 0; i &lt; n; i++) {</a:t>
-            </a:r>
-            <a:endParaRPr sz="1400" b="0" i="0" u="none" strike="noStrike" cap="none">
-              <a:solidFill>
-                <a:srgbClr val="000000"/>
-              </a:solidFill>
-              <a:latin typeface="Arial"/>
-              <a:ea typeface="Arial"/>
-              <a:cs typeface="Arial"/>
-              <a:sym typeface="Arial"/>
-            </a:endParaRPr>
-          </a:p>
-          <a:p>
-            <a:pPr marL="0" marR="0" lvl="0" indent="0" algn="l" rtl="0">
-              <a:lnSpc>
-                <a:spcPct val="100000"/>
-              </a:lnSpc>
-              <a:spcBef>
-                <a:spcPts val="0"/>
-              </a:spcBef>
-              <a:spcAft>
-                <a:spcPts val="0"/>
-              </a:spcAft>
-              <a:buClr>
-                <a:srgbClr val="000000"/>
-              </a:buClr>
-              <a:buSzPts val="1400"/>
-              <a:buFont typeface="Arial"/>
-              <a:buNone/>
-            </a:pPr>
-            <a:r>
-              <a:rPr lang="en-US" sz="1400" b="0" i="0" u="none" strike="noStrike" cap="none">
-                <a:solidFill>
-                  <a:schemeClr val="dk1"/>
-                </a:solidFill>
-                <a:latin typeface="Consolas"/>
-                <a:ea typeface="Consolas"/>
-                <a:cs typeface="Consolas"/>
-                <a:sym typeface="Consolas"/>
-              </a:rPr>
-              <a:t>  a[i] = 1;</a:t>
-            </a:r>
-            <a:endParaRPr sz="1400" b="0" i="0" u="none" strike="noStrike" cap="none">
-              <a:solidFill>
-                <a:srgbClr val="000000"/>
-              </a:solidFill>
-              <a:latin typeface="Arial"/>
-              <a:ea typeface="Arial"/>
-              <a:cs typeface="Arial"/>
-              <a:sym typeface="Arial"/>
-            </a:endParaRPr>
-          </a:p>
-          <a:p>
-            <a:pPr marL="0" marR="0" lvl="0" indent="0" algn="l" rtl="0">
-              <a:lnSpc>
-                <a:spcPct val="100000"/>
-              </a:lnSpc>
-              <a:spcBef>
-                <a:spcPts val="0"/>
-              </a:spcBef>
-              <a:spcAft>
-                <a:spcPts val="0"/>
-              </a:spcAft>
-              <a:buClr>
-                <a:srgbClr val="000000"/>
-              </a:buClr>
-              <a:buSzPts val="1400"/>
-              <a:buFont typeface="Arial"/>
-              <a:buNone/>
-            </a:pPr>
-            <a:r>
-              <a:rPr lang="en-US" sz="1400" b="0" i="0" u="none" strike="noStrike" cap="none">
-                <a:solidFill>
-                  <a:schemeClr val="dk1"/>
-                </a:solidFill>
-                <a:latin typeface="Consolas"/>
-                <a:ea typeface="Consolas"/>
-                <a:cs typeface="Consolas"/>
-                <a:sym typeface="Consolas"/>
-              </a:rPr>
-              <a:t>  b[i] = 2;</a:t>
-            </a:r>
-            <a:endParaRPr sz="1400" b="0" i="0" u="none" strike="noStrike" cap="none">
-              <a:solidFill>
-                <a:srgbClr val="000000"/>
-              </a:solidFill>
-              <a:latin typeface="Arial"/>
-              <a:ea typeface="Arial"/>
-              <a:cs typeface="Arial"/>
-              <a:sym typeface="Arial"/>
-            </a:endParaRPr>
-          </a:p>
-          <a:p>
-            <a:pPr marL="0" marR="0" lvl="0" indent="0" algn="l" rtl="0">
-              <a:lnSpc>
-                <a:spcPct val="100000"/>
-              </a:lnSpc>
-              <a:spcBef>
-                <a:spcPts val="0"/>
-              </a:spcBef>
-              <a:spcAft>
-                <a:spcPts val="0"/>
-              </a:spcAft>
-              <a:buClr>
-                <a:srgbClr val="000000"/>
-              </a:buClr>
-              <a:buSzPts val="1400"/>
-              <a:buFont typeface="Arial"/>
-              <a:buNone/>
-            </a:pPr>
-            <a:r>
-              <a:rPr lang="en-US" sz="1400" b="0" i="0" u="none" strike="noStrike" cap="none">
-                <a:solidFill>
-                  <a:schemeClr val="dk1"/>
-                </a:solidFill>
-                <a:latin typeface="Consolas"/>
-                <a:ea typeface="Consolas"/>
-                <a:cs typeface="Consolas"/>
-                <a:sym typeface="Consolas"/>
-              </a:rPr>
-              <a:t>}</a:t>
-            </a:r>
-            <a:endParaRPr sz="1400" b="0" i="0" u="none" strike="noStrike" cap="none">
-              <a:solidFill>
-                <a:srgbClr val="000000"/>
-              </a:solidFill>
-              <a:latin typeface="Arial"/>
-              <a:ea typeface="Arial"/>
-              <a:cs typeface="Arial"/>
-              <a:sym typeface="Arial"/>
-            </a:endParaRPr>
-          </a:p>
-        </p:txBody>
-      </p:sp>
-      <p:sp>
-        <p:nvSpPr>
-          <p:cNvPr id="568" name="Google Shape;568;p26"/>
-          <p:cNvSpPr txBox="1"/>
-          <p:nvPr/>
-        </p:nvSpPr>
-        <p:spPr>
-          <a:xfrm>
-            <a:off x="5078903" y="3450674"/>
-            <a:ext cx="1236236" cy="400069"/>
-          </a:xfrm>
-          <a:prstGeom prst="rect">
-            <a:avLst/>
-          </a:prstGeom>
-          <a:noFill/>
-          <a:ln>
-            <a:noFill/>
-          </a:ln>
-        </p:spPr>
-        <p:txBody>
-          <a:bodyPr spcFirstLastPara="1" wrap="square" lIns="91425" tIns="45700" rIns="91425" bIns="45700" anchor="t" anchorCtr="0">
-            <a:spAutoFit/>
-          </a:bodyPr>
-          <a:lstStyle/>
-          <a:p>
-            <a:pPr marL="0" marR="0" lvl="0" indent="0" algn="l" rtl="0">
-              <a:lnSpc>
-                <a:spcPct val="100000"/>
-              </a:lnSpc>
-              <a:spcBef>
-                <a:spcPts val="0"/>
-              </a:spcBef>
-              <a:spcAft>
-                <a:spcPts val="0"/>
-              </a:spcAft>
-              <a:buClr>
-                <a:srgbClr val="000000"/>
-              </a:buClr>
-              <a:buSzPts val="2400"/>
-              <a:buFont typeface="Arial"/>
-              <a:buNone/>
-            </a:pPr>
-            <a:r>
-              <a:rPr lang="en-US" sz="2000" b="0" i="0" u="none" strike="noStrike" cap="none" dirty="0">
-                <a:solidFill>
-                  <a:schemeClr val="dk1"/>
-                </a:solidFill>
-                <a:latin typeface="Calibri"/>
-                <a:ea typeface="Calibri"/>
-                <a:cs typeface="Calibri"/>
-                <a:sym typeface="Calibri"/>
-              </a:rPr>
-              <a:t>f(n) = 2n</a:t>
-            </a:r>
-            <a:endParaRPr sz="1200" b="0" i="0" u="none" strike="noStrike" cap="none" dirty="0">
-              <a:solidFill>
-                <a:srgbClr val="000000"/>
-              </a:solidFill>
-              <a:latin typeface="Arial"/>
-              <a:ea typeface="Arial"/>
-              <a:cs typeface="Arial"/>
-              <a:sym typeface="Arial"/>
-            </a:endParaRPr>
-          </a:p>
-        </p:txBody>
-      </p:sp>
-      <p:sp>
-        <p:nvSpPr>
-          <p:cNvPr id="569" name="Google Shape;569;p26"/>
-          <p:cNvSpPr/>
-          <p:nvPr/>
-        </p:nvSpPr>
-        <p:spPr>
-          <a:xfrm rot="-5400000">
-            <a:off x="6102916" y="1750563"/>
-            <a:ext cx="3800753" cy="2201056"/>
-          </a:xfrm>
-          <a:prstGeom prst="trapezoid">
-            <a:avLst>
-              <a:gd name="adj" fmla="val 61673"/>
-            </a:avLst>
-          </a:prstGeom>
-          <a:solidFill>
-            <a:srgbClr val="9EC0D5"/>
-          </a:solidFill>
-          <a:ln>
-            <a:noFill/>
-          </a:ln>
-        </p:spPr>
-        <p:txBody>
-          <a:bodyPr spcFirstLastPara="1" wrap="square" lIns="91425" tIns="45700" rIns="91425" bIns="45700" anchor="ctr" anchorCtr="0">
-            <a:noAutofit/>
-          </a:bodyPr>
-          <a:lstStyle/>
-          <a:p>
-            <a:pPr marL="0" marR="0" lvl="0" indent="0" algn="ctr" rtl="0">
-              <a:lnSpc>
-                <a:spcPct val="100000"/>
-              </a:lnSpc>
-              <a:spcBef>
-                <a:spcPts val="0"/>
-              </a:spcBef>
-              <a:spcAft>
-                <a:spcPts val="0"/>
-              </a:spcAft>
-              <a:buClr>
-                <a:srgbClr val="000000"/>
-              </a:buClr>
-              <a:buSzPts val="1800"/>
-              <a:buFont typeface="Arial"/>
-              <a:buNone/>
-            </a:pPr>
-            <a:endParaRPr sz="1800" b="0" i="0" u="none" strike="noStrike" cap="none">
-              <a:solidFill>
-                <a:schemeClr val="lt1"/>
-              </a:solidFill>
-              <a:latin typeface="Twentieth Century"/>
-              <a:ea typeface="Twentieth Century"/>
-              <a:cs typeface="Twentieth Century"/>
-              <a:sym typeface="Twentieth Century"/>
-            </a:endParaRPr>
-          </a:p>
-        </p:txBody>
-      </p:sp>
-      <p:sp>
-        <p:nvSpPr>
-          <p:cNvPr id="570" name="Google Shape;570;p26"/>
-          <p:cNvSpPr/>
-          <p:nvPr/>
-        </p:nvSpPr>
-        <p:spPr>
-          <a:xfrm rot="5400000">
-            <a:off x="9795548" y="1388427"/>
-            <a:ext cx="385780" cy="284010"/>
-          </a:xfrm>
-          <a:prstGeom prst="triangle">
-            <a:avLst>
-              <a:gd name="adj" fmla="val 50000"/>
-            </a:avLst>
-          </a:prstGeom>
-          <a:solidFill>
-            <a:srgbClr val="9EC0D5"/>
-          </a:solidFill>
-          <a:ln>
-            <a:noFill/>
-          </a:ln>
-        </p:spPr>
-        <p:txBody>
-          <a:bodyPr spcFirstLastPara="1" wrap="square" lIns="91425" tIns="45700" rIns="91425" bIns="45700" anchor="ctr" anchorCtr="0">
-            <a:noAutofit/>
-          </a:bodyPr>
-          <a:lstStyle/>
-          <a:p>
-            <a:pPr marL="0" marR="0" lvl="0" indent="0" algn="ctr" rtl="0">
-              <a:lnSpc>
-                <a:spcPct val="100000"/>
-              </a:lnSpc>
-              <a:spcBef>
-                <a:spcPts val="0"/>
-              </a:spcBef>
-              <a:spcAft>
-                <a:spcPts val="0"/>
-              </a:spcAft>
-              <a:buClr>
-                <a:srgbClr val="000000"/>
-              </a:buClr>
-              <a:buSzPts val="1800"/>
-              <a:buFont typeface="Arial"/>
-              <a:buNone/>
-            </a:pPr>
-            <a:endParaRPr sz="1800" b="0" i="0" u="none" strike="noStrike" cap="none">
-              <a:solidFill>
-                <a:schemeClr val="lt1"/>
-              </a:solidFill>
-              <a:latin typeface="Twentieth Century"/>
-              <a:ea typeface="Twentieth Century"/>
-              <a:cs typeface="Twentieth Century"/>
-              <a:sym typeface="Twentieth Century"/>
-            </a:endParaRPr>
-          </a:p>
-        </p:txBody>
-      </p:sp>
-      <p:sp>
-        <p:nvSpPr>
-          <p:cNvPr id="571" name="Google Shape;571;p26"/>
-          <p:cNvSpPr/>
-          <p:nvPr/>
-        </p:nvSpPr>
-        <p:spPr>
-          <a:xfrm>
-            <a:off x="6541810" y="2306148"/>
-            <a:ext cx="365760" cy="365760"/>
-          </a:xfrm>
-          <a:prstGeom prst="rect">
-            <a:avLst/>
-          </a:prstGeom>
-          <a:solidFill>
-            <a:srgbClr val="9EC0D5"/>
-          </a:solidFill>
-          <a:ln>
-            <a:noFill/>
-          </a:ln>
-        </p:spPr>
-        <p:txBody>
-          <a:bodyPr spcFirstLastPara="1" wrap="square" lIns="91425" tIns="45700" rIns="91425" bIns="45700" anchor="ctr" anchorCtr="0">
-            <a:noAutofit/>
-          </a:bodyPr>
-          <a:lstStyle/>
-          <a:p>
-            <a:pPr marL="0" marR="0" lvl="0" indent="0" algn="ctr" rtl="0">
-              <a:lnSpc>
-                <a:spcPct val="100000"/>
-              </a:lnSpc>
-              <a:spcBef>
-                <a:spcPts val="0"/>
-              </a:spcBef>
-              <a:spcAft>
-                <a:spcPts val="0"/>
-              </a:spcAft>
-              <a:buClr>
-                <a:srgbClr val="000000"/>
-              </a:buClr>
-              <a:buSzPts val="1800"/>
-              <a:buFont typeface="Arial"/>
-              <a:buNone/>
-            </a:pPr>
-            <a:endParaRPr sz="1800" b="0" i="0" u="none" strike="noStrike" cap="none">
-              <a:solidFill>
-                <a:schemeClr val="lt1"/>
-              </a:solidFill>
-              <a:latin typeface="Twentieth Century"/>
-              <a:ea typeface="Twentieth Century"/>
-              <a:cs typeface="Twentieth Century"/>
-              <a:sym typeface="Twentieth Century"/>
-            </a:endParaRPr>
-          </a:p>
-        </p:txBody>
-      </p:sp>
-      <p:sp>
-        <p:nvSpPr>
-          <p:cNvPr id="572" name="Google Shape;572;p26"/>
-          <p:cNvSpPr/>
-          <p:nvPr/>
-        </p:nvSpPr>
-        <p:spPr>
-          <a:xfrm>
-            <a:off x="6541486" y="3034572"/>
-            <a:ext cx="365760" cy="365760"/>
-          </a:xfrm>
-          <a:prstGeom prst="rect">
-            <a:avLst/>
-          </a:prstGeom>
-          <a:solidFill>
-            <a:srgbClr val="9EC0D5"/>
-          </a:solidFill>
-          <a:ln>
-            <a:noFill/>
-          </a:ln>
-        </p:spPr>
-        <p:txBody>
-          <a:bodyPr spcFirstLastPara="1" wrap="square" lIns="91425" tIns="45700" rIns="91425" bIns="45700" anchor="ctr" anchorCtr="0">
-            <a:noAutofit/>
-          </a:bodyPr>
-          <a:lstStyle/>
-          <a:p>
-            <a:pPr marL="0" marR="0" lvl="0" indent="0" algn="ctr" rtl="0">
-              <a:lnSpc>
-                <a:spcPct val="100000"/>
-              </a:lnSpc>
-              <a:spcBef>
-                <a:spcPts val="0"/>
-              </a:spcBef>
-              <a:spcAft>
-                <a:spcPts val="0"/>
-              </a:spcAft>
-              <a:buClr>
-                <a:srgbClr val="000000"/>
-              </a:buClr>
-              <a:buSzPts val="1800"/>
-              <a:buFont typeface="Arial"/>
-              <a:buNone/>
-            </a:pPr>
-            <a:endParaRPr sz="1800" b="0" i="0" u="none" strike="noStrike" cap="none">
-              <a:solidFill>
-                <a:schemeClr val="lt1"/>
-              </a:solidFill>
-              <a:latin typeface="Twentieth Century"/>
-              <a:ea typeface="Twentieth Century"/>
-              <a:cs typeface="Twentieth Century"/>
-              <a:sym typeface="Twentieth Century"/>
-            </a:endParaRPr>
-          </a:p>
-        </p:txBody>
-      </p:sp>
-      <p:sp>
-        <p:nvSpPr>
-          <p:cNvPr id="573" name="Google Shape;573;p26"/>
-          <p:cNvSpPr/>
-          <p:nvPr/>
-        </p:nvSpPr>
-        <p:spPr>
-          <a:xfrm>
-            <a:off x="9087938" y="959933"/>
-            <a:ext cx="758495" cy="1105786"/>
-          </a:xfrm>
-          <a:prstGeom prst="rect">
-            <a:avLst/>
-          </a:prstGeom>
-          <a:solidFill>
-            <a:srgbClr val="9EC0D5"/>
-          </a:solidFill>
-          <a:ln>
-            <a:noFill/>
-          </a:ln>
-        </p:spPr>
-        <p:txBody>
-          <a:bodyPr spcFirstLastPara="1" wrap="square" lIns="91425" tIns="45700" rIns="91425" bIns="45700" anchor="ctr" anchorCtr="0">
-            <a:noAutofit/>
-          </a:bodyPr>
-          <a:lstStyle/>
-          <a:p>
-            <a:pPr marL="0" marR="0" lvl="0" indent="0" algn="ctr" rtl="0">
-              <a:lnSpc>
-                <a:spcPct val="100000"/>
-              </a:lnSpc>
-              <a:spcBef>
-                <a:spcPts val="0"/>
-              </a:spcBef>
-              <a:spcAft>
-                <a:spcPts val="0"/>
-              </a:spcAft>
-              <a:buClr>
-                <a:srgbClr val="000000"/>
-              </a:buClr>
-              <a:buSzPts val="1800"/>
-              <a:buFont typeface="Arial"/>
-              <a:buNone/>
-            </a:pPr>
-            <a:endParaRPr sz="1800" b="0" i="0" u="none" strike="noStrike" cap="none">
-              <a:solidFill>
-                <a:schemeClr val="lt1"/>
-              </a:solidFill>
-              <a:latin typeface="Twentieth Century"/>
-              <a:ea typeface="Twentieth Century"/>
-              <a:cs typeface="Twentieth Century"/>
-              <a:sym typeface="Twentieth Century"/>
-            </a:endParaRPr>
-          </a:p>
-        </p:txBody>
-      </p:sp>
-      <p:grpSp>
-        <p:nvGrpSpPr>
-          <p:cNvPr id="574" name="Google Shape;574;p26"/>
-          <p:cNvGrpSpPr/>
-          <p:nvPr/>
-        </p:nvGrpSpPr>
-        <p:grpSpPr>
-          <a:xfrm>
-            <a:off x="9836698" y="959407"/>
-            <a:ext cx="2343590" cy="1106838"/>
-            <a:chOff x="7012434" y="3614205"/>
-            <a:chExt cx="2343590" cy="1106838"/>
-          </a:xfrm>
-        </p:grpSpPr>
-        <p:sp>
-          <p:nvSpPr>
-            <p:cNvPr id="575" name="Google Shape;575;p26"/>
-            <p:cNvSpPr/>
-            <p:nvPr/>
-          </p:nvSpPr>
-          <p:spPr>
-            <a:xfrm>
-              <a:off x="7290111" y="3614205"/>
-              <a:ext cx="1700153" cy="1105786"/>
-            </a:xfrm>
-            <a:prstGeom prst="rect">
-              <a:avLst/>
-            </a:prstGeom>
-            <a:solidFill>
-              <a:srgbClr val="8BD6C0"/>
-            </a:solidFill>
-            <a:ln>
-              <a:noFill/>
-            </a:ln>
-          </p:spPr>
-          <p:txBody>
-            <a:bodyPr spcFirstLastPara="1" wrap="square" lIns="91425" tIns="45700" rIns="91425" bIns="45700" anchor="ctr" anchorCtr="0">
-              <a:noAutofit/>
-            </a:bodyPr>
-            <a:lstStyle/>
-            <a:p>
-              <a:pPr marL="0" marR="0" lvl="0" indent="0" algn="ctr" rtl="0">
-                <a:lnSpc>
-                  <a:spcPct val="100000"/>
-                </a:lnSpc>
-                <a:spcBef>
-                  <a:spcPts val="0"/>
-                </a:spcBef>
-                <a:spcAft>
-                  <a:spcPts val="0"/>
-                </a:spcAft>
-                <a:buClr>
-                  <a:srgbClr val="000000"/>
-                </a:buClr>
-                <a:buSzPts val="1400"/>
-                <a:buFont typeface="Arial"/>
-                <a:buNone/>
-              </a:pPr>
-              <a:r>
-                <a:rPr lang="de-DE" b="1" i="0" u="none" strike="noStrike" cap="none" dirty="0">
-                  <a:solidFill>
-                    <a:schemeClr val="lt1"/>
-                  </a:solidFill>
-                  <a:latin typeface="+mj-lt"/>
-                  <a:ea typeface="Twentieth Century"/>
-                  <a:cs typeface="Twentieth Century"/>
-                  <a:sym typeface="Twentieth Century"/>
-                </a:rPr>
-                <a:t>O-Notation</a:t>
-              </a:r>
-              <a:endParaRPr sz="2400" b="0" i="0" u="none" strike="noStrike" cap="none" dirty="0">
-                <a:solidFill>
-                  <a:schemeClr val="lt1"/>
-                </a:solidFill>
-                <a:latin typeface="+mj-lt"/>
-                <a:ea typeface="Twentieth Century"/>
-                <a:cs typeface="Twentieth Century"/>
-                <a:sym typeface="Twentieth Century"/>
-              </a:endParaRPr>
-            </a:p>
-          </p:txBody>
-        </p:sp>
-        <p:sp>
-          <p:nvSpPr>
-            <p:cNvPr id="576" name="Google Shape;576;p26"/>
-            <p:cNvSpPr/>
-            <p:nvPr/>
-          </p:nvSpPr>
-          <p:spPr>
-            <a:xfrm>
-              <a:off x="7012580" y="3974938"/>
-              <a:ext cx="532515" cy="385780"/>
-            </a:xfrm>
-            <a:prstGeom prst="flowChartCollate">
-              <a:avLst/>
-            </a:prstGeom>
-            <a:solidFill>
-              <a:srgbClr val="8BD6C0"/>
-            </a:solidFill>
-            <a:ln>
-              <a:noFill/>
-            </a:ln>
-          </p:spPr>
-          <p:txBody>
-            <a:bodyPr spcFirstLastPara="1" wrap="square" lIns="91425" tIns="45700" rIns="91425" bIns="45700" anchor="ctr" anchorCtr="0">
-              <a:noAutofit/>
-            </a:bodyPr>
-            <a:lstStyle/>
-            <a:p>
-              <a:pPr marL="0" marR="0" lvl="0" indent="0" algn="ctr" rtl="0">
-                <a:lnSpc>
-                  <a:spcPct val="100000"/>
-                </a:lnSpc>
-                <a:spcBef>
-                  <a:spcPts val="0"/>
-                </a:spcBef>
-                <a:spcAft>
-                  <a:spcPts val="0"/>
-                </a:spcAft>
-                <a:buClr>
-                  <a:srgbClr val="000000"/>
-                </a:buClr>
-                <a:buSzPts val="1800"/>
-                <a:buFont typeface="Arial"/>
-                <a:buNone/>
-              </a:pPr>
-              <a:endParaRPr sz="1800" b="0" i="0" u="none" strike="noStrike" cap="none">
-                <a:solidFill>
-                  <a:schemeClr val="dk1"/>
-                </a:solidFill>
-                <a:latin typeface="Twentieth Century"/>
-                <a:ea typeface="Twentieth Century"/>
-                <a:cs typeface="Twentieth Century"/>
-                <a:sym typeface="Twentieth Century"/>
-              </a:endParaRPr>
-            </a:p>
-          </p:txBody>
-        </p:sp>
-        <p:sp>
-          <p:nvSpPr>
-            <p:cNvPr id="577" name="Google Shape;577;p26"/>
-            <p:cNvSpPr/>
-            <p:nvPr/>
-          </p:nvSpPr>
-          <p:spPr>
-            <a:xfrm>
-              <a:off x="7012434" y="3616465"/>
-              <a:ext cx="365760" cy="365760"/>
-            </a:xfrm>
-            <a:prstGeom prst="rect">
-              <a:avLst/>
-            </a:prstGeom>
-            <a:solidFill>
-              <a:srgbClr val="8BD6C0"/>
-            </a:solidFill>
-            <a:ln>
-              <a:noFill/>
-            </a:ln>
-          </p:spPr>
-          <p:txBody>
-            <a:bodyPr spcFirstLastPara="1" wrap="square" lIns="91425" tIns="45700" rIns="91425" bIns="45700" anchor="ctr" anchorCtr="0">
-              <a:noAutofit/>
-            </a:bodyPr>
-            <a:lstStyle/>
-            <a:p>
-              <a:pPr marL="0" marR="0" lvl="0" indent="0" algn="ctr" rtl="0">
-                <a:lnSpc>
-                  <a:spcPct val="100000"/>
-                </a:lnSpc>
-                <a:spcBef>
-                  <a:spcPts val="0"/>
-                </a:spcBef>
-                <a:spcAft>
-                  <a:spcPts val="0"/>
-                </a:spcAft>
-                <a:buClr>
-                  <a:srgbClr val="000000"/>
-                </a:buClr>
-                <a:buSzPts val="1800"/>
-                <a:buFont typeface="Arial"/>
-                <a:buNone/>
-              </a:pPr>
-              <a:endParaRPr sz="1800" b="0" i="0" u="none" strike="noStrike" cap="none">
-                <a:solidFill>
-                  <a:schemeClr val="lt1"/>
-                </a:solidFill>
-                <a:latin typeface="Twentieth Century"/>
-                <a:ea typeface="Twentieth Century"/>
-                <a:cs typeface="Twentieth Century"/>
-                <a:sym typeface="Twentieth Century"/>
-              </a:endParaRPr>
-            </a:p>
-          </p:txBody>
-        </p:sp>
-        <p:sp>
-          <p:nvSpPr>
-            <p:cNvPr id="578" name="Google Shape;578;p26"/>
-            <p:cNvSpPr/>
-            <p:nvPr/>
-          </p:nvSpPr>
-          <p:spPr>
-            <a:xfrm>
-              <a:off x="7012434" y="4355283"/>
-              <a:ext cx="365760" cy="365760"/>
-            </a:xfrm>
-            <a:prstGeom prst="rect">
-              <a:avLst/>
-            </a:prstGeom>
-            <a:solidFill>
-              <a:srgbClr val="8BD6C0"/>
-            </a:solidFill>
-            <a:ln>
-              <a:noFill/>
-            </a:ln>
-          </p:spPr>
-          <p:txBody>
-            <a:bodyPr spcFirstLastPara="1" wrap="square" lIns="91425" tIns="45700" rIns="91425" bIns="45700" anchor="ctr" anchorCtr="0">
-              <a:noAutofit/>
-            </a:bodyPr>
-            <a:lstStyle/>
-            <a:p>
-              <a:pPr marL="0" marR="0" lvl="0" indent="0" algn="ctr" rtl="0">
-                <a:lnSpc>
-                  <a:spcPct val="100000"/>
-                </a:lnSpc>
-                <a:spcBef>
-                  <a:spcPts val="0"/>
-                </a:spcBef>
-                <a:spcAft>
-                  <a:spcPts val="0"/>
-                </a:spcAft>
-                <a:buClr>
-                  <a:srgbClr val="000000"/>
-                </a:buClr>
-                <a:buSzPts val="1800"/>
-                <a:buFont typeface="Arial"/>
-                <a:buNone/>
-              </a:pPr>
-              <a:endParaRPr sz="1800" b="0" i="0" u="none" strike="noStrike" cap="none">
-                <a:solidFill>
-                  <a:schemeClr val="lt1"/>
-                </a:solidFill>
-                <a:latin typeface="Twentieth Century"/>
-                <a:ea typeface="Twentieth Century"/>
-                <a:cs typeface="Twentieth Century"/>
-                <a:sym typeface="Twentieth Century"/>
-              </a:endParaRPr>
-            </a:p>
-          </p:txBody>
-        </p:sp>
-        <p:sp>
-          <p:nvSpPr>
-            <p:cNvPr id="579" name="Google Shape;579;p26"/>
-            <p:cNvSpPr/>
-            <p:nvPr/>
-          </p:nvSpPr>
-          <p:spPr>
-            <a:xfrm rot="5400000">
-              <a:off x="8961003" y="3993173"/>
-              <a:ext cx="424282" cy="365760"/>
-            </a:xfrm>
-            <a:prstGeom prst="triangle">
-              <a:avLst>
-                <a:gd name="adj" fmla="val 50000"/>
-              </a:avLst>
-            </a:prstGeom>
-            <a:solidFill>
-              <a:srgbClr val="8BD6C0"/>
-            </a:solidFill>
-            <a:ln>
-              <a:noFill/>
-            </a:ln>
-          </p:spPr>
-          <p:txBody>
-            <a:bodyPr spcFirstLastPara="1" wrap="square" lIns="91425" tIns="45700" rIns="91425" bIns="45700" anchor="ctr" anchorCtr="0">
-              <a:noAutofit/>
-            </a:bodyPr>
-            <a:lstStyle/>
-            <a:p>
-              <a:pPr marL="0" marR="0" lvl="0" indent="0" algn="ctr" rtl="0">
-                <a:lnSpc>
-                  <a:spcPct val="100000"/>
-                </a:lnSpc>
-                <a:spcBef>
-                  <a:spcPts val="0"/>
-                </a:spcBef>
-                <a:spcAft>
-                  <a:spcPts val="0"/>
-                </a:spcAft>
-                <a:buClr>
-                  <a:srgbClr val="000000"/>
-                </a:buClr>
-                <a:buSzPts val="1800"/>
-                <a:buFont typeface="Arial"/>
-                <a:buNone/>
-              </a:pPr>
-              <a:endParaRPr sz="1800" b="0" i="0" u="none" strike="noStrike" cap="none">
-                <a:solidFill>
-                  <a:schemeClr val="lt1"/>
-                </a:solidFill>
-                <a:latin typeface="Twentieth Century"/>
-                <a:ea typeface="Twentieth Century"/>
-                <a:cs typeface="Twentieth Century"/>
-                <a:sym typeface="Twentieth Century"/>
-              </a:endParaRPr>
-            </a:p>
-          </p:txBody>
-        </p:sp>
-      </p:grpSp>
-      <p:sp>
-        <p:nvSpPr>
-          <p:cNvPr id="580" name="Google Shape;580;p26"/>
-          <p:cNvSpPr/>
-          <p:nvPr/>
-        </p:nvSpPr>
-        <p:spPr>
-          <a:xfrm flipH="1">
-            <a:off x="6648574" y="2657796"/>
-            <a:ext cx="1119941" cy="376711"/>
-          </a:xfrm>
-          <a:prstGeom prst="flowChartOnlineStorage">
-            <a:avLst/>
-          </a:prstGeom>
-          <a:solidFill>
-            <a:srgbClr val="9EC0D5"/>
-          </a:solidFill>
-          <a:ln>
-            <a:noFill/>
-          </a:ln>
-        </p:spPr>
-        <p:txBody>
-          <a:bodyPr spcFirstLastPara="1" wrap="square" lIns="91425" tIns="45700" rIns="91425" bIns="45700" anchor="ctr" anchorCtr="0">
-            <a:noAutofit/>
-          </a:bodyPr>
-          <a:lstStyle/>
-          <a:p>
-            <a:pPr marL="0" marR="0" lvl="0" indent="0" algn="ctr" rtl="0">
-              <a:lnSpc>
-                <a:spcPct val="100000"/>
-              </a:lnSpc>
-              <a:spcBef>
-                <a:spcPts val="0"/>
-              </a:spcBef>
-              <a:spcAft>
-                <a:spcPts val="0"/>
-              </a:spcAft>
-              <a:buClr>
-                <a:srgbClr val="000000"/>
-              </a:buClr>
-              <a:buSzPts val="1800"/>
-              <a:buFont typeface="Arial"/>
-              <a:buNone/>
-            </a:pPr>
-            <a:endParaRPr sz="1800" b="0" i="0" u="none" strike="noStrike" cap="none">
-              <a:solidFill>
-                <a:schemeClr val="lt1"/>
-              </a:solidFill>
-              <a:latin typeface="Twentieth Century"/>
-              <a:ea typeface="Twentieth Century"/>
-              <a:cs typeface="Twentieth Century"/>
-              <a:sym typeface="Twentieth Century"/>
-            </a:endParaRPr>
-          </a:p>
-        </p:txBody>
-      </p:sp>
-      <p:sp>
-        <p:nvSpPr>
-          <p:cNvPr id="581" name="Google Shape;581;p26"/>
-          <p:cNvSpPr/>
-          <p:nvPr/>
-        </p:nvSpPr>
-        <p:spPr>
-          <a:xfrm>
-            <a:off x="7395369" y="2456012"/>
-            <a:ext cx="1573414" cy="792969"/>
-          </a:xfrm>
-          <a:prstGeom prst="rightArrow">
-            <a:avLst>
-              <a:gd name="adj1" fmla="val 50000"/>
-              <a:gd name="adj2" fmla="val 50000"/>
-            </a:avLst>
-          </a:prstGeom>
-          <a:solidFill>
-            <a:srgbClr val="BAC7DA"/>
-          </a:solidFill>
-          <a:ln>
-            <a:noFill/>
-          </a:ln>
-        </p:spPr>
-        <p:txBody>
-          <a:bodyPr spcFirstLastPara="1" wrap="square" lIns="91425" tIns="45700" rIns="91425" bIns="45700" anchor="ctr" anchorCtr="0">
-            <a:noAutofit/>
-          </a:bodyPr>
-          <a:lstStyle/>
-          <a:p>
-            <a:pPr marL="0" marR="0" lvl="0" indent="0" algn="ctr" rtl="0">
-              <a:lnSpc>
-                <a:spcPct val="100000"/>
-              </a:lnSpc>
-              <a:spcBef>
-                <a:spcPts val="0"/>
-              </a:spcBef>
-              <a:spcAft>
-                <a:spcPts val="0"/>
-              </a:spcAft>
-              <a:buClr>
-                <a:srgbClr val="000000"/>
-              </a:buClr>
-              <a:buSzPts val="1800"/>
-              <a:buFont typeface="Arial"/>
-              <a:buNone/>
-            </a:pPr>
-            <a:endParaRPr sz="1800" b="0" i="0" u="none" strike="noStrike" cap="none">
-              <a:solidFill>
-                <a:schemeClr val="lt1"/>
-              </a:solidFill>
-              <a:latin typeface="Twentieth Century"/>
-              <a:ea typeface="Twentieth Century"/>
-              <a:cs typeface="Twentieth Century"/>
-              <a:sym typeface="Twentieth Century"/>
-            </a:endParaRPr>
-          </a:p>
-        </p:txBody>
-      </p:sp>
-      <p:sp>
-        <p:nvSpPr>
-          <p:cNvPr id="582" name="Google Shape;582;p26"/>
-          <p:cNvSpPr txBox="1"/>
-          <p:nvPr/>
-        </p:nvSpPr>
-        <p:spPr>
-          <a:xfrm>
-            <a:off x="7384459" y="2488858"/>
-            <a:ext cx="1818422" cy="707846"/>
-          </a:xfrm>
-          <a:prstGeom prst="rect">
-            <a:avLst/>
-          </a:prstGeom>
-          <a:noFill/>
-          <a:ln>
-            <a:noFill/>
-          </a:ln>
-        </p:spPr>
-        <p:txBody>
-          <a:bodyPr spcFirstLastPara="1" wrap="square" lIns="91425" tIns="45700" rIns="91425" bIns="45700" anchor="t" anchorCtr="0">
-            <a:spAutoFit/>
-          </a:bodyPr>
-          <a:lstStyle/>
-          <a:p>
-            <a:pPr marL="0" marR="0" lvl="0" indent="0" algn="l" rtl="0">
-              <a:lnSpc>
-                <a:spcPct val="100000"/>
-              </a:lnSpc>
-              <a:spcBef>
-                <a:spcPts val="0"/>
-              </a:spcBef>
-              <a:spcAft>
-                <a:spcPts val="0"/>
-              </a:spcAft>
-              <a:buClr>
-                <a:srgbClr val="000000"/>
-              </a:buClr>
-              <a:buSzPts val="2000"/>
-              <a:buFont typeface="Arial"/>
-              <a:buNone/>
-            </a:pPr>
-            <a:r>
-              <a:rPr lang="de-DE" sz="2000" b="1" i="0" u="none" strike="noStrike" cap="none" dirty="0">
-                <a:solidFill>
-                  <a:schemeClr val="dk1"/>
-                </a:solidFill>
-                <a:latin typeface="Twentieth Century"/>
-                <a:ea typeface="Twentieth Century"/>
-                <a:cs typeface="Twentieth Century"/>
-                <a:sym typeface="Twentieth Century"/>
-              </a:rPr>
-              <a:t>Asymptotische</a:t>
-            </a:r>
-            <a:endParaRPr lang="de-DE" sz="1400" b="0" i="0" u="none" strike="noStrike" cap="none" dirty="0">
-              <a:solidFill>
-                <a:srgbClr val="000000"/>
-              </a:solidFill>
-              <a:latin typeface="Arial"/>
-              <a:ea typeface="Arial"/>
-              <a:cs typeface="Arial"/>
-              <a:sym typeface="Arial"/>
-            </a:endParaRPr>
-          </a:p>
-          <a:p>
-            <a:pPr marL="0" marR="0" lvl="0" indent="0" algn="l" rtl="0">
-              <a:lnSpc>
-                <a:spcPct val="100000"/>
-              </a:lnSpc>
-              <a:spcBef>
-                <a:spcPts val="0"/>
-              </a:spcBef>
-              <a:spcAft>
-                <a:spcPts val="0"/>
-              </a:spcAft>
-              <a:buClr>
-                <a:srgbClr val="000000"/>
-              </a:buClr>
-              <a:buSzPts val="2000"/>
-              <a:buFont typeface="Arial"/>
-              <a:buNone/>
-            </a:pPr>
-            <a:r>
-              <a:rPr lang="de-DE" sz="2000" b="1" i="0" u="none" strike="noStrike" cap="none" dirty="0">
-                <a:solidFill>
-                  <a:schemeClr val="dk1"/>
-                </a:solidFill>
-                <a:latin typeface="Twentieth Century"/>
-                <a:ea typeface="Twentieth Century"/>
-                <a:cs typeface="Twentieth Century"/>
-                <a:sym typeface="Twentieth Century"/>
-              </a:rPr>
-              <a:t>Analyse</a:t>
-            </a:r>
-            <a:endParaRPr lang="de-DE" sz="1400" b="0" i="0" u="none" strike="noStrike" cap="none" dirty="0">
-              <a:solidFill>
-                <a:srgbClr val="000000"/>
-              </a:solidFill>
-              <a:latin typeface="Arial"/>
-              <a:ea typeface="Arial"/>
-              <a:cs typeface="Arial"/>
-              <a:sym typeface="Arial"/>
-            </a:endParaRPr>
-          </a:p>
-        </p:txBody>
-      </p:sp>
-      <p:sp>
-        <p:nvSpPr>
-          <p:cNvPr id="583" name="Google Shape;583;p26"/>
-          <p:cNvSpPr/>
-          <p:nvPr/>
-        </p:nvSpPr>
-        <p:spPr>
-          <a:xfrm>
-            <a:off x="7555278" y="1315044"/>
-            <a:ext cx="762636" cy="762636"/>
-          </a:xfrm>
-          <a:prstGeom prst="ellipse">
-            <a:avLst/>
-          </a:prstGeom>
-          <a:solidFill>
-            <a:srgbClr val="4C3282"/>
-          </a:solidFill>
-          <a:ln>
-            <a:noFill/>
-          </a:ln>
-        </p:spPr>
-        <p:txBody>
-          <a:bodyPr spcFirstLastPara="1" wrap="square" lIns="91425" tIns="45700" rIns="91425" bIns="45700" anchor="ctr" anchorCtr="0">
-            <a:noAutofit/>
-          </a:bodyPr>
-          <a:lstStyle/>
-          <a:p>
-            <a:pPr marL="0" marR="0" lvl="0" indent="0" algn="ctr" rtl="0">
-              <a:lnSpc>
-                <a:spcPct val="100000"/>
-              </a:lnSpc>
-              <a:spcBef>
-                <a:spcPts val="0"/>
-              </a:spcBef>
-              <a:spcAft>
-                <a:spcPts val="0"/>
-              </a:spcAft>
-              <a:buClr>
-                <a:srgbClr val="000000"/>
-              </a:buClr>
-              <a:buSzPts val="2800"/>
-              <a:buFont typeface="Arial"/>
-              <a:buNone/>
-            </a:pPr>
-            <a:r>
-              <a:rPr lang="en-US" sz="2800" b="1" i="0" u="none" strike="noStrike" cap="none">
-                <a:solidFill>
-                  <a:schemeClr val="lt1"/>
-                </a:solidFill>
-                <a:latin typeface="Montserrat"/>
-                <a:ea typeface="Montserrat"/>
-                <a:cs typeface="Montserrat"/>
-                <a:sym typeface="Montserrat"/>
-              </a:rPr>
-              <a:t>2</a:t>
-            </a:r>
-            <a:endParaRPr sz="1400" b="0" i="0" u="none" strike="noStrike" cap="none">
-              <a:solidFill>
-                <a:srgbClr val="000000"/>
-              </a:solidFill>
-              <a:latin typeface="Arial"/>
-              <a:ea typeface="Arial"/>
-              <a:cs typeface="Arial"/>
-              <a:sym typeface="Arial"/>
-            </a:endParaRPr>
-          </a:p>
-        </p:txBody>
-      </p:sp>
-      <p:sp>
-        <p:nvSpPr>
-          <p:cNvPr id="584" name="Google Shape;584;p26"/>
-          <p:cNvSpPr/>
-          <p:nvPr/>
-        </p:nvSpPr>
-        <p:spPr>
-          <a:xfrm rot="5400000">
-            <a:off x="9785813" y="2735694"/>
-            <a:ext cx="385780" cy="284010"/>
-          </a:xfrm>
-          <a:prstGeom prst="triangle">
-            <a:avLst>
-              <a:gd name="adj" fmla="val 50000"/>
-            </a:avLst>
-          </a:prstGeom>
-          <a:solidFill>
-            <a:srgbClr val="9EC0D5"/>
-          </a:solidFill>
-          <a:ln>
-            <a:noFill/>
-          </a:ln>
-        </p:spPr>
-        <p:txBody>
-          <a:bodyPr spcFirstLastPara="1" wrap="square" lIns="91425" tIns="45700" rIns="91425" bIns="45700" anchor="ctr" anchorCtr="0">
-            <a:noAutofit/>
-          </a:bodyPr>
-          <a:lstStyle/>
-          <a:p>
-            <a:pPr marL="0" marR="0" lvl="0" indent="0" algn="ctr" rtl="0">
-              <a:lnSpc>
-                <a:spcPct val="100000"/>
-              </a:lnSpc>
-              <a:spcBef>
-                <a:spcPts val="0"/>
-              </a:spcBef>
-              <a:spcAft>
-                <a:spcPts val="0"/>
-              </a:spcAft>
-              <a:buClr>
-                <a:srgbClr val="000000"/>
-              </a:buClr>
-              <a:buSzPts val="1800"/>
-              <a:buFont typeface="Arial"/>
-              <a:buNone/>
-            </a:pPr>
-            <a:endParaRPr sz="1800" b="0" i="0" u="none" strike="noStrike" cap="none">
-              <a:solidFill>
-                <a:schemeClr val="lt1"/>
-              </a:solidFill>
-              <a:latin typeface="Twentieth Century"/>
-              <a:ea typeface="Twentieth Century"/>
-              <a:cs typeface="Twentieth Century"/>
-              <a:sym typeface="Twentieth Century"/>
-            </a:endParaRPr>
-          </a:p>
-        </p:txBody>
-      </p:sp>
-      <p:sp>
-        <p:nvSpPr>
-          <p:cNvPr id="585" name="Google Shape;585;p26"/>
-          <p:cNvSpPr/>
-          <p:nvPr/>
-        </p:nvSpPr>
-        <p:spPr>
-          <a:xfrm>
-            <a:off x="9078203" y="2307200"/>
-            <a:ext cx="758495" cy="1105786"/>
-          </a:xfrm>
-          <a:prstGeom prst="rect">
-            <a:avLst/>
-          </a:prstGeom>
-          <a:solidFill>
-            <a:srgbClr val="9EC0D5"/>
-          </a:solidFill>
-          <a:ln>
-            <a:noFill/>
-          </a:ln>
-        </p:spPr>
-        <p:txBody>
-          <a:bodyPr spcFirstLastPara="1" wrap="square" lIns="91425" tIns="45700" rIns="91425" bIns="45700" anchor="ctr" anchorCtr="0">
-            <a:noAutofit/>
-          </a:bodyPr>
-          <a:lstStyle/>
-          <a:p>
-            <a:pPr marL="0" marR="0" lvl="0" indent="0" algn="ctr" rtl="0">
-              <a:lnSpc>
-                <a:spcPct val="100000"/>
-              </a:lnSpc>
-              <a:spcBef>
-                <a:spcPts val="0"/>
-              </a:spcBef>
-              <a:spcAft>
-                <a:spcPts val="0"/>
-              </a:spcAft>
-              <a:buClr>
-                <a:srgbClr val="000000"/>
-              </a:buClr>
-              <a:buSzPts val="1800"/>
-              <a:buFont typeface="Arial"/>
-              <a:buNone/>
-            </a:pPr>
-            <a:endParaRPr sz="1800" b="0" i="0" u="none" strike="noStrike" cap="none">
-              <a:solidFill>
-                <a:schemeClr val="lt1"/>
-              </a:solidFill>
-              <a:latin typeface="Twentieth Century"/>
-              <a:ea typeface="Twentieth Century"/>
-              <a:cs typeface="Twentieth Century"/>
-              <a:sym typeface="Twentieth Century"/>
-            </a:endParaRPr>
-          </a:p>
-        </p:txBody>
-      </p:sp>
-      <p:sp>
-        <p:nvSpPr>
-          <p:cNvPr id="586" name="Google Shape;586;p26"/>
-          <p:cNvSpPr/>
-          <p:nvPr/>
-        </p:nvSpPr>
-        <p:spPr>
-          <a:xfrm rot="5400000">
-            <a:off x="9795548" y="4083394"/>
-            <a:ext cx="385780" cy="284010"/>
-          </a:xfrm>
-          <a:prstGeom prst="triangle">
-            <a:avLst>
-              <a:gd name="adj" fmla="val 50000"/>
-            </a:avLst>
-          </a:prstGeom>
-          <a:solidFill>
-            <a:srgbClr val="9EC0D5"/>
-          </a:solidFill>
-          <a:ln>
-            <a:noFill/>
-          </a:ln>
-        </p:spPr>
-        <p:txBody>
-          <a:bodyPr spcFirstLastPara="1" wrap="square" lIns="91425" tIns="45700" rIns="91425" bIns="45700" anchor="ctr" anchorCtr="0">
-            <a:noAutofit/>
-          </a:bodyPr>
-          <a:lstStyle/>
-          <a:p>
-            <a:pPr marL="0" marR="0" lvl="0" indent="0" algn="ctr" rtl="0">
-              <a:lnSpc>
-                <a:spcPct val="100000"/>
-              </a:lnSpc>
-              <a:spcBef>
-                <a:spcPts val="0"/>
-              </a:spcBef>
-              <a:spcAft>
-                <a:spcPts val="0"/>
-              </a:spcAft>
-              <a:buClr>
-                <a:srgbClr val="000000"/>
-              </a:buClr>
-              <a:buSzPts val="1800"/>
-              <a:buFont typeface="Arial"/>
-              <a:buNone/>
-            </a:pPr>
-            <a:endParaRPr sz="1800" b="0" i="0" u="none" strike="noStrike" cap="none">
-              <a:solidFill>
-                <a:schemeClr val="lt1"/>
-              </a:solidFill>
-              <a:latin typeface="Twentieth Century"/>
-              <a:ea typeface="Twentieth Century"/>
-              <a:cs typeface="Twentieth Century"/>
-              <a:sym typeface="Twentieth Century"/>
-            </a:endParaRPr>
-          </a:p>
-        </p:txBody>
-      </p:sp>
-      <p:sp>
-        <p:nvSpPr>
-          <p:cNvPr id="587" name="Google Shape;587;p26"/>
-          <p:cNvSpPr/>
-          <p:nvPr/>
-        </p:nvSpPr>
-        <p:spPr>
-          <a:xfrm>
-            <a:off x="9087938" y="3654900"/>
-            <a:ext cx="758495" cy="1105786"/>
-          </a:xfrm>
-          <a:prstGeom prst="rect">
-            <a:avLst/>
-          </a:prstGeom>
-          <a:solidFill>
-            <a:srgbClr val="9EC0D5"/>
-          </a:solidFill>
-          <a:ln>
-            <a:noFill/>
-          </a:ln>
-        </p:spPr>
-        <p:txBody>
-          <a:bodyPr spcFirstLastPara="1" wrap="square" lIns="91425" tIns="45700" rIns="91425" bIns="45700" anchor="ctr" anchorCtr="0">
-            <a:noAutofit/>
-          </a:bodyPr>
-          <a:lstStyle/>
-          <a:p>
-            <a:pPr marL="0" marR="0" lvl="0" indent="0" algn="ctr" rtl="0">
-              <a:lnSpc>
-                <a:spcPct val="100000"/>
-              </a:lnSpc>
-              <a:spcBef>
-                <a:spcPts val="0"/>
-              </a:spcBef>
-              <a:spcAft>
-                <a:spcPts val="0"/>
-              </a:spcAft>
-              <a:buClr>
-                <a:srgbClr val="000000"/>
-              </a:buClr>
-              <a:buSzPts val="1800"/>
-              <a:buFont typeface="Arial"/>
-              <a:buNone/>
-            </a:pPr>
-            <a:endParaRPr sz="1800" b="0" i="0" u="none" strike="noStrike" cap="none">
-              <a:solidFill>
-                <a:schemeClr val="lt1"/>
-              </a:solidFill>
-              <a:latin typeface="Twentieth Century"/>
-              <a:ea typeface="Twentieth Century"/>
-              <a:cs typeface="Twentieth Century"/>
-              <a:sym typeface="Twentieth Century"/>
-            </a:endParaRPr>
-          </a:p>
-        </p:txBody>
-      </p:sp>
-      <p:grpSp>
-        <p:nvGrpSpPr>
-          <p:cNvPr id="588" name="Google Shape;588;p26"/>
-          <p:cNvGrpSpPr/>
-          <p:nvPr/>
-        </p:nvGrpSpPr>
-        <p:grpSpPr>
-          <a:xfrm>
-            <a:off x="9846433" y="3669616"/>
-            <a:ext cx="2343590" cy="1106838"/>
-            <a:chOff x="7012434" y="3614205"/>
-            <a:chExt cx="2343590" cy="1106838"/>
-          </a:xfrm>
-        </p:grpSpPr>
-        <p:sp>
-          <p:nvSpPr>
-            <p:cNvPr id="589" name="Google Shape;589;p26"/>
-            <p:cNvSpPr/>
-            <p:nvPr/>
-          </p:nvSpPr>
-          <p:spPr>
-            <a:xfrm>
-              <a:off x="7290111" y="3614205"/>
-              <a:ext cx="1700153" cy="1105786"/>
-            </a:xfrm>
-            <a:prstGeom prst="rect">
-              <a:avLst/>
-            </a:prstGeom>
-            <a:solidFill>
-              <a:srgbClr val="E6AC00"/>
-            </a:solidFill>
-            <a:ln>
-              <a:noFill/>
-            </a:ln>
-          </p:spPr>
-          <p:txBody>
-            <a:bodyPr spcFirstLastPara="1" wrap="square" lIns="91425" tIns="45700" rIns="91425" bIns="45700" anchor="ctr" anchorCtr="0">
-              <a:noAutofit/>
-            </a:bodyPr>
-            <a:lstStyle/>
-            <a:p>
-              <a:pPr lvl="0" algn="ctr">
-                <a:spcBef>
-                  <a:spcPts val="0"/>
-                </a:spcBef>
-                <a:spcAft>
-                  <a:spcPts val="0"/>
-                </a:spcAft>
-                <a:buClr>
-                  <a:srgbClr val="000000"/>
-                </a:buClr>
-                <a:buSzPts val="1400"/>
-              </a:pPr>
-              <a:r>
-                <a:rPr lang="el-GR" b="1" dirty="0"/>
-                <a:t>Ω-</a:t>
-              </a:r>
-              <a:r>
-                <a:rPr lang="de-DE" b="1" dirty="0"/>
-                <a:t>Notation</a:t>
-              </a:r>
-              <a:endParaRPr lang="de-DE" b="1" dirty="0">
-                <a:solidFill>
-                  <a:schemeClr val="lt1"/>
-                </a:solidFill>
-                <a:latin typeface="Twentieth Century"/>
-                <a:ea typeface="Twentieth Century"/>
-                <a:cs typeface="Twentieth Century"/>
-                <a:sym typeface="Twentieth Century"/>
-              </a:endParaRPr>
-            </a:p>
-          </p:txBody>
-        </p:sp>
-        <p:sp>
-          <p:nvSpPr>
-            <p:cNvPr id="590" name="Google Shape;590;p26"/>
-            <p:cNvSpPr/>
-            <p:nvPr/>
-          </p:nvSpPr>
-          <p:spPr>
-            <a:xfrm>
-              <a:off x="7012580" y="3974938"/>
-              <a:ext cx="532515" cy="385780"/>
-            </a:xfrm>
-            <a:prstGeom prst="flowChartCollate">
-              <a:avLst/>
-            </a:prstGeom>
-            <a:solidFill>
-              <a:srgbClr val="E6AC00"/>
-            </a:solidFill>
-            <a:ln>
-              <a:noFill/>
-            </a:ln>
-          </p:spPr>
-          <p:txBody>
-            <a:bodyPr spcFirstLastPara="1" wrap="square" lIns="91425" tIns="45700" rIns="91425" bIns="45700" anchor="ctr" anchorCtr="0">
-              <a:noAutofit/>
-            </a:bodyPr>
-            <a:lstStyle/>
-            <a:p>
-              <a:pPr marL="0" marR="0" lvl="0" indent="0" algn="ctr" rtl="0">
-                <a:lnSpc>
-                  <a:spcPct val="100000"/>
-                </a:lnSpc>
-                <a:spcBef>
-                  <a:spcPts val="0"/>
-                </a:spcBef>
-                <a:spcAft>
-                  <a:spcPts val="0"/>
-                </a:spcAft>
-                <a:buClr>
-                  <a:srgbClr val="000000"/>
-                </a:buClr>
-                <a:buSzPts val="1800"/>
-                <a:buFont typeface="Arial"/>
-                <a:buNone/>
-              </a:pPr>
-              <a:endParaRPr sz="1800" b="0" i="0" u="none" strike="noStrike" cap="none">
-                <a:solidFill>
-                  <a:schemeClr val="dk1"/>
-                </a:solidFill>
-                <a:latin typeface="Twentieth Century"/>
-                <a:ea typeface="Twentieth Century"/>
-                <a:cs typeface="Twentieth Century"/>
-                <a:sym typeface="Twentieth Century"/>
-              </a:endParaRPr>
-            </a:p>
-          </p:txBody>
-        </p:sp>
-        <p:sp>
-          <p:nvSpPr>
-            <p:cNvPr id="591" name="Google Shape;591;p26"/>
-            <p:cNvSpPr/>
-            <p:nvPr/>
-          </p:nvSpPr>
-          <p:spPr>
-            <a:xfrm>
-              <a:off x="7012434" y="3616465"/>
-              <a:ext cx="365760" cy="365760"/>
-            </a:xfrm>
-            <a:prstGeom prst="rect">
-              <a:avLst/>
-            </a:prstGeom>
-            <a:solidFill>
-              <a:srgbClr val="E6AC00"/>
-            </a:solidFill>
-            <a:ln>
-              <a:noFill/>
-            </a:ln>
-          </p:spPr>
-          <p:txBody>
-            <a:bodyPr spcFirstLastPara="1" wrap="square" lIns="91425" tIns="45700" rIns="91425" bIns="45700" anchor="ctr" anchorCtr="0">
-              <a:noAutofit/>
-            </a:bodyPr>
-            <a:lstStyle/>
-            <a:p>
-              <a:pPr marL="0" marR="0" lvl="0" indent="0" algn="ctr" rtl="0">
-                <a:lnSpc>
-                  <a:spcPct val="100000"/>
-                </a:lnSpc>
-                <a:spcBef>
-                  <a:spcPts val="0"/>
-                </a:spcBef>
-                <a:spcAft>
-                  <a:spcPts val="0"/>
-                </a:spcAft>
-                <a:buClr>
-                  <a:srgbClr val="000000"/>
-                </a:buClr>
-                <a:buSzPts val="1800"/>
-                <a:buFont typeface="Arial"/>
-                <a:buNone/>
-              </a:pPr>
-              <a:endParaRPr sz="1800" b="0" i="0" u="none" strike="noStrike" cap="none">
-                <a:solidFill>
-                  <a:schemeClr val="lt1"/>
-                </a:solidFill>
-                <a:latin typeface="Twentieth Century"/>
-                <a:ea typeface="Twentieth Century"/>
-                <a:cs typeface="Twentieth Century"/>
-                <a:sym typeface="Twentieth Century"/>
-              </a:endParaRPr>
-            </a:p>
-          </p:txBody>
-        </p:sp>
-        <p:sp>
-          <p:nvSpPr>
-            <p:cNvPr id="592" name="Google Shape;592;p26"/>
-            <p:cNvSpPr/>
-            <p:nvPr/>
-          </p:nvSpPr>
-          <p:spPr>
-            <a:xfrm>
-              <a:off x="7012434" y="4355283"/>
-              <a:ext cx="365760" cy="365760"/>
-            </a:xfrm>
-            <a:prstGeom prst="rect">
-              <a:avLst/>
-            </a:prstGeom>
-            <a:solidFill>
-              <a:srgbClr val="E6AC00"/>
-            </a:solidFill>
-            <a:ln>
-              <a:noFill/>
-            </a:ln>
-          </p:spPr>
-          <p:txBody>
-            <a:bodyPr spcFirstLastPara="1" wrap="square" lIns="91425" tIns="45700" rIns="91425" bIns="45700" anchor="ctr" anchorCtr="0">
-              <a:noAutofit/>
-            </a:bodyPr>
-            <a:lstStyle/>
-            <a:p>
-              <a:pPr marL="0" marR="0" lvl="0" indent="0" algn="ctr" rtl="0">
-                <a:lnSpc>
-                  <a:spcPct val="100000"/>
-                </a:lnSpc>
-                <a:spcBef>
-                  <a:spcPts val="0"/>
-                </a:spcBef>
-                <a:spcAft>
-                  <a:spcPts val="0"/>
-                </a:spcAft>
-                <a:buClr>
-                  <a:srgbClr val="000000"/>
-                </a:buClr>
-                <a:buSzPts val="1800"/>
-                <a:buFont typeface="Arial"/>
-                <a:buNone/>
-              </a:pPr>
-              <a:endParaRPr sz="1800" b="0" i="0" u="none" strike="noStrike" cap="none">
-                <a:solidFill>
-                  <a:schemeClr val="lt1"/>
-                </a:solidFill>
-                <a:latin typeface="Twentieth Century"/>
-                <a:ea typeface="Twentieth Century"/>
-                <a:cs typeface="Twentieth Century"/>
-                <a:sym typeface="Twentieth Century"/>
-              </a:endParaRPr>
-            </a:p>
-          </p:txBody>
-        </p:sp>
-        <p:sp>
-          <p:nvSpPr>
-            <p:cNvPr id="593" name="Google Shape;593;p26"/>
-            <p:cNvSpPr/>
-            <p:nvPr/>
-          </p:nvSpPr>
-          <p:spPr>
-            <a:xfrm rot="5400000">
-              <a:off x="8961003" y="3993173"/>
-              <a:ext cx="424282" cy="365760"/>
-            </a:xfrm>
-            <a:prstGeom prst="triangle">
-              <a:avLst>
-                <a:gd name="adj" fmla="val 50000"/>
-              </a:avLst>
-            </a:prstGeom>
-            <a:solidFill>
-              <a:srgbClr val="E6AC00"/>
-            </a:solidFill>
-            <a:ln>
-              <a:noFill/>
-            </a:ln>
-          </p:spPr>
-          <p:txBody>
-            <a:bodyPr spcFirstLastPara="1" wrap="square" lIns="91425" tIns="45700" rIns="91425" bIns="45700" anchor="ctr" anchorCtr="0">
-              <a:noAutofit/>
-            </a:bodyPr>
-            <a:lstStyle/>
-            <a:p>
-              <a:pPr marL="0" marR="0" lvl="0" indent="0" algn="ctr" rtl="0">
-                <a:lnSpc>
-                  <a:spcPct val="100000"/>
-                </a:lnSpc>
-                <a:spcBef>
-                  <a:spcPts val="0"/>
-                </a:spcBef>
-                <a:spcAft>
-                  <a:spcPts val="0"/>
-                </a:spcAft>
-                <a:buClr>
-                  <a:srgbClr val="000000"/>
-                </a:buClr>
-                <a:buSzPts val="1800"/>
-                <a:buFont typeface="Arial"/>
-                <a:buNone/>
-              </a:pPr>
-              <a:endParaRPr sz="1800" b="0" i="0" u="none" strike="noStrike" cap="none">
-                <a:solidFill>
-                  <a:schemeClr val="lt1"/>
-                </a:solidFill>
-                <a:latin typeface="Twentieth Century"/>
-                <a:ea typeface="Twentieth Century"/>
-                <a:cs typeface="Twentieth Century"/>
-                <a:sym typeface="Twentieth Century"/>
-              </a:endParaRPr>
-            </a:p>
-          </p:txBody>
-        </p:sp>
-      </p:grpSp>
-      <p:grpSp>
-        <p:nvGrpSpPr>
-          <p:cNvPr id="594" name="Google Shape;594;p26"/>
-          <p:cNvGrpSpPr/>
-          <p:nvPr/>
-        </p:nvGrpSpPr>
-        <p:grpSpPr>
-          <a:xfrm>
-            <a:off x="9802391" y="2306148"/>
-            <a:ext cx="2343590" cy="1106838"/>
-            <a:chOff x="7012434" y="3614205"/>
-            <a:chExt cx="2343590" cy="1106838"/>
-          </a:xfrm>
-        </p:grpSpPr>
-        <p:sp>
-          <p:nvSpPr>
-            <p:cNvPr id="595" name="Google Shape;595;p26"/>
-            <p:cNvSpPr/>
-            <p:nvPr/>
-          </p:nvSpPr>
-          <p:spPr>
-            <a:xfrm>
-              <a:off x="7290111" y="3614205"/>
-              <a:ext cx="1700153" cy="1105786"/>
-            </a:xfrm>
-            <a:prstGeom prst="rect">
-              <a:avLst/>
-            </a:prstGeom>
-            <a:solidFill>
-              <a:schemeClr val="accent4"/>
-            </a:solidFill>
-            <a:ln>
-              <a:noFill/>
-            </a:ln>
-          </p:spPr>
-          <p:txBody>
-            <a:bodyPr spcFirstLastPara="1" wrap="square" lIns="91425" tIns="45700" rIns="91425" bIns="45700" anchor="ctr" anchorCtr="0">
-              <a:noAutofit/>
-            </a:bodyPr>
-            <a:lstStyle/>
-            <a:p>
-              <a:pPr lvl="0" algn="ctr">
-                <a:spcBef>
-                  <a:spcPts val="0"/>
-                </a:spcBef>
-                <a:spcAft>
-                  <a:spcPts val="0"/>
-                </a:spcAft>
-                <a:buClr>
-                  <a:srgbClr val="000000"/>
-                </a:buClr>
-                <a:buSzPts val="1800"/>
-              </a:pPr>
-              <a:r>
-                <a:rPr lang="el-GR" b="1" dirty="0"/>
-                <a:t>Θ-</a:t>
-              </a:r>
-              <a:r>
-                <a:rPr lang="de-DE" b="1" dirty="0"/>
-                <a:t>Notation</a:t>
-              </a:r>
-              <a:endParaRPr lang="de-DE" b="1" dirty="0">
-                <a:solidFill>
-                  <a:schemeClr val="lt1"/>
-                </a:solidFill>
-                <a:latin typeface="Twentieth Century"/>
-                <a:ea typeface="Twentieth Century"/>
-                <a:cs typeface="Twentieth Century"/>
-                <a:sym typeface="Twentieth Century"/>
-              </a:endParaRPr>
-            </a:p>
-          </p:txBody>
-        </p:sp>
-        <p:sp>
-          <p:nvSpPr>
-            <p:cNvPr id="596" name="Google Shape;596;p26"/>
-            <p:cNvSpPr/>
-            <p:nvPr/>
-          </p:nvSpPr>
-          <p:spPr>
-            <a:xfrm>
-              <a:off x="7012580" y="3974938"/>
-              <a:ext cx="532515" cy="385780"/>
-            </a:xfrm>
-            <a:prstGeom prst="flowChartCollate">
-              <a:avLst/>
-            </a:prstGeom>
-            <a:solidFill>
-              <a:schemeClr val="accent4"/>
-            </a:solidFill>
-            <a:ln>
-              <a:noFill/>
-            </a:ln>
-          </p:spPr>
-          <p:txBody>
-            <a:bodyPr spcFirstLastPara="1" wrap="square" lIns="91425" tIns="45700" rIns="91425" bIns="45700" anchor="ctr" anchorCtr="0">
-              <a:noAutofit/>
-            </a:bodyPr>
-            <a:lstStyle/>
-            <a:p>
-              <a:pPr marL="0" marR="0" lvl="0" indent="0" algn="ctr" rtl="0">
-                <a:lnSpc>
-                  <a:spcPct val="100000"/>
-                </a:lnSpc>
-                <a:spcBef>
-                  <a:spcPts val="0"/>
-                </a:spcBef>
-                <a:spcAft>
-                  <a:spcPts val="0"/>
-                </a:spcAft>
-                <a:buClr>
-                  <a:srgbClr val="000000"/>
-                </a:buClr>
-                <a:buSzPts val="1800"/>
-                <a:buFont typeface="Arial"/>
-                <a:buNone/>
-              </a:pPr>
-              <a:endParaRPr sz="1800" b="0" i="0" u="none" strike="noStrike" cap="none">
-                <a:solidFill>
-                  <a:schemeClr val="dk1"/>
-                </a:solidFill>
-                <a:latin typeface="Twentieth Century"/>
-                <a:ea typeface="Twentieth Century"/>
-                <a:cs typeface="Twentieth Century"/>
-                <a:sym typeface="Twentieth Century"/>
-              </a:endParaRPr>
-            </a:p>
-          </p:txBody>
-        </p:sp>
-        <p:sp>
-          <p:nvSpPr>
-            <p:cNvPr id="597" name="Google Shape;597;p26"/>
-            <p:cNvSpPr/>
-            <p:nvPr/>
-          </p:nvSpPr>
-          <p:spPr>
-            <a:xfrm>
-              <a:off x="7012434" y="3616465"/>
-              <a:ext cx="365760" cy="365760"/>
-            </a:xfrm>
-            <a:prstGeom prst="rect">
-              <a:avLst/>
-            </a:prstGeom>
-            <a:solidFill>
-              <a:schemeClr val="accent4"/>
-            </a:solidFill>
-            <a:ln>
-              <a:noFill/>
-            </a:ln>
-          </p:spPr>
-          <p:txBody>
-            <a:bodyPr spcFirstLastPara="1" wrap="square" lIns="91425" tIns="45700" rIns="91425" bIns="45700" anchor="ctr" anchorCtr="0">
-              <a:noAutofit/>
-            </a:bodyPr>
-            <a:lstStyle/>
-            <a:p>
-              <a:pPr marL="0" marR="0" lvl="0" indent="0" algn="ctr" rtl="0">
-                <a:lnSpc>
-                  <a:spcPct val="100000"/>
-                </a:lnSpc>
-                <a:spcBef>
-                  <a:spcPts val="0"/>
-                </a:spcBef>
-                <a:spcAft>
-                  <a:spcPts val="0"/>
-                </a:spcAft>
-                <a:buClr>
-                  <a:srgbClr val="000000"/>
-                </a:buClr>
-                <a:buSzPts val="1800"/>
-                <a:buFont typeface="Arial"/>
-                <a:buNone/>
-              </a:pPr>
-              <a:endParaRPr sz="1800" b="0" i="0" u="none" strike="noStrike" cap="none">
-                <a:solidFill>
-                  <a:schemeClr val="lt1"/>
-                </a:solidFill>
-                <a:latin typeface="Twentieth Century"/>
-                <a:ea typeface="Twentieth Century"/>
-                <a:cs typeface="Twentieth Century"/>
-                <a:sym typeface="Twentieth Century"/>
-              </a:endParaRPr>
-            </a:p>
-          </p:txBody>
-        </p:sp>
-        <p:sp>
-          <p:nvSpPr>
-            <p:cNvPr id="598" name="Google Shape;598;p26"/>
-            <p:cNvSpPr/>
-            <p:nvPr/>
-          </p:nvSpPr>
-          <p:spPr>
-            <a:xfrm>
-              <a:off x="7012434" y="4355283"/>
-              <a:ext cx="365760" cy="365760"/>
-            </a:xfrm>
-            <a:prstGeom prst="rect">
-              <a:avLst/>
-            </a:prstGeom>
-            <a:solidFill>
-              <a:schemeClr val="accent4"/>
-            </a:solidFill>
-            <a:ln>
-              <a:noFill/>
-            </a:ln>
-          </p:spPr>
-          <p:txBody>
-            <a:bodyPr spcFirstLastPara="1" wrap="square" lIns="91425" tIns="45700" rIns="91425" bIns="45700" anchor="ctr" anchorCtr="0">
-              <a:noAutofit/>
-            </a:bodyPr>
-            <a:lstStyle/>
-            <a:p>
-              <a:pPr marL="0" marR="0" lvl="0" indent="0" algn="ctr" rtl="0">
-                <a:lnSpc>
-                  <a:spcPct val="100000"/>
-                </a:lnSpc>
-                <a:spcBef>
-                  <a:spcPts val="0"/>
-                </a:spcBef>
-                <a:spcAft>
-                  <a:spcPts val="0"/>
-                </a:spcAft>
-                <a:buClr>
-                  <a:srgbClr val="000000"/>
-                </a:buClr>
-                <a:buSzPts val="1800"/>
-                <a:buFont typeface="Arial"/>
-                <a:buNone/>
-              </a:pPr>
-              <a:endParaRPr sz="1800" b="0" i="0" u="none" strike="noStrike" cap="none">
-                <a:solidFill>
-                  <a:schemeClr val="lt1"/>
-                </a:solidFill>
-                <a:latin typeface="Twentieth Century"/>
-                <a:ea typeface="Twentieth Century"/>
-                <a:cs typeface="Twentieth Century"/>
-                <a:sym typeface="Twentieth Century"/>
-              </a:endParaRPr>
-            </a:p>
-          </p:txBody>
-        </p:sp>
-        <p:sp>
-          <p:nvSpPr>
-            <p:cNvPr id="599" name="Google Shape;599;p26"/>
-            <p:cNvSpPr/>
-            <p:nvPr/>
-          </p:nvSpPr>
-          <p:spPr>
-            <a:xfrm rot="5400000">
-              <a:off x="8961003" y="3993173"/>
-              <a:ext cx="424282" cy="365760"/>
-            </a:xfrm>
-            <a:prstGeom prst="triangle">
-              <a:avLst>
-                <a:gd name="adj" fmla="val 50000"/>
-              </a:avLst>
-            </a:prstGeom>
-            <a:solidFill>
-              <a:schemeClr val="accent4"/>
-            </a:solidFill>
-            <a:ln>
-              <a:noFill/>
-            </a:ln>
-          </p:spPr>
-          <p:txBody>
-            <a:bodyPr spcFirstLastPara="1" wrap="square" lIns="91425" tIns="45700" rIns="91425" bIns="45700" anchor="ctr" anchorCtr="0">
-              <a:noAutofit/>
-            </a:bodyPr>
-            <a:lstStyle/>
-            <a:p>
-              <a:pPr marL="0" marR="0" lvl="0" indent="0" algn="ctr" rtl="0">
-                <a:lnSpc>
-                  <a:spcPct val="100000"/>
-                </a:lnSpc>
-                <a:spcBef>
-                  <a:spcPts val="0"/>
-                </a:spcBef>
-                <a:spcAft>
-                  <a:spcPts val="0"/>
-                </a:spcAft>
-                <a:buClr>
-                  <a:srgbClr val="000000"/>
-                </a:buClr>
-                <a:buSzPts val="1800"/>
-                <a:buFont typeface="Arial"/>
-                <a:buNone/>
-              </a:pPr>
-              <a:endParaRPr sz="1800" b="0" i="0" u="none" strike="noStrike" cap="none">
-                <a:solidFill>
-                  <a:schemeClr val="lt1"/>
-                </a:solidFill>
-                <a:latin typeface="Twentieth Century"/>
-                <a:ea typeface="Twentieth Century"/>
-                <a:cs typeface="Twentieth Century"/>
-                <a:sym typeface="Twentieth Century"/>
-              </a:endParaRPr>
-            </a:p>
-          </p:txBody>
-        </p:sp>
-      </p:grpSp>
-      <p:sp>
-        <p:nvSpPr>
-          <p:cNvPr id="600" name="Google Shape;600;p26"/>
-          <p:cNvSpPr txBox="1"/>
-          <p:nvPr/>
-        </p:nvSpPr>
-        <p:spPr>
-          <a:xfrm>
-            <a:off x="11349728" y="1700485"/>
-            <a:ext cx="840295" cy="461665"/>
-          </a:xfrm>
-          <a:prstGeom prst="rect">
-            <a:avLst/>
-          </a:prstGeom>
-          <a:noFill/>
-          <a:ln>
-            <a:noFill/>
-          </a:ln>
-        </p:spPr>
-        <p:txBody>
-          <a:bodyPr spcFirstLastPara="1" wrap="square" lIns="91425" tIns="45700" rIns="91425" bIns="45700" anchor="t" anchorCtr="0">
-            <a:spAutoFit/>
-          </a:bodyPr>
-          <a:lstStyle/>
-          <a:p>
-            <a:pPr marL="0" marR="0" lvl="0" indent="0" algn="l" rtl="0">
-              <a:lnSpc>
-                <a:spcPct val="100000"/>
-              </a:lnSpc>
-              <a:spcBef>
-                <a:spcPts val="0"/>
-              </a:spcBef>
-              <a:spcAft>
-                <a:spcPts val="0"/>
-              </a:spcAft>
-              <a:buClr>
-                <a:srgbClr val="000000"/>
-              </a:buClr>
-              <a:buSzPts val="2400"/>
-              <a:buFont typeface="Arial"/>
-              <a:buNone/>
-            </a:pPr>
-            <a:r>
-              <a:rPr lang="en-US" sz="2400" b="0" i="0" u="none" strike="noStrike" cap="none">
-                <a:solidFill>
-                  <a:schemeClr val="dk1"/>
-                </a:solidFill>
-                <a:latin typeface="Calibri"/>
-                <a:ea typeface="Calibri"/>
-                <a:cs typeface="Calibri"/>
-                <a:sym typeface="Calibri"/>
-              </a:rPr>
-              <a:t>O(n)</a:t>
-            </a:r>
-            <a:endParaRPr sz="1400" b="0" i="0" u="none" strike="noStrike" cap="none">
-              <a:solidFill>
-                <a:srgbClr val="000000"/>
-              </a:solidFill>
-              <a:latin typeface="Arial"/>
-              <a:ea typeface="Arial"/>
-              <a:cs typeface="Arial"/>
-              <a:sym typeface="Arial"/>
-            </a:endParaRPr>
-          </a:p>
-        </p:txBody>
-      </p:sp>
-      <p:sp>
-        <p:nvSpPr>
-          <p:cNvPr id="601" name="Google Shape;601;p26"/>
-          <p:cNvSpPr txBox="1"/>
-          <p:nvPr/>
-        </p:nvSpPr>
-        <p:spPr>
-          <a:xfrm>
-            <a:off x="11377186" y="4375642"/>
-            <a:ext cx="845103" cy="461665"/>
-          </a:xfrm>
-          <a:prstGeom prst="rect">
-            <a:avLst/>
-          </a:prstGeom>
-          <a:blipFill rotWithShape="1">
-            <a:blip r:embed="rId3">
-              <a:alphaModFix/>
-            </a:blip>
-            <a:stretch>
-              <a:fillRect l="-1469" t="-7892" b="-26310"/>
-            </a:stretch>
-          </a:blipFill>
-          <a:ln>
-            <a:noFill/>
-          </a:ln>
-        </p:spPr>
-        <p:txBody>
-          <a:bodyPr spcFirstLastPara="1" wrap="square" lIns="91425" tIns="45700" rIns="91425" bIns="45700" anchor="t" anchorCtr="0">
-            <a:noAutofit/>
-          </a:bodyPr>
-          <a:lstStyle/>
-          <a:p>
-            <a:pPr marL="0" marR="0" lvl="0" indent="0" algn="l" rtl="0">
-              <a:lnSpc>
-                <a:spcPct val="100000"/>
-              </a:lnSpc>
-              <a:spcBef>
-                <a:spcPts val="0"/>
-              </a:spcBef>
-              <a:spcAft>
-                <a:spcPts val="0"/>
-              </a:spcAft>
-              <a:buClr>
-                <a:srgbClr val="000000"/>
-              </a:buClr>
-              <a:buSzPts val="1800"/>
-              <a:buFont typeface="Arial"/>
-              <a:buNone/>
-            </a:pPr>
-            <a:r>
-              <a:rPr lang="en-US" sz="1800" b="0" i="0" u="none" strike="noStrike" cap="none" dirty="0">
-                <a:solidFill>
-                  <a:srgbClr val="000000"/>
-                </a:solidFill>
-                <a:latin typeface="Twentieth Century"/>
-                <a:ea typeface="Twentieth Century"/>
-                <a:cs typeface="Twentieth Century"/>
-                <a:sym typeface="Twentieth Century"/>
-              </a:rPr>
-              <a:t> </a:t>
-            </a:r>
-            <a:endParaRPr sz="1400" b="0" i="0" u="none" strike="noStrike" cap="none" dirty="0">
-              <a:solidFill>
-                <a:srgbClr val="000000"/>
-              </a:solidFill>
-              <a:latin typeface="Arial"/>
-              <a:ea typeface="Arial"/>
-              <a:cs typeface="Arial"/>
-              <a:sym typeface="Arial"/>
-            </a:endParaRPr>
-          </a:p>
-        </p:txBody>
-      </p:sp>
-      <p:sp>
-        <p:nvSpPr>
-          <p:cNvPr id="602" name="Google Shape;602;p26"/>
-          <p:cNvSpPr txBox="1"/>
-          <p:nvPr/>
-        </p:nvSpPr>
-        <p:spPr>
-          <a:xfrm>
-            <a:off x="11349728" y="3063078"/>
-            <a:ext cx="862653" cy="461665"/>
-          </a:xfrm>
-          <a:prstGeom prst="rect">
-            <a:avLst/>
-          </a:prstGeom>
-          <a:noFill/>
-          <a:ln>
-            <a:noFill/>
-          </a:ln>
-        </p:spPr>
-        <p:txBody>
-          <a:bodyPr spcFirstLastPara="1" wrap="square" lIns="91425" tIns="45700" rIns="91425" bIns="45700" anchor="t" anchorCtr="0">
-            <a:spAutoFit/>
-          </a:bodyPr>
-          <a:lstStyle/>
-          <a:p>
-            <a:pPr marL="0" marR="0" lvl="0" indent="0" algn="l" rtl="0">
-              <a:lnSpc>
-                <a:spcPct val="100000"/>
-              </a:lnSpc>
-              <a:spcBef>
-                <a:spcPts val="0"/>
-              </a:spcBef>
-              <a:spcAft>
-                <a:spcPts val="0"/>
-              </a:spcAft>
-              <a:buClr>
-                <a:srgbClr val="000000"/>
-              </a:buClr>
-              <a:buSzPts val="2400"/>
-              <a:buFont typeface="Arial"/>
-              <a:buNone/>
-            </a:pPr>
-            <a:r>
-              <a:rPr lang="en-US" sz="2400" b="0" i="0" u="none" strike="noStrike" cap="none">
-                <a:solidFill>
-                  <a:schemeClr val="dk1"/>
-                </a:solidFill>
-                <a:latin typeface="Calibri"/>
-                <a:ea typeface="Calibri"/>
-                <a:cs typeface="Calibri"/>
-                <a:sym typeface="Calibri"/>
-              </a:rPr>
-              <a:t>Θ(n)</a:t>
-            </a:r>
-            <a:endParaRPr sz="1400" b="0" i="0" u="none" strike="noStrike" cap="none">
-              <a:solidFill>
-                <a:srgbClr val="000000"/>
-              </a:solidFill>
-              <a:latin typeface="Arial"/>
-              <a:ea typeface="Arial"/>
-              <a:cs typeface="Arial"/>
-              <a:sym typeface="Arial"/>
-            </a:endParaRPr>
-          </a:p>
-        </p:txBody>
-      </p:sp>
-      <p:sp>
-        <p:nvSpPr>
-          <p:cNvPr id="603" name="Google Shape;603;p26"/>
-          <p:cNvSpPr txBox="1"/>
-          <p:nvPr/>
-        </p:nvSpPr>
-        <p:spPr>
-          <a:xfrm>
-            <a:off x="5715720" y="4886865"/>
-            <a:ext cx="5477055" cy="923289"/>
-          </a:xfrm>
-          <a:prstGeom prst="rect">
-            <a:avLst/>
-          </a:prstGeom>
-          <a:noFill/>
-          <a:ln>
-            <a:noFill/>
-          </a:ln>
-        </p:spPr>
-        <p:txBody>
-          <a:bodyPr spcFirstLastPara="1" wrap="square" lIns="91425" tIns="45700" rIns="91425" bIns="45700" anchor="t" anchorCtr="0">
-            <a:spAutoFit/>
-          </a:bodyPr>
-          <a:lstStyle/>
-          <a:p>
-            <a:pPr lvl="0">
-              <a:spcBef>
-                <a:spcPts val="0"/>
-              </a:spcBef>
-              <a:spcAft>
-                <a:spcPts val="0"/>
-              </a:spcAft>
-              <a:buClr>
-                <a:srgbClr val="000000"/>
-              </a:buClr>
-              <a:buSzPts val="2400"/>
-            </a:pPr>
-            <a:r>
-              <a:rPr lang="de-DE" dirty="0">
-                <a:solidFill>
-                  <a:schemeClr val="dk1"/>
-                </a:solidFill>
-                <a:latin typeface="+mj-lt"/>
-                <a:ea typeface="Calibri"/>
-                <a:cs typeface="Calibri"/>
-                <a:sym typeface="Calibri"/>
-              </a:rPr>
-              <a:t>Wir haben gerade dieses Werkzeug fertiggestellt, um eine Funktion anhand einiger nützlicher Schranken zu charakterisieren!</a:t>
-            </a:r>
-            <a:endParaRPr b="0" i="0" u="none" strike="noStrike" cap="none" dirty="0">
-              <a:solidFill>
-                <a:srgbClr val="000000"/>
-              </a:solidFill>
-              <a:latin typeface="+mj-lt"/>
-              <a:ea typeface="Arial"/>
-              <a:cs typeface="Arial"/>
-              <a:sym typeface="Arial"/>
-            </a:endParaRPr>
-          </a:p>
-        </p:txBody>
-      </p:sp>
-      <p:sp>
-        <p:nvSpPr>
-          <p:cNvPr id="604" name="Google Shape;604;p26"/>
-          <p:cNvSpPr txBox="1"/>
-          <p:nvPr/>
-        </p:nvSpPr>
-        <p:spPr>
-          <a:xfrm>
-            <a:off x="661599" y="4886865"/>
-            <a:ext cx="4550819" cy="923289"/>
-          </a:xfrm>
-          <a:prstGeom prst="rect">
-            <a:avLst/>
-          </a:prstGeom>
-          <a:noFill/>
-          <a:ln>
-            <a:noFill/>
-          </a:ln>
-        </p:spPr>
-        <p:txBody>
-          <a:bodyPr spcFirstLastPara="1" wrap="square" lIns="91425" tIns="45700" rIns="91425" bIns="45700" anchor="t" anchorCtr="0">
-            <a:spAutoFit/>
-          </a:bodyPr>
-          <a:lstStyle/>
-          <a:p>
-            <a:pPr lvl="0">
-              <a:spcBef>
-                <a:spcPts val="0"/>
-              </a:spcBef>
-              <a:spcAft>
-                <a:spcPts val="0"/>
-              </a:spcAft>
-              <a:buClr>
-                <a:srgbClr val="000000"/>
-              </a:buClr>
-              <a:buSzPts val="2400"/>
-            </a:pPr>
-            <a:r>
-              <a:rPr lang="de-DE" dirty="0">
-                <a:solidFill>
-                  <a:schemeClr val="dk1"/>
-                </a:solidFill>
-                <a:latin typeface="+mj-lt"/>
-                <a:ea typeface="Calibri"/>
-                <a:cs typeface="Calibri"/>
-                <a:sym typeface="Calibri"/>
-              </a:rPr>
-              <a:t>Schauen wir uns dieses Werkzeug nun genauer an. Wie genau kommen wir zu dieser Funktion?</a:t>
-            </a:r>
-            <a:endParaRPr b="0" i="0" u="none" strike="noStrike" cap="none" dirty="0">
-              <a:solidFill>
-                <a:srgbClr val="000000"/>
-              </a:solidFill>
-              <a:latin typeface="+mj-lt"/>
-              <a:ea typeface="Arial"/>
-              <a:cs typeface="Arial"/>
-              <a:sym typeface="Arial"/>
-            </a:endParaRPr>
-          </a:p>
-        </p:txBody>
-      </p:sp>
-      <p:cxnSp>
-        <p:nvCxnSpPr>
-          <p:cNvPr id="605" name="Google Shape;605;p26"/>
-          <p:cNvCxnSpPr>
-            <a:cxnSpLocks/>
-          </p:cNvCxnSpPr>
-          <p:nvPr/>
-        </p:nvCxnSpPr>
-        <p:spPr>
-          <a:xfrm flipH="1">
-            <a:off x="7900090" y="4285728"/>
-            <a:ext cx="698" cy="551579"/>
-          </a:xfrm>
-          <a:prstGeom prst="straightConnector1">
-            <a:avLst/>
-          </a:prstGeom>
-          <a:noFill/>
-          <a:ln w="57150" cap="flat" cmpd="sng">
-            <a:solidFill>
-              <a:srgbClr val="4C3282"/>
-            </a:solidFill>
-            <a:prstDash val="solid"/>
-            <a:round/>
-            <a:headEnd type="none" w="sm" len="sm"/>
-            <a:tailEnd type="none" w="sm" len="sm"/>
-          </a:ln>
-        </p:spPr>
-      </p:cxnSp>
-      <p:cxnSp>
-        <p:nvCxnSpPr>
-          <p:cNvPr id="606" name="Google Shape;606;p26"/>
-          <p:cNvCxnSpPr>
-            <a:cxnSpLocks/>
-          </p:cNvCxnSpPr>
-          <p:nvPr/>
-        </p:nvCxnSpPr>
-        <p:spPr>
-          <a:xfrm>
-            <a:off x="3125875" y="3605978"/>
-            <a:ext cx="0" cy="1231329"/>
-          </a:xfrm>
-          <a:prstGeom prst="straightConnector1">
-            <a:avLst/>
-          </a:prstGeom>
-          <a:noFill/>
-          <a:ln w="57150" cap="flat" cmpd="sng">
-            <a:solidFill>
-              <a:srgbClr val="4C3282"/>
-            </a:solidFill>
-            <a:prstDash val="solid"/>
-            <a:round/>
-            <a:headEnd type="none" w="sm" len="sm"/>
-            <a:tailEnd type="none" w="sm" len="sm"/>
-          </a:ln>
-        </p:spPr>
-      </p:cxnSp>
-      <p:sp>
-        <p:nvSpPr>
-          <p:cNvPr id="5" name="Titel 4">
-            <a:extLst>
-              <a:ext uri="{FF2B5EF4-FFF2-40B4-BE49-F238E27FC236}">
-                <a16:creationId xmlns:a16="http://schemas.microsoft.com/office/drawing/2014/main" id="{E642F3E5-05DE-44F9-869F-E8B20341141A}"/>
-              </a:ext>
-            </a:extLst>
-          </p:cNvPr>
-          <p:cNvSpPr>
-            <a:spLocks noGrp="1"/>
-          </p:cNvSpPr>
-          <p:nvPr>
-            <p:ph type="title"/>
-          </p:nvPr>
-        </p:nvSpPr>
-        <p:spPr/>
-        <p:txBody>
-          <a:bodyPr/>
-          <a:lstStyle/>
-          <a:p>
-            <a:r>
-              <a:rPr lang="de-DE" noProof="0" dirty="0"/>
-              <a:t>Analyse von Algorithmen</a:t>
-            </a:r>
-          </a:p>
-        </p:txBody>
-      </p:sp>
-      <p:sp>
-        <p:nvSpPr>
-          <p:cNvPr id="65" name="Google Shape;257;p13">
-            <a:extLst>
-              <a:ext uri="{FF2B5EF4-FFF2-40B4-BE49-F238E27FC236}">
-                <a16:creationId xmlns:a16="http://schemas.microsoft.com/office/drawing/2014/main" id="{5B2E0C48-0BFC-43A7-B0EE-62CDC60B704D}"/>
-              </a:ext>
-            </a:extLst>
-          </p:cNvPr>
-          <p:cNvSpPr txBox="1">
-            <a:spLocks/>
-          </p:cNvSpPr>
-          <p:nvPr/>
-        </p:nvSpPr>
-        <p:spPr>
-          <a:xfrm>
-            <a:off x="6881091" y="6349134"/>
-            <a:ext cx="2812473" cy="219798"/>
-          </a:xfrm>
-          <a:prstGeom prst="rect">
-            <a:avLst/>
-          </a:prstGeom>
-          <a:noFill/>
-          <a:ln>
-            <a:noFill/>
-          </a:ln>
-        </p:spPr>
-        <p:txBody>
-          <a:bodyPr spcFirstLastPara="1" wrap="square" lIns="91425" tIns="45700" rIns="91425" bIns="45700" anchor="ctr" anchorCtr="0">
-            <a:noAutofit/>
-          </a:bodyPr>
-          <a:lstStyle>
-            <a:defPPr>
-              <a:defRPr lang="de-DE"/>
-            </a:defPPr>
-            <a:lvl1pPr algn="l" defTabSz="457200" rtl="0" fontAlgn="base">
-              <a:spcBef>
-                <a:spcPct val="0"/>
-              </a:spcBef>
-              <a:spcAft>
-                <a:spcPct val="0"/>
-              </a:spcAft>
-              <a:defRPr kern="1200">
-                <a:solidFill>
-                  <a:schemeClr val="tx1"/>
-                </a:solidFill>
-                <a:latin typeface="Arial" pitchFamily="34" charset="0"/>
-                <a:ea typeface="+mn-ea"/>
-                <a:cs typeface="Arial" pitchFamily="34" charset="0"/>
-              </a:defRPr>
-            </a:lvl1pPr>
-            <a:lvl2pPr marL="457200" algn="l" defTabSz="457200" rtl="0" fontAlgn="base">
-              <a:spcBef>
-                <a:spcPct val="0"/>
-              </a:spcBef>
-              <a:spcAft>
-                <a:spcPct val="0"/>
-              </a:spcAft>
-              <a:defRPr kern="1200">
-                <a:solidFill>
-                  <a:schemeClr val="tx1"/>
-                </a:solidFill>
-                <a:latin typeface="Arial" pitchFamily="34" charset="0"/>
-                <a:ea typeface="+mn-ea"/>
-                <a:cs typeface="Arial" pitchFamily="34" charset="0"/>
-              </a:defRPr>
-            </a:lvl2pPr>
-            <a:lvl3pPr marL="914400" algn="l" defTabSz="457200" rtl="0" fontAlgn="base">
-              <a:spcBef>
-                <a:spcPct val="0"/>
-              </a:spcBef>
-              <a:spcAft>
-                <a:spcPct val="0"/>
-              </a:spcAft>
-              <a:defRPr kern="1200">
-                <a:solidFill>
-                  <a:schemeClr val="tx1"/>
-                </a:solidFill>
-                <a:latin typeface="Arial" pitchFamily="34" charset="0"/>
-                <a:ea typeface="+mn-ea"/>
-                <a:cs typeface="Arial" pitchFamily="34" charset="0"/>
-              </a:defRPr>
-            </a:lvl3pPr>
-            <a:lvl4pPr marL="1371600" algn="l" defTabSz="457200" rtl="0" fontAlgn="base">
-              <a:spcBef>
-                <a:spcPct val="0"/>
-              </a:spcBef>
-              <a:spcAft>
-                <a:spcPct val="0"/>
-              </a:spcAft>
-              <a:defRPr kern="1200">
-                <a:solidFill>
-                  <a:schemeClr val="tx1"/>
-                </a:solidFill>
-                <a:latin typeface="Arial" pitchFamily="34" charset="0"/>
-                <a:ea typeface="+mn-ea"/>
-                <a:cs typeface="Arial" pitchFamily="34" charset="0"/>
-              </a:defRPr>
-            </a:lvl4pPr>
-            <a:lvl5pPr marL="1828800" algn="l" defTabSz="457200" rtl="0" fontAlgn="base">
-              <a:spcBef>
-                <a:spcPct val="0"/>
-              </a:spcBef>
-              <a:spcAft>
-                <a:spcPct val="0"/>
-              </a:spcAft>
-              <a:defRPr kern="1200">
-                <a:solidFill>
-                  <a:schemeClr val="tx1"/>
-                </a:solidFill>
-                <a:latin typeface="Arial" pitchFamily="34" charset="0"/>
-                <a:ea typeface="+mn-ea"/>
-                <a:cs typeface="Arial" pitchFamily="34" charset="0"/>
-              </a:defRPr>
-            </a:lvl5pPr>
-            <a:lvl6pPr marL="2286000" algn="l" defTabSz="914400" rtl="0" eaLnBrk="1" latinLnBrk="0" hangingPunct="1">
-              <a:defRPr kern="1200">
-                <a:solidFill>
-                  <a:schemeClr val="tx1"/>
-                </a:solidFill>
-                <a:latin typeface="Arial" pitchFamily="34" charset="0"/>
-                <a:ea typeface="+mn-ea"/>
-                <a:cs typeface="Arial" pitchFamily="34" charset="0"/>
-              </a:defRPr>
-            </a:lvl6pPr>
-            <a:lvl7pPr marL="2743200" algn="l" defTabSz="914400" rtl="0" eaLnBrk="1" latinLnBrk="0" hangingPunct="1">
-              <a:defRPr kern="1200">
-                <a:solidFill>
-                  <a:schemeClr val="tx1"/>
-                </a:solidFill>
-                <a:latin typeface="Arial" pitchFamily="34" charset="0"/>
-                <a:ea typeface="+mn-ea"/>
-                <a:cs typeface="Arial" pitchFamily="34" charset="0"/>
-              </a:defRPr>
-            </a:lvl7pPr>
-            <a:lvl8pPr marL="3200400" algn="l" defTabSz="914400" rtl="0" eaLnBrk="1" latinLnBrk="0" hangingPunct="1">
-              <a:defRPr kern="1200">
-                <a:solidFill>
-                  <a:schemeClr val="tx1"/>
-                </a:solidFill>
-                <a:latin typeface="Arial" pitchFamily="34" charset="0"/>
-                <a:ea typeface="+mn-ea"/>
-                <a:cs typeface="Arial" pitchFamily="34" charset="0"/>
-              </a:defRPr>
-            </a:lvl8pPr>
-            <a:lvl9pPr marL="3657600" algn="l" defTabSz="914400" rtl="0" eaLnBrk="1" latinLnBrk="0" hangingPunct="1">
-              <a:defRPr kern="1200">
-                <a:solidFill>
-                  <a:schemeClr val="tx1"/>
-                </a:solidFill>
-                <a:latin typeface="Arial" pitchFamily="34" charset="0"/>
-                <a:ea typeface="+mn-ea"/>
-                <a:cs typeface="Arial" pitchFamily="34" charset="0"/>
-              </a:defRPr>
-            </a:lvl9pPr>
-          </a:lstStyle>
-          <a:p>
-            <a:pPr algn="r">
-              <a:spcBef>
-                <a:spcPts val="0"/>
-              </a:spcBef>
-              <a:spcAft>
-                <a:spcPts val="0"/>
-              </a:spcAft>
-            </a:pPr>
-            <a:r>
-              <a:rPr lang="fr-FR" sz="800" dirty="0"/>
-              <a:t>Quelle: Data Structures and </a:t>
-            </a:r>
-            <a:r>
-              <a:rPr lang="fr-FR" sz="800" dirty="0" err="1"/>
-              <a:t>Algorithms</a:t>
-            </a:r>
-            <a:r>
-              <a:rPr lang="fr-FR" sz="800" dirty="0"/>
-              <a:t> (CSE 373), University of Washington, Spring 2022</a:t>
-            </a:r>
-          </a:p>
-        </p:txBody>
-      </p:sp>
-      <p:sp>
-        <p:nvSpPr>
-          <p:cNvPr id="68" name="Datumsplatzhalter 4">
-            <a:extLst>
-              <a:ext uri="{FF2B5EF4-FFF2-40B4-BE49-F238E27FC236}">
-                <a16:creationId xmlns:a16="http://schemas.microsoft.com/office/drawing/2014/main" id="{64EDBB06-6632-4697-912B-2FABD050E425}"/>
-              </a:ext>
-            </a:extLst>
-          </p:cNvPr>
-          <p:cNvSpPr>
-            <a:spLocks noGrp="1"/>
-          </p:cNvSpPr>
-          <p:nvPr>
-            <p:ph type="dt" sz="half" idx="14"/>
-          </p:nvPr>
-        </p:nvSpPr>
-        <p:spPr>
-          <a:xfrm>
-            <a:off x="1206500" y="6011863"/>
-            <a:ext cx="1295400" cy="179387"/>
-          </a:xfrm>
-        </p:spPr>
-        <p:txBody>
-          <a:bodyPr/>
-          <a:lstStyle/>
-          <a:p>
-            <a:fld id="{F2D06E3F-368B-43DC-96F3-4B8E65027050}" type="datetime1">
-              <a:rPr lang="de-DE" smtClean="0"/>
-              <a:pPr/>
-              <a:t>09.01.2026</a:t>
-            </a:fld>
-            <a:endParaRPr lang="de-DE" dirty="0"/>
-          </a:p>
-        </p:txBody>
-      </p:sp>
-      <p:sp>
-        <p:nvSpPr>
-          <p:cNvPr id="69" name="Foliennummernplatzhalter 5">
-            <a:extLst>
-              <a:ext uri="{FF2B5EF4-FFF2-40B4-BE49-F238E27FC236}">
-                <a16:creationId xmlns:a16="http://schemas.microsoft.com/office/drawing/2014/main" id="{7CAE0784-6486-4B55-8D34-1DBF71301261}"/>
-              </a:ext>
-            </a:extLst>
-          </p:cNvPr>
-          <p:cNvSpPr>
-            <a:spLocks noGrp="1"/>
-          </p:cNvSpPr>
-          <p:nvPr>
-            <p:ph type="sldNum" sz="quarter" idx="15"/>
-          </p:nvPr>
-        </p:nvSpPr>
-        <p:spPr>
-          <a:xfrm>
-            <a:off x="1206500" y="6361113"/>
-            <a:ext cx="1295400" cy="214312"/>
-          </a:xfrm>
-        </p:spPr>
-        <p:txBody>
-          <a:bodyPr/>
-          <a:lstStyle/>
-          <a:p>
-            <a:r>
-              <a:rPr lang="de-DE" dirty="0"/>
-              <a:t>Seite </a:t>
-            </a:r>
-            <a:fld id="{43310F81-32EE-4F95-9E9C-0BDC6AD52EEC}" type="slidenum">
-              <a:rPr lang="de-DE" smtClean="0"/>
-              <a:pPr/>
-              <a:t>8</a:t>
-            </a:fld>
-            <a:endParaRPr lang="de-DE" dirty="0"/>
-          </a:p>
-        </p:txBody>
-      </p:sp>
-    </p:spTree>
-  </p:cSld>
-  <p:clrMapOvr>
-    <a:masterClrMapping/>
-  </p:clrMapOvr>
-  <p:timing>
-    <p:tnLst>
-      <p:par>
-        <p:cTn id="1" dur="indefinite" restart="never" nodeType="tmRoot">
-          <p:childTnLst>
-            <p:seq concurrent="1" nextAc="seek">
-              <p:cTn id="2" dur="indefinite" nodeType="mainSeq">
-                <p:childTnLst>
-                  <p:par>
-                    <p:cTn id="3" fill="hold">
-                      <p:stCondLst>
-                        <p:cond delay="indefinite"/>
-                      </p:stCondLst>
-                      <p:childTnLst>
-                        <p:par>
-                          <p:cTn id="4" fill="hold">
-                            <p:stCondLst>
-                              <p:cond delay="0"/>
-                            </p:stCondLst>
-                            <p:childTnLst>
-                              <p:par>
-                                <p:cTn id="5" presetID="1" presetClass="entr" presetSubtype="0" fill="hold" nodeType="clickEffect">
-                                  <p:stCondLst>
-                                    <p:cond delay="0"/>
-                                  </p:stCondLst>
-                                  <p:childTnLst>
-                                    <p:set>
-                                      <p:cBhvr>
-                                        <p:cTn id="6" dur="1" fill="hold">
-                                          <p:stCondLst>
-                                            <p:cond delay="0"/>
-                                          </p:stCondLst>
-                                        </p:cTn>
-                                        <p:tgtEl>
-                                          <p:spTgt spid="603"/>
-                                        </p:tgtEl>
-                                        <p:attrNameLst>
-                                          <p:attrName>style.visibility</p:attrName>
-                                        </p:attrNameLst>
-                                      </p:cBhvr>
-                                      <p:to>
-                                        <p:strVal val="visible"/>
-                                      </p:to>
-                                    </p:set>
-                                  </p:childTnLst>
-                                </p:cTn>
-                              </p:par>
-                              <p:par>
-                                <p:cTn id="7" presetID="1" presetClass="entr" presetSubtype="0" fill="hold" nodeType="withEffect">
-                                  <p:stCondLst>
-                                    <p:cond delay="0"/>
-                                  </p:stCondLst>
-                                  <p:childTnLst>
-                                    <p:set>
-                                      <p:cBhvr>
-                                        <p:cTn id="8" dur="1" fill="hold">
-                                          <p:stCondLst>
-                                            <p:cond delay="0"/>
-                                          </p:stCondLst>
-                                        </p:cTn>
-                                        <p:tgtEl>
-                                          <p:spTgt spid="605"/>
-                                        </p:tgtEl>
-                                        <p:attrNameLst>
-                                          <p:attrName>style.visibility</p:attrName>
-                                        </p:attrNameLst>
-                                      </p:cBhvr>
-                                      <p:to>
-                                        <p:strVal val="visible"/>
-                                      </p:to>
-                                    </p:set>
-                                  </p:childTnLst>
-                                </p:cTn>
-                              </p:par>
-                            </p:childTnLst>
-                          </p:cTn>
-                        </p:par>
-                      </p:childTnLst>
-                    </p:cTn>
-                  </p:par>
-                  <p:par>
-                    <p:cTn id="9" fill="hold">
-                      <p:stCondLst>
-                        <p:cond delay="indefinite"/>
-                      </p:stCondLst>
-                      <p:childTnLst>
-                        <p:par>
-                          <p:cTn id="10" fill="hold">
-                            <p:stCondLst>
-                              <p:cond delay="0"/>
-                            </p:stCondLst>
-                            <p:childTnLst>
-                              <p:par>
-                                <p:cTn id="11" presetID="1" presetClass="entr" presetSubtype="0" fill="hold" nodeType="clickEffect">
-                                  <p:stCondLst>
-                                    <p:cond delay="0"/>
-                                  </p:stCondLst>
-                                  <p:childTnLst>
-                                    <p:set>
-                                      <p:cBhvr>
-                                        <p:cTn id="12" dur="1" fill="hold">
-                                          <p:stCondLst>
-                                            <p:cond delay="0"/>
-                                          </p:stCondLst>
-                                        </p:cTn>
-                                        <p:tgtEl>
-                                          <p:spTgt spid="606"/>
-                                        </p:tgtEl>
-                                        <p:attrNameLst>
-                                          <p:attrName>style.visibility</p:attrName>
-                                        </p:attrNameLst>
-                                      </p:cBhvr>
-                                      <p:to>
-                                        <p:strVal val="visible"/>
-                                      </p:to>
-                                    </p:set>
-                                  </p:childTnLst>
-                                </p:cTn>
-                              </p:par>
-                              <p:par>
-                                <p:cTn id="13" presetID="1" presetClass="entr" presetSubtype="0" fill="hold" nodeType="withEffect">
-                                  <p:stCondLst>
-                                    <p:cond delay="0"/>
-                                  </p:stCondLst>
-                                  <p:childTnLst>
-                                    <p:set>
-                                      <p:cBhvr>
-                                        <p:cTn id="14" dur="1" fill="hold">
-                                          <p:stCondLst>
-                                            <p:cond delay="0"/>
-                                          </p:stCondLst>
-                                        </p:cTn>
-                                        <p:tgtEl>
-                                          <p:spTgt spid="604"/>
-                                        </p:tgtEl>
-                                        <p:attrNameLst>
-                                          <p:attrName>style.visibility</p:attrName>
-                                        </p:attrNameLst>
-                                      </p:cBhvr>
-                                      <p:to>
-                                        <p:strVal val="visible"/>
-                                      </p:to>
-                                    </p:set>
                                   </p:childTnLst>
                                 </p:cTn>
                               </p:par>

--- a/input/Algorithmik.pptx
+++ b/input/Algorithmik.pptx
@@ -5,16 +5,20 @@
     <p:sldMasterId id="2147483648" r:id="rId1"/>
   </p:sldMasterIdLst>
   <p:notesMasterIdLst>
-    <p:notesMasterId r:id="rId6"/>
+    <p:notesMasterId r:id="rId10"/>
   </p:notesMasterIdLst>
   <p:handoutMasterIdLst>
-    <p:handoutMasterId r:id="rId7"/>
+    <p:handoutMasterId r:id="rId11"/>
   </p:handoutMasterIdLst>
   <p:sldIdLst>
-    <p:sldId id="1037" r:id="rId2"/>
-    <p:sldId id="279" r:id="rId3"/>
-    <p:sldId id="283" r:id="rId4"/>
-    <p:sldId id="257" r:id="rId5"/>
+    <p:sldId id="1031" r:id="rId2"/>
+    <p:sldId id="1037" r:id="rId3"/>
+    <p:sldId id="278" r:id="rId4"/>
+    <p:sldId id="279" r:id="rId5"/>
+    <p:sldId id="280" r:id="rId6"/>
+    <p:sldId id="283" r:id="rId7"/>
+    <p:sldId id="257" r:id="rId8"/>
+    <p:sldId id="1017" r:id="rId9"/>
   </p:sldIdLst>
   <p:sldSz cx="12192000" cy="6858000"/>
   <p:notesSz cx="6797675" cy="9928225"/>
@@ -815,7 +819,7 @@
                 </a:lnSpc>
                 <a:defRPr/>
               </a:pPr>
-              <a:t>30.01.2026</a:t>
+              <a:t>05.02.2026</a:t>
             </a:fld>
             <a:endParaRPr lang="de-DE" sz="900" dirty="0"/>
           </a:p>
@@ -1800,7 +1804,7 @@
                 </a:lnSpc>
                 <a:defRPr/>
               </a:pPr>
-              <a:t>30.01.2026</a:t>
+              <a:t>05.02.2026</a:t>
             </a:fld>
             <a:endParaRPr lang="de-DE" sz="900" dirty="0"/>
           </a:p>
@@ -2173,6 +2177,67 @@
 </file>
 
 <file path=ppt/notesSlides/notesSlide1.xml><?xml version="1.0" encoding="utf-8"?>
+<p:notes xmlns:a="http://schemas.openxmlformats.org/drawingml/2006/main" xmlns:r="http://schemas.openxmlformats.org/officeDocument/2006/relationships" xmlns:p="http://schemas.openxmlformats.org/presentationml/2006/main">
+  <p:cSld>
+    <p:spTree>
+      <p:nvGrpSpPr>
+        <p:cNvPr id="1" name=""/>
+        <p:cNvGrpSpPr/>
+        <p:nvPr/>
+      </p:nvGrpSpPr>
+      <p:grpSpPr>
+        <a:xfrm>
+          <a:off x="0" y="0"/>
+          <a:ext cx="0" cy="0"/>
+          <a:chOff x="0" y="0"/>
+          <a:chExt cx="0" cy="0"/>
+        </a:xfrm>
+      </p:grpSpPr>
+      <p:sp>
+        <p:nvSpPr>
+          <p:cNvPr id="2" name="Folienbildplatzhalter 1"/>
+          <p:cNvSpPr>
+            <a:spLocks noGrp="1" noRot="1" noChangeAspect="1"/>
+          </p:cNvSpPr>
+          <p:nvPr>
+            <p:ph type="sldImg"/>
+          </p:nvPr>
+        </p:nvSpPr>
+        <p:spPr/>
+      </p:sp>
+      <p:sp>
+        <p:nvSpPr>
+          <p:cNvPr id="3" name="Notizenplatzhalter 2"/>
+          <p:cNvSpPr>
+            <a:spLocks noGrp="1"/>
+          </p:cNvSpPr>
+          <p:nvPr>
+            <p:ph type="body" idx="1"/>
+          </p:nvPr>
+        </p:nvSpPr>
+        <p:spPr/>
+        <p:txBody>
+          <a:bodyPr/>
+          <a:lstStyle/>
+          <a:p>
+            <a:endParaRPr lang="de-DE" dirty="0"/>
+          </a:p>
+        </p:txBody>
+      </p:sp>
+    </p:spTree>
+    <p:extLst>
+      <p:ext uri="{BB962C8B-B14F-4D97-AF65-F5344CB8AC3E}">
+        <p14:creationId xmlns:p14="http://schemas.microsoft.com/office/powerpoint/2010/main" val="3130216680"/>
+      </p:ext>
+    </p:extLst>
+  </p:cSld>
+  <p:clrMapOvr>
+    <a:masterClrMapping/>
+  </p:clrMapOvr>
+</p:notes>
+</file>
+
+<file path=ppt/notesSlides/notesSlide2.xml><?xml version="1.0" encoding="utf-8"?>
 <p:notes xmlns:a="http://schemas.openxmlformats.org/drawingml/2006/main" xmlns:r="http://schemas.openxmlformats.org/officeDocument/2006/relationships" xmlns:p="http://schemas.openxmlformats.org/presentationml/2006/main" showMasterSp="0" showMasterPhAnim="0">
   <p:cSld>
     <p:spTree>
@@ -2322,7 +2387,7 @@
             </a:pPr>
             <a:fld id="{00000000-1234-1234-1234-123412341234}" type="slidenum">
               <a:rPr lang="en-US"/>
-              <a:t>1</a:t>
+              <a:t>2</a:t>
             </a:fld>
             <a:endParaRPr/>
           </a:p>
@@ -2336,12 +2401,12 @@
 </p:notes>
 </file>
 
-<file path=ppt/notesSlides/notesSlide2.xml><?xml version="1.0" encoding="utf-8"?>
+<file path=ppt/notesSlides/notesSlide3.xml><?xml version="1.0" encoding="utf-8"?>
 <p:notes xmlns:a="http://schemas.openxmlformats.org/drawingml/2006/main" xmlns:r="http://schemas.openxmlformats.org/officeDocument/2006/relationships" xmlns:p="http://schemas.openxmlformats.org/presentationml/2006/main" showMasterSp="0" showMasterPhAnim="0">
   <p:cSld>
     <p:spTree>
       <p:nvGrpSpPr>
-        <p:cNvPr id="1" name="Shape 649"/>
+        <p:cNvPr id="1" name="Shape 633"/>
         <p:cNvGrpSpPr/>
         <p:nvPr/>
       </p:nvGrpSpPr>
@@ -2355,7 +2420,7 @@
       </p:grpSpPr>
       <p:sp>
         <p:nvSpPr>
-          <p:cNvPr id="650" name="Google Shape;650;p18:notes"/>
+          <p:cNvPr id="634" name="Google Shape;634;p17:notes"/>
           <p:cNvSpPr txBox="1">
             <a:spLocks noGrp="1"/>
           </p:cNvSpPr>
@@ -2393,7 +2458,7 @@
       </p:sp>
       <p:sp>
         <p:nvSpPr>
-          <p:cNvPr id="651" name="Google Shape;651;p18:notes"/>
+          <p:cNvPr id="635" name="Google Shape;635;p17:notes"/>
           <p:cNvSpPr>
             <a:spLocks noGrp="1" noRot="1" noChangeAspect="1"/>
           </p:cNvSpPr>
@@ -2440,12 +2505,12 @@
 </p:notes>
 </file>
 
-<file path=ppt/notesSlides/notesSlide3.xml><?xml version="1.0" encoding="utf-8"?>
+<file path=ppt/notesSlides/notesSlide4.xml><?xml version="1.0" encoding="utf-8"?>
 <p:notes xmlns:a="http://schemas.openxmlformats.org/drawingml/2006/main" xmlns:r="http://schemas.openxmlformats.org/officeDocument/2006/relationships" xmlns:p="http://schemas.openxmlformats.org/presentationml/2006/main" showMasterSp="0" showMasterPhAnim="0">
   <p:cSld>
     <p:spTree>
       <p:nvGrpSpPr>
-        <p:cNvPr id="1" name="Shape 750"/>
+        <p:cNvPr id="1" name="Shape 649"/>
         <p:cNvGrpSpPr/>
         <p:nvPr/>
       </p:nvGrpSpPr>
@@ -2459,7 +2524,7 @@
       </p:grpSpPr>
       <p:sp>
         <p:nvSpPr>
-          <p:cNvPr id="751" name="Google Shape;751;p22:notes"/>
+          <p:cNvPr id="650" name="Google Shape;650;p18:notes"/>
           <p:cNvSpPr txBox="1">
             <a:spLocks noGrp="1"/>
           </p:cNvSpPr>
@@ -2497,7 +2562,7 @@
       </p:sp>
       <p:sp>
         <p:nvSpPr>
-          <p:cNvPr id="752" name="Google Shape;752;p22:notes"/>
+          <p:cNvPr id="651" name="Google Shape;651;p18:notes"/>
           <p:cNvSpPr>
             <a:spLocks noGrp="1" noRot="1" noChangeAspect="1"/>
           </p:cNvSpPr>
@@ -2544,7 +2609,215 @@
 </p:notes>
 </file>
 
-<file path=ppt/notesSlides/notesSlide4.xml><?xml version="1.0" encoding="utf-8"?>
+<file path=ppt/notesSlides/notesSlide5.xml><?xml version="1.0" encoding="utf-8"?>
+<p:notes xmlns:a="http://schemas.openxmlformats.org/drawingml/2006/main" xmlns:r="http://schemas.openxmlformats.org/officeDocument/2006/relationships" xmlns:p="http://schemas.openxmlformats.org/presentationml/2006/main" showMasterSp="0" showMasterPhAnim="0">
+  <p:cSld>
+    <p:spTree>
+      <p:nvGrpSpPr>
+        <p:cNvPr id="1" name="Shape 692"/>
+        <p:cNvGrpSpPr/>
+        <p:nvPr/>
+      </p:nvGrpSpPr>
+      <p:grpSpPr>
+        <a:xfrm>
+          <a:off x="0" y="0"/>
+          <a:ext cx="0" cy="0"/>
+          <a:chOff x="0" y="0"/>
+          <a:chExt cx="0" cy="0"/>
+        </a:xfrm>
+      </p:grpSpPr>
+      <p:sp>
+        <p:nvSpPr>
+          <p:cNvPr id="693" name="Google Shape;693;p19:notes"/>
+          <p:cNvSpPr txBox="1">
+            <a:spLocks noGrp="1"/>
+          </p:cNvSpPr>
+          <p:nvPr>
+            <p:ph type="body" idx="1"/>
+          </p:nvPr>
+        </p:nvSpPr>
+        <p:spPr>
+          <a:xfrm>
+            <a:off x="685800" y="4400550"/>
+            <a:ext cx="5486400" cy="3600450"/>
+          </a:xfrm>
+          <a:prstGeom prst="rect">
+            <a:avLst/>
+          </a:prstGeom>
+        </p:spPr>
+        <p:txBody>
+          <a:bodyPr spcFirstLastPara="1" wrap="square" lIns="91425" tIns="45700" rIns="91425" bIns="45700" anchor="t" anchorCtr="0">
+            <a:noAutofit/>
+          </a:bodyPr>
+          <a:lstStyle/>
+          <a:p>
+            <a:pPr marL="0" lvl="0" indent="0" algn="l" rtl="0">
+              <a:spcBef>
+                <a:spcPts val="0"/>
+              </a:spcBef>
+              <a:spcAft>
+                <a:spcPts val="0"/>
+              </a:spcAft>
+              <a:buNone/>
+            </a:pPr>
+            <a:endParaRPr/>
+          </a:p>
+        </p:txBody>
+      </p:sp>
+      <p:sp>
+        <p:nvSpPr>
+          <p:cNvPr id="694" name="Google Shape;694;p19:notes"/>
+          <p:cNvSpPr>
+            <a:spLocks noGrp="1" noRot="1" noChangeAspect="1"/>
+          </p:cNvSpPr>
+          <p:nvPr>
+            <p:ph type="sldImg" idx="2"/>
+          </p:nvPr>
+        </p:nvSpPr>
+        <p:spPr>
+          <a:xfrm>
+            <a:off x="685800" y="1143000"/>
+            <a:ext cx="5486400" cy="3086100"/>
+          </a:xfrm>
+          <a:custGeom>
+            <a:avLst/>
+            <a:gdLst/>
+            <a:ahLst/>
+            <a:cxnLst/>
+            <a:rect l="l" t="t" r="r" b="b"/>
+            <a:pathLst>
+              <a:path w="120000" h="120000" extrusionOk="0">
+                <a:moveTo>
+                  <a:pt x="0" y="0"/>
+                </a:moveTo>
+                <a:lnTo>
+                  <a:pt x="120000" y="0"/>
+                </a:lnTo>
+                <a:lnTo>
+                  <a:pt x="120000" y="120000"/>
+                </a:lnTo>
+                <a:lnTo>
+                  <a:pt x="0" y="120000"/>
+                </a:lnTo>
+                <a:close/>
+              </a:path>
+            </a:pathLst>
+          </a:custGeom>
+        </p:spPr>
+      </p:sp>
+    </p:spTree>
+  </p:cSld>
+  <p:clrMapOvr>
+    <a:masterClrMapping/>
+  </p:clrMapOvr>
+</p:notes>
+</file>
+
+<file path=ppt/notesSlides/notesSlide6.xml><?xml version="1.0" encoding="utf-8"?>
+<p:notes xmlns:a="http://schemas.openxmlformats.org/drawingml/2006/main" xmlns:r="http://schemas.openxmlformats.org/officeDocument/2006/relationships" xmlns:p="http://schemas.openxmlformats.org/presentationml/2006/main" showMasterSp="0" showMasterPhAnim="0">
+  <p:cSld>
+    <p:spTree>
+      <p:nvGrpSpPr>
+        <p:cNvPr id="1" name="Shape 750"/>
+        <p:cNvGrpSpPr/>
+        <p:nvPr/>
+      </p:nvGrpSpPr>
+      <p:grpSpPr>
+        <a:xfrm>
+          <a:off x="0" y="0"/>
+          <a:ext cx="0" cy="0"/>
+          <a:chOff x="0" y="0"/>
+          <a:chExt cx="0" cy="0"/>
+        </a:xfrm>
+      </p:grpSpPr>
+      <p:sp>
+        <p:nvSpPr>
+          <p:cNvPr id="751" name="Google Shape;751;p22:notes"/>
+          <p:cNvSpPr txBox="1">
+            <a:spLocks noGrp="1"/>
+          </p:cNvSpPr>
+          <p:nvPr>
+            <p:ph type="body" idx="1"/>
+          </p:nvPr>
+        </p:nvSpPr>
+        <p:spPr>
+          <a:xfrm>
+            <a:off x="685800" y="4400550"/>
+            <a:ext cx="5486400" cy="3600450"/>
+          </a:xfrm>
+          <a:prstGeom prst="rect">
+            <a:avLst/>
+          </a:prstGeom>
+        </p:spPr>
+        <p:txBody>
+          <a:bodyPr spcFirstLastPara="1" wrap="square" lIns="91425" tIns="45700" rIns="91425" bIns="45700" anchor="t" anchorCtr="0">
+            <a:noAutofit/>
+          </a:bodyPr>
+          <a:lstStyle/>
+          <a:p>
+            <a:pPr marL="0" lvl="0" indent="0" algn="l" rtl="0">
+              <a:spcBef>
+                <a:spcPts val="0"/>
+              </a:spcBef>
+              <a:spcAft>
+                <a:spcPts val="0"/>
+              </a:spcAft>
+              <a:buNone/>
+            </a:pPr>
+            <a:endParaRPr/>
+          </a:p>
+        </p:txBody>
+      </p:sp>
+      <p:sp>
+        <p:nvSpPr>
+          <p:cNvPr id="752" name="Google Shape;752;p22:notes"/>
+          <p:cNvSpPr>
+            <a:spLocks noGrp="1" noRot="1" noChangeAspect="1"/>
+          </p:cNvSpPr>
+          <p:nvPr>
+            <p:ph type="sldImg" idx="2"/>
+          </p:nvPr>
+        </p:nvSpPr>
+        <p:spPr>
+          <a:xfrm>
+            <a:off x="685800" y="1143000"/>
+            <a:ext cx="5486400" cy="3086100"/>
+          </a:xfrm>
+          <a:custGeom>
+            <a:avLst/>
+            <a:gdLst/>
+            <a:ahLst/>
+            <a:cxnLst/>
+            <a:rect l="l" t="t" r="r" b="b"/>
+            <a:pathLst>
+              <a:path w="120000" h="120000" extrusionOk="0">
+                <a:moveTo>
+                  <a:pt x="0" y="0"/>
+                </a:moveTo>
+                <a:lnTo>
+                  <a:pt x="120000" y="0"/>
+                </a:lnTo>
+                <a:lnTo>
+                  <a:pt x="120000" y="120000"/>
+                </a:lnTo>
+                <a:lnTo>
+                  <a:pt x="0" y="120000"/>
+                </a:lnTo>
+                <a:close/>
+              </a:path>
+            </a:pathLst>
+          </a:custGeom>
+        </p:spPr>
+      </p:sp>
+    </p:spTree>
+  </p:cSld>
+  <p:clrMapOvr>
+    <a:masterClrMapping/>
+  </p:clrMapOvr>
+</p:notes>
+</file>
+
+<file path=ppt/notesSlides/notesSlide7.xml><?xml version="1.0" encoding="utf-8"?>
 <p:notes xmlns:a="http://schemas.openxmlformats.org/drawingml/2006/main" xmlns:r="http://schemas.openxmlformats.org/officeDocument/2006/relationships" xmlns:p="http://schemas.openxmlformats.org/presentationml/2006/main" showMasterSp="0" showMasterPhAnim="0">
   <p:cSld>
     <p:spTree>
@@ -2666,6 +2939,178 @@
 </p:notes>
 </file>
 
+<file path=ppt/notesSlides/notesSlide8.xml><?xml version="1.0" encoding="utf-8"?>
+<p:notes xmlns:a="http://schemas.openxmlformats.org/drawingml/2006/main" xmlns:r="http://schemas.openxmlformats.org/officeDocument/2006/relationships" xmlns:p="http://schemas.openxmlformats.org/presentationml/2006/main" showMasterSp="0" showMasterPhAnim="0">
+  <p:cSld>
+    <p:spTree>
+      <p:nvGrpSpPr>
+        <p:cNvPr id="1" name="Shape 542"/>
+        <p:cNvGrpSpPr/>
+        <p:nvPr/>
+      </p:nvGrpSpPr>
+      <p:grpSpPr>
+        <a:xfrm>
+          <a:off x="0" y="0"/>
+          <a:ext cx="0" cy="0"/>
+          <a:chOff x="0" y="0"/>
+          <a:chExt cx="0" cy="0"/>
+        </a:xfrm>
+      </p:grpSpPr>
+      <p:sp>
+        <p:nvSpPr>
+          <p:cNvPr id="543" name="Google Shape;543;p26:notes"/>
+          <p:cNvSpPr>
+            <a:spLocks noGrp="1" noRot="1" noChangeAspect="1"/>
+          </p:cNvSpPr>
+          <p:nvPr>
+            <p:ph type="sldImg" idx="2"/>
+          </p:nvPr>
+        </p:nvSpPr>
+        <p:spPr>
+          <a:xfrm>
+            <a:off x="685800" y="1143000"/>
+            <a:ext cx="5486400" cy="3086100"/>
+          </a:xfrm>
+          <a:custGeom>
+            <a:avLst/>
+            <a:gdLst/>
+            <a:ahLst/>
+            <a:cxnLst/>
+            <a:rect l="l" t="t" r="r" b="b"/>
+            <a:pathLst>
+              <a:path w="120000" h="120000" extrusionOk="0">
+                <a:moveTo>
+                  <a:pt x="0" y="0"/>
+                </a:moveTo>
+                <a:lnTo>
+                  <a:pt x="120000" y="0"/>
+                </a:lnTo>
+                <a:lnTo>
+                  <a:pt x="120000" y="120000"/>
+                </a:lnTo>
+                <a:lnTo>
+                  <a:pt x="0" y="120000"/>
+                </a:lnTo>
+                <a:close/>
+              </a:path>
+            </a:pathLst>
+          </a:custGeom>
+          <a:noFill/>
+          <a:ln w="12700" cap="flat" cmpd="sng">
+            <a:solidFill>
+              <a:srgbClr val="000000"/>
+            </a:solidFill>
+            <a:prstDash val="solid"/>
+            <a:round/>
+            <a:headEnd type="none" w="sm" len="sm"/>
+            <a:tailEnd type="none" w="sm" len="sm"/>
+          </a:ln>
+        </p:spPr>
+      </p:sp>
+      <p:sp>
+        <p:nvSpPr>
+          <p:cNvPr id="544" name="Google Shape;544;p26:notes"/>
+          <p:cNvSpPr txBox="1">
+            <a:spLocks noGrp="1"/>
+          </p:cNvSpPr>
+          <p:nvPr>
+            <p:ph type="body" idx="1"/>
+          </p:nvPr>
+        </p:nvSpPr>
+        <p:spPr>
+          <a:xfrm>
+            <a:off x="685800" y="4400550"/>
+            <a:ext cx="5486400" cy="3600450"/>
+          </a:xfrm>
+          <a:prstGeom prst="rect">
+            <a:avLst/>
+          </a:prstGeom>
+          <a:noFill/>
+          <a:ln>
+            <a:noFill/>
+          </a:ln>
+        </p:spPr>
+        <p:txBody>
+          <a:bodyPr spcFirstLastPara="1" wrap="square" lIns="91425" tIns="45700" rIns="91425" bIns="45700" anchor="t" anchorCtr="0">
+            <a:noAutofit/>
+          </a:bodyPr>
+          <a:lstStyle/>
+          <a:p>
+            <a:pPr marL="0" lvl="0" indent="0" algn="l" rtl="0">
+              <a:lnSpc>
+                <a:spcPct val="100000"/>
+              </a:lnSpc>
+              <a:spcBef>
+                <a:spcPts val="0"/>
+              </a:spcBef>
+              <a:spcAft>
+                <a:spcPts val="0"/>
+              </a:spcAft>
+              <a:buSzPts val="1400"/>
+              <a:buNone/>
+            </a:pPr>
+            <a:endParaRPr/>
+          </a:p>
+        </p:txBody>
+      </p:sp>
+      <p:sp>
+        <p:nvSpPr>
+          <p:cNvPr id="545" name="Google Shape;545;p26:notes"/>
+          <p:cNvSpPr txBox="1">
+            <a:spLocks noGrp="1"/>
+          </p:cNvSpPr>
+          <p:nvPr>
+            <p:ph type="sldNum" idx="12"/>
+          </p:nvPr>
+        </p:nvSpPr>
+        <p:spPr>
+          <a:xfrm>
+            <a:off x="3884613" y="8685213"/>
+            <a:ext cx="2971800" cy="458787"/>
+          </a:xfrm>
+          <a:prstGeom prst="rect">
+            <a:avLst/>
+          </a:prstGeom>
+          <a:noFill/>
+          <a:ln>
+            <a:noFill/>
+          </a:ln>
+        </p:spPr>
+        <p:txBody>
+          <a:bodyPr spcFirstLastPara="1" wrap="square" lIns="91425" tIns="45700" rIns="91425" bIns="45700" anchor="b" anchorCtr="0">
+            <a:noAutofit/>
+          </a:bodyPr>
+          <a:lstStyle/>
+          <a:p>
+            <a:pPr marL="0" lvl="0" indent="0" algn="r" rtl="0">
+              <a:lnSpc>
+                <a:spcPct val="100000"/>
+              </a:lnSpc>
+              <a:spcBef>
+                <a:spcPts val="0"/>
+              </a:spcBef>
+              <a:spcAft>
+                <a:spcPts val="0"/>
+              </a:spcAft>
+              <a:buSzPts val="1400"/>
+              <a:buNone/>
+            </a:pPr>
+            <a:fld id="{00000000-1234-1234-1234-123412341234}" type="slidenum">
+              <a:rPr lang="en-US"/>
+              <a:t>8</a:t>
+            </a:fld>
+            <a:endParaRPr/>
+          </a:p>
+        </p:txBody>
+      </p:sp>
+    </p:spTree>
+  </p:cSld>
+  <p:clrMapOvr>
+    <a:masterClrMapping/>
+  </p:clrMapOvr>
+</p:notes>
+</file>
+
 <file path=ppt/slideLayouts/slideLayout1.xml><?xml version="1.0" encoding="utf-8"?>
 <p:sldLayout xmlns:a="http://schemas.openxmlformats.org/drawingml/2006/main" xmlns:r="http://schemas.openxmlformats.org/officeDocument/2006/relationships" xmlns:p="http://schemas.openxmlformats.org/presentationml/2006/main" preserve="1" userDrawn="1">
   <p:cSld name="1_Titelseite mit großem Bild">
@@ -2873,7 +3318,7 @@
             </a:pPr>
             <a:fld id="{C9048784-7281-4837-A1AE-FC4A34A747D6}" type="datetime1">
               <a:rPr lang="de-DE" smtClean="0"/>
-              <a:t>30.01.2026</a:t>
+              <a:t>05.02.2026</a:t>
             </a:fld>
             <a:endParaRPr lang="de-DE" dirty="0"/>
           </a:p>
@@ -4354,7 +4799,7 @@
             </a:pPr>
             <a:fld id="{29E1D907-3A8C-4FA0-AF32-FB476100B44A}" type="datetime1">
               <a:rPr lang="de-DE" smtClean="0"/>
-              <a:t>30.01.2026</a:t>
+              <a:t>05.02.2026</a:t>
             </a:fld>
             <a:endParaRPr lang="de-DE" dirty="0"/>
           </a:p>
@@ -4765,7 +5210,7 @@
             </a:pPr>
             <a:fld id="{0D5930E3-AAC2-4ADF-925B-A037BED539BF}" type="datetime1">
               <a:rPr lang="de-DE" smtClean="0"/>
-              <a:t>30.01.2026</a:t>
+              <a:t>05.02.2026</a:t>
             </a:fld>
             <a:endParaRPr lang="en-US"/>
           </a:p>
@@ -5074,7 +5519,7 @@
             </a:pPr>
             <a:fld id="{77078B80-CC76-49E8-922A-90B2CBA19035}" type="datetime1">
               <a:rPr lang="de-DE" smtClean="0"/>
-              <a:t>30.01.2026</a:t>
+              <a:t>05.02.2026</a:t>
             </a:fld>
             <a:endParaRPr lang="en-US"/>
           </a:p>
@@ -5575,7 +6020,7 @@
             </a:pPr>
             <a:fld id="{410F1620-6991-468A-986C-DEA71AF2A6A8}" type="datetime1">
               <a:rPr lang="de-DE" smtClean="0"/>
-              <a:t>30.01.2026</a:t>
+              <a:t>05.02.2026</a:t>
             </a:fld>
             <a:endParaRPr lang="en-US"/>
           </a:p>
@@ -5973,7 +6418,7 @@
             </a:pPr>
             <a:fld id="{2A021128-E3BC-4510-A597-24FCB75D3A75}" type="datetime1">
               <a:rPr lang="de-DE" smtClean="0"/>
-              <a:t>30.01.2026</a:t>
+              <a:t>05.02.2026</a:t>
             </a:fld>
             <a:endParaRPr lang="de-DE" dirty="0"/>
           </a:p>
@@ -6230,7 +6675,7 @@
             </a:pPr>
             <a:fld id="{204B419C-6100-4ECC-A14C-29389AFC3646}" type="datetime1">
               <a:rPr lang="de-DE" smtClean="0"/>
-              <a:t>30.01.2026</a:t>
+              <a:t>05.02.2026</a:t>
             </a:fld>
             <a:endParaRPr lang="de-DE" dirty="0"/>
           </a:p>
@@ -6621,7 +7066,7 @@
             </a:pPr>
             <a:fld id="{17D379B7-331E-424B-A45F-F03D5981C976}" type="datetime1">
               <a:rPr lang="de-DE" smtClean="0"/>
-              <a:t>30.01.2026</a:t>
+              <a:t>05.02.2026</a:t>
             </a:fld>
             <a:endParaRPr lang="de-DE" dirty="0"/>
           </a:p>
@@ -7163,7 +7608,7 @@
             </a:pPr>
             <a:fld id="{F95F7EFE-EEF9-40C5-9AEC-F07BD35586E4}" type="datetime1">
               <a:rPr lang="de-DE" smtClean="0"/>
-              <a:t>30.01.2026</a:t>
+              <a:t>05.02.2026</a:t>
             </a:fld>
             <a:endParaRPr lang="de-DE" dirty="0"/>
           </a:p>
@@ -7419,7 +7864,7 @@
             </a:pPr>
             <a:fld id="{29F603B7-878E-43D0-A9A1-FA3C2AF87C58}" type="datetime1">
               <a:rPr lang="de-DE" smtClean="0"/>
-              <a:t>30.01.2026</a:t>
+              <a:t>05.02.2026</a:t>
             </a:fld>
             <a:endParaRPr lang="de-DE" dirty="0"/>
           </a:p>
@@ -7516,7 +7961,7 @@
             </a:pPr>
             <a:fld id="{64985212-05E7-49A7-ABD6-673A483CDAE3}" type="datetime1">
               <a:rPr lang="de-DE" smtClean="0"/>
-              <a:t>30.01.2026</a:t>
+              <a:t>05.02.2026</a:t>
             </a:fld>
             <a:endParaRPr lang="de-DE" dirty="0"/>
           </a:p>
@@ -8486,7 +8931,7 @@
             </a:pPr>
             <a:fld id="{8ED535EE-90AE-4348-98D3-AFE064A78180}" type="datetime1">
               <a:rPr lang="de-DE" smtClean="0"/>
-              <a:t>30.01.2026</a:t>
+              <a:t>05.02.2026</a:t>
             </a:fld>
             <a:endParaRPr lang="de-DE" dirty="0"/>
           </a:p>
@@ -9256,7 +9701,7 @@
             </a:pPr>
             <a:fld id="{9C590BB0-1566-4728-8689-C18D1116058A}" type="datetime1">
               <a:rPr lang="de-DE" smtClean="0"/>
-              <a:t>30.01.2026</a:t>
+              <a:t>05.02.2026</a:t>
             </a:fld>
             <a:endParaRPr lang="de-DE" dirty="0"/>
           </a:p>
@@ -9780,6 +10225,630 @@
   <p:cSld>
     <p:spTree>
       <p:nvGrpSpPr>
+        <p:cNvPr id="1" name=""/>
+        <p:cNvGrpSpPr/>
+        <p:nvPr/>
+      </p:nvGrpSpPr>
+      <p:grpSpPr>
+        <a:xfrm>
+          <a:off x="0" y="0"/>
+          <a:ext cx="0" cy="0"/>
+          <a:chOff x="0" y="0"/>
+          <a:chExt cx="0" cy="0"/>
+        </a:xfrm>
+      </p:grpSpPr>
+      <p:sp>
+        <p:nvSpPr>
+          <p:cNvPr id="2" name="Titel 1"/>
+          <p:cNvSpPr>
+            <a:spLocks noGrp="1"/>
+          </p:cNvSpPr>
+          <p:nvPr>
+            <p:ph type="title"/>
+          </p:nvPr>
+        </p:nvSpPr>
+        <p:spPr/>
+        <p:txBody>
+          <a:bodyPr/>
+          <a:lstStyle/>
+          <a:p>
+            <a:r>
+              <a:rPr lang="de-DE" noProof="0" dirty="0"/>
+              <a:t>Lernraum I: Abstrakte Datentypen, Datenstrukturen und Asymptotische Notation</a:t>
+            </a:r>
+          </a:p>
+        </p:txBody>
+      </p:sp>
+      <p:sp>
+        <p:nvSpPr>
+          <p:cNvPr id="3" name="Inhaltsplatzhalter 2"/>
+          <p:cNvSpPr>
+            <a:spLocks noGrp="1"/>
+          </p:cNvSpPr>
+          <p:nvPr>
+            <p:ph sz="quarter" idx="12"/>
+          </p:nvPr>
+        </p:nvSpPr>
+        <p:spPr/>
+        <p:txBody>
+          <a:bodyPr/>
+          <a:lstStyle/>
+          <a:p>
+            <a:pPr lvl="1"/>
+            <a:r>
+              <a:rPr lang="de-DE" noProof="0" dirty="0"/>
+              <a:t>Abstrakte Datentypen</a:t>
+            </a:r>
+          </a:p>
+          <a:p>
+            <a:pPr lvl="2"/>
+            <a:r>
+              <a:rPr lang="de-DE" noProof="0" dirty="0"/>
+              <a:t>Liste, Stapel, Warteschlange, Tabelle (Dictionary)</a:t>
+            </a:r>
+          </a:p>
+          <a:p>
+            <a:pPr lvl="1"/>
+            <a:r>
+              <a:rPr lang="de-DE" noProof="0" dirty="0"/>
+              <a:t>Datenstrukturen</a:t>
+            </a:r>
+          </a:p>
+          <a:p>
+            <a:pPr lvl="2"/>
+            <a:r>
+              <a:rPr lang="de-DE" noProof="0" dirty="0"/>
+              <a:t>Array, Verkettete Liste</a:t>
+            </a:r>
+          </a:p>
+          <a:p>
+            <a:pPr lvl="1"/>
+            <a:r>
+              <a:rPr lang="de-DE" noProof="0" dirty="0"/>
+              <a:t>Implementierungen der Abstrakten Datentypen mit den Datenstrukturen …</a:t>
+            </a:r>
+          </a:p>
+          <a:p>
+            <a:pPr lvl="2"/>
+            <a:r>
+              <a:rPr lang="de-DE" noProof="0" dirty="0"/>
+              <a:t>Array</a:t>
+            </a:r>
+          </a:p>
+          <a:p>
+            <a:pPr lvl="2"/>
+            <a:r>
+              <a:rPr lang="de-DE" noProof="0" dirty="0"/>
+              <a:t>Verkettete Listen</a:t>
+            </a:r>
+          </a:p>
+          <a:p>
+            <a:pPr lvl="1"/>
+            <a:r>
+              <a:rPr lang="de-DE" noProof="0" dirty="0"/>
+              <a:t>Analyse von Laufzeit und Speicherbedarf der Implementierungen</a:t>
+            </a:r>
+          </a:p>
+          <a:p>
+            <a:pPr lvl="2"/>
+            <a:r>
+              <a:rPr lang="de-DE" noProof="0" dirty="0"/>
+              <a:t>O-Notation</a:t>
+            </a:r>
+          </a:p>
+          <a:p>
+            <a:pPr lvl="1"/>
+            <a:r>
+              <a:rPr lang="de-DE" noProof="0" dirty="0">
+                <a:solidFill>
+                  <a:srgbClr val="002060"/>
+                </a:solidFill>
+              </a:rPr>
+              <a:t>Laufzeitanalyse von Algorithmen durch Asymptotische Notation</a:t>
+            </a:r>
+          </a:p>
+          <a:p>
+            <a:pPr lvl="2"/>
+            <a:r>
+              <a:rPr lang="de-DE" noProof="0" dirty="0">
+                <a:solidFill>
+                  <a:srgbClr val="002060"/>
+                </a:solidFill>
+              </a:rPr>
+              <a:t>O-Notation, Ω-Notation, Θ-Notation</a:t>
+            </a:r>
+          </a:p>
+          <a:p>
+            <a:pPr lvl="2"/>
+            <a:r>
+              <a:rPr lang="de-DE" noProof="0" dirty="0">
+                <a:solidFill>
+                  <a:srgbClr val="002060"/>
+                </a:solidFill>
+              </a:rPr>
+              <a:t>Fallanalyse: </a:t>
+            </a:r>
+            <a:r>
+              <a:rPr lang="de-DE" noProof="0" dirty="0" err="1">
+                <a:solidFill>
+                  <a:srgbClr val="002060"/>
+                </a:solidFill>
+              </a:rPr>
+              <a:t>Worst</a:t>
+            </a:r>
+            <a:r>
+              <a:rPr lang="de-DE" noProof="0" dirty="0">
+                <a:solidFill>
+                  <a:srgbClr val="002060"/>
+                </a:solidFill>
+              </a:rPr>
+              <a:t> Case, Best Case Analyse</a:t>
+            </a:r>
+          </a:p>
+          <a:p>
+            <a:pPr lvl="1"/>
+            <a:r>
+              <a:rPr lang="de-DE" noProof="0" dirty="0"/>
+              <a:t>Laufzeitanalyse von Rekursiven Algorithmen durch Asymptotische Notation</a:t>
+            </a:r>
+          </a:p>
+        </p:txBody>
+      </p:sp>
+      <p:sp>
+        <p:nvSpPr>
+          <p:cNvPr id="4" name="Textplatzhalter 3"/>
+          <p:cNvSpPr>
+            <a:spLocks noGrp="1"/>
+          </p:cNvSpPr>
+          <p:nvPr>
+            <p:ph type="body" idx="13"/>
+          </p:nvPr>
+        </p:nvSpPr>
+        <p:spPr/>
+        <p:txBody>
+          <a:bodyPr/>
+          <a:lstStyle/>
+          <a:p>
+            <a:r>
+              <a:rPr lang="de-DE" noProof="0" dirty="0"/>
+              <a:t>Algorithmik – Laufzeitanalyse von Algorithmen durch Asymptotische Notation</a:t>
+            </a:r>
+          </a:p>
+        </p:txBody>
+      </p:sp>
+      <p:sp>
+        <p:nvSpPr>
+          <p:cNvPr id="5" name="Datumsplatzhalter 4"/>
+          <p:cNvSpPr>
+            <a:spLocks noGrp="1"/>
+          </p:cNvSpPr>
+          <p:nvPr>
+            <p:ph type="dt" sz="half" idx="14"/>
+          </p:nvPr>
+        </p:nvSpPr>
+        <p:spPr/>
+        <p:txBody>
+          <a:bodyPr/>
+          <a:lstStyle/>
+          <a:p>
+            <a:fld id="{97C55095-590B-4AAB-8606-0F86796D070A}" type="datetime1">
+              <a:rPr lang="de-DE" smtClean="0"/>
+              <a:pPr/>
+              <a:t>05.02.2026</a:t>
+            </a:fld>
+            <a:endParaRPr lang="de-DE" dirty="0"/>
+          </a:p>
+        </p:txBody>
+      </p:sp>
+      <p:sp>
+        <p:nvSpPr>
+          <p:cNvPr id="6" name="Foliennummernplatzhalter 5"/>
+          <p:cNvSpPr>
+            <a:spLocks noGrp="1"/>
+          </p:cNvSpPr>
+          <p:nvPr>
+            <p:ph type="sldNum" sz="quarter" idx="15"/>
+          </p:nvPr>
+        </p:nvSpPr>
+        <p:spPr/>
+        <p:txBody>
+          <a:bodyPr/>
+          <a:lstStyle/>
+          <a:p>
+            <a:r>
+              <a:rPr lang="de-DE"/>
+              <a:t>Seite </a:t>
+            </a:r>
+            <a:fld id="{43310F81-32EE-4F95-9E9C-0BDC6AD52EEC}" type="slidenum">
+              <a:rPr lang="de-DE" smtClean="0"/>
+              <a:pPr/>
+              <a:t>1</a:t>
+            </a:fld>
+            <a:endParaRPr lang="de-DE"/>
+          </a:p>
+        </p:txBody>
+      </p:sp>
+    </p:spTree>
+    <p:extLst>
+      <p:ext uri="{BB962C8B-B14F-4D97-AF65-F5344CB8AC3E}">
+        <p14:creationId xmlns:p14="http://schemas.microsoft.com/office/powerpoint/2010/main" val="2556114085"/>
+      </p:ext>
+    </p:extLst>
+  </p:cSld>
+  <p:clrMapOvr>
+    <a:masterClrMapping/>
+  </p:clrMapOvr>
+  <p:timing>
+    <p:tnLst>
+      <p:par>
+        <p:cTn id="1" dur="indefinite" restart="never" nodeType="tmRoot">
+          <p:childTnLst>
+            <p:seq concurrent="1" nextAc="seek">
+              <p:cTn id="2" dur="indefinite" nodeType="mainSeq">
+                <p:childTnLst>
+                  <p:par>
+                    <p:cTn id="3" fill="hold">
+                      <p:stCondLst>
+                        <p:cond delay="indefinite"/>
+                      </p:stCondLst>
+                      <p:childTnLst>
+                        <p:par>
+                          <p:cTn id="4" fill="hold">
+                            <p:stCondLst>
+                              <p:cond delay="0"/>
+                            </p:stCondLst>
+                            <p:childTnLst>
+                              <p:par>
+                                <p:cTn id="5" presetID="1" presetClass="entr" presetSubtype="0" fill="hold" nodeType="clickEffect">
+                                  <p:stCondLst>
+                                    <p:cond delay="0"/>
+                                  </p:stCondLst>
+                                  <p:childTnLst>
+                                    <p:set>
+                                      <p:cBhvr>
+                                        <p:cTn id="6" dur="1" fill="hold">
+                                          <p:stCondLst>
+                                            <p:cond delay="0"/>
+                                          </p:stCondLst>
+                                        </p:cTn>
+                                        <p:tgtEl>
+                                          <p:spTgt spid="3">
+                                            <p:txEl>
+                                              <p:pRg st="4" end="4"/>
+                                            </p:txEl>
+                                          </p:spTgt>
+                                        </p:tgtEl>
+                                        <p:attrNameLst>
+                                          <p:attrName>style.visibility</p:attrName>
+                                        </p:attrNameLst>
+                                      </p:cBhvr>
+                                      <p:to>
+                                        <p:strVal val="visible"/>
+                                      </p:to>
+                                    </p:set>
+                                  </p:childTnLst>
+                                </p:cTn>
+                              </p:par>
+                              <p:par>
+                                <p:cTn id="7" presetID="1" presetClass="entr" presetSubtype="0" fill="hold" nodeType="withEffect">
+                                  <p:stCondLst>
+                                    <p:cond delay="0"/>
+                                  </p:stCondLst>
+                                  <p:childTnLst>
+                                    <p:set>
+                                      <p:cBhvr>
+                                        <p:cTn id="8" dur="1" fill="hold">
+                                          <p:stCondLst>
+                                            <p:cond delay="0"/>
+                                          </p:stCondLst>
+                                        </p:cTn>
+                                        <p:tgtEl>
+                                          <p:spTgt spid="3">
+                                            <p:txEl>
+                                              <p:pRg st="5" end="5"/>
+                                            </p:txEl>
+                                          </p:spTgt>
+                                        </p:tgtEl>
+                                        <p:attrNameLst>
+                                          <p:attrName>style.visibility</p:attrName>
+                                        </p:attrNameLst>
+                                      </p:cBhvr>
+                                      <p:to>
+                                        <p:strVal val="visible"/>
+                                      </p:to>
+                                    </p:set>
+                                  </p:childTnLst>
+                                </p:cTn>
+                              </p:par>
+                              <p:par>
+                                <p:cTn id="9" presetID="1" presetClass="entr" presetSubtype="0" fill="hold" nodeType="withEffect">
+                                  <p:stCondLst>
+                                    <p:cond delay="0"/>
+                                  </p:stCondLst>
+                                  <p:childTnLst>
+                                    <p:set>
+                                      <p:cBhvr>
+                                        <p:cTn id="10" dur="1" fill="hold">
+                                          <p:stCondLst>
+                                            <p:cond delay="0"/>
+                                          </p:stCondLst>
+                                        </p:cTn>
+                                        <p:tgtEl>
+                                          <p:spTgt spid="3">
+                                            <p:txEl>
+                                              <p:pRg st="6" end="6"/>
+                                            </p:txEl>
+                                          </p:spTgt>
+                                        </p:tgtEl>
+                                        <p:attrNameLst>
+                                          <p:attrName>style.visibility</p:attrName>
+                                        </p:attrNameLst>
+                                      </p:cBhvr>
+                                      <p:to>
+                                        <p:strVal val="visible"/>
+                                      </p:to>
+                                    </p:set>
+                                  </p:childTnLst>
+                                </p:cTn>
+                              </p:par>
+                              <p:par>
+                                <p:cTn id="11" presetID="1" presetClass="entr" presetSubtype="0" fill="hold" nodeType="withEffect">
+                                  <p:stCondLst>
+                                    <p:cond delay="0"/>
+                                  </p:stCondLst>
+                                  <p:childTnLst>
+                                    <p:set>
+                                      <p:cBhvr>
+                                        <p:cTn id="12" dur="1" fill="hold">
+                                          <p:stCondLst>
+                                            <p:cond delay="0"/>
+                                          </p:stCondLst>
+                                        </p:cTn>
+                                        <p:tgtEl>
+                                          <p:spTgt spid="3">
+                                            <p:txEl>
+                                              <p:pRg st="7" end="7"/>
+                                            </p:txEl>
+                                          </p:spTgt>
+                                        </p:tgtEl>
+                                        <p:attrNameLst>
+                                          <p:attrName>style.visibility</p:attrName>
+                                        </p:attrNameLst>
+                                      </p:cBhvr>
+                                      <p:to>
+                                        <p:strVal val="visible"/>
+                                      </p:to>
+                                    </p:set>
+                                  </p:childTnLst>
+                                </p:cTn>
+                              </p:par>
+                              <p:par>
+                                <p:cTn id="13" presetID="1" presetClass="entr" presetSubtype="0" fill="hold" nodeType="withEffect">
+                                  <p:stCondLst>
+                                    <p:cond delay="0"/>
+                                  </p:stCondLst>
+                                  <p:childTnLst>
+                                    <p:set>
+                                      <p:cBhvr>
+                                        <p:cTn id="14" dur="1" fill="hold">
+                                          <p:stCondLst>
+                                            <p:cond delay="0"/>
+                                          </p:stCondLst>
+                                        </p:cTn>
+                                        <p:tgtEl>
+                                          <p:spTgt spid="3">
+                                            <p:txEl>
+                                              <p:pRg st="8" end="8"/>
+                                            </p:txEl>
+                                          </p:spTgt>
+                                        </p:tgtEl>
+                                        <p:attrNameLst>
+                                          <p:attrName>style.visibility</p:attrName>
+                                        </p:attrNameLst>
+                                      </p:cBhvr>
+                                      <p:to>
+                                        <p:strVal val="visible"/>
+                                      </p:to>
+                                    </p:set>
+                                  </p:childTnLst>
+                                </p:cTn>
+                              </p:par>
+                            </p:childTnLst>
+                          </p:cTn>
+                        </p:par>
+                      </p:childTnLst>
+                    </p:cTn>
+                  </p:par>
+                  <p:par>
+                    <p:cTn id="15" fill="hold">
+                      <p:stCondLst>
+                        <p:cond delay="indefinite"/>
+                      </p:stCondLst>
+                      <p:childTnLst>
+                        <p:par>
+                          <p:cTn id="16" fill="hold">
+                            <p:stCondLst>
+                              <p:cond delay="0"/>
+                            </p:stCondLst>
+                            <p:childTnLst>
+                              <p:par>
+                                <p:cTn id="17" presetID="1" presetClass="entr" presetSubtype="0" fill="hold" nodeType="clickEffect">
+                                  <p:stCondLst>
+                                    <p:cond delay="0"/>
+                                  </p:stCondLst>
+                                  <p:childTnLst>
+                                    <p:set>
+                                      <p:cBhvr>
+                                        <p:cTn id="18" dur="1" fill="hold">
+                                          <p:stCondLst>
+                                            <p:cond delay="0"/>
+                                          </p:stCondLst>
+                                        </p:cTn>
+                                        <p:tgtEl>
+                                          <p:spTgt spid="3">
+                                            <p:txEl>
+                                              <p:pRg st="9" end="9"/>
+                                            </p:txEl>
+                                          </p:spTgt>
+                                        </p:tgtEl>
+                                        <p:attrNameLst>
+                                          <p:attrName>style.visibility</p:attrName>
+                                        </p:attrNameLst>
+                                      </p:cBhvr>
+                                      <p:to>
+                                        <p:strVal val="visible"/>
+                                      </p:to>
+                                    </p:set>
+                                  </p:childTnLst>
+                                </p:cTn>
+                              </p:par>
+                              <p:par>
+                                <p:cTn id="19" presetID="1" presetClass="entr" presetSubtype="0" fill="hold" nodeType="withEffect">
+                                  <p:stCondLst>
+                                    <p:cond delay="0"/>
+                                  </p:stCondLst>
+                                  <p:childTnLst>
+                                    <p:set>
+                                      <p:cBhvr>
+                                        <p:cTn id="20" dur="1" fill="hold">
+                                          <p:stCondLst>
+                                            <p:cond delay="0"/>
+                                          </p:stCondLst>
+                                        </p:cTn>
+                                        <p:tgtEl>
+                                          <p:spTgt spid="3">
+                                            <p:txEl>
+                                              <p:pRg st="10" end="10"/>
+                                            </p:txEl>
+                                          </p:spTgt>
+                                        </p:tgtEl>
+                                        <p:attrNameLst>
+                                          <p:attrName>style.visibility</p:attrName>
+                                        </p:attrNameLst>
+                                      </p:cBhvr>
+                                      <p:to>
+                                        <p:strVal val="visible"/>
+                                      </p:to>
+                                    </p:set>
+                                  </p:childTnLst>
+                                </p:cTn>
+                              </p:par>
+                              <p:par>
+                                <p:cTn id="21" presetID="1" presetClass="entr" presetSubtype="0" fill="hold" nodeType="withEffect">
+                                  <p:stCondLst>
+                                    <p:cond delay="0"/>
+                                  </p:stCondLst>
+                                  <p:childTnLst>
+                                    <p:set>
+                                      <p:cBhvr>
+                                        <p:cTn id="22" dur="1" fill="hold">
+                                          <p:stCondLst>
+                                            <p:cond delay="0"/>
+                                          </p:stCondLst>
+                                        </p:cTn>
+                                        <p:tgtEl>
+                                          <p:spTgt spid="3">
+                                            <p:txEl>
+                                              <p:pRg st="11" end="11"/>
+                                            </p:txEl>
+                                          </p:spTgt>
+                                        </p:tgtEl>
+                                        <p:attrNameLst>
+                                          <p:attrName>style.visibility</p:attrName>
+                                        </p:attrNameLst>
+                                      </p:cBhvr>
+                                      <p:to>
+                                        <p:strVal val="visible"/>
+                                      </p:to>
+                                    </p:set>
+                                  </p:childTnLst>
+                                </p:cTn>
+                              </p:par>
+                            </p:childTnLst>
+                          </p:cTn>
+                        </p:par>
+                      </p:childTnLst>
+                    </p:cTn>
+                  </p:par>
+                  <p:par>
+                    <p:cTn id="23" fill="hold">
+                      <p:stCondLst>
+                        <p:cond delay="indefinite"/>
+                      </p:stCondLst>
+                      <p:childTnLst>
+                        <p:par>
+                          <p:cTn id="24" fill="hold">
+                            <p:stCondLst>
+                              <p:cond delay="0"/>
+                            </p:stCondLst>
+                            <p:childTnLst>
+                              <p:par>
+                                <p:cTn id="25" presetID="1" presetClass="entr" presetSubtype="0" fill="hold" nodeType="clickEffect">
+                                  <p:stCondLst>
+                                    <p:cond delay="0"/>
+                                  </p:stCondLst>
+                                  <p:childTnLst>
+                                    <p:set>
+                                      <p:cBhvr>
+                                        <p:cTn id="26" dur="1" fill="hold">
+                                          <p:stCondLst>
+                                            <p:cond delay="0"/>
+                                          </p:stCondLst>
+                                        </p:cTn>
+                                        <p:tgtEl>
+                                          <p:spTgt spid="3">
+                                            <p:txEl>
+                                              <p:pRg st="12" end="12"/>
+                                            </p:txEl>
+                                          </p:spTgt>
+                                        </p:tgtEl>
+                                        <p:attrNameLst>
+                                          <p:attrName>style.visibility</p:attrName>
+                                        </p:attrNameLst>
+                                      </p:cBhvr>
+                                      <p:to>
+                                        <p:strVal val="visible"/>
+                                      </p:to>
+                                    </p:set>
+                                  </p:childTnLst>
+                                </p:cTn>
+                              </p:par>
+                            </p:childTnLst>
+                          </p:cTn>
+                        </p:par>
+                      </p:childTnLst>
+                    </p:cTn>
+                  </p:par>
+                </p:childTnLst>
+              </p:cTn>
+              <p:prevCondLst>
+                <p:cond evt="onPrev" delay="0">
+                  <p:tgtEl>
+                    <p:sldTgt/>
+                  </p:tgtEl>
+                </p:cond>
+              </p:prevCondLst>
+              <p:nextCondLst>
+                <p:cond evt="onNext" delay="0">
+                  <p:tgtEl>
+                    <p:sldTgt/>
+                  </p:tgtEl>
+                </p:cond>
+              </p:nextCondLst>
+            </p:seq>
+          </p:childTnLst>
+        </p:cTn>
+      </p:par>
+    </p:tnLst>
+  </p:timing>
+</p:sld>
+</file>
+
+<file path=ppt/slides/slide2.xml><?xml version="1.0" encoding="utf-8"?>
+<p:sld xmlns:a="http://schemas.openxmlformats.org/drawingml/2006/main" xmlns:r="http://schemas.openxmlformats.org/officeDocument/2006/relationships" xmlns:p="http://schemas.openxmlformats.org/presentationml/2006/main">
+  <p:cSld>
+    <p:spTree>
+      <p:nvGrpSpPr>
         <p:cNvPr id="1" name="Shape 758"/>
         <p:cNvGrpSpPr/>
         <p:nvPr/>
@@ -9921,7 +10990,7 @@
             <a:fld id="{F2D06E3F-368B-43DC-96F3-4B8E65027050}" type="datetime1">
               <a:rPr lang="de-DE" smtClean="0"/>
               <a:pPr/>
-              <a:t>30.01.2026</a:t>
+              <a:t>05.02.2026</a:t>
             </a:fld>
             <a:endParaRPr lang="de-DE" dirty="0"/>
           </a:p>
@@ -9955,7 +11024,7 @@
             <a:fld id="{43310F81-32EE-4F95-9E9C-0BDC6AD52EEC}" type="slidenum">
               <a:rPr lang="de-DE" smtClean="0"/>
               <a:pPr/>
-              <a:t>1</a:t>
+              <a:t>2</a:t>
             </a:fld>
             <a:endParaRPr lang="de-DE" dirty="0"/>
           </a:p>
@@ -12997,7 +14066,1165 @@
 </p:sld>
 </file>
 
-<file path=ppt/slides/slide2.xml><?xml version="1.0" encoding="utf-8"?>
+<file path=ppt/slides/slide3.xml><?xml version="1.0" encoding="utf-8"?>
+<p:sld xmlns:a="http://schemas.openxmlformats.org/drawingml/2006/main" xmlns:r="http://schemas.openxmlformats.org/officeDocument/2006/relationships" xmlns:p="http://schemas.openxmlformats.org/presentationml/2006/main">
+  <p:cSld>
+    <p:spTree>
+      <p:nvGrpSpPr>
+        <p:cNvPr id="1" name="Shape 636"/>
+        <p:cNvGrpSpPr/>
+        <p:nvPr/>
+      </p:nvGrpSpPr>
+      <p:grpSpPr>
+        <a:xfrm>
+          <a:off x="0" y="0"/>
+          <a:ext cx="0" cy="0"/>
+          <a:chOff x="0" y="0"/>
+          <a:chExt cx="0" cy="0"/>
+        </a:xfrm>
+      </p:grpSpPr>
+      <p:sp>
+        <p:nvSpPr>
+          <p:cNvPr id="4" name="Titel 3">
+            <a:extLst>
+              <a:ext uri="{FF2B5EF4-FFF2-40B4-BE49-F238E27FC236}">
+                <a16:creationId xmlns:a16="http://schemas.microsoft.com/office/drawing/2014/main" id="{96CC7B3D-4080-4B83-AC42-CCFDD12CF264}"/>
+              </a:ext>
+            </a:extLst>
+          </p:cNvPr>
+          <p:cNvSpPr>
+            <a:spLocks noGrp="1"/>
+          </p:cNvSpPr>
+          <p:nvPr>
+            <p:ph type="title"/>
+          </p:nvPr>
+        </p:nvSpPr>
+        <p:spPr/>
+        <p:txBody>
+          <a:bodyPr/>
+          <a:lstStyle/>
+          <a:p>
+            <a:r>
+              <a:rPr lang="de-DE" noProof="0" dirty="0"/>
+              <a:t>Code in O-Notation umwandeln</a:t>
+            </a:r>
+          </a:p>
+        </p:txBody>
+      </p:sp>
+      <p:sp>
+        <p:nvSpPr>
+          <p:cNvPr id="2" name="Inhaltsplatzhalter 1">
+            <a:extLst>
+              <a:ext uri="{FF2B5EF4-FFF2-40B4-BE49-F238E27FC236}">
+                <a16:creationId xmlns:a16="http://schemas.microsoft.com/office/drawing/2014/main" id="{B270EAB6-3E9B-4BB1-9A90-F6D344A3570F}"/>
+              </a:ext>
+            </a:extLst>
+          </p:cNvPr>
+          <p:cNvSpPr>
+            <a:spLocks noGrp="1"/>
+          </p:cNvSpPr>
+          <p:nvPr>
+            <p:ph sz="quarter" idx="12"/>
+          </p:nvPr>
+        </p:nvSpPr>
+        <p:spPr/>
+        <p:txBody>
+          <a:bodyPr/>
+          <a:lstStyle/>
+          <a:p>
+            <a:endParaRPr lang="de-DE" noProof="0" dirty="0"/>
+          </a:p>
+          <a:p>
+            <a:endParaRPr lang="de-DE" noProof="0" dirty="0"/>
+          </a:p>
+          <a:p>
+            <a:endParaRPr lang="de-DE" noProof="0" dirty="0"/>
+          </a:p>
+          <a:p>
+            <a:endParaRPr lang="de-DE" noProof="0" dirty="0"/>
+          </a:p>
+          <a:p>
+            <a:endParaRPr lang="de-DE" noProof="0" dirty="0"/>
+          </a:p>
+          <a:p>
+            <a:endParaRPr lang="de-DE" noProof="0" dirty="0"/>
+          </a:p>
+          <a:p>
+            <a:endParaRPr lang="de-DE" noProof="0" dirty="0"/>
+          </a:p>
+          <a:p>
+            <a:endParaRPr lang="de-DE" noProof="0" dirty="0"/>
+          </a:p>
+          <a:p>
+            <a:r>
+              <a:rPr lang="de-DE" noProof="0" dirty="0"/>
+              <a:t>Bisher: “O(1) bedeutet keine Schleifen, O(n) ist eine Schleife, O(n</a:t>
+            </a:r>
+            <a:r>
+              <a:rPr lang="de-DE" baseline="30000" noProof="0" dirty="0"/>
+              <a:t>2</a:t>
+            </a:r>
+            <a:r>
+              <a:rPr lang="de-DE" noProof="0" dirty="0"/>
+              <a:t>) ist verschachtelte Schleife”</a:t>
+            </a:r>
+          </a:p>
+          <a:p>
+            <a:pPr lvl="1"/>
+            <a:r>
+              <a:rPr lang="de-DE" noProof="0" dirty="0"/>
+              <a:t>Das ist weiterhin nützlich!</a:t>
+            </a:r>
+          </a:p>
+          <a:p>
+            <a:pPr lvl="1"/>
+            <a:r>
+              <a:rPr lang="de-DE" noProof="0" dirty="0"/>
+              <a:t>In diesem Modul gehen wir mehr ins Detail: Damit wir auch komplizierteren Code in die O-Notation umwandeln können</a:t>
+            </a:r>
+          </a:p>
+          <a:p>
+            <a:endParaRPr lang="de-DE" noProof="0" dirty="0"/>
+          </a:p>
+        </p:txBody>
+      </p:sp>
+      <p:sp>
+        <p:nvSpPr>
+          <p:cNvPr id="5" name="Textplatzhalter 4">
+            <a:extLst>
+              <a:ext uri="{FF2B5EF4-FFF2-40B4-BE49-F238E27FC236}">
+                <a16:creationId xmlns:a16="http://schemas.microsoft.com/office/drawing/2014/main" id="{28A238EC-29FE-40B3-A04F-8D8B9DF6AE62}"/>
+              </a:ext>
+            </a:extLst>
+          </p:cNvPr>
+          <p:cNvSpPr>
+            <a:spLocks noGrp="1"/>
+          </p:cNvSpPr>
+          <p:nvPr>
+            <p:ph type="body" idx="13"/>
+          </p:nvPr>
+        </p:nvSpPr>
+        <p:spPr/>
+        <p:txBody>
+          <a:bodyPr/>
+          <a:lstStyle/>
+          <a:p>
+            <a:r>
+              <a:rPr lang="de-DE" noProof="0" dirty="0"/>
+              <a:t>Algorithmik – Laufzeitanalyse von Algorithmen durch Asymptotische Notation</a:t>
+            </a:r>
+          </a:p>
+        </p:txBody>
+      </p:sp>
+      <p:sp>
+        <p:nvSpPr>
+          <p:cNvPr id="16" name="Datumsplatzhalter 4">
+            <a:extLst>
+              <a:ext uri="{FF2B5EF4-FFF2-40B4-BE49-F238E27FC236}">
+                <a16:creationId xmlns:a16="http://schemas.microsoft.com/office/drawing/2014/main" id="{1239DAA0-ADA5-486A-9B09-2647D7872B21}"/>
+              </a:ext>
+            </a:extLst>
+          </p:cNvPr>
+          <p:cNvSpPr>
+            <a:spLocks noGrp="1"/>
+          </p:cNvSpPr>
+          <p:nvPr>
+            <p:ph type="dt" sz="half" idx="14"/>
+          </p:nvPr>
+        </p:nvSpPr>
+        <p:spPr/>
+        <p:txBody>
+          <a:bodyPr/>
+          <a:lstStyle/>
+          <a:p>
+            <a:fld id="{97C55095-590B-4AAB-8606-0F86796D070A}" type="datetime1">
+              <a:rPr lang="de-DE" smtClean="0"/>
+              <a:pPr/>
+              <a:t>05.02.2026</a:t>
+            </a:fld>
+            <a:endParaRPr lang="de-DE" dirty="0"/>
+          </a:p>
+        </p:txBody>
+      </p:sp>
+      <p:sp>
+        <p:nvSpPr>
+          <p:cNvPr id="17" name="Foliennummernplatzhalter 5">
+            <a:extLst>
+              <a:ext uri="{FF2B5EF4-FFF2-40B4-BE49-F238E27FC236}">
+                <a16:creationId xmlns:a16="http://schemas.microsoft.com/office/drawing/2014/main" id="{63C5F54C-8400-49FE-A6AE-03F11E0FEFC5}"/>
+              </a:ext>
+            </a:extLst>
+          </p:cNvPr>
+          <p:cNvSpPr>
+            <a:spLocks noGrp="1"/>
+          </p:cNvSpPr>
+          <p:nvPr>
+            <p:ph type="sldNum" sz="quarter" idx="15"/>
+          </p:nvPr>
+        </p:nvSpPr>
+        <p:spPr/>
+        <p:txBody>
+          <a:bodyPr/>
+          <a:lstStyle/>
+          <a:p>
+            <a:r>
+              <a:rPr lang="de-DE"/>
+              <a:t>Seite </a:t>
+            </a:r>
+            <a:fld id="{43310F81-32EE-4F95-9E9C-0BDC6AD52EEC}" type="slidenum">
+              <a:rPr lang="de-DE" smtClean="0"/>
+              <a:pPr/>
+              <a:t>3</a:t>
+            </a:fld>
+            <a:endParaRPr lang="de-DE"/>
+          </a:p>
+        </p:txBody>
+      </p:sp>
+      <p:sp>
+        <p:nvSpPr>
+          <p:cNvPr id="640" name="Google Shape;640;p17"/>
+          <p:cNvSpPr/>
+          <p:nvPr/>
+        </p:nvSpPr>
+        <p:spPr>
+          <a:xfrm>
+            <a:off x="3961081" y="2300906"/>
+            <a:ext cx="5474525" cy="521742"/>
+          </a:xfrm>
+          <a:prstGeom prst="rightArrow">
+            <a:avLst>
+              <a:gd name="adj1" fmla="val 50000"/>
+              <a:gd name="adj2" fmla="val 50000"/>
+            </a:avLst>
+          </a:prstGeom>
+          <a:solidFill>
+            <a:srgbClr val="B6A479"/>
+          </a:solidFill>
+          <a:ln>
+            <a:noFill/>
+          </a:ln>
+        </p:spPr>
+        <p:txBody>
+          <a:bodyPr spcFirstLastPara="1" wrap="square" lIns="91425" tIns="45700" rIns="91425" bIns="45700" anchor="ctr" anchorCtr="0">
+            <a:noAutofit/>
+          </a:bodyPr>
+          <a:lstStyle/>
+          <a:p>
+            <a:pPr marL="0" marR="0" lvl="0" indent="0" algn="ctr" rtl="0">
+              <a:spcBef>
+                <a:spcPts val="0"/>
+              </a:spcBef>
+              <a:spcAft>
+                <a:spcPts val="0"/>
+              </a:spcAft>
+              <a:buNone/>
+            </a:pPr>
+            <a:endParaRPr sz="1800">
+              <a:solidFill>
+                <a:schemeClr val="lt1"/>
+              </a:solidFill>
+              <a:latin typeface="Twentieth Century"/>
+              <a:ea typeface="Twentieth Century"/>
+              <a:cs typeface="Twentieth Century"/>
+              <a:sym typeface="Twentieth Century"/>
+            </a:endParaRPr>
+          </a:p>
+        </p:txBody>
+      </p:sp>
+      <p:sp>
+        <p:nvSpPr>
+          <p:cNvPr id="642" name="Google Shape;642;p17"/>
+          <p:cNvSpPr/>
+          <p:nvPr/>
+        </p:nvSpPr>
+        <p:spPr>
+          <a:xfrm>
+            <a:off x="1711196" y="1905819"/>
+            <a:ext cx="1878856" cy="1105786"/>
+          </a:xfrm>
+          <a:prstGeom prst="rect">
+            <a:avLst/>
+          </a:prstGeom>
+          <a:solidFill>
+            <a:srgbClr val="4C3282"/>
+          </a:solidFill>
+          <a:ln>
+            <a:noFill/>
+          </a:ln>
+        </p:spPr>
+        <p:txBody>
+          <a:bodyPr spcFirstLastPara="1" wrap="square" lIns="91425" tIns="45700" rIns="91425" bIns="45700" anchor="ctr" anchorCtr="0">
+            <a:noAutofit/>
+          </a:bodyPr>
+          <a:lstStyle/>
+          <a:p>
+            <a:pPr marL="0" marR="0" lvl="0" indent="0" algn="ctr" rtl="0">
+              <a:spcBef>
+                <a:spcPts val="0"/>
+              </a:spcBef>
+              <a:spcAft>
+                <a:spcPts val="0"/>
+              </a:spcAft>
+              <a:buNone/>
+            </a:pPr>
+            <a:r>
+              <a:rPr lang="en-US" sz="2000" b="1">
+                <a:solidFill>
+                  <a:schemeClr val="lt1"/>
+                </a:solidFill>
+                <a:latin typeface="Twentieth Century"/>
+                <a:ea typeface="Twentieth Century"/>
+                <a:cs typeface="Twentieth Century"/>
+                <a:sym typeface="Twentieth Century"/>
+              </a:rPr>
+              <a:t>CODE</a:t>
+            </a:r>
+            <a:endParaRPr/>
+          </a:p>
+        </p:txBody>
+      </p:sp>
+      <p:sp>
+        <p:nvSpPr>
+          <p:cNvPr id="643" name="Google Shape;643;p17"/>
+          <p:cNvSpPr/>
+          <p:nvPr/>
+        </p:nvSpPr>
+        <p:spPr>
+          <a:xfrm>
+            <a:off x="9636422" y="1901156"/>
+            <a:ext cx="1878856" cy="1105786"/>
+          </a:xfrm>
+          <a:prstGeom prst="rect">
+            <a:avLst/>
+          </a:prstGeom>
+          <a:solidFill>
+            <a:srgbClr val="9B8ABE"/>
+          </a:solidFill>
+          <a:ln>
+            <a:noFill/>
+          </a:ln>
+        </p:spPr>
+        <p:txBody>
+          <a:bodyPr spcFirstLastPara="1" wrap="square" lIns="91425" tIns="45700" rIns="91425" bIns="45700" anchor="ctr" anchorCtr="0">
+            <a:noAutofit/>
+          </a:bodyPr>
+          <a:lstStyle/>
+          <a:p>
+            <a:pPr marL="0" marR="0" lvl="0" indent="0" algn="ctr" rtl="0">
+              <a:spcBef>
+                <a:spcPts val="0"/>
+              </a:spcBef>
+              <a:spcAft>
+                <a:spcPts val="0"/>
+              </a:spcAft>
+              <a:buNone/>
+            </a:pPr>
+            <a:r>
+              <a:rPr lang="en-US" sz="2000" b="1" dirty="0">
+                <a:solidFill>
+                  <a:schemeClr val="lt1"/>
+                </a:solidFill>
+                <a:latin typeface="Twentieth Century"/>
+                <a:ea typeface="Twentieth Century"/>
+                <a:cs typeface="Twentieth Century"/>
+                <a:sym typeface="Twentieth Century"/>
+              </a:rPr>
+              <a:t>O-Notation</a:t>
+            </a:r>
+            <a:endParaRPr dirty="0"/>
+          </a:p>
+        </p:txBody>
+      </p:sp>
+      <p:sp>
+        <p:nvSpPr>
+          <p:cNvPr id="644" name="Google Shape;644;p17"/>
+          <p:cNvSpPr/>
+          <p:nvPr/>
+        </p:nvSpPr>
+        <p:spPr>
+          <a:xfrm>
+            <a:off x="4938446" y="1323171"/>
+            <a:ext cx="3349582" cy="2431473"/>
+          </a:xfrm>
+          <a:prstGeom prst="cloud">
+            <a:avLst/>
+          </a:prstGeom>
+          <a:solidFill>
+            <a:srgbClr val="B6A479"/>
+          </a:solidFill>
+          <a:ln>
+            <a:noFill/>
+          </a:ln>
+        </p:spPr>
+        <p:txBody>
+          <a:bodyPr spcFirstLastPara="1" wrap="square" lIns="91425" tIns="45700" rIns="91425" bIns="45700" anchor="ctr" anchorCtr="0">
+            <a:noAutofit/>
+          </a:bodyPr>
+          <a:lstStyle/>
+          <a:p>
+            <a:pPr marL="0" marR="0" lvl="0" indent="0" algn="ctr" rtl="0">
+              <a:spcBef>
+                <a:spcPts val="0"/>
+              </a:spcBef>
+              <a:spcAft>
+                <a:spcPts val="0"/>
+              </a:spcAft>
+              <a:buNone/>
+            </a:pPr>
+            <a:endParaRPr sz="1800">
+              <a:solidFill>
+                <a:schemeClr val="lt1"/>
+              </a:solidFill>
+              <a:latin typeface="Twentieth Century"/>
+              <a:ea typeface="Twentieth Century"/>
+              <a:cs typeface="Twentieth Century"/>
+              <a:sym typeface="Twentieth Century"/>
+            </a:endParaRPr>
+          </a:p>
+        </p:txBody>
+      </p:sp>
+      <p:pic>
+        <p:nvPicPr>
+          <p:cNvPr id="645" name="Google Shape;645;p17"/>
+          <p:cNvPicPr preferRelativeResize="0"/>
+          <p:nvPr/>
+        </p:nvPicPr>
+        <p:blipFill rotWithShape="1">
+          <a:blip r:embed="rId3">
+            <a:alphaModFix/>
+          </a:blip>
+          <a:srcRect/>
+          <a:stretch/>
+        </p:blipFill>
+        <p:spPr>
+          <a:xfrm>
+            <a:off x="5385099" y="1887398"/>
+            <a:ext cx="2376086" cy="1335360"/>
+          </a:xfrm>
+          <a:prstGeom prst="rect">
+            <a:avLst/>
+          </a:prstGeom>
+          <a:noFill/>
+          <a:ln>
+            <a:noFill/>
+          </a:ln>
+        </p:spPr>
+      </p:pic>
+      <p:sp>
+        <p:nvSpPr>
+          <p:cNvPr id="646" name="Google Shape;646;p17"/>
+          <p:cNvSpPr txBox="1"/>
+          <p:nvPr/>
+        </p:nvSpPr>
+        <p:spPr>
+          <a:xfrm>
+            <a:off x="1155663" y="3230585"/>
+            <a:ext cx="3402482" cy="1077178"/>
+          </a:xfrm>
+          <a:prstGeom prst="rect">
+            <a:avLst/>
+          </a:prstGeom>
+          <a:noFill/>
+          <a:ln>
+            <a:noFill/>
+          </a:ln>
+        </p:spPr>
+        <p:txBody>
+          <a:bodyPr spcFirstLastPara="1" wrap="square" lIns="91425" tIns="45700" rIns="91425" bIns="45700" anchor="t" anchorCtr="0">
+            <a:spAutoFit/>
+          </a:bodyPr>
+          <a:lstStyle/>
+          <a:p>
+            <a:pPr marL="0" marR="0" lvl="0" indent="0" algn="l" rtl="0">
+              <a:spcBef>
+                <a:spcPts val="0"/>
+              </a:spcBef>
+              <a:spcAft>
+                <a:spcPts val="0"/>
+              </a:spcAft>
+              <a:buNone/>
+            </a:pPr>
+            <a:r>
+              <a:rPr lang="en-US" sz="1600" dirty="0">
+                <a:solidFill>
+                  <a:schemeClr val="dk1"/>
+                </a:solidFill>
+                <a:latin typeface="Courier New" panose="02070309020205020404" pitchFamily="49" charset="0"/>
+                <a:ea typeface="Consolas"/>
+                <a:cs typeface="Courier New" panose="02070309020205020404" pitchFamily="49" charset="0"/>
+                <a:sym typeface="Consolas"/>
+              </a:rPr>
+              <a:t>for (</a:t>
+            </a:r>
+            <a:r>
+              <a:rPr lang="en-US" sz="1600" dirty="0" err="1">
+                <a:solidFill>
+                  <a:schemeClr val="dk1"/>
+                </a:solidFill>
+                <a:latin typeface="Courier New" panose="02070309020205020404" pitchFamily="49" charset="0"/>
+                <a:ea typeface="Consolas"/>
+                <a:cs typeface="Courier New" panose="02070309020205020404" pitchFamily="49" charset="0"/>
+                <a:sym typeface="Consolas"/>
+              </a:rPr>
+              <a:t>i</a:t>
+            </a:r>
+            <a:r>
+              <a:rPr lang="en-US" sz="1600" dirty="0">
+                <a:solidFill>
+                  <a:schemeClr val="dk1"/>
+                </a:solidFill>
+                <a:latin typeface="Courier New" panose="02070309020205020404" pitchFamily="49" charset="0"/>
+                <a:ea typeface="Consolas"/>
+                <a:cs typeface="Courier New" panose="02070309020205020404" pitchFamily="49" charset="0"/>
+                <a:sym typeface="Consolas"/>
+              </a:rPr>
+              <a:t> = 0; </a:t>
+            </a:r>
+            <a:r>
+              <a:rPr lang="en-US" sz="1600" dirty="0" err="1">
+                <a:solidFill>
+                  <a:schemeClr val="dk1"/>
+                </a:solidFill>
+                <a:latin typeface="Courier New" panose="02070309020205020404" pitchFamily="49" charset="0"/>
+                <a:ea typeface="Consolas"/>
+                <a:cs typeface="Courier New" panose="02070309020205020404" pitchFamily="49" charset="0"/>
+                <a:sym typeface="Consolas"/>
+              </a:rPr>
+              <a:t>i</a:t>
+            </a:r>
+            <a:r>
+              <a:rPr lang="en-US" sz="1600" dirty="0">
+                <a:solidFill>
+                  <a:schemeClr val="dk1"/>
+                </a:solidFill>
+                <a:latin typeface="Courier New" panose="02070309020205020404" pitchFamily="49" charset="0"/>
+                <a:ea typeface="Consolas"/>
+                <a:cs typeface="Courier New" panose="02070309020205020404" pitchFamily="49" charset="0"/>
+                <a:sym typeface="Consolas"/>
+              </a:rPr>
+              <a:t> &lt; n; </a:t>
+            </a:r>
+            <a:r>
+              <a:rPr lang="en-US" sz="1600" dirty="0" err="1">
+                <a:solidFill>
+                  <a:schemeClr val="dk1"/>
+                </a:solidFill>
+                <a:latin typeface="Courier New" panose="02070309020205020404" pitchFamily="49" charset="0"/>
+                <a:ea typeface="Consolas"/>
+                <a:cs typeface="Courier New" panose="02070309020205020404" pitchFamily="49" charset="0"/>
+                <a:sym typeface="Consolas"/>
+              </a:rPr>
+              <a:t>i</a:t>
+            </a:r>
+            <a:r>
+              <a:rPr lang="en-US" sz="1600" dirty="0">
+                <a:solidFill>
+                  <a:schemeClr val="dk1"/>
+                </a:solidFill>
+                <a:latin typeface="Courier New" panose="02070309020205020404" pitchFamily="49" charset="0"/>
+                <a:ea typeface="Consolas"/>
+                <a:cs typeface="Courier New" panose="02070309020205020404" pitchFamily="49" charset="0"/>
+                <a:sym typeface="Consolas"/>
+              </a:rPr>
+              <a:t>++) {</a:t>
+            </a:r>
+            <a:endParaRPr sz="1600" dirty="0">
+              <a:latin typeface="Courier New" panose="02070309020205020404" pitchFamily="49" charset="0"/>
+              <a:cs typeface="Courier New" panose="02070309020205020404" pitchFamily="49" charset="0"/>
+            </a:endParaRPr>
+          </a:p>
+          <a:p>
+            <a:pPr marL="0" marR="0" lvl="0" indent="0" algn="l" rtl="0">
+              <a:spcBef>
+                <a:spcPts val="0"/>
+              </a:spcBef>
+              <a:spcAft>
+                <a:spcPts val="0"/>
+              </a:spcAft>
+              <a:buNone/>
+            </a:pPr>
+            <a:r>
+              <a:rPr lang="en-US" sz="1600" dirty="0">
+                <a:solidFill>
+                  <a:schemeClr val="dk1"/>
+                </a:solidFill>
+                <a:latin typeface="Courier New" panose="02070309020205020404" pitchFamily="49" charset="0"/>
+                <a:ea typeface="Consolas"/>
+                <a:cs typeface="Courier New" panose="02070309020205020404" pitchFamily="49" charset="0"/>
+                <a:sym typeface="Consolas"/>
+              </a:rPr>
+              <a:t>  a[</a:t>
+            </a:r>
+            <a:r>
+              <a:rPr lang="en-US" sz="1600" dirty="0" err="1">
+                <a:solidFill>
+                  <a:schemeClr val="dk1"/>
+                </a:solidFill>
+                <a:latin typeface="Courier New" panose="02070309020205020404" pitchFamily="49" charset="0"/>
+                <a:ea typeface="Consolas"/>
+                <a:cs typeface="Courier New" panose="02070309020205020404" pitchFamily="49" charset="0"/>
+                <a:sym typeface="Consolas"/>
+              </a:rPr>
+              <a:t>i</a:t>
+            </a:r>
+            <a:r>
+              <a:rPr lang="en-US" sz="1600" dirty="0">
+                <a:solidFill>
+                  <a:schemeClr val="dk1"/>
+                </a:solidFill>
+                <a:latin typeface="Courier New" panose="02070309020205020404" pitchFamily="49" charset="0"/>
+                <a:ea typeface="Consolas"/>
+                <a:cs typeface="Courier New" panose="02070309020205020404" pitchFamily="49" charset="0"/>
+                <a:sym typeface="Consolas"/>
+              </a:rPr>
+              <a:t>] = 1;</a:t>
+            </a:r>
+            <a:endParaRPr sz="1600" dirty="0">
+              <a:latin typeface="Courier New" panose="02070309020205020404" pitchFamily="49" charset="0"/>
+              <a:cs typeface="Courier New" panose="02070309020205020404" pitchFamily="49" charset="0"/>
+            </a:endParaRPr>
+          </a:p>
+          <a:p>
+            <a:pPr marL="0" marR="0" lvl="0" indent="0" algn="l" rtl="0">
+              <a:spcBef>
+                <a:spcPts val="0"/>
+              </a:spcBef>
+              <a:spcAft>
+                <a:spcPts val="0"/>
+              </a:spcAft>
+              <a:buNone/>
+            </a:pPr>
+            <a:r>
+              <a:rPr lang="en-US" sz="1600" dirty="0">
+                <a:solidFill>
+                  <a:schemeClr val="dk1"/>
+                </a:solidFill>
+                <a:latin typeface="Courier New" panose="02070309020205020404" pitchFamily="49" charset="0"/>
+                <a:ea typeface="Consolas"/>
+                <a:cs typeface="Courier New" panose="02070309020205020404" pitchFamily="49" charset="0"/>
+                <a:sym typeface="Consolas"/>
+              </a:rPr>
+              <a:t>  b[</a:t>
+            </a:r>
+            <a:r>
+              <a:rPr lang="en-US" sz="1600" dirty="0" err="1">
+                <a:solidFill>
+                  <a:schemeClr val="dk1"/>
+                </a:solidFill>
+                <a:latin typeface="Courier New" panose="02070309020205020404" pitchFamily="49" charset="0"/>
+                <a:ea typeface="Consolas"/>
+                <a:cs typeface="Courier New" panose="02070309020205020404" pitchFamily="49" charset="0"/>
+                <a:sym typeface="Consolas"/>
+              </a:rPr>
+              <a:t>i</a:t>
+            </a:r>
+            <a:r>
+              <a:rPr lang="en-US" sz="1600" dirty="0">
+                <a:solidFill>
+                  <a:schemeClr val="dk1"/>
+                </a:solidFill>
+                <a:latin typeface="Courier New" panose="02070309020205020404" pitchFamily="49" charset="0"/>
+                <a:ea typeface="Consolas"/>
+                <a:cs typeface="Courier New" panose="02070309020205020404" pitchFamily="49" charset="0"/>
+                <a:sym typeface="Consolas"/>
+              </a:rPr>
+              <a:t>] = 2;</a:t>
+            </a:r>
+            <a:endParaRPr sz="1600" dirty="0">
+              <a:latin typeface="Courier New" panose="02070309020205020404" pitchFamily="49" charset="0"/>
+              <a:cs typeface="Courier New" panose="02070309020205020404" pitchFamily="49" charset="0"/>
+            </a:endParaRPr>
+          </a:p>
+          <a:p>
+            <a:pPr marL="0" marR="0" lvl="0" indent="0" algn="l" rtl="0">
+              <a:spcBef>
+                <a:spcPts val="0"/>
+              </a:spcBef>
+              <a:spcAft>
+                <a:spcPts val="0"/>
+              </a:spcAft>
+              <a:buNone/>
+            </a:pPr>
+            <a:r>
+              <a:rPr lang="en-US" sz="1600" dirty="0">
+                <a:solidFill>
+                  <a:schemeClr val="dk1"/>
+                </a:solidFill>
+                <a:latin typeface="Courier New" panose="02070309020205020404" pitchFamily="49" charset="0"/>
+                <a:ea typeface="Consolas"/>
+                <a:cs typeface="Courier New" panose="02070309020205020404" pitchFamily="49" charset="0"/>
+                <a:sym typeface="Consolas"/>
+              </a:rPr>
+              <a:t>}</a:t>
+            </a:r>
+            <a:endParaRPr sz="1600" dirty="0">
+              <a:latin typeface="Courier New" panose="02070309020205020404" pitchFamily="49" charset="0"/>
+              <a:cs typeface="Courier New" panose="02070309020205020404" pitchFamily="49" charset="0"/>
+            </a:endParaRPr>
+          </a:p>
+        </p:txBody>
+      </p:sp>
+      <p:sp>
+        <p:nvSpPr>
+          <p:cNvPr id="647" name="Google Shape;647;p17"/>
+          <p:cNvSpPr txBox="1"/>
+          <p:nvPr/>
+        </p:nvSpPr>
+        <p:spPr>
+          <a:xfrm>
+            <a:off x="10252684" y="3124923"/>
+            <a:ext cx="646331" cy="400110"/>
+          </a:xfrm>
+          <a:prstGeom prst="rect">
+            <a:avLst/>
+          </a:prstGeom>
+          <a:noFill/>
+          <a:ln>
+            <a:noFill/>
+          </a:ln>
+        </p:spPr>
+        <p:txBody>
+          <a:bodyPr spcFirstLastPara="1" wrap="square" lIns="91425" tIns="45700" rIns="91425" bIns="45700" anchor="t" anchorCtr="0">
+            <a:spAutoFit/>
+          </a:bodyPr>
+          <a:lstStyle/>
+          <a:p>
+            <a:pPr marL="0" marR="0" lvl="0" indent="0" algn="l" rtl="0">
+              <a:spcBef>
+                <a:spcPts val="0"/>
+              </a:spcBef>
+              <a:spcAft>
+                <a:spcPts val="0"/>
+              </a:spcAft>
+              <a:buNone/>
+            </a:pPr>
+            <a:r>
+              <a:rPr lang="en-US" sz="2000" dirty="0">
+                <a:solidFill>
+                  <a:schemeClr val="dk1"/>
+                </a:solidFill>
+                <a:latin typeface="Twentieth Century"/>
+                <a:ea typeface="Twentieth Century"/>
+                <a:cs typeface="Twentieth Century"/>
+                <a:sym typeface="Twentieth Century"/>
+              </a:rPr>
+              <a:t>O(n)</a:t>
+            </a:r>
+            <a:endParaRPr dirty="0"/>
+          </a:p>
+        </p:txBody>
+      </p:sp>
+      <p:sp>
+        <p:nvSpPr>
+          <p:cNvPr id="648" name="Google Shape;648;p17"/>
+          <p:cNvSpPr txBox="1"/>
+          <p:nvPr/>
+        </p:nvSpPr>
+        <p:spPr>
+          <a:xfrm>
+            <a:off x="6773681" y="2165262"/>
+            <a:ext cx="1514347" cy="2646878"/>
+          </a:xfrm>
+          <a:prstGeom prst="rect">
+            <a:avLst/>
+          </a:prstGeom>
+          <a:noFill/>
+          <a:ln>
+            <a:noFill/>
+          </a:ln>
+        </p:spPr>
+        <p:txBody>
+          <a:bodyPr spcFirstLastPara="1" wrap="square" lIns="91425" tIns="45700" rIns="91425" bIns="45700" anchor="t" anchorCtr="0">
+            <a:spAutoFit/>
+          </a:bodyPr>
+          <a:lstStyle/>
+          <a:p>
+            <a:pPr marL="0" marR="0" lvl="0" indent="0" algn="l" rtl="0">
+              <a:spcBef>
+                <a:spcPts val="0"/>
+              </a:spcBef>
+              <a:spcAft>
+                <a:spcPts val="0"/>
+              </a:spcAft>
+              <a:buNone/>
+            </a:pPr>
+            <a:r>
+              <a:rPr lang="en-US" sz="16600" b="1">
+                <a:solidFill>
+                  <a:srgbClr val="4C3282"/>
+                </a:solidFill>
+                <a:latin typeface="Helvetica Neue"/>
+                <a:ea typeface="Helvetica Neue"/>
+                <a:cs typeface="Helvetica Neue"/>
+                <a:sym typeface="Helvetica Neue"/>
+              </a:rPr>
+              <a:t>?</a:t>
+            </a:r>
+            <a:endParaRPr/>
+          </a:p>
+        </p:txBody>
+      </p:sp>
+      <p:sp>
+        <p:nvSpPr>
+          <p:cNvPr id="14" name="Google Shape;257;p13">
+            <a:extLst>
+              <a:ext uri="{FF2B5EF4-FFF2-40B4-BE49-F238E27FC236}">
+                <a16:creationId xmlns:a16="http://schemas.microsoft.com/office/drawing/2014/main" id="{9A5AA8DF-7AFA-4BB7-84FB-2626353650C4}"/>
+              </a:ext>
+            </a:extLst>
+          </p:cNvPr>
+          <p:cNvSpPr txBox="1">
+            <a:spLocks/>
+          </p:cNvSpPr>
+          <p:nvPr/>
+        </p:nvSpPr>
+        <p:spPr>
+          <a:xfrm>
+            <a:off x="7499928" y="6407294"/>
+            <a:ext cx="2193636" cy="219798"/>
+          </a:xfrm>
+          <a:prstGeom prst="rect">
+            <a:avLst/>
+          </a:prstGeom>
+          <a:noFill/>
+          <a:ln>
+            <a:noFill/>
+          </a:ln>
+        </p:spPr>
+        <p:txBody>
+          <a:bodyPr spcFirstLastPara="1" wrap="square" lIns="91425" tIns="45700" rIns="91425" bIns="45700" anchor="ctr" anchorCtr="0">
+            <a:noAutofit/>
+          </a:bodyPr>
+          <a:lstStyle>
+            <a:defPPr>
+              <a:defRPr lang="de-DE"/>
+            </a:defPPr>
+            <a:lvl1pPr algn="l" defTabSz="457200" rtl="0" fontAlgn="base">
+              <a:spcBef>
+                <a:spcPct val="0"/>
+              </a:spcBef>
+              <a:spcAft>
+                <a:spcPct val="0"/>
+              </a:spcAft>
+              <a:defRPr kern="1200">
+                <a:solidFill>
+                  <a:schemeClr val="tx1"/>
+                </a:solidFill>
+                <a:latin typeface="Arial" pitchFamily="34" charset="0"/>
+                <a:ea typeface="+mn-ea"/>
+                <a:cs typeface="Arial" pitchFamily="34" charset="0"/>
+              </a:defRPr>
+            </a:lvl1pPr>
+            <a:lvl2pPr marL="457200" algn="l" defTabSz="457200" rtl="0" fontAlgn="base">
+              <a:spcBef>
+                <a:spcPct val="0"/>
+              </a:spcBef>
+              <a:spcAft>
+                <a:spcPct val="0"/>
+              </a:spcAft>
+              <a:defRPr kern="1200">
+                <a:solidFill>
+                  <a:schemeClr val="tx1"/>
+                </a:solidFill>
+                <a:latin typeface="Arial" pitchFamily="34" charset="0"/>
+                <a:ea typeface="+mn-ea"/>
+                <a:cs typeface="Arial" pitchFamily="34" charset="0"/>
+              </a:defRPr>
+            </a:lvl2pPr>
+            <a:lvl3pPr marL="914400" algn="l" defTabSz="457200" rtl="0" fontAlgn="base">
+              <a:spcBef>
+                <a:spcPct val="0"/>
+              </a:spcBef>
+              <a:spcAft>
+                <a:spcPct val="0"/>
+              </a:spcAft>
+              <a:defRPr kern="1200">
+                <a:solidFill>
+                  <a:schemeClr val="tx1"/>
+                </a:solidFill>
+                <a:latin typeface="Arial" pitchFamily="34" charset="0"/>
+                <a:ea typeface="+mn-ea"/>
+                <a:cs typeface="Arial" pitchFamily="34" charset="0"/>
+              </a:defRPr>
+            </a:lvl3pPr>
+            <a:lvl4pPr marL="1371600" algn="l" defTabSz="457200" rtl="0" fontAlgn="base">
+              <a:spcBef>
+                <a:spcPct val="0"/>
+              </a:spcBef>
+              <a:spcAft>
+                <a:spcPct val="0"/>
+              </a:spcAft>
+              <a:defRPr kern="1200">
+                <a:solidFill>
+                  <a:schemeClr val="tx1"/>
+                </a:solidFill>
+                <a:latin typeface="Arial" pitchFamily="34" charset="0"/>
+                <a:ea typeface="+mn-ea"/>
+                <a:cs typeface="Arial" pitchFamily="34" charset="0"/>
+              </a:defRPr>
+            </a:lvl4pPr>
+            <a:lvl5pPr marL="1828800" algn="l" defTabSz="457200" rtl="0" fontAlgn="base">
+              <a:spcBef>
+                <a:spcPct val="0"/>
+              </a:spcBef>
+              <a:spcAft>
+                <a:spcPct val="0"/>
+              </a:spcAft>
+              <a:defRPr kern="1200">
+                <a:solidFill>
+                  <a:schemeClr val="tx1"/>
+                </a:solidFill>
+                <a:latin typeface="Arial" pitchFamily="34" charset="0"/>
+                <a:ea typeface="+mn-ea"/>
+                <a:cs typeface="Arial" pitchFamily="34" charset="0"/>
+              </a:defRPr>
+            </a:lvl5pPr>
+            <a:lvl6pPr marL="2286000" algn="l" defTabSz="914400" rtl="0" eaLnBrk="1" latinLnBrk="0" hangingPunct="1">
+              <a:defRPr kern="1200">
+                <a:solidFill>
+                  <a:schemeClr val="tx1"/>
+                </a:solidFill>
+                <a:latin typeface="Arial" pitchFamily="34" charset="0"/>
+                <a:ea typeface="+mn-ea"/>
+                <a:cs typeface="Arial" pitchFamily="34" charset="0"/>
+              </a:defRPr>
+            </a:lvl6pPr>
+            <a:lvl7pPr marL="2743200" algn="l" defTabSz="914400" rtl="0" eaLnBrk="1" latinLnBrk="0" hangingPunct="1">
+              <a:defRPr kern="1200">
+                <a:solidFill>
+                  <a:schemeClr val="tx1"/>
+                </a:solidFill>
+                <a:latin typeface="Arial" pitchFamily="34" charset="0"/>
+                <a:ea typeface="+mn-ea"/>
+                <a:cs typeface="Arial" pitchFamily="34" charset="0"/>
+              </a:defRPr>
+            </a:lvl7pPr>
+            <a:lvl8pPr marL="3200400" algn="l" defTabSz="914400" rtl="0" eaLnBrk="1" latinLnBrk="0" hangingPunct="1">
+              <a:defRPr kern="1200">
+                <a:solidFill>
+                  <a:schemeClr val="tx1"/>
+                </a:solidFill>
+                <a:latin typeface="Arial" pitchFamily="34" charset="0"/>
+                <a:ea typeface="+mn-ea"/>
+                <a:cs typeface="Arial" pitchFamily="34" charset="0"/>
+              </a:defRPr>
+            </a:lvl8pPr>
+            <a:lvl9pPr marL="3657600" algn="l" defTabSz="914400" rtl="0" eaLnBrk="1" latinLnBrk="0" hangingPunct="1">
+              <a:defRPr kern="1200">
+                <a:solidFill>
+                  <a:schemeClr val="tx1"/>
+                </a:solidFill>
+                <a:latin typeface="Arial" pitchFamily="34" charset="0"/>
+                <a:ea typeface="+mn-ea"/>
+                <a:cs typeface="Arial" pitchFamily="34" charset="0"/>
+              </a:defRPr>
+            </a:lvl9pPr>
+          </a:lstStyle>
+          <a:p>
+            <a:pPr algn="r">
+              <a:spcBef>
+                <a:spcPts val="0"/>
+              </a:spcBef>
+              <a:spcAft>
+                <a:spcPts val="0"/>
+              </a:spcAft>
+            </a:pPr>
+            <a:r>
+              <a:rPr lang="fr-FR" sz="800" dirty="0"/>
+              <a:t>CSE 373 20 AU – SCHAFER</a:t>
+            </a:r>
+          </a:p>
+        </p:txBody>
+      </p:sp>
+      <p:sp>
+        <p:nvSpPr>
+          <p:cNvPr id="15" name="Google Shape;257;p13">
+            <a:extLst>
+              <a:ext uri="{FF2B5EF4-FFF2-40B4-BE49-F238E27FC236}">
+                <a16:creationId xmlns:a16="http://schemas.microsoft.com/office/drawing/2014/main" id="{3F9CD9BC-3DE3-4ED5-909F-D074E6AB7946}"/>
+              </a:ext>
+            </a:extLst>
+          </p:cNvPr>
+          <p:cNvSpPr txBox="1">
+            <a:spLocks/>
+          </p:cNvSpPr>
+          <p:nvPr/>
+        </p:nvSpPr>
+        <p:spPr>
+          <a:xfrm>
+            <a:off x="6881091" y="6150552"/>
+            <a:ext cx="2812473" cy="219798"/>
+          </a:xfrm>
+          <a:prstGeom prst="rect">
+            <a:avLst/>
+          </a:prstGeom>
+          <a:noFill/>
+          <a:ln>
+            <a:noFill/>
+          </a:ln>
+        </p:spPr>
+        <p:txBody>
+          <a:bodyPr spcFirstLastPara="1" wrap="square" lIns="91425" tIns="45700" rIns="91425" bIns="45700" anchor="ctr" anchorCtr="0">
+            <a:noAutofit/>
+          </a:bodyPr>
+          <a:lstStyle>
+            <a:defPPr>
+              <a:defRPr lang="de-DE"/>
+            </a:defPPr>
+            <a:lvl1pPr algn="l" defTabSz="457200" rtl="0" fontAlgn="base">
+              <a:spcBef>
+                <a:spcPct val="0"/>
+              </a:spcBef>
+              <a:spcAft>
+                <a:spcPct val="0"/>
+              </a:spcAft>
+              <a:defRPr kern="1200">
+                <a:solidFill>
+                  <a:schemeClr val="tx1"/>
+                </a:solidFill>
+                <a:latin typeface="Arial" pitchFamily="34" charset="0"/>
+                <a:ea typeface="+mn-ea"/>
+                <a:cs typeface="Arial" pitchFamily="34" charset="0"/>
+              </a:defRPr>
+            </a:lvl1pPr>
+            <a:lvl2pPr marL="457200" algn="l" defTabSz="457200" rtl="0" fontAlgn="base">
+              <a:spcBef>
+                <a:spcPct val="0"/>
+              </a:spcBef>
+              <a:spcAft>
+                <a:spcPct val="0"/>
+              </a:spcAft>
+              <a:defRPr kern="1200">
+                <a:solidFill>
+                  <a:schemeClr val="tx1"/>
+                </a:solidFill>
+                <a:latin typeface="Arial" pitchFamily="34" charset="0"/>
+                <a:ea typeface="+mn-ea"/>
+                <a:cs typeface="Arial" pitchFamily="34" charset="0"/>
+              </a:defRPr>
+            </a:lvl2pPr>
+            <a:lvl3pPr marL="914400" algn="l" defTabSz="457200" rtl="0" fontAlgn="base">
+              <a:spcBef>
+                <a:spcPct val="0"/>
+              </a:spcBef>
+              <a:spcAft>
+                <a:spcPct val="0"/>
+              </a:spcAft>
+              <a:defRPr kern="1200">
+                <a:solidFill>
+                  <a:schemeClr val="tx1"/>
+                </a:solidFill>
+                <a:latin typeface="Arial" pitchFamily="34" charset="0"/>
+                <a:ea typeface="+mn-ea"/>
+                <a:cs typeface="Arial" pitchFamily="34" charset="0"/>
+              </a:defRPr>
+            </a:lvl3pPr>
+            <a:lvl4pPr marL="1371600" algn="l" defTabSz="457200" rtl="0" fontAlgn="base">
+              <a:spcBef>
+                <a:spcPct val="0"/>
+              </a:spcBef>
+              <a:spcAft>
+                <a:spcPct val="0"/>
+              </a:spcAft>
+              <a:defRPr kern="1200">
+                <a:solidFill>
+                  <a:schemeClr val="tx1"/>
+                </a:solidFill>
+                <a:latin typeface="Arial" pitchFamily="34" charset="0"/>
+                <a:ea typeface="+mn-ea"/>
+                <a:cs typeface="Arial" pitchFamily="34" charset="0"/>
+              </a:defRPr>
+            </a:lvl4pPr>
+            <a:lvl5pPr marL="1828800" algn="l" defTabSz="457200" rtl="0" fontAlgn="base">
+              <a:spcBef>
+                <a:spcPct val="0"/>
+              </a:spcBef>
+              <a:spcAft>
+                <a:spcPct val="0"/>
+              </a:spcAft>
+              <a:defRPr kern="1200">
+                <a:solidFill>
+                  <a:schemeClr val="tx1"/>
+                </a:solidFill>
+                <a:latin typeface="Arial" pitchFamily="34" charset="0"/>
+                <a:ea typeface="+mn-ea"/>
+                <a:cs typeface="Arial" pitchFamily="34" charset="0"/>
+              </a:defRPr>
+            </a:lvl5pPr>
+            <a:lvl6pPr marL="2286000" algn="l" defTabSz="914400" rtl="0" eaLnBrk="1" latinLnBrk="0" hangingPunct="1">
+              <a:defRPr kern="1200">
+                <a:solidFill>
+                  <a:schemeClr val="tx1"/>
+                </a:solidFill>
+                <a:latin typeface="Arial" pitchFamily="34" charset="0"/>
+                <a:ea typeface="+mn-ea"/>
+                <a:cs typeface="Arial" pitchFamily="34" charset="0"/>
+              </a:defRPr>
+            </a:lvl6pPr>
+            <a:lvl7pPr marL="2743200" algn="l" defTabSz="914400" rtl="0" eaLnBrk="1" latinLnBrk="0" hangingPunct="1">
+              <a:defRPr kern="1200">
+                <a:solidFill>
+                  <a:schemeClr val="tx1"/>
+                </a:solidFill>
+                <a:latin typeface="Arial" pitchFamily="34" charset="0"/>
+                <a:ea typeface="+mn-ea"/>
+                <a:cs typeface="Arial" pitchFamily="34" charset="0"/>
+              </a:defRPr>
+            </a:lvl7pPr>
+            <a:lvl8pPr marL="3200400" algn="l" defTabSz="914400" rtl="0" eaLnBrk="1" latinLnBrk="0" hangingPunct="1">
+              <a:defRPr kern="1200">
+                <a:solidFill>
+                  <a:schemeClr val="tx1"/>
+                </a:solidFill>
+                <a:latin typeface="Arial" pitchFamily="34" charset="0"/>
+                <a:ea typeface="+mn-ea"/>
+                <a:cs typeface="Arial" pitchFamily="34" charset="0"/>
+              </a:defRPr>
+            </a:lvl8pPr>
+            <a:lvl9pPr marL="3657600" algn="l" defTabSz="914400" rtl="0" eaLnBrk="1" latinLnBrk="0" hangingPunct="1">
+              <a:defRPr kern="1200">
+                <a:solidFill>
+                  <a:schemeClr val="tx1"/>
+                </a:solidFill>
+                <a:latin typeface="Arial" pitchFamily="34" charset="0"/>
+                <a:ea typeface="+mn-ea"/>
+                <a:cs typeface="Arial" pitchFamily="34" charset="0"/>
+              </a:defRPr>
+            </a:lvl9pPr>
+          </a:lstStyle>
+          <a:p>
+            <a:pPr algn="r">
+              <a:spcBef>
+                <a:spcPts val="0"/>
+              </a:spcBef>
+              <a:spcAft>
+                <a:spcPts val="0"/>
+              </a:spcAft>
+            </a:pPr>
+            <a:r>
+              <a:rPr lang="fr-FR" sz="800" dirty="0"/>
+              <a:t>Quelle: Data Structures and </a:t>
+            </a:r>
+            <a:r>
+              <a:rPr lang="fr-FR" sz="800" dirty="0" err="1"/>
+              <a:t>Algorithms</a:t>
+            </a:r>
+            <a:r>
+              <a:rPr lang="fr-FR" sz="800" dirty="0"/>
+              <a:t> (CSE 373), University of Washington, Spring 2022</a:t>
+            </a:r>
+          </a:p>
+        </p:txBody>
+      </p:sp>
+    </p:spTree>
+  </p:cSld>
+  <p:clrMapOvr>
+    <a:masterClrMapping/>
+  </p:clrMapOvr>
+</p:sld>
+</file>
+
+<file path=ppt/slides/slide4.xml><?xml version="1.0" encoding="utf-8"?>
 <p:sld xmlns:a="http://schemas.openxmlformats.org/drawingml/2006/main" xmlns:r="http://schemas.openxmlformats.org/officeDocument/2006/relationships" xmlns:p="http://schemas.openxmlformats.org/presentationml/2006/main">
   <p:cSld>
     <p:spTree>
@@ -13202,7 +15429,7 @@
             <a:fld id="{97C55095-590B-4AAB-8606-0F86796D070A}" type="datetime1">
               <a:rPr lang="de-DE" smtClean="0"/>
               <a:pPr/>
-              <a:t>30.01.2026</a:t>
+              <a:t>05.02.2026</a:t>
             </a:fld>
             <a:endParaRPr lang="de-DE" dirty="0"/>
           </a:p>
@@ -13236,7 +15463,7 @@
             <a:fld id="{43310F81-32EE-4F95-9E9C-0BDC6AD52EEC}" type="slidenum">
               <a:rPr lang="de-DE" smtClean="0"/>
               <a:pPr/>
-              <a:t>2</a:t>
+              <a:t>4</a:t>
             </a:fld>
             <a:endParaRPr lang="de-DE"/>
           </a:p>
@@ -15670,7 +17897,1539 @@
 </p:sld>
 </file>
 
-<file path=ppt/slides/slide3.xml><?xml version="1.0" encoding="utf-8"?>
+<file path=ppt/slides/slide5.xml><?xml version="1.0" encoding="utf-8"?>
+<p:sld xmlns:a="http://schemas.openxmlformats.org/drawingml/2006/main" xmlns:r="http://schemas.openxmlformats.org/officeDocument/2006/relationships" xmlns:p="http://schemas.openxmlformats.org/presentationml/2006/main">
+  <p:cSld>
+    <p:spTree>
+      <p:nvGrpSpPr>
+        <p:cNvPr id="1" name="Shape 695"/>
+        <p:cNvGrpSpPr/>
+        <p:nvPr/>
+      </p:nvGrpSpPr>
+      <p:grpSpPr>
+        <a:xfrm>
+          <a:off x="0" y="0"/>
+          <a:ext cx="0" cy="0"/>
+          <a:chOff x="0" y="0"/>
+          <a:chExt cx="0" cy="0"/>
+        </a:xfrm>
+      </p:grpSpPr>
+      <p:sp>
+        <p:nvSpPr>
+          <p:cNvPr id="4" name="Titel 3">
+            <a:extLst>
+              <a:ext uri="{FF2B5EF4-FFF2-40B4-BE49-F238E27FC236}">
+                <a16:creationId xmlns:a16="http://schemas.microsoft.com/office/drawing/2014/main" id="{B30BCCD3-DABA-4DC4-A9E5-9094D1BE08FF}"/>
+              </a:ext>
+            </a:extLst>
+          </p:cNvPr>
+          <p:cNvSpPr>
+            <a:spLocks noGrp="1"/>
+          </p:cNvSpPr>
+          <p:nvPr>
+            <p:ph type="title"/>
+          </p:nvPr>
+        </p:nvSpPr>
+        <p:spPr/>
+        <p:txBody>
+          <a:bodyPr/>
+          <a:lstStyle/>
+          <a:p>
+            <a:r>
+              <a:rPr lang="de-DE" noProof="0" dirty="0"/>
+              <a:t>Code Modellierung</a:t>
+            </a:r>
+          </a:p>
+        </p:txBody>
+      </p:sp>
+      <p:sp>
+        <p:nvSpPr>
+          <p:cNvPr id="2" name="Inhaltsplatzhalter 1">
+            <a:extLst>
+              <a:ext uri="{FF2B5EF4-FFF2-40B4-BE49-F238E27FC236}">
+                <a16:creationId xmlns:a16="http://schemas.microsoft.com/office/drawing/2014/main" id="{162F0D7F-8D49-4349-8DF4-1229E57B9AA0}"/>
+              </a:ext>
+            </a:extLst>
+          </p:cNvPr>
+          <p:cNvSpPr>
+            <a:spLocks noGrp="1"/>
+          </p:cNvSpPr>
+          <p:nvPr>
+            <p:ph sz="quarter" idx="12"/>
+          </p:nvPr>
+        </p:nvSpPr>
+        <p:spPr/>
+        <p:txBody>
+          <a:bodyPr/>
+          <a:lstStyle/>
+          <a:p>
+            <a:endParaRPr lang="de-DE" noProof="0" dirty="0"/>
+          </a:p>
+          <a:p>
+            <a:endParaRPr lang="de-DE" noProof="0" dirty="0"/>
+          </a:p>
+          <a:p>
+            <a:endParaRPr lang="de-DE" noProof="0" dirty="0"/>
+          </a:p>
+          <a:p>
+            <a:endParaRPr lang="de-DE" noProof="0" dirty="0"/>
+          </a:p>
+          <a:p>
+            <a:endParaRPr lang="de-DE" noProof="0" dirty="0"/>
+          </a:p>
+          <a:p>
+            <a:endParaRPr lang="de-DE" noProof="0" dirty="0"/>
+          </a:p>
+          <a:p>
+            <a:endParaRPr lang="de-DE" noProof="0" dirty="0"/>
+          </a:p>
+          <a:p>
+            <a:r>
+              <a:rPr lang="de-DE" noProof="0" dirty="0"/>
+              <a:t>Code Modellierung - der Prozess der mathematischen Darstellung, wie viele Operationen ein Stück Code im Verhältnis zur Eingabegröße </a:t>
+            </a:r>
+            <a:r>
+              <a:rPr lang="de-DE" b="1" noProof="0" dirty="0"/>
+              <a:t>n</a:t>
+            </a:r>
+            <a:r>
+              <a:rPr lang="de-DE" noProof="0" dirty="0"/>
+              <a:t> ausführt.</a:t>
+            </a:r>
+          </a:p>
+          <a:p>
+            <a:pPr lvl="1"/>
+            <a:r>
+              <a:rPr lang="de-DE" noProof="0" dirty="0"/>
+              <a:t>Umwandlung von Code in eine Laufzeitfunktion, die seine Laufzeit darstellt</a:t>
+            </a:r>
+          </a:p>
+        </p:txBody>
+      </p:sp>
+      <p:sp>
+        <p:nvSpPr>
+          <p:cNvPr id="5" name="Textplatzhalter 4">
+            <a:extLst>
+              <a:ext uri="{FF2B5EF4-FFF2-40B4-BE49-F238E27FC236}">
+                <a16:creationId xmlns:a16="http://schemas.microsoft.com/office/drawing/2014/main" id="{26A9218C-2217-4A42-95E0-72897F6C7DAD}"/>
+              </a:ext>
+            </a:extLst>
+          </p:cNvPr>
+          <p:cNvSpPr>
+            <a:spLocks noGrp="1"/>
+          </p:cNvSpPr>
+          <p:nvPr>
+            <p:ph type="body" idx="13"/>
+          </p:nvPr>
+        </p:nvSpPr>
+        <p:spPr/>
+        <p:txBody>
+          <a:bodyPr/>
+          <a:lstStyle/>
+          <a:p>
+            <a:r>
+              <a:rPr lang="de-DE" noProof="0" dirty="0"/>
+              <a:t>Algorithmik – Laufzeitanalyse von Algorithmen durch Asymptotische Notation</a:t>
+            </a:r>
+          </a:p>
+        </p:txBody>
+      </p:sp>
+      <p:sp>
+        <p:nvSpPr>
+          <p:cNvPr id="27" name="Datumsplatzhalter 4">
+            <a:extLst>
+              <a:ext uri="{FF2B5EF4-FFF2-40B4-BE49-F238E27FC236}">
+                <a16:creationId xmlns:a16="http://schemas.microsoft.com/office/drawing/2014/main" id="{A1F25C3C-FE9F-4152-8782-7757E99D7A81}"/>
+              </a:ext>
+            </a:extLst>
+          </p:cNvPr>
+          <p:cNvSpPr>
+            <a:spLocks noGrp="1"/>
+          </p:cNvSpPr>
+          <p:nvPr>
+            <p:ph type="dt" sz="half" idx="14"/>
+          </p:nvPr>
+        </p:nvSpPr>
+        <p:spPr/>
+        <p:txBody>
+          <a:bodyPr/>
+          <a:lstStyle/>
+          <a:p>
+            <a:fld id="{97C55095-590B-4AAB-8606-0F86796D070A}" type="datetime1">
+              <a:rPr lang="de-DE" smtClean="0"/>
+              <a:pPr/>
+              <a:t>05.02.2026</a:t>
+            </a:fld>
+            <a:endParaRPr lang="de-DE" dirty="0"/>
+          </a:p>
+        </p:txBody>
+      </p:sp>
+      <p:sp>
+        <p:nvSpPr>
+          <p:cNvPr id="28" name="Foliennummernplatzhalter 5">
+            <a:extLst>
+              <a:ext uri="{FF2B5EF4-FFF2-40B4-BE49-F238E27FC236}">
+                <a16:creationId xmlns:a16="http://schemas.microsoft.com/office/drawing/2014/main" id="{0005C9F9-9BE4-492C-958A-5F4E6DC90EB0}"/>
+              </a:ext>
+            </a:extLst>
+          </p:cNvPr>
+          <p:cNvSpPr>
+            <a:spLocks noGrp="1"/>
+          </p:cNvSpPr>
+          <p:nvPr>
+            <p:ph type="sldNum" sz="quarter" idx="15"/>
+          </p:nvPr>
+        </p:nvSpPr>
+        <p:spPr/>
+        <p:txBody>
+          <a:bodyPr/>
+          <a:lstStyle/>
+          <a:p>
+            <a:r>
+              <a:rPr lang="de-DE"/>
+              <a:t>Seite </a:t>
+            </a:r>
+            <a:fld id="{43310F81-32EE-4F95-9E9C-0BDC6AD52EEC}" type="slidenum">
+              <a:rPr lang="de-DE" smtClean="0"/>
+              <a:pPr/>
+              <a:t>5</a:t>
+            </a:fld>
+            <a:endParaRPr lang="de-DE"/>
+          </a:p>
+        </p:txBody>
+      </p:sp>
+      <p:sp>
+        <p:nvSpPr>
+          <p:cNvPr id="700" name="Google Shape;700;p19"/>
+          <p:cNvSpPr/>
+          <p:nvPr/>
+        </p:nvSpPr>
+        <p:spPr>
+          <a:xfrm>
+            <a:off x="4533753" y="2127604"/>
+            <a:ext cx="365760" cy="365760"/>
+          </a:xfrm>
+          <a:prstGeom prst="rect">
+            <a:avLst/>
+          </a:prstGeom>
+          <a:solidFill>
+            <a:srgbClr val="9EC0D5"/>
+          </a:solidFill>
+          <a:ln>
+            <a:noFill/>
+          </a:ln>
+        </p:spPr>
+        <p:txBody>
+          <a:bodyPr spcFirstLastPara="1" wrap="square" lIns="91425" tIns="45700" rIns="91425" bIns="45700" anchor="ctr" anchorCtr="0">
+            <a:noAutofit/>
+          </a:bodyPr>
+          <a:lstStyle/>
+          <a:p>
+            <a:pPr marL="0" marR="0" lvl="0" indent="0" algn="ctr" rtl="0">
+              <a:spcBef>
+                <a:spcPts val="0"/>
+              </a:spcBef>
+              <a:spcAft>
+                <a:spcPts val="0"/>
+              </a:spcAft>
+              <a:buNone/>
+            </a:pPr>
+            <a:endParaRPr sz="1800">
+              <a:solidFill>
+                <a:schemeClr val="lt1"/>
+              </a:solidFill>
+              <a:latin typeface="Twentieth Century"/>
+              <a:ea typeface="Twentieth Century"/>
+              <a:cs typeface="Twentieth Century"/>
+              <a:sym typeface="Twentieth Century"/>
+            </a:endParaRPr>
+          </a:p>
+        </p:txBody>
+      </p:sp>
+      <p:sp>
+        <p:nvSpPr>
+          <p:cNvPr id="701" name="Google Shape;701;p19"/>
+          <p:cNvSpPr/>
+          <p:nvPr/>
+        </p:nvSpPr>
+        <p:spPr>
+          <a:xfrm>
+            <a:off x="4533753" y="2867630"/>
+            <a:ext cx="365760" cy="365760"/>
+          </a:xfrm>
+          <a:prstGeom prst="rect">
+            <a:avLst/>
+          </a:prstGeom>
+          <a:solidFill>
+            <a:srgbClr val="9EC0D5"/>
+          </a:solidFill>
+          <a:ln>
+            <a:noFill/>
+          </a:ln>
+        </p:spPr>
+        <p:txBody>
+          <a:bodyPr spcFirstLastPara="1" wrap="square" lIns="91425" tIns="45700" rIns="91425" bIns="45700" anchor="ctr" anchorCtr="0">
+            <a:noAutofit/>
+          </a:bodyPr>
+          <a:lstStyle/>
+          <a:p>
+            <a:pPr marL="0" marR="0" lvl="0" indent="0" algn="ctr" rtl="0">
+              <a:spcBef>
+                <a:spcPts val="0"/>
+              </a:spcBef>
+              <a:spcAft>
+                <a:spcPts val="0"/>
+              </a:spcAft>
+              <a:buNone/>
+            </a:pPr>
+            <a:endParaRPr sz="1800">
+              <a:solidFill>
+                <a:schemeClr val="lt1"/>
+              </a:solidFill>
+              <a:latin typeface="Twentieth Century"/>
+              <a:ea typeface="Twentieth Century"/>
+              <a:cs typeface="Twentieth Century"/>
+              <a:sym typeface="Twentieth Century"/>
+            </a:endParaRPr>
+          </a:p>
+        </p:txBody>
+      </p:sp>
+      <p:sp>
+        <p:nvSpPr>
+          <p:cNvPr id="702" name="Google Shape;702;p19"/>
+          <p:cNvSpPr/>
+          <p:nvPr/>
+        </p:nvSpPr>
+        <p:spPr>
+          <a:xfrm>
+            <a:off x="4899513" y="2127604"/>
+            <a:ext cx="2455665" cy="1105786"/>
+          </a:xfrm>
+          <a:prstGeom prst="rect">
+            <a:avLst/>
+          </a:prstGeom>
+          <a:solidFill>
+            <a:srgbClr val="9EC0D5"/>
+          </a:solidFill>
+          <a:ln>
+            <a:noFill/>
+          </a:ln>
+        </p:spPr>
+        <p:txBody>
+          <a:bodyPr spcFirstLastPara="1" wrap="square" lIns="91425" tIns="45700" rIns="91425" bIns="45700" anchor="ctr" anchorCtr="0">
+            <a:noAutofit/>
+          </a:bodyPr>
+          <a:lstStyle/>
+          <a:p>
+            <a:pPr marL="0" marR="0" lvl="0" indent="0" algn="ctr" rtl="0">
+              <a:spcBef>
+                <a:spcPts val="0"/>
+              </a:spcBef>
+              <a:spcAft>
+                <a:spcPts val="0"/>
+              </a:spcAft>
+              <a:buNone/>
+            </a:pPr>
+            <a:endParaRPr sz="1800">
+              <a:solidFill>
+                <a:schemeClr val="lt1"/>
+              </a:solidFill>
+              <a:latin typeface="Twentieth Century"/>
+              <a:ea typeface="Twentieth Century"/>
+              <a:cs typeface="Twentieth Century"/>
+              <a:sym typeface="Twentieth Century"/>
+            </a:endParaRPr>
+          </a:p>
+        </p:txBody>
+      </p:sp>
+      <p:sp>
+        <p:nvSpPr>
+          <p:cNvPr id="703" name="Google Shape;703;p19"/>
+          <p:cNvSpPr/>
+          <p:nvPr/>
+        </p:nvSpPr>
+        <p:spPr>
+          <a:xfrm>
+            <a:off x="9670644" y="2144869"/>
+            <a:ext cx="365760" cy="365760"/>
+          </a:xfrm>
+          <a:prstGeom prst="rect">
+            <a:avLst/>
+          </a:prstGeom>
+          <a:solidFill>
+            <a:srgbClr val="9EC0D5"/>
+          </a:solidFill>
+          <a:ln>
+            <a:noFill/>
+          </a:ln>
+        </p:spPr>
+        <p:txBody>
+          <a:bodyPr spcFirstLastPara="1" wrap="square" lIns="91425" tIns="45700" rIns="91425" bIns="45700" anchor="ctr" anchorCtr="0">
+            <a:noAutofit/>
+          </a:bodyPr>
+          <a:lstStyle/>
+          <a:p>
+            <a:pPr marL="0" marR="0" lvl="0" indent="0" algn="ctr" rtl="0">
+              <a:spcBef>
+                <a:spcPts val="0"/>
+              </a:spcBef>
+              <a:spcAft>
+                <a:spcPts val="0"/>
+              </a:spcAft>
+              <a:buNone/>
+            </a:pPr>
+            <a:endParaRPr sz="1800">
+              <a:solidFill>
+                <a:schemeClr val="lt1"/>
+              </a:solidFill>
+              <a:latin typeface="Twentieth Century"/>
+              <a:ea typeface="Twentieth Century"/>
+              <a:cs typeface="Twentieth Century"/>
+              <a:sym typeface="Twentieth Century"/>
+            </a:endParaRPr>
+          </a:p>
+        </p:txBody>
+      </p:sp>
+      <p:sp>
+        <p:nvSpPr>
+          <p:cNvPr id="704" name="Google Shape;704;p19"/>
+          <p:cNvSpPr/>
+          <p:nvPr/>
+        </p:nvSpPr>
+        <p:spPr>
+          <a:xfrm>
+            <a:off x="9670644" y="2884895"/>
+            <a:ext cx="365760" cy="365760"/>
+          </a:xfrm>
+          <a:prstGeom prst="rect">
+            <a:avLst/>
+          </a:prstGeom>
+          <a:solidFill>
+            <a:srgbClr val="9EC0D5"/>
+          </a:solidFill>
+          <a:ln>
+            <a:noFill/>
+          </a:ln>
+        </p:spPr>
+        <p:txBody>
+          <a:bodyPr spcFirstLastPara="1" wrap="square" lIns="91425" tIns="45700" rIns="91425" bIns="45700" anchor="ctr" anchorCtr="0">
+            <a:noAutofit/>
+          </a:bodyPr>
+          <a:lstStyle/>
+          <a:p>
+            <a:pPr marL="0" marR="0" lvl="0" indent="0" algn="ctr" rtl="0">
+              <a:spcBef>
+                <a:spcPts val="0"/>
+              </a:spcBef>
+              <a:spcAft>
+                <a:spcPts val="0"/>
+              </a:spcAft>
+              <a:buNone/>
+            </a:pPr>
+            <a:endParaRPr sz="1800">
+              <a:solidFill>
+                <a:schemeClr val="lt1"/>
+              </a:solidFill>
+              <a:latin typeface="Twentieth Century"/>
+              <a:ea typeface="Twentieth Century"/>
+              <a:cs typeface="Twentieth Century"/>
+              <a:sym typeface="Twentieth Century"/>
+            </a:endParaRPr>
+          </a:p>
+        </p:txBody>
+      </p:sp>
+      <p:sp>
+        <p:nvSpPr>
+          <p:cNvPr id="705" name="Google Shape;705;p19"/>
+          <p:cNvSpPr/>
+          <p:nvPr/>
+        </p:nvSpPr>
+        <p:spPr>
+          <a:xfrm flipH="1">
+            <a:off x="9322618" y="2516297"/>
+            <a:ext cx="1061359" cy="357006"/>
+          </a:xfrm>
+          <a:prstGeom prst="flowChartOnlineStorage">
+            <a:avLst/>
+          </a:prstGeom>
+          <a:solidFill>
+            <a:schemeClr val="accent6"/>
+          </a:solidFill>
+          <a:ln>
+            <a:noFill/>
+          </a:ln>
+        </p:spPr>
+        <p:txBody>
+          <a:bodyPr spcFirstLastPara="1" wrap="square" lIns="91425" tIns="45700" rIns="91425" bIns="45700" anchor="ctr" anchorCtr="0">
+            <a:noAutofit/>
+          </a:bodyPr>
+          <a:lstStyle/>
+          <a:p>
+            <a:pPr marL="0" marR="0" lvl="0" indent="0" algn="ctr" rtl="0">
+              <a:spcBef>
+                <a:spcPts val="0"/>
+              </a:spcBef>
+              <a:spcAft>
+                <a:spcPts val="0"/>
+              </a:spcAft>
+              <a:buNone/>
+            </a:pPr>
+            <a:endParaRPr sz="1800">
+              <a:solidFill>
+                <a:schemeClr val="lt1"/>
+              </a:solidFill>
+              <a:latin typeface="Twentieth Century"/>
+              <a:ea typeface="Twentieth Century"/>
+              <a:cs typeface="Twentieth Century"/>
+              <a:sym typeface="Twentieth Century"/>
+            </a:endParaRPr>
+          </a:p>
+        </p:txBody>
+      </p:sp>
+      <p:sp>
+        <p:nvSpPr>
+          <p:cNvPr id="706" name="Google Shape;706;p19"/>
+          <p:cNvSpPr/>
+          <p:nvPr/>
+        </p:nvSpPr>
+        <p:spPr>
+          <a:xfrm flipH="1">
+            <a:off x="6698564" y="2493364"/>
+            <a:ext cx="965902" cy="381164"/>
+          </a:xfrm>
+          <a:prstGeom prst="flowChartOnlineStorage">
+            <a:avLst/>
+          </a:prstGeom>
+          <a:solidFill>
+            <a:srgbClr val="9EC0D5"/>
+          </a:solidFill>
+          <a:ln>
+            <a:noFill/>
+          </a:ln>
+        </p:spPr>
+        <p:txBody>
+          <a:bodyPr spcFirstLastPara="1" wrap="square" lIns="91425" tIns="45700" rIns="91425" bIns="45700" anchor="ctr" anchorCtr="0">
+            <a:noAutofit/>
+          </a:bodyPr>
+          <a:lstStyle/>
+          <a:p>
+            <a:pPr marL="0" marR="0" lvl="0" indent="0" algn="ctr" rtl="0">
+              <a:spcBef>
+                <a:spcPts val="0"/>
+              </a:spcBef>
+              <a:spcAft>
+                <a:spcPts val="0"/>
+              </a:spcAft>
+              <a:buNone/>
+            </a:pPr>
+            <a:endParaRPr sz="1800">
+              <a:solidFill>
+                <a:schemeClr val="lt1"/>
+              </a:solidFill>
+              <a:latin typeface="Twentieth Century"/>
+              <a:ea typeface="Twentieth Century"/>
+              <a:cs typeface="Twentieth Century"/>
+              <a:sym typeface="Twentieth Century"/>
+            </a:endParaRPr>
+          </a:p>
+        </p:txBody>
+      </p:sp>
+      <p:sp>
+        <p:nvSpPr>
+          <p:cNvPr id="707" name="Google Shape;707;p19"/>
+          <p:cNvSpPr/>
+          <p:nvPr/>
+        </p:nvSpPr>
+        <p:spPr>
+          <a:xfrm flipH="1">
+            <a:off x="8177156" y="2508184"/>
+            <a:ext cx="1119941" cy="376711"/>
+          </a:xfrm>
+          <a:prstGeom prst="flowChartOnlineStorage">
+            <a:avLst/>
+          </a:prstGeom>
+          <a:solidFill>
+            <a:schemeClr val="accent6"/>
+          </a:solidFill>
+          <a:ln>
+            <a:noFill/>
+          </a:ln>
+        </p:spPr>
+        <p:txBody>
+          <a:bodyPr spcFirstLastPara="1" wrap="square" lIns="91425" tIns="45700" rIns="91425" bIns="45700" anchor="ctr" anchorCtr="0">
+            <a:noAutofit/>
+          </a:bodyPr>
+          <a:lstStyle/>
+          <a:p>
+            <a:pPr marL="0" marR="0" lvl="0" indent="0" algn="ctr" rtl="0">
+              <a:spcBef>
+                <a:spcPts val="0"/>
+              </a:spcBef>
+              <a:spcAft>
+                <a:spcPts val="0"/>
+              </a:spcAft>
+              <a:buNone/>
+            </a:pPr>
+            <a:endParaRPr sz="1800">
+              <a:solidFill>
+                <a:schemeClr val="lt1"/>
+              </a:solidFill>
+              <a:latin typeface="Twentieth Century"/>
+              <a:ea typeface="Twentieth Century"/>
+              <a:cs typeface="Twentieth Century"/>
+              <a:sym typeface="Twentieth Century"/>
+            </a:endParaRPr>
+          </a:p>
+        </p:txBody>
+      </p:sp>
+      <p:sp>
+        <p:nvSpPr>
+          <p:cNvPr id="708" name="Google Shape;708;p19"/>
+          <p:cNvSpPr/>
+          <p:nvPr/>
+        </p:nvSpPr>
+        <p:spPr>
+          <a:xfrm>
+            <a:off x="8047272" y="2143647"/>
+            <a:ext cx="365760" cy="365760"/>
+          </a:xfrm>
+          <a:prstGeom prst="rect">
+            <a:avLst/>
+          </a:prstGeom>
+          <a:solidFill>
+            <a:schemeClr val="accent6"/>
+          </a:solidFill>
+          <a:ln>
+            <a:noFill/>
+          </a:ln>
+        </p:spPr>
+        <p:txBody>
+          <a:bodyPr spcFirstLastPara="1" wrap="square" lIns="91425" tIns="45700" rIns="91425" bIns="45700" anchor="ctr" anchorCtr="0">
+            <a:noAutofit/>
+          </a:bodyPr>
+          <a:lstStyle/>
+          <a:p>
+            <a:pPr marL="0" marR="0" lvl="0" indent="0" algn="ctr" rtl="0">
+              <a:spcBef>
+                <a:spcPts val="0"/>
+              </a:spcBef>
+              <a:spcAft>
+                <a:spcPts val="0"/>
+              </a:spcAft>
+              <a:buNone/>
+            </a:pPr>
+            <a:endParaRPr sz="1800">
+              <a:solidFill>
+                <a:schemeClr val="lt1"/>
+              </a:solidFill>
+              <a:latin typeface="Twentieth Century"/>
+              <a:ea typeface="Twentieth Century"/>
+              <a:cs typeface="Twentieth Century"/>
+              <a:sym typeface="Twentieth Century"/>
+            </a:endParaRPr>
+          </a:p>
+        </p:txBody>
+      </p:sp>
+      <p:sp>
+        <p:nvSpPr>
+          <p:cNvPr id="709" name="Google Shape;709;p19"/>
+          <p:cNvSpPr/>
+          <p:nvPr/>
+        </p:nvSpPr>
+        <p:spPr>
+          <a:xfrm>
+            <a:off x="8047272" y="2884895"/>
+            <a:ext cx="365760" cy="365760"/>
+          </a:xfrm>
+          <a:prstGeom prst="rect">
+            <a:avLst/>
+          </a:prstGeom>
+          <a:solidFill>
+            <a:schemeClr val="accent6"/>
+          </a:solidFill>
+          <a:ln>
+            <a:noFill/>
+          </a:ln>
+        </p:spPr>
+        <p:txBody>
+          <a:bodyPr spcFirstLastPara="1" wrap="square" lIns="91425" tIns="45700" rIns="91425" bIns="45700" anchor="ctr" anchorCtr="0">
+            <a:noAutofit/>
+          </a:bodyPr>
+          <a:lstStyle/>
+          <a:p>
+            <a:pPr marL="0" marR="0" lvl="0" indent="0" algn="ctr" rtl="0">
+              <a:spcBef>
+                <a:spcPts val="0"/>
+              </a:spcBef>
+              <a:spcAft>
+                <a:spcPts val="0"/>
+              </a:spcAft>
+              <a:buNone/>
+            </a:pPr>
+            <a:endParaRPr sz="1800">
+              <a:solidFill>
+                <a:schemeClr val="lt1"/>
+              </a:solidFill>
+              <a:latin typeface="Twentieth Century"/>
+              <a:ea typeface="Twentieth Century"/>
+              <a:cs typeface="Twentieth Century"/>
+              <a:sym typeface="Twentieth Century"/>
+            </a:endParaRPr>
+          </a:p>
+        </p:txBody>
+      </p:sp>
+      <p:sp>
+        <p:nvSpPr>
+          <p:cNvPr id="710" name="Google Shape;710;p19"/>
+          <p:cNvSpPr/>
+          <p:nvPr/>
+        </p:nvSpPr>
+        <p:spPr>
+          <a:xfrm>
+            <a:off x="2734165" y="2144869"/>
+            <a:ext cx="1121652" cy="1105786"/>
+          </a:xfrm>
+          <a:prstGeom prst="rect">
+            <a:avLst/>
+          </a:prstGeom>
+          <a:solidFill>
+            <a:schemeClr val="accent2"/>
+          </a:solidFill>
+          <a:ln>
+            <a:noFill/>
+          </a:ln>
+        </p:spPr>
+        <p:txBody>
+          <a:bodyPr spcFirstLastPara="1" wrap="square" lIns="91425" tIns="45700" rIns="91425" bIns="45700" anchor="ctr" anchorCtr="0">
+            <a:noAutofit/>
+          </a:bodyPr>
+          <a:lstStyle/>
+          <a:p>
+            <a:pPr marL="0" marR="0" lvl="0" indent="0" algn="ctr" rtl="0">
+              <a:spcBef>
+                <a:spcPts val="0"/>
+              </a:spcBef>
+              <a:spcAft>
+                <a:spcPts val="0"/>
+              </a:spcAft>
+              <a:buNone/>
+            </a:pPr>
+            <a:r>
+              <a:rPr lang="en-US" sz="1800" b="1">
+                <a:solidFill>
+                  <a:schemeClr val="lt1"/>
+                </a:solidFill>
+                <a:latin typeface="Twentieth Century"/>
+                <a:ea typeface="Twentieth Century"/>
+                <a:cs typeface="Twentieth Century"/>
+                <a:sym typeface="Twentieth Century"/>
+              </a:rPr>
+              <a:t>CODE</a:t>
+            </a:r>
+            <a:endParaRPr/>
+          </a:p>
+        </p:txBody>
+      </p:sp>
+      <p:sp>
+        <p:nvSpPr>
+          <p:cNvPr id="711" name="Google Shape;711;p19"/>
+          <p:cNvSpPr/>
+          <p:nvPr/>
+        </p:nvSpPr>
+        <p:spPr>
+          <a:xfrm>
+            <a:off x="3802093" y="2494575"/>
+            <a:ext cx="418989" cy="396807"/>
+          </a:xfrm>
+          <a:prstGeom prst="rect">
+            <a:avLst/>
+          </a:prstGeom>
+          <a:solidFill>
+            <a:schemeClr val="accent2"/>
+          </a:solidFill>
+          <a:ln>
+            <a:noFill/>
+          </a:ln>
+        </p:spPr>
+        <p:txBody>
+          <a:bodyPr spcFirstLastPara="1" wrap="square" lIns="91425" tIns="45700" rIns="91425" bIns="45700" anchor="ctr" anchorCtr="0">
+            <a:noAutofit/>
+          </a:bodyPr>
+          <a:lstStyle/>
+          <a:p>
+            <a:pPr marL="0" marR="0" lvl="0" indent="0" algn="ctr" rtl="0">
+              <a:spcBef>
+                <a:spcPts val="0"/>
+              </a:spcBef>
+              <a:spcAft>
+                <a:spcPts val="0"/>
+              </a:spcAft>
+              <a:buNone/>
+            </a:pPr>
+            <a:endParaRPr sz="1800">
+              <a:solidFill>
+                <a:schemeClr val="lt1"/>
+              </a:solidFill>
+              <a:latin typeface="Twentieth Century"/>
+              <a:ea typeface="Twentieth Century"/>
+              <a:cs typeface="Twentieth Century"/>
+              <a:sym typeface="Twentieth Century"/>
+            </a:endParaRPr>
+          </a:p>
+        </p:txBody>
+      </p:sp>
+      <p:sp>
+        <p:nvSpPr>
+          <p:cNvPr id="712" name="Google Shape;712;p19"/>
+          <p:cNvSpPr/>
+          <p:nvPr/>
+        </p:nvSpPr>
+        <p:spPr>
+          <a:xfrm>
+            <a:off x="2367905" y="2144869"/>
+            <a:ext cx="365760" cy="365760"/>
+          </a:xfrm>
+          <a:prstGeom prst="rect">
+            <a:avLst/>
+          </a:prstGeom>
+          <a:solidFill>
+            <a:schemeClr val="accent2"/>
+          </a:solidFill>
+          <a:ln>
+            <a:noFill/>
+          </a:ln>
+        </p:spPr>
+        <p:txBody>
+          <a:bodyPr spcFirstLastPara="1" wrap="square" lIns="91425" tIns="45700" rIns="91425" bIns="45700" anchor="ctr" anchorCtr="0">
+            <a:noAutofit/>
+          </a:bodyPr>
+          <a:lstStyle/>
+          <a:p>
+            <a:pPr marL="0" marR="0" lvl="0" indent="0" algn="ctr" rtl="0">
+              <a:spcBef>
+                <a:spcPts val="0"/>
+              </a:spcBef>
+              <a:spcAft>
+                <a:spcPts val="0"/>
+              </a:spcAft>
+              <a:buNone/>
+            </a:pPr>
+            <a:endParaRPr sz="1800">
+              <a:solidFill>
+                <a:schemeClr val="lt1"/>
+              </a:solidFill>
+              <a:latin typeface="Twentieth Century"/>
+              <a:ea typeface="Twentieth Century"/>
+              <a:cs typeface="Twentieth Century"/>
+              <a:sym typeface="Twentieth Century"/>
+            </a:endParaRPr>
+          </a:p>
+        </p:txBody>
+      </p:sp>
+      <p:sp>
+        <p:nvSpPr>
+          <p:cNvPr id="713" name="Google Shape;713;p19"/>
+          <p:cNvSpPr/>
+          <p:nvPr/>
+        </p:nvSpPr>
+        <p:spPr>
+          <a:xfrm>
+            <a:off x="2367904" y="2884895"/>
+            <a:ext cx="365760" cy="365760"/>
+          </a:xfrm>
+          <a:prstGeom prst="rect">
+            <a:avLst/>
+          </a:prstGeom>
+          <a:solidFill>
+            <a:schemeClr val="accent2"/>
+          </a:solidFill>
+          <a:ln>
+            <a:noFill/>
+          </a:ln>
+        </p:spPr>
+        <p:txBody>
+          <a:bodyPr spcFirstLastPara="1" wrap="square" lIns="91425" tIns="45700" rIns="91425" bIns="45700" anchor="ctr" anchorCtr="0">
+            <a:noAutofit/>
+          </a:bodyPr>
+          <a:lstStyle/>
+          <a:p>
+            <a:pPr marL="0" marR="0" lvl="0" indent="0" algn="ctr" rtl="0">
+              <a:spcBef>
+                <a:spcPts val="0"/>
+              </a:spcBef>
+              <a:spcAft>
+                <a:spcPts val="0"/>
+              </a:spcAft>
+              <a:buNone/>
+            </a:pPr>
+            <a:endParaRPr sz="1800">
+              <a:solidFill>
+                <a:schemeClr val="lt1"/>
+              </a:solidFill>
+              <a:latin typeface="Twentieth Century"/>
+              <a:ea typeface="Twentieth Century"/>
+              <a:cs typeface="Twentieth Century"/>
+              <a:sym typeface="Twentieth Century"/>
+            </a:endParaRPr>
+          </a:p>
+        </p:txBody>
+      </p:sp>
+      <p:sp>
+        <p:nvSpPr>
+          <p:cNvPr id="714" name="Google Shape;714;p19"/>
+          <p:cNvSpPr/>
+          <p:nvPr/>
+        </p:nvSpPr>
+        <p:spPr>
+          <a:xfrm>
+            <a:off x="5122601" y="2269692"/>
+            <a:ext cx="2044962" cy="792969"/>
+          </a:xfrm>
+          <a:prstGeom prst="rightArrow">
+            <a:avLst>
+              <a:gd name="adj1" fmla="val 50000"/>
+              <a:gd name="adj2" fmla="val 50000"/>
+            </a:avLst>
+          </a:prstGeom>
+          <a:solidFill>
+            <a:srgbClr val="BAC7DA"/>
+          </a:solidFill>
+          <a:ln>
+            <a:noFill/>
+          </a:ln>
+        </p:spPr>
+        <p:txBody>
+          <a:bodyPr spcFirstLastPara="1" wrap="square" lIns="91425" tIns="45700" rIns="91425" bIns="45700" anchor="ctr" anchorCtr="0">
+            <a:noAutofit/>
+          </a:bodyPr>
+          <a:lstStyle/>
+          <a:p>
+            <a:pPr marL="0" marR="0" lvl="0" indent="0" algn="ctr" rtl="0">
+              <a:spcBef>
+                <a:spcPts val="0"/>
+              </a:spcBef>
+              <a:spcAft>
+                <a:spcPts val="0"/>
+              </a:spcAft>
+              <a:buNone/>
+            </a:pPr>
+            <a:endParaRPr sz="1800">
+              <a:solidFill>
+                <a:schemeClr val="lt1"/>
+              </a:solidFill>
+              <a:latin typeface="Twentieth Century"/>
+              <a:ea typeface="Twentieth Century"/>
+              <a:cs typeface="Twentieth Century"/>
+              <a:sym typeface="Twentieth Century"/>
+            </a:endParaRPr>
+          </a:p>
+        </p:txBody>
+      </p:sp>
+      <p:sp>
+        <p:nvSpPr>
+          <p:cNvPr id="715" name="Google Shape;715;p19"/>
+          <p:cNvSpPr txBox="1"/>
+          <p:nvPr/>
+        </p:nvSpPr>
+        <p:spPr>
+          <a:xfrm>
+            <a:off x="5103093" y="2477078"/>
+            <a:ext cx="2025339" cy="369291"/>
+          </a:xfrm>
+          <a:prstGeom prst="rect">
+            <a:avLst/>
+          </a:prstGeom>
+          <a:noFill/>
+          <a:ln>
+            <a:noFill/>
+          </a:ln>
+        </p:spPr>
+        <p:txBody>
+          <a:bodyPr spcFirstLastPara="1" wrap="square" lIns="91425" tIns="45700" rIns="91425" bIns="45700" anchor="t" anchorCtr="0">
+            <a:spAutoFit/>
+          </a:bodyPr>
+          <a:lstStyle/>
+          <a:p>
+            <a:pPr marL="0" marR="0" lvl="0" indent="0" algn="l" rtl="0">
+              <a:spcBef>
+                <a:spcPts val="0"/>
+              </a:spcBef>
+              <a:spcAft>
+                <a:spcPts val="0"/>
+              </a:spcAft>
+              <a:buNone/>
+            </a:pPr>
+            <a:r>
+              <a:rPr lang="en-US" sz="1800" b="1" dirty="0">
+                <a:solidFill>
+                  <a:schemeClr val="dk1"/>
+                </a:solidFill>
+                <a:latin typeface="Calibri"/>
+                <a:ea typeface="Calibri"/>
+                <a:cs typeface="Calibri"/>
+                <a:sym typeface="Calibri"/>
+              </a:rPr>
+              <a:t>Code </a:t>
+            </a:r>
+            <a:r>
+              <a:rPr lang="en-US" sz="1800" b="1" dirty="0" err="1">
+                <a:solidFill>
+                  <a:schemeClr val="dk1"/>
+                </a:solidFill>
+                <a:latin typeface="Calibri"/>
+                <a:ea typeface="Calibri"/>
+                <a:cs typeface="Calibri"/>
+                <a:sym typeface="Calibri"/>
+              </a:rPr>
+              <a:t>Modellierung</a:t>
+            </a:r>
+            <a:endParaRPr dirty="0"/>
+          </a:p>
+        </p:txBody>
+      </p:sp>
+      <p:sp>
+        <p:nvSpPr>
+          <p:cNvPr id="716" name="Google Shape;716;p19"/>
+          <p:cNvSpPr/>
+          <p:nvPr/>
+        </p:nvSpPr>
+        <p:spPr>
+          <a:xfrm flipH="1">
+            <a:off x="8910130" y="2505602"/>
+            <a:ext cx="1119941" cy="376711"/>
+          </a:xfrm>
+          <a:prstGeom prst="flowChartOnlineStorage">
+            <a:avLst/>
+          </a:prstGeom>
+          <a:solidFill>
+            <a:schemeClr val="accent3"/>
+          </a:solidFill>
+          <a:ln>
+            <a:noFill/>
+          </a:ln>
+        </p:spPr>
+        <p:txBody>
+          <a:bodyPr spcFirstLastPara="1" wrap="square" lIns="91425" tIns="45700" rIns="91425" bIns="45700" anchor="ctr" anchorCtr="0">
+            <a:noAutofit/>
+          </a:bodyPr>
+          <a:lstStyle/>
+          <a:p>
+            <a:pPr marL="0" marR="0" lvl="0" indent="0" algn="ctr" rtl="0">
+              <a:spcBef>
+                <a:spcPts val="0"/>
+              </a:spcBef>
+              <a:spcAft>
+                <a:spcPts val="0"/>
+              </a:spcAft>
+              <a:buNone/>
+            </a:pPr>
+            <a:endParaRPr sz="1800">
+              <a:solidFill>
+                <a:schemeClr val="lt1"/>
+              </a:solidFill>
+              <a:latin typeface="Twentieth Century"/>
+              <a:ea typeface="Twentieth Century"/>
+              <a:cs typeface="Twentieth Century"/>
+              <a:sym typeface="Twentieth Century"/>
+            </a:endParaRPr>
+          </a:p>
+        </p:txBody>
+      </p:sp>
+      <p:sp>
+        <p:nvSpPr>
+          <p:cNvPr id="717" name="Google Shape;717;p19"/>
+          <p:cNvSpPr/>
+          <p:nvPr/>
+        </p:nvSpPr>
+        <p:spPr>
+          <a:xfrm>
+            <a:off x="8409410" y="2144869"/>
+            <a:ext cx="1662037" cy="1105786"/>
+          </a:xfrm>
+          <a:prstGeom prst="rect">
+            <a:avLst/>
+          </a:prstGeom>
+          <a:solidFill>
+            <a:schemeClr val="accent6"/>
+          </a:solidFill>
+          <a:ln>
+            <a:noFill/>
+          </a:ln>
+        </p:spPr>
+        <p:txBody>
+          <a:bodyPr spcFirstLastPara="1" wrap="square" lIns="91425" tIns="45700" rIns="91425" bIns="45700" anchor="ctr" anchorCtr="0">
+            <a:noAutofit/>
+          </a:bodyPr>
+          <a:lstStyle/>
+          <a:p>
+            <a:pPr marL="0" marR="0" lvl="0" indent="0" algn="ctr" rtl="0">
+              <a:spcBef>
+                <a:spcPts val="0"/>
+              </a:spcBef>
+              <a:spcAft>
+                <a:spcPts val="0"/>
+              </a:spcAft>
+              <a:buNone/>
+            </a:pPr>
+            <a:r>
+              <a:rPr lang="de-DE" sz="1400" b="1" dirty="0">
+                <a:solidFill>
+                  <a:schemeClr val="lt1"/>
+                </a:solidFill>
+                <a:latin typeface="Twentieth Century"/>
+                <a:ea typeface="Twentieth Century"/>
+                <a:cs typeface="Twentieth Century"/>
+                <a:sym typeface="Twentieth Century"/>
+              </a:rPr>
+              <a:t>LAUFZEIT</a:t>
+            </a:r>
+            <a:endParaRPr lang="de-DE" b="1" dirty="0">
+              <a:solidFill>
+                <a:schemeClr val="lt1"/>
+              </a:solidFill>
+              <a:latin typeface="Twentieth Century"/>
+              <a:ea typeface="Twentieth Century"/>
+              <a:cs typeface="Twentieth Century"/>
+              <a:sym typeface="Twentieth Century"/>
+            </a:endParaRPr>
+          </a:p>
+          <a:p>
+            <a:pPr marL="0" marR="0" lvl="0" indent="0" algn="ctr" rtl="0">
+              <a:spcBef>
+                <a:spcPts val="0"/>
+              </a:spcBef>
+              <a:spcAft>
+                <a:spcPts val="0"/>
+              </a:spcAft>
+              <a:buNone/>
+            </a:pPr>
+            <a:r>
+              <a:rPr lang="de-DE" b="1" dirty="0">
+                <a:solidFill>
+                  <a:schemeClr val="lt1"/>
+                </a:solidFill>
+                <a:latin typeface="Twentieth Century"/>
+                <a:sym typeface="Twentieth Century"/>
+              </a:rPr>
+              <a:t>FUNKTION</a:t>
+            </a:r>
+            <a:endParaRPr dirty="0"/>
+          </a:p>
+        </p:txBody>
+      </p:sp>
+      <p:sp>
+        <p:nvSpPr>
+          <p:cNvPr id="718" name="Google Shape;718;p19"/>
+          <p:cNvSpPr/>
+          <p:nvPr/>
+        </p:nvSpPr>
+        <p:spPr>
+          <a:xfrm>
+            <a:off x="5577449" y="1560940"/>
+            <a:ext cx="762636" cy="762636"/>
+          </a:xfrm>
+          <a:prstGeom prst="ellipse">
+            <a:avLst/>
+          </a:prstGeom>
+          <a:solidFill>
+            <a:srgbClr val="4C3282"/>
+          </a:solidFill>
+          <a:ln>
+            <a:noFill/>
+          </a:ln>
+        </p:spPr>
+        <p:txBody>
+          <a:bodyPr spcFirstLastPara="1" wrap="square" lIns="91425" tIns="45700" rIns="91425" bIns="45700" anchor="ctr" anchorCtr="0">
+            <a:noAutofit/>
+          </a:bodyPr>
+          <a:lstStyle/>
+          <a:p>
+            <a:pPr marL="0" marR="0" lvl="0" indent="0" algn="ctr" rtl="0">
+              <a:spcBef>
+                <a:spcPts val="0"/>
+              </a:spcBef>
+              <a:spcAft>
+                <a:spcPts val="0"/>
+              </a:spcAft>
+              <a:buNone/>
+            </a:pPr>
+            <a:r>
+              <a:rPr lang="en-US" sz="2800" b="1">
+                <a:solidFill>
+                  <a:schemeClr val="lt1"/>
+                </a:solidFill>
+                <a:latin typeface="Montserrat"/>
+                <a:ea typeface="Montserrat"/>
+                <a:cs typeface="Montserrat"/>
+                <a:sym typeface="Montserrat"/>
+              </a:rPr>
+              <a:t>1</a:t>
+            </a:r>
+            <a:endParaRPr/>
+          </a:p>
+        </p:txBody>
+      </p:sp>
+      <p:sp>
+        <p:nvSpPr>
+          <p:cNvPr id="25" name="Google Shape;257;p13">
+            <a:extLst>
+              <a:ext uri="{FF2B5EF4-FFF2-40B4-BE49-F238E27FC236}">
+                <a16:creationId xmlns:a16="http://schemas.microsoft.com/office/drawing/2014/main" id="{11EA8824-AC42-4A57-85EE-9A4AAB7B65ED}"/>
+              </a:ext>
+            </a:extLst>
+          </p:cNvPr>
+          <p:cNvSpPr txBox="1">
+            <a:spLocks/>
+          </p:cNvSpPr>
+          <p:nvPr/>
+        </p:nvSpPr>
+        <p:spPr>
+          <a:xfrm>
+            <a:off x="7499928" y="6407294"/>
+            <a:ext cx="2193636" cy="219798"/>
+          </a:xfrm>
+          <a:prstGeom prst="rect">
+            <a:avLst/>
+          </a:prstGeom>
+          <a:noFill/>
+          <a:ln>
+            <a:noFill/>
+          </a:ln>
+        </p:spPr>
+        <p:txBody>
+          <a:bodyPr spcFirstLastPara="1" wrap="square" lIns="91425" tIns="45700" rIns="91425" bIns="45700" anchor="ctr" anchorCtr="0">
+            <a:noAutofit/>
+          </a:bodyPr>
+          <a:lstStyle>
+            <a:defPPr>
+              <a:defRPr lang="de-DE"/>
+            </a:defPPr>
+            <a:lvl1pPr algn="l" defTabSz="457200" rtl="0" fontAlgn="base">
+              <a:spcBef>
+                <a:spcPct val="0"/>
+              </a:spcBef>
+              <a:spcAft>
+                <a:spcPct val="0"/>
+              </a:spcAft>
+              <a:defRPr kern="1200">
+                <a:solidFill>
+                  <a:schemeClr val="tx1"/>
+                </a:solidFill>
+                <a:latin typeface="Arial" pitchFamily="34" charset="0"/>
+                <a:ea typeface="+mn-ea"/>
+                <a:cs typeface="Arial" pitchFamily="34" charset="0"/>
+              </a:defRPr>
+            </a:lvl1pPr>
+            <a:lvl2pPr marL="457200" algn="l" defTabSz="457200" rtl="0" fontAlgn="base">
+              <a:spcBef>
+                <a:spcPct val="0"/>
+              </a:spcBef>
+              <a:spcAft>
+                <a:spcPct val="0"/>
+              </a:spcAft>
+              <a:defRPr kern="1200">
+                <a:solidFill>
+                  <a:schemeClr val="tx1"/>
+                </a:solidFill>
+                <a:latin typeface="Arial" pitchFamily="34" charset="0"/>
+                <a:ea typeface="+mn-ea"/>
+                <a:cs typeface="Arial" pitchFamily="34" charset="0"/>
+              </a:defRPr>
+            </a:lvl2pPr>
+            <a:lvl3pPr marL="914400" algn="l" defTabSz="457200" rtl="0" fontAlgn="base">
+              <a:spcBef>
+                <a:spcPct val="0"/>
+              </a:spcBef>
+              <a:spcAft>
+                <a:spcPct val="0"/>
+              </a:spcAft>
+              <a:defRPr kern="1200">
+                <a:solidFill>
+                  <a:schemeClr val="tx1"/>
+                </a:solidFill>
+                <a:latin typeface="Arial" pitchFamily="34" charset="0"/>
+                <a:ea typeface="+mn-ea"/>
+                <a:cs typeface="Arial" pitchFamily="34" charset="0"/>
+              </a:defRPr>
+            </a:lvl3pPr>
+            <a:lvl4pPr marL="1371600" algn="l" defTabSz="457200" rtl="0" fontAlgn="base">
+              <a:spcBef>
+                <a:spcPct val="0"/>
+              </a:spcBef>
+              <a:spcAft>
+                <a:spcPct val="0"/>
+              </a:spcAft>
+              <a:defRPr kern="1200">
+                <a:solidFill>
+                  <a:schemeClr val="tx1"/>
+                </a:solidFill>
+                <a:latin typeface="Arial" pitchFamily="34" charset="0"/>
+                <a:ea typeface="+mn-ea"/>
+                <a:cs typeface="Arial" pitchFamily="34" charset="0"/>
+              </a:defRPr>
+            </a:lvl4pPr>
+            <a:lvl5pPr marL="1828800" algn="l" defTabSz="457200" rtl="0" fontAlgn="base">
+              <a:spcBef>
+                <a:spcPct val="0"/>
+              </a:spcBef>
+              <a:spcAft>
+                <a:spcPct val="0"/>
+              </a:spcAft>
+              <a:defRPr kern="1200">
+                <a:solidFill>
+                  <a:schemeClr val="tx1"/>
+                </a:solidFill>
+                <a:latin typeface="Arial" pitchFamily="34" charset="0"/>
+                <a:ea typeface="+mn-ea"/>
+                <a:cs typeface="Arial" pitchFamily="34" charset="0"/>
+              </a:defRPr>
+            </a:lvl5pPr>
+            <a:lvl6pPr marL="2286000" algn="l" defTabSz="914400" rtl="0" eaLnBrk="1" latinLnBrk="0" hangingPunct="1">
+              <a:defRPr kern="1200">
+                <a:solidFill>
+                  <a:schemeClr val="tx1"/>
+                </a:solidFill>
+                <a:latin typeface="Arial" pitchFamily="34" charset="0"/>
+                <a:ea typeface="+mn-ea"/>
+                <a:cs typeface="Arial" pitchFamily="34" charset="0"/>
+              </a:defRPr>
+            </a:lvl6pPr>
+            <a:lvl7pPr marL="2743200" algn="l" defTabSz="914400" rtl="0" eaLnBrk="1" latinLnBrk="0" hangingPunct="1">
+              <a:defRPr kern="1200">
+                <a:solidFill>
+                  <a:schemeClr val="tx1"/>
+                </a:solidFill>
+                <a:latin typeface="Arial" pitchFamily="34" charset="0"/>
+                <a:ea typeface="+mn-ea"/>
+                <a:cs typeface="Arial" pitchFamily="34" charset="0"/>
+              </a:defRPr>
+            </a:lvl7pPr>
+            <a:lvl8pPr marL="3200400" algn="l" defTabSz="914400" rtl="0" eaLnBrk="1" latinLnBrk="0" hangingPunct="1">
+              <a:defRPr kern="1200">
+                <a:solidFill>
+                  <a:schemeClr val="tx1"/>
+                </a:solidFill>
+                <a:latin typeface="Arial" pitchFamily="34" charset="0"/>
+                <a:ea typeface="+mn-ea"/>
+                <a:cs typeface="Arial" pitchFamily="34" charset="0"/>
+              </a:defRPr>
+            </a:lvl8pPr>
+            <a:lvl9pPr marL="3657600" algn="l" defTabSz="914400" rtl="0" eaLnBrk="1" latinLnBrk="0" hangingPunct="1">
+              <a:defRPr kern="1200">
+                <a:solidFill>
+                  <a:schemeClr val="tx1"/>
+                </a:solidFill>
+                <a:latin typeface="Arial" pitchFamily="34" charset="0"/>
+                <a:ea typeface="+mn-ea"/>
+                <a:cs typeface="Arial" pitchFamily="34" charset="0"/>
+              </a:defRPr>
+            </a:lvl9pPr>
+          </a:lstStyle>
+          <a:p>
+            <a:pPr algn="r">
+              <a:spcBef>
+                <a:spcPts val="0"/>
+              </a:spcBef>
+              <a:spcAft>
+                <a:spcPts val="0"/>
+              </a:spcAft>
+            </a:pPr>
+            <a:r>
+              <a:rPr lang="fr-FR" sz="800" dirty="0"/>
+              <a:t>CSE 373 20 AU – SCHAFER</a:t>
+            </a:r>
+          </a:p>
+        </p:txBody>
+      </p:sp>
+      <p:sp>
+        <p:nvSpPr>
+          <p:cNvPr id="26" name="Google Shape;257;p13">
+            <a:extLst>
+              <a:ext uri="{FF2B5EF4-FFF2-40B4-BE49-F238E27FC236}">
+                <a16:creationId xmlns:a16="http://schemas.microsoft.com/office/drawing/2014/main" id="{BB036449-F13B-4324-B1CF-97D0C6A4FD84}"/>
+              </a:ext>
+            </a:extLst>
+          </p:cNvPr>
+          <p:cNvSpPr txBox="1">
+            <a:spLocks/>
+          </p:cNvSpPr>
+          <p:nvPr/>
+        </p:nvSpPr>
+        <p:spPr>
+          <a:xfrm>
+            <a:off x="6881091" y="6150552"/>
+            <a:ext cx="2812473" cy="219798"/>
+          </a:xfrm>
+          <a:prstGeom prst="rect">
+            <a:avLst/>
+          </a:prstGeom>
+          <a:noFill/>
+          <a:ln>
+            <a:noFill/>
+          </a:ln>
+        </p:spPr>
+        <p:txBody>
+          <a:bodyPr spcFirstLastPara="1" wrap="square" lIns="91425" tIns="45700" rIns="91425" bIns="45700" anchor="ctr" anchorCtr="0">
+            <a:noAutofit/>
+          </a:bodyPr>
+          <a:lstStyle>
+            <a:defPPr>
+              <a:defRPr lang="de-DE"/>
+            </a:defPPr>
+            <a:lvl1pPr algn="l" defTabSz="457200" rtl="0" fontAlgn="base">
+              <a:spcBef>
+                <a:spcPct val="0"/>
+              </a:spcBef>
+              <a:spcAft>
+                <a:spcPct val="0"/>
+              </a:spcAft>
+              <a:defRPr kern="1200">
+                <a:solidFill>
+                  <a:schemeClr val="tx1"/>
+                </a:solidFill>
+                <a:latin typeface="Arial" pitchFamily="34" charset="0"/>
+                <a:ea typeface="+mn-ea"/>
+                <a:cs typeface="Arial" pitchFamily="34" charset="0"/>
+              </a:defRPr>
+            </a:lvl1pPr>
+            <a:lvl2pPr marL="457200" algn="l" defTabSz="457200" rtl="0" fontAlgn="base">
+              <a:spcBef>
+                <a:spcPct val="0"/>
+              </a:spcBef>
+              <a:spcAft>
+                <a:spcPct val="0"/>
+              </a:spcAft>
+              <a:defRPr kern="1200">
+                <a:solidFill>
+                  <a:schemeClr val="tx1"/>
+                </a:solidFill>
+                <a:latin typeface="Arial" pitchFamily="34" charset="0"/>
+                <a:ea typeface="+mn-ea"/>
+                <a:cs typeface="Arial" pitchFamily="34" charset="0"/>
+              </a:defRPr>
+            </a:lvl2pPr>
+            <a:lvl3pPr marL="914400" algn="l" defTabSz="457200" rtl="0" fontAlgn="base">
+              <a:spcBef>
+                <a:spcPct val="0"/>
+              </a:spcBef>
+              <a:spcAft>
+                <a:spcPct val="0"/>
+              </a:spcAft>
+              <a:defRPr kern="1200">
+                <a:solidFill>
+                  <a:schemeClr val="tx1"/>
+                </a:solidFill>
+                <a:latin typeface="Arial" pitchFamily="34" charset="0"/>
+                <a:ea typeface="+mn-ea"/>
+                <a:cs typeface="Arial" pitchFamily="34" charset="0"/>
+              </a:defRPr>
+            </a:lvl3pPr>
+            <a:lvl4pPr marL="1371600" algn="l" defTabSz="457200" rtl="0" fontAlgn="base">
+              <a:spcBef>
+                <a:spcPct val="0"/>
+              </a:spcBef>
+              <a:spcAft>
+                <a:spcPct val="0"/>
+              </a:spcAft>
+              <a:defRPr kern="1200">
+                <a:solidFill>
+                  <a:schemeClr val="tx1"/>
+                </a:solidFill>
+                <a:latin typeface="Arial" pitchFamily="34" charset="0"/>
+                <a:ea typeface="+mn-ea"/>
+                <a:cs typeface="Arial" pitchFamily="34" charset="0"/>
+              </a:defRPr>
+            </a:lvl4pPr>
+            <a:lvl5pPr marL="1828800" algn="l" defTabSz="457200" rtl="0" fontAlgn="base">
+              <a:spcBef>
+                <a:spcPct val="0"/>
+              </a:spcBef>
+              <a:spcAft>
+                <a:spcPct val="0"/>
+              </a:spcAft>
+              <a:defRPr kern="1200">
+                <a:solidFill>
+                  <a:schemeClr val="tx1"/>
+                </a:solidFill>
+                <a:latin typeface="Arial" pitchFamily="34" charset="0"/>
+                <a:ea typeface="+mn-ea"/>
+                <a:cs typeface="Arial" pitchFamily="34" charset="0"/>
+              </a:defRPr>
+            </a:lvl5pPr>
+            <a:lvl6pPr marL="2286000" algn="l" defTabSz="914400" rtl="0" eaLnBrk="1" latinLnBrk="0" hangingPunct="1">
+              <a:defRPr kern="1200">
+                <a:solidFill>
+                  <a:schemeClr val="tx1"/>
+                </a:solidFill>
+                <a:latin typeface="Arial" pitchFamily="34" charset="0"/>
+                <a:ea typeface="+mn-ea"/>
+                <a:cs typeface="Arial" pitchFamily="34" charset="0"/>
+              </a:defRPr>
+            </a:lvl6pPr>
+            <a:lvl7pPr marL="2743200" algn="l" defTabSz="914400" rtl="0" eaLnBrk="1" latinLnBrk="0" hangingPunct="1">
+              <a:defRPr kern="1200">
+                <a:solidFill>
+                  <a:schemeClr val="tx1"/>
+                </a:solidFill>
+                <a:latin typeface="Arial" pitchFamily="34" charset="0"/>
+                <a:ea typeface="+mn-ea"/>
+                <a:cs typeface="Arial" pitchFamily="34" charset="0"/>
+              </a:defRPr>
+            </a:lvl7pPr>
+            <a:lvl8pPr marL="3200400" algn="l" defTabSz="914400" rtl="0" eaLnBrk="1" latinLnBrk="0" hangingPunct="1">
+              <a:defRPr kern="1200">
+                <a:solidFill>
+                  <a:schemeClr val="tx1"/>
+                </a:solidFill>
+                <a:latin typeface="Arial" pitchFamily="34" charset="0"/>
+                <a:ea typeface="+mn-ea"/>
+                <a:cs typeface="Arial" pitchFamily="34" charset="0"/>
+              </a:defRPr>
+            </a:lvl8pPr>
+            <a:lvl9pPr marL="3657600" algn="l" defTabSz="914400" rtl="0" eaLnBrk="1" latinLnBrk="0" hangingPunct="1">
+              <a:defRPr kern="1200">
+                <a:solidFill>
+                  <a:schemeClr val="tx1"/>
+                </a:solidFill>
+                <a:latin typeface="Arial" pitchFamily="34" charset="0"/>
+                <a:ea typeface="+mn-ea"/>
+                <a:cs typeface="Arial" pitchFamily="34" charset="0"/>
+              </a:defRPr>
+            </a:lvl9pPr>
+          </a:lstStyle>
+          <a:p>
+            <a:pPr algn="r">
+              <a:spcBef>
+                <a:spcPts val="0"/>
+              </a:spcBef>
+              <a:spcAft>
+                <a:spcPts val="0"/>
+              </a:spcAft>
+            </a:pPr>
+            <a:r>
+              <a:rPr lang="fr-FR" sz="800" dirty="0"/>
+              <a:t>Quelle: Data Structures and </a:t>
+            </a:r>
+            <a:r>
+              <a:rPr lang="fr-FR" sz="800" dirty="0" err="1"/>
+              <a:t>Algorithms</a:t>
+            </a:r>
+            <a:r>
+              <a:rPr lang="fr-FR" sz="800" dirty="0"/>
+              <a:t> (CSE 373), University of Washington, Spring 2022</a:t>
+            </a:r>
+          </a:p>
+        </p:txBody>
+      </p:sp>
+    </p:spTree>
+  </p:cSld>
+  <p:clrMapOvr>
+    <a:masterClrMapping/>
+  </p:clrMapOvr>
+</p:sld>
+</file>
+
+<file path=ppt/slides/slide6.xml><?xml version="1.0" encoding="utf-8"?>
 <p:sld xmlns:a="http://schemas.openxmlformats.org/drawingml/2006/main" xmlns:r="http://schemas.openxmlformats.org/officeDocument/2006/relationships" xmlns:p="http://schemas.openxmlformats.org/presentationml/2006/main">
   <p:cSld>
     <p:spTree>
@@ -16556,7 +20315,7 @@
               <a:buNone/>
             </a:pPr>
             <a:r>
-              <a:rPr lang="en-US" sz="2000" b="1" dirty="0">
+              <a:rPr lang="en-US" sz="2000" b="1">
                 <a:solidFill>
                   <a:schemeClr val="lt1"/>
                 </a:solidFill>
@@ -16567,7 +20326,7 @@
               </a:rPr>
               <a:t>+1</a:t>
             </a:r>
-            <a:endParaRPr dirty="0"/>
+            <a:endParaRPr/>
           </a:p>
         </p:txBody>
       </p:sp>
@@ -17043,7 +20802,7 @@
               <a:buNone/>
             </a:pPr>
             <a:r>
-              <a:rPr lang="en-US" sz="2400" dirty="0">
+              <a:rPr lang="en-US" sz="2400">
                 <a:solidFill>
                   <a:schemeClr val="lt1"/>
                 </a:solidFill>
@@ -17054,7 +20813,7 @@
               </a:rPr>
               <a:t>f(n) = (9n+4)n + 3</a:t>
             </a:r>
-            <a:endParaRPr dirty="0"/>
+            <a:endParaRPr/>
           </a:p>
         </p:txBody>
       </p:sp>
@@ -17536,7 +21295,7 @@
                 <a:buNone/>
               </a:pPr>
               <a:r>
-                <a:rPr lang="en-US" sz="1800" b="1" dirty="0">
+                <a:rPr lang="en-US" sz="1800" b="1">
                   <a:solidFill>
                     <a:schemeClr val="lt1"/>
                   </a:solidFill>
@@ -17547,7 +21306,7 @@
                 </a:rPr>
                 <a:t>*n</a:t>
               </a:r>
-              <a:endParaRPr dirty="0"/>
+              <a:endParaRPr/>
             </a:p>
           </p:txBody>
         </p:sp>
@@ -18018,7 +21777,7 @@
             <a:fld id="{97C55095-590B-4AAB-8606-0F86796D070A}" type="datetime1">
               <a:rPr lang="de-DE" smtClean="0"/>
               <a:pPr/>
-              <a:t>30.01.2026</a:t>
+              <a:t>05.02.2026</a:t>
             </a:fld>
             <a:endParaRPr lang="de-DE" dirty="0"/>
           </a:p>
@@ -18057,7 +21816,7 @@
             <a:fld id="{43310F81-32EE-4F95-9E9C-0BDC6AD52EEC}" type="slidenum">
               <a:rPr lang="de-DE" smtClean="0"/>
               <a:pPr/>
-              <a:t>3</a:t>
+              <a:t>6</a:t>
             </a:fld>
             <a:endParaRPr lang="de-DE"/>
           </a:p>
@@ -18920,7 +22679,7 @@
 </p:sld>
 </file>
 
-<file path=ppt/slides/slide4.xml><?xml version="1.0" encoding="utf-8"?>
+<file path=ppt/slides/slide7.xml><?xml version="1.0" encoding="utf-8"?>
 <p:sld xmlns:a="http://schemas.openxmlformats.org/drawingml/2006/main" xmlns:r="http://schemas.openxmlformats.org/officeDocument/2006/relationships" xmlns:p="http://schemas.openxmlformats.org/presentationml/2006/main">
   <p:cSld>
     <p:spTree>
@@ -18937,126 +22696,74 @@
           <a:chExt cx="0" cy="0"/>
         </a:xfrm>
       </p:grpSpPr>
-      <p:grpSp>
-        <p:nvGrpSpPr>
-          <p:cNvPr id="38" name="Gruppieren 37">
+      <p:sp>
+        <p:nvSpPr>
+          <p:cNvPr id="40" name="Google Shape;921;p27">
             <a:extLst>
               <a:ext uri="{FF2B5EF4-FFF2-40B4-BE49-F238E27FC236}">
-                <a16:creationId xmlns:a16="http://schemas.microsoft.com/office/drawing/2014/main" id="{3E20075B-7A52-4F26-A090-9C63D480AAF3}"/>
+                <a16:creationId xmlns:a16="http://schemas.microsoft.com/office/drawing/2014/main" id="{3CE34F02-980A-4D8E-8EB6-8116A1140FFC}"/>
               </a:ext>
             </a:extLst>
           </p:cNvPr>
-          <p:cNvGrpSpPr>
-            <a:grpSpLocks noChangeAspect="1"/>
-          </p:cNvGrpSpPr>
+          <p:cNvSpPr/>
           <p:nvPr/>
-        </p:nvGrpSpPr>
-        <p:grpSpPr>
+        </p:nvSpPr>
+        <p:spPr>
           <a:xfrm>
             <a:off x="5766996" y="4028691"/>
-            <a:ext cx="6238094" cy="1872049"/>
-            <a:chOff x="5281611" y="520700"/>
-            <a:chExt cx="6723479" cy="2017713"/>
+            <a:ext cx="6238094" cy="441868"/>
           </a:xfrm>
-        </p:grpSpPr>
-        <p:pic>
-          <p:nvPicPr>
-            <p:cNvPr id="39" name="Grafik 38">
-              <a:extLst>
-                <a:ext uri="{FF2B5EF4-FFF2-40B4-BE49-F238E27FC236}">
-                  <a16:creationId xmlns:a16="http://schemas.microsoft.com/office/drawing/2014/main" id="{E9773847-59E5-4A70-94A9-D503A9497FE0}"/>
-                </a:ext>
-              </a:extLst>
-            </p:cNvPr>
-            <p:cNvPicPr>
-              <a:picLocks noChangeAspect="1"/>
-            </p:cNvPicPr>
-            <p:nvPr/>
-          </p:nvPicPr>
-          <p:blipFill rotWithShape="1">
-            <a:blip r:embed="rId3"/>
-            <a:srcRect l="1289" r="768" b="4434"/>
-            <a:stretch/>
-          </p:blipFill>
-          <p:spPr>
-            <a:xfrm>
-              <a:off x="5281613" y="996950"/>
-              <a:ext cx="6723477" cy="1541463"/>
-            </a:xfrm>
-            <a:prstGeom prst="rect">
-              <a:avLst/>
-            </a:prstGeom>
-          </p:spPr>
-        </p:pic>
-        <p:sp>
-          <p:nvSpPr>
-            <p:cNvPr id="40" name="Google Shape;921;p27">
-              <a:extLst>
-                <a:ext uri="{FF2B5EF4-FFF2-40B4-BE49-F238E27FC236}">
-                  <a16:creationId xmlns:a16="http://schemas.microsoft.com/office/drawing/2014/main" id="{3CE34F02-980A-4D8E-8EB6-8116A1140FFC}"/>
-                </a:ext>
-              </a:extLst>
-            </p:cNvPr>
-            <p:cNvSpPr/>
-            <p:nvPr/>
-          </p:nvSpPr>
-          <p:spPr>
-            <a:xfrm>
-              <a:off x="5281611" y="520700"/>
-              <a:ext cx="6723479" cy="476250"/>
-            </a:xfrm>
-            <a:prstGeom prst="rect">
-              <a:avLst/>
-            </a:prstGeom>
-            <a:solidFill>
-              <a:srgbClr val="4C3282"/>
-            </a:solidFill>
-            <a:ln>
-              <a:noFill/>
-            </a:ln>
-          </p:spPr>
-          <p:txBody>
-            <a:bodyPr spcFirstLastPara="1" wrap="square" lIns="91425" tIns="45700" rIns="91425" bIns="45700" anchor="ctr" anchorCtr="0">
-              <a:noAutofit/>
-            </a:bodyPr>
-            <a:lstStyle/>
-            <a:p>
-              <a:pPr marL="0" marR="0" lvl="0" indent="0" algn="l" rtl="0">
-                <a:spcBef>
-                  <a:spcPts val="0"/>
-                </a:spcBef>
-                <a:spcAft>
-                  <a:spcPts val="0"/>
-                </a:spcAft>
-                <a:buNone/>
-              </a:pPr>
-              <a:r>
-                <a:rPr lang="el-GR" sz="2400" dirty="0">
-                  <a:solidFill>
-                    <a:schemeClr val="lt1"/>
-                  </a:solidFill>
-                  <a:ea typeface="Quattrocento Sans"/>
-                  <a:sym typeface="Quattrocento Sans"/>
-                </a:rPr>
-                <a:t>Θ</a:t>
-              </a:r>
-              <a:r>
-                <a:rPr lang="en-US" sz="2400" dirty="0">
-                  <a:solidFill>
-                    <a:schemeClr val="lt1"/>
-                  </a:solidFill>
-                  <a:latin typeface="Quattrocento Sans"/>
-                  <a:ea typeface="Quattrocento Sans"/>
-                  <a:cs typeface="Quattrocento Sans"/>
-                  <a:sym typeface="Quattrocento Sans"/>
-                </a:rPr>
-                <a:t>-Notation</a:t>
-              </a:r>
-              <a:endParaRPr dirty="0"/>
-            </a:p>
-          </p:txBody>
-        </p:sp>
-      </p:grpSp>
+          <a:prstGeom prst="rect">
+            <a:avLst/>
+          </a:prstGeom>
+          <a:solidFill>
+            <a:srgbClr val="4C3282"/>
+          </a:solidFill>
+          <a:ln>
+            <a:noFill/>
+          </a:ln>
+        </p:spPr>
+        <p:txBody>
+          <a:bodyPr spcFirstLastPara="1" wrap="square" lIns="91425" tIns="45700" rIns="91425" bIns="45700" anchor="ctr" anchorCtr="0">
+            <a:noAutofit/>
+          </a:bodyPr>
+          <a:lstStyle/>
+          <a:p>
+            <a:pPr marL="0" marR="0" lvl="0" indent="0" algn="l" rtl="0">
+              <a:spcBef>
+                <a:spcPts val="0"/>
+              </a:spcBef>
+              <a:spcAft>
+                <a:spcPts val="0"/>
+              </a:spcAft>
+              <a:buNone/>
+            </a:pPr>
+            <a:r>
+              <a:rPr lang="el-GR" sz="2400" dirty="0">
+                <a:solidFill>
+                  <a:schemeClr val="lt1"/>
+                </a:solidFill>
+                <a:ea typeface="Quattrocento Sans"/>
+                <a:sym typeface="Quattrocento Sans"/>
+              </a:rPr>
+              <a:t>Θ</a:t>
+            </a:r>
+            <a:r>
+              <a:rPr lang="en-US" sz="2400" dirty="0">
+                <a:solidFill>
+                  <a:schemeClr val="lt1"/>
+                </a:solidFill>
+                <a:latin typeface="Quattrocento Sans"/>
+                <a:ea typeface="Quattrocento Sans"/>
+                <a:cs typeface="Quattrocento Sans"/>
+                <a:sym typeface="Quattrocento Sans"/>
+              </a:rPr>
+              <a:t>-Notation</a:t>
+            </a:r>
+            <a:endParaRPr dirty="0"/>
+          </a:p>
+        </p:txBody>
+      </p:sp>
       <p:sp>
         <p:nvSpPr>
           <p:cNvPr id="5" name="Titel 4">
@@ -19173,7 +22880,7 @@
             <a:avLst/>
           </a:prstGeom>
           <a:blipFill rotWithShape="1">
-            <a:blip r:embed="rId4">
+            <a:blip r:embed="rId3">
               <a:alphaModFix/>
             </a:blip>
             <a:stretch>
@@ -19246,7 +22953,7 @@
             <a:avLst/>
           </a:prstGeom>
           <a:blipFill rotWithShape="1">
-            <a:blip r:embed="rId5">
+            <a:blip r:embed="rId4">
               <a:alphaModFix/>
             </a:blip>
             <a:stretch>
@@ -19319,7 +23026,7 @@
             <a:avLst/>
           </a:prstGeom>
           <a:blipFill rotWithShape="1">
-            <a:blip r:embed="rId6">
+            <a:blip r:embed="rId5">
               <a:alphaModFix/>
             </a:blip>
             <a:stretch>
@@ -19392,7 +23099,7 @@
             <a:avLst/>
           </a:prstGeom>
           <a:blipFill rotWithShape="1">
-            <a:blip r:embed="rId7">
+            <a:blip r:embed="rId6">
               <a:alphaModFix/>
             </a:blip>
             <a:stretch>
@@ -19465,7 +23172,7 @@
             <a:avLst/>
           </a:prstGeom>
           <a:blipFill rotWithShape="1">
-            <a:blip r:embed="rId8">
+            <a:blip r:embed="rId7">
               <a:alphaModFix/>
             </a:blip>
             <a:stretch>
@@ -20836,240 +24543,134 @@
           </a:p>
         </p:txBody>
       </p:sp>
-      <p:grpSp>
-        <p:nvGrpSpPr>
-          <p:cNvPr id="35" name="Gruppieren 34">
+      <p:sp>
+        <p:nvSpPr>
+          <p:cNvPr id="36" name="Google Shape;921;p27">
             <a:extLst>
               <a:ext uri="{FF2B5EF4-FFF2-40B4-BE49-F238E27FC236}">
-                <a16:creationId xmlns:a16="http://schemas.microsoft.com/office/drawing/2014/main" id="{F2260CFE-E139-45C1-A92C-17B8F5C84E3E}"/>
+                <a16:creationId xmlns:a16="http://schemas.microsoft.com/office/drawing/2014/main" id="{91FDE9D0-1D09-45E3-927C-0BE69EC5823B}"/>
               </a:ext>
             </a:extLst>
           </p:cNvPr>
-          <p:cNvGrpSpPr>
-            <a:grpSpLocks noChangeAspect="1"/>
-          </p:cNvGrpSpPr>
+          <p:cNvSpPr/>
           <p:nvPr/>
-        </p:nvGrpSpPr>
-        <p:grpSpPr>
+        </p:nvSpPr>
+        <p:spPr>
           <a:xfrm>
             <a:off x="7426683" y="453359"/>
-            <a:ext cx="4578455" cy="1579001"/>
-            <a:chOff x="1206001" y="3141826"/>
-            <a:chExt cx="4934703" cy="1701863"/>
+            <a:ext cx="4577992" cy="441868"/>
           </a:xfrm>
-        </p:grpSpPr>
-        <p:sp>
-          <p:nvSpPr>
-            <p:cNvPr id="36" name="Google Shape;921;p27">
-              <a:extLst>
-                <a:ext uri="{FF2B5EF4-FFF2-40B4-BE49-F238E27FC236}">
-                  <a16:creationId xmlns:a16="http://schemas.microsoft.com/office/drawing/2014/main" id="{91FDE9D0-1D09-45E3-927C-0BE69EC5823B}"/>
-                </a:ext>
-              </a:extLst>
-            </p:cNvPr>
-            <p:cNvSpPr/>
-            <p:nvPr/>
-          </p:nvSpPr>
-          <p:spPr>
-            <a:xfrm>
-              <a:off x="1206001" y="3141826"/>
-              <a:ext cx="4934204" cy="476250"/>
-            </a:xfrm>
-            <a:prstGeom prst="rect">
-              <a:avLst/>
-            </a:prstGeom>
-            <a:solidFill>
-              <a:srgbClr val="4C3282"/>
-            </a:solidFill>
-            <a:ln>
-              <a:noFill/>
-            </a:ln>
-          </p:spPr>
-          <p:txBody>
-            <a:bodyPr spcFirstLastPara="1" wrap="square" lIns="91425" tIns="45700" rIns="91425" bIns="45700" anchor="ctr" anchorCtr="0">
-              <a:noAutofit/>
-            </a:bodyPr>
-            <a:lstStyle/>
-            <a:p>
-              <a:pPr marL="0" marR="0" lvl="0" indent="0" algn="l" rtl="0">
-                <a:spcBef>
-                  <a:spcPts val="0"/>
-                </a:spcBef>
-                <a:spcAft>
-                  <a:spcPts val="0"/>
-                </a:spcAft>
-                <a:buNone/>
-              </a:pPr>
-              <a:r>
-                <a:rPr lang="en-US" sz="2400" dirty="0">
-                  <a:solidFill>
-                    <a:schemeClr val="lt1"/>
-                  </a:solidFill>
-                  <a:latin typeface="Quattrocento Sans"/>
-                  <a:ea typeface="Quattrocento Sans"/>
-                  <a:cs typeface="Quattrocento Sans"/>
-                  <a:sym typeface="Quattrocento Sans"/>
-                </a:rPr>
-                <a:t>O-Notation</a:t>
-              </a:r>
-              <a:endParaRPr dirty="0"/>
-            </a:p>
-          </p:txBody>
-        </p:sp>
-        <p:pic>
-          <p:nvPicPr>
-            <p:cNvPr id="37" name="Grafik 36">
-              <a:extLst>
-                <a:ext uri="{FF2B5EF4-FFF2-40B4-BE49-F238E27FC236}">
-                  <a16:creationId xmlns:a16="http://schemas.microsoft.com/office/drawing/2014/main" id="{A7ED0E79-083D-43DE-BF6F-D2510335E980}"/>
-                </a:ext>
-              </a:extLst>
-            </p:cNvPr>
-            <p:cNvPicPr>
-              <a:picLocks noChangeAspect="1"/>
-            </p:cNvPicPr>
-            <p:nvPr/>
-          </p:nvPicPr>
-          <p:blipFill>
-            <a:blip r:embed="rId9"/>
-            <a:stretch>
-              <a:fillRect/>
-            </a:stretch>
-          </p:blipFill>
-          <p:spPr>
-            <a:xfrm>
-              <a:off x="1206500" y="3618076"/>
-              <a:ext cx="4934204" cy="1225613"/>
-            </a:xfrm>
-            <a:prstGeom prst="rect">
-              <a:avLst/>
-            </a:prstGeom>
-          </p:spPr>
-        </p:pic>
-      </p:grpSp>
-      <p:grpSp>
-        <p:nvGrpSpPr>
-          <p:cNvPr id="41" name="Gruppieren 40">
+          <a:prstGeom prst="rect">
+            <a:avLst/>
+          </a:prstGeom>
+          <a:solidFill>
+            <a:srgbClr val="4C3282"/>
+          </a:solidFill>
+          <a:ln>
+            <a:noFill/>
+          </a:ln>
+        </p:spPr>
+        <p:txBody>
+          <a:bodyPr spcFirstLastPara="1" wrap="square" lIns="91425" tIns="45700" rIns="91425" bIns="45700" anchor="ctr" anchorCtr="0">
+            <a:noAutofit/>
+          </a:bodyPr>
+          <a:lstStyle/>
+          <a:p>
+            <a:pPr marL="0" marR="0" lvl="0" indent="0" algn="l" rtl="0">
+              <a:spcBef>
+                <a:spcPts val="0"/>
+              </a:spcBef>
+              <a:spcAft>
+                <a:spcPts val="0"/>
+              </a:spcAft>
+              <a:buNone/>
+            </a:pPr>
+            <a:r>
+              <a:rPr lang="en-US" sz="2400" dirty="0">
+                <a:solidFill>
+                  <a:schemeClr val="lt1"/>
+                </a:solidFill>
+                <a:latin typeface="Quattrocento Sans"/>
+                <a:ea typeface="Quattrocento Sans"/>
+                <a:cs typeface="Quattrocento Sans"/>
+                <a:sym typeface="Quattrocento Sans"/>
+              </a:rPr>
+              <a:t>O-Notation</a:t>
+            </a:r>
+            <a:endParaRPr dirty="0"/>
+          </a:p>
+        </p:txBody>
+      </p:sp>
+      <p:sp>
+        <p:nvSpPr>
+          <p:cNvPr id="43" name="Google Shape;921;p27">
             <a:extLst>
               <a:ext uri="{FF2B5EF4-FFF2-40B4-BE49-F238E27FC236}">
-                <a16:creationId xmlns:a16="http://schemas.microsoft.com/office/drawing/2014/main" id="{473FB23C-EE1B-490F-B7E1-8188A689BFA1}"/>
+                <a16:creationId xmlns:a16="http://schemas.microsoft.com/office/drawing/2014/main" id="{6175ED36-3BA6-42D3-9AE7-600DB9E0CDE3}"/>
               </a:ext>
             </a:extLst>
           </p:cNvPr>
-          <p:cNvGrpSpPr>
-            <a:grpSpLocks noChangeAspect="1"/>
-          </p:cNvGrpSpPr>
+          <p:cNvSpPr/>
           <p:nvPr/>
-        </p:nvGrpSpPr>
-        <p:grpSpPr>
+        </p:nvSpPr>
+        <p:spPr>
           <a:xfrm>
             <a:off x="7426683" y="2256772"/>
-            <a:ext cx="4577992" cy="1567217"/>
-            <a:chOff x="7056771" y="520700"/>
-            <a:chExt cx="4934204" cy="1689162"/>
+            <a:ext cx="4577992" cy="441868"/>
           </a:xfrm>
-        </p:grpSpPr>
-        <p:pic>
-          <p:nvPicPr>
-            <p:cNvPr id="42" name="Grafik 41">
-              <a:extLst>
-                <a:ext uri="{FF2B5EF4-FFF2-40B4-BE49-F238E27FC236}">
-                  <a16:creationId xmlns:a16="http://schemas.microsoft.com/office/drawing/2014/main" id="{DCB8ECC9-E778-453F-96C0-40163BFBBE40}"/>
-                </a:ext>
-              </a:extLst>
-            </p:cNvPr>
-            <p:cNvPicPr>
-              <a:picLocks noChangeAspect="1"/>
-            </p:cNvPicPr>
-            <p:nvPr/>
-          </p:nvPicPr>
-          <p:blipFill>
-            <a:blip r:embed="rId10"/>
-            <a:stretch>
-              <a:fillRect/>
-            </a:stretch>
-          </p:blipFill>
-          <p:spPr>
-            <a:xfrm>
-              <a:off x="7104399" y="996950"/>
-              <a:ext cx="4838949" cy="1212912"/>
-            </a:xfrm>
-            <a:prstGeom prst="rect">
-              <a:avLst/>
-            </a:prstGeom>
-          </p:spPr>
-        </p:pic>
-        <p:sp>
-          <p:nvSpPr>
-            <p:cNvPr id="43" name="Google Shape;921;p27">
-              <a:extLst>
-                <a:ext uri="{FF2B5EF4-FFF2-40B4-BE49-F238E27FC236}">
-                  <a16:creationId xmlns:a16="http://schemas.microsoft.com/office/drawing/2014/main" id="{6175ED36-3BA6-42D3-9AE7-600DB9E0CDE3}"/>
-                </a:ext>
-              </a:extLst>
-            </p:cNvPr>
-            <p:cNvSpPr/>
-            <p:nvPr/>
-          </p:nvSpPr>
-          <p:spPr>
-            <a:xfrm>
-              <a:off x="7056771" y="520700"/>
-              <a:ext cx="4934204" cy="476250"/>
-            </a:xfrm>
-            <a:prstGeom prst="rect">
-              <a:avLst/>
-            </a:prstGeom>
-            <a:solidFill>
-              <a:srgbClr val="4C3282"/>
-            </a:solidFill>
-            <a:ln>
-              <a:noFill/>
-            </a:ln>
-          </p:spPr>
-          <p:txBody>
-            <a:bodyPr spcFirstLastPara="1" wrap="square" lIns="91425" tIns="45700" rIns="91425" bIns="45700" anchor="ctr" anchorCtr="0">
-              <a:noAutofit/>
-            </a:bodyPr>
-            <a:lstStyle/>
-            <a:p>
-              <a:pPr marL="0" marR="0" lvl="0" indent="0" algn="l" rtl="0">
-                <a:spcBef>
-                  <a:spcPts val="0"/>
-                </a:spcBef>
-                <a:spcAft>
-                  <a:spcPts val="0"/>
-                </a:spcAft>
-                <a:buNone/>
-              </a:pPr>
-              <a:r>
-                <a:rPr lang="el-GR" sz="2400" dirty="0">
-                  <a:solidFill>
-                    <a:schemeClr val="lt1"/>
-                  </a:solidFill>
-                  <a:latin typeface="Quattrocento Sans"/>
-                  <a:ea typeface="Quattrocento Sans"/>
-                  <a:cs typeface="Quattrocento Sans"/>
-                  <a:sym typeface="Quattrocento Sans"/>
-                </a:rPr>
-                <a:t>Ω</a:t>
-              </a:r>
-              <a:r>
-                <a:rPr lang="en-US" sz="2400" dirty="0">
-                  <a:solidFill>
-                    <a:schemeClr val="lt1"/>
-                  </a:solidFill>
-                  <a:latin typeface="Quattrocento Sans"/>
-                  <a:ea typeface="Quattrocento Sans"/>
-                  <a:cs typeface="Quattrocento Sans"/>
-                  <a:sym typeface="Quattrocento Sans"/>
-                </a:rPr>
-                <a:t>-Notation</a:t>
-              </a:r>
-              <a:endParaRPr dirty="0"/>
-            </a:p>
-          </p:txBody>
-        </p:sp>
-      </p:grpSp>
+          <a:prstGeom prst="rect">
+            <a:avLst/>
+          </a:prstGeom>
+          <a:solidFill>
+            <a:srgbClr val="4C3282"/>
+          </a:solidFill>
+          <a:ln>
+            <a:noFill/>
+          </a:ln>
+        </p:spPr>
+        <p:txBody>
+          <a:bodyPr spcFirstLastPara="1" wrap="square" lIns="91425" tIns="45700" rIns="91425" bIns="45700" anchor="ctr" anchorCtr="0">
+            <a:noAutofit/>
+          </a:bodyPr>
+          <a:lstStyle/>
+          <a:p>
+            <a:pPr marL="0" marR="0" lvl="0" indent="0" algn="l" rtl="0">
+              <a:spcBef>
+                <a:spcPts val="0"/>
+              </a:spcBef>
+              <a:spcAft>
+                <a:spcPts val="0"/>
+              </a:spcAft>
+              <a:buNone/>
+            </a:pPr>
+            <a:r>
+              <a:rPr lang="el-GR" sz="2400" dirty="0">
+                <a:solidFill>
+                  <a:schemeClr val="lt1"/>
+                </a:solidFill>
+                <a:latin typeface="Quattrocento Sans"/>
+                <a:ea typeface="Quattrocento Sans"/>
+                <a:cs typeface="Quattrocento Sans"/>
+                <a:sym typeface="Quattrocento Sans"/>
+              </a:rPr>
+              <a:t>Ω</a:t>
+            </a:r>
+            <a:r>
+              <a:rPr lang="en-US" sz="2400" dirty="0">
+                <a:solidFill>
+                  <a:schemeClr val="lt1"/>
+                </a:solidFill>
+                <a:latin typeface="Quattrocento Sans"/>
+                <a:ea typeface="Quattrocento Sans"/>
+                <a:cs typeface="Quattrocento Sans"/>
+                <a:sym typeface="Quattrocento Sans"/>
+              </a:rPr>
+              <a:t>-Notation</a:t>
+            </a:r>
+            <a:endParaRPr dirty="0"/>
+          </a:p>
+        </p:txBody>
+      </p:sp>
       <p:sp>
         <p:nvSpPr>
           <p:cNvPr id="46" name="Datumsplatzhalter 4">
@@ -21099,7 +24700,7 @@
             <a:fld id="{F2D06E3F-368B-43DC-96F3-4B8E65027050}" type="datetime1">
               <a:rPr lang="de-DE" smtClean="0"/>
               <a:pPr/>
-              <a:t>30.01.2026</a:t>
+              <a:t>05.02.2026</a:t>
             </a:fld>
             <a:endParaRPr lang="de-DE" dirty="0"/>
           </a:p>
@@ -21138,12 +24739,101 @@
             <a:fld id="{43310F81-32EE-4F95-9E9C-0BDC6AD52EEC}" type="slidenum">
               <a:rPr lang="de-DE" smtClean="0"/>
               <a:pPr/>
-              <a:t>4</a:t>
+              <a:t>7</a:t>
             </a:fld>
             <a:endParaRPr lang="de-DE" dirty="0"/>
           </a:p>
         </p:txBody>
       </p:sp>
+      <p:pic>
+        <p:nvPicPr>
+          <p:cNvPr id="2" name="Grafik 1">
+            <a:extLst>
+              <a:ext uri="{FF2B5EF4-FFF2-40B4-BE49-F238E27FC236}">
+                <a16:creationId xmlns:a16="http://schemas.microsoft.com/office/drawing/2014/main" id="{DCB8ECC9-E778-453F-96C0-40163BFBBE40}"/>
+              </a:ext>
+            </a:extLst>
+          </p:cNvPr>
+          <p:cNvPicPr>
+            <a:picLocks noChangeAspect="1"/>
+          </p:cNvPicPr>
+          <p:nvPr/>
+        </p:nvPicPr>
+        <p:blipFill>
+          <a:blip r:embed="rId8"/>
+          <a:stretch>
+            <a:fillRect/>
+          </a:stretch>
+        </p:blipFill>
+        <p:spPr>
+          <a:xfrm>
+            <a:off x="7470873" y="2698640"/>
+            <a:ext cx="4489614" cy="1125349"/>
+          </a:xfrm>
+          <a:prstGeom prst="rect">
+            <a:avLst/>
+          </a:prstGeom>
+        </p:spPr>
+      </p:pic>
+      <p:pic>
+        <p:nvPicPr>
+          <p:cNvPr id="4" name="Grafik 3">
+            <a:extLst>
+              <a:ext uri="{FF2B5EF4-FFF2-40B4-BE49-F238E27FC236}">
+                <a16:creationId xmlns:a16="http://schemas.microsoft.com/office/drawing/2014/main" id="{A7ED0E79-083D-43DE-BF6F-D2510335E980}"/>
+              </a:ext>
+            </a:extLst>
+          </p:cNvPr>
+          <p:cNvPicPr>
+            <a:picLocks noChangeAspect="1"/>
+          </p:cNvPicPr>
+          <p:nvPr/>
+        </p:nvPicPr>
+        <p:blipFill>
+          <a:blip r:embed="rId9"/>
+          <a:stretch>
+            <a:fillRect/>
+          </a:stretch>
+        </p:blipFill>
+        <p:spPr>
+          <a:xfrm>
+            <a:off x="7427146" y="895227"/>
+            <a:ext cx="4577992" cy="1137133"/>
+          </a:xfrm>
+          <a:prstGeom prst="rect">
+            <a:avLst/>
+          </a:prstGeom>
+        </p:spPr>
+      </p:pic>
+      <p:pic>
+        <p:nvPicPr>
+          <p:cNvPr id="7" name="Grafik 6">
+            <a:extLst>
+              <a:ext uri="{FF2B5EF4-FFF2-40B4-BE49-F238E27FC236}">
+                <a16:creationId xmlns:a16="http://schemas.microsoft.com/office/drawing/2014/main" id="{E9773847-59E5-4A70-94A9-D503A9497FE0}"/>
+              </a:ext>
+            </a:extLst>
+          </p:cNvPr>
+          <p:cNvPicPr>
+            <a:picLocks noChangeAspect="1"/>
+          </p:cNvPicPr>
+          <p:nvPr/>
+        </p:nvPicPr>
+        <p:blipFill rotWithShape="1">
+          <a:blip r:embed="rId10"/>
+          <a:srcRect l="1289" r="768" b="4434"/>
+          <a:stretch/>
+        </p:blipFill>
+        <p:spPr>
+          <a:xfrm>
+            <a:off x="5766998" y="4470559"/>
+            <a:ext cx="6238092" cy="1430181"/>
+          </a:xfrm>
+          <a:prstGeom prst="rect">
+            <a:avLst/>
+          </a:prstGeom>
+        </p:spPr>
+      </p:pic>
     </p:spTree>
   </p:cSld>
   <p:clrMapOvr>
@@ -21519,6 +25209,4038 @@
                                         </p:tgtEl>
                                       </p:cBhvr>
                                     </p:animEffect>
+                                  </p:childTnLst>
+                                </p:cTn>
+                              </p:par>
+                            </p:childTnLst>
+                          </p:cTn>
+                        </p:par>
+                      </p:childTnLst>
+                    </p:cTn>
+                  </p:par>
+                </p:childTnLst>
+              </p:cTn>
+              <p:prevCondLst>
+                <p:cond evt="onPrev" delay="0">
+                  <p:tgtEl>
+                    <p:sldTgt/>
+                  </p:tgtEl>
+                </p:cond>
+              </p:prevCondLst>
+              <p:nextCondLst>
+                <p:cond evt="onNext" delay="0">
+                  <p:tgtEl>
+                    <p:sldTgt/>
+                  </p:tgtEl>
+                </p:cond>
+              </p:nextCondLst>
+            </p:seq>
+          </p:childTnLst>
+        </p:cTn>
+      </p:par>
+    </p:tnLst>
+  </p:timing>
+</p:sld>
+</file>
+
+<file path=ppt/slides/slide8.xml><?xml version="1.0" encoding="utf-8"?>
+<p:sld xmlns:a="http://schemas.openxmlformats.org/drawingml/2006/main" xmlns:r="http://schemas.openxmlformats.org/officeDocument/2006/relationships" xmlns:p="http://schemas.openxmlformats.org/presentationml/2006/main">
+  <p:cSld>
+    <p:spTree>
+      <p:nvGrpSpPr>
+        <p:cNvPr id="1" name="Shape 546"/>
+        <p:cNvGrpSpPr/>
+        <p:nvPr/>
+      </p:nvGrpSpPr>
+      <p:grpSpPr>
+        <a:xfrm>
+          <a:off x="0" y="0"/>
+          <a:ext cx="0" cy="0"/>
+          <a:chOff x="0" y="0"/>
+          <a:chExt cx="0" cy="0"/>
+        </a:xfrm>
+      </p:grpSpPr>
+      <p:sp>
+        <p:nvSpPr>
+          <p:cNvPr id="2" name="Inhaltsplatzhalter 1">
+            <a:extLst>
+              <a:ext uri="{FF2B5EF4-FFF2-40B4-BE49-F238E27FC236}">
+                <a16:creationId xmlns:a16="http://schemas.microsoft.com/office/drawing/2014/main" id="{6E01CDBB-62BB-4D4A-9EFC-1664E20EBDEA}"/>
+              </a:ext>
+            </a:extLst>
+          </p:cNvPr>
+          <p:cNvSpPr>
+            <a:spLocks noGrp="1"/>
+          </p:cNvSpPr>
+          <p:nvPr>
+            <p:ph sz="quarter" idx="12"/>
+          </p:nvPr>
+        </p:nvSpPr>
+        <p:spPr/>
+        <p:txBody>
+          <a:bodyPr/>
+          <a:lstStyle/>
+          <a:p>
+            <a:endParaRPr lang="de-DE"/>
+          </a:p>
+        </p:txBody>
+      </p:sp>
+      <p:sp>
+        <p:nvSpPr>
+          <p:cNvPr id="3" name="Textplatzhalter 2">
+            <a:extLst>
+              <a:ext uri="{FF2B5EF4-FFF2-40B4-BE49-F238E27FC236}">
+                <a16:creationId xmlns:a16="http://schemas.microsoft.com/office/drawing/2014/main" id="{B8DA8BDD-77A6-4BCD-A68E-EF3DD5D26B1D}"/>
+              </a:ext>
+            </a:extLst>
+          </p:cNvPr>
+          <p:cNvSpPr>
+            <a:spLocks noGrp="1"/>
+          </p:cNvSpPr>
+          <p:nvPr>
+            <p:ph type="body" idx="13"/>
+          </p:nvPr>
+        </p:nvSpPr>
+        <p:spPr/>
+        <p:txBody>
+          <a:bodyPr/>
+          <a:lstStyle/>
+          <a:p>
+            <a:r>
+              <a:rPr lang="de-DE" noProof="0" dirty="0"/>
+              <a:t>Algorithmik – Laufzeitanalyse von Algorithmen durch Asymptotische Notation</a:t>
+            </a:r>
+          </a:p>
+        </p:txBody>
+      </p:sp>
+      <p:sp>
+        <p:nvSpPr>
+          <p:cNvPr id="548" name="Google Shape;548;p26"/>
+          <p:cNvSpPr/>
+          <p:nvPr/>
+        </p:nvSpPr>
+        <p:spPr>
+          <a:xfrm>
+            <a:off x="1706108" y="2294546"/>
+            <a:ext cx="365760" cy="365760"/>
+          </a:xfrm>
+          <a:prstGeom prst="rect">
+            <a:avLst/>
+          </a:prstGeom>
+          <a:solidFill>
+            <a:srgbClr val="9EC0D5"/>
+          </a:solidFill>
+          <a:ln>
+            <a:noFill/>
+          </a:ln>
+        </p:spPr>
+        <p:txBody>
+          <a:bodyPr spcFirstLastPara="1" wrap="square" lIns="91425" tIns="45700" rIns="91425" bIns="45700" anchor="ctr" anchorCtr="0">
+            <a:noAutofit/>
+          </a:bodyPr>
+          <a:lstStyle/>
+          <a:p>
+            <a:pPr marL="0" marR="0" lvl="0" indent="0" algn="ctr" rtl="0">
+              <a:lnSpc>
+                <a:spcPct val="100000"/>
+              </a:lnSpc>
+              <a:spcBef>
+                <a:spcPts val="0"/>
+              </a:spcBef>
+              <a:spcAft>
+                <a:spcPts val="0"/>
+              </a:spcAft>
+              <a:buClr>
+                <a:srgbClr val="000000"/>
+              </a:buClr>
+              <a:buSzPts val="1800"/>
+              <a:buFont typeface="Arial"/>
+              <a:buNone/>
+            </a:pPr>
+            <a:endParaRPr sz="1800" b="0" i="0" u="none" strike="noStrike" cap="none">
+              <a:solidFill>
+                <a:schemeClr val="lt1"/>
+              </a:solidFill>
+              <a:latin typeface="Twentieth Century"/>
+              <a:ea typeface="Twentieth Century"/>
+              <a:cs typeface="Twentieth Century"/>
+              <a:sym typeface="Twentieth Century"/>
+            </a:endParaRPr>
+          </a:p>
+        </p:txBody>
+      </p:sp>
+      <p:sp>
+        <p:nvSpPr>
+          <p:cNvPr id="549" name="Google Shape;549;p26"/>
+          <p:cNvSpPr/>
+          <p:nvPr/>
+        </p:nvSpPr>
+        <p:spPr>
+          <a:xfrm>
+            <a:off x="1706108" y="3034572"/>
+            <a:ext cx="365760" cy="365760"/>
+          </a:xfrm>
+          <a:prstGeom prst="rect">
+            <a:avLst/>
+          </a:prstGeom>
+          <a:solidFill>
+            <a:srgbClr val="9EC0D5"/>
+          </a:solidFill>
+          <a:ln>
+            <a:noFill/>
+          </a:ln>
+        </p:spPr>
+        <p:txBody>
+          <a:bodyPr spcFirstLastPara="1" wrap="square" lIns="91425" tIns="45700" rIns="91425" bIns="45700" anchor="ctr" anchorCtr="0">
+            <a:noAutofit/>
+          </a:bodyPr>
+          <a:lstStyle/>
+          <a:p>
+            <a:pPr marL="0" marR="0" lvl="0" indent="0" algn="ctr" rtl="0">
+              <a:lnSpc>
+                <a:spcPct val="100000"/>
+              </a:lnSpc>
+              <a:spcBef>
+                <a:spcPts val="0"/>
+              </a:spcBef>
+              <a:spcAft>
+                <a:spcPts val="0"/>
+              </a:spcAft>
+              <a:buClr>
+                <a:srgbClr val="000000"/>
+              </a:buClr>
+              <a:buSzPts val="1800"/>
+              <a:buFont typeface="Arial"/>
+              <a:buNone/>
+            </a:pPr>
+            <a:endParaRPr sz="1800" b="0" i="0" u="none" strike="noStrike" cap="none">
+              <a:solidFill>
+                <a:schemeClr val="lt1"/>
+              </a:solidFill>
+              <a:latin typeface="Twentieth Century"/>
+              <a:ea typeface="Twentieth Century"/>
+              <a:cs typeface="Twentieth Century"/>
+              <a:sym typeface="Twentieth Century"/>
+            </a:endParaRPr>
+          </a:p>
+        </p:txBody>
+      </p:sp>
+      <p:sp>
+        <p:nvSpPr>
+          <p:cNvPr id="550" name="Google Shape;550;p26"/>
+          <p:cNvSpPr/>
+          <p:nvPr/>
+        </p:nvSpPr>
+        <p:spPr>
+          <a:xfrm>
+            <a:off x="2071868" y="2294546"/>
+            <a:ext cx="2455665" cy="1105786"/>
+          </a:xfrm>
+          <a:prstGeom prst="rect">
+            <a:avLst/>
+          </a:prstGeom>
+          <a:solidFill>
+            <a:srgbClr val="9EC0D5"/>
+          </a:solidFill>
+          <a:ln>
+            <a:noFill/>
+          </a:ln>
+        </p:spPr>
+        <p:txBody>
+          <a:bodyPr spcFirstLastPara="1" wrap="square" lIns="91425" tIns="45700" rIns="91425" bIns="45700" anchor="ctr" anchorCtr="0">
+            <a:noAutofit/>
+          </a:bodyPr>
+          <a:lstStyle/>
+          <a:p>
+            <a:pPr marL="0" marR="0" lvl="0" indent="0" algn="ctr" rtl="0">
+              <a:lnSpc>
+                <a:spcPct val="100000"/>
+              </a:lnSpc>
+              <a:spcBef>
+                <a:spcPts val="0"/>
+              </a:spcBef>
+              <a:spcAft>
+                <a:spcPts val="0"/>
+              </a:spcAft>
+              <a:buClr>
+                <a:srgbClr val="000000"/>
+              </a:buClr>
+              <a:buSzPts val="1800"/>
+              <a:buFont typeface="Arial"/>
+              <a:buNone/>
+            </a:pPr>
+            <a:endParaRPr sz="1800" b="0" i="0" u="none" strike="noStrike" cap="none">
+              <a:solidFill>
+                <a:schemeClr val="lt1"/>
+              </a:solidFill>
+              <a:latin typeface="Twentieth Century"/>
+              <a:ea typeface="Twentieth Century"/>
+              <a:cs typeface="Twentieth Century"/>
+              <a:sym typeface="Twentieth Century"/>
+            </a:endParaRPr>
+          </a:p>
+        </p:txBody>
+      </p:sp>
+      <p:sp>
+        <p:nvSpPr>
+          <p:cNvPr id="551" name="Google Shape;551;p26"/>
+          <p:cNvSpPr/>
+          <p:nvPr/>
+        </p:nvSpPr>
+        <p:spPr>
+          <a:xfrm>
+            <a:off x="6145936" y="2294546"/>
+            <a:ext cx="365760" cy="365760"/>
+          </a:xfrm>
+          <a:prstGeom prst="rect">
+            <a:avLst/>
+          </a:prstGeom>
+          <a:solidFill>
+            <a:srgbClr val="9EC0D5"/>
+          </a:solidFill>
+          <a:ln>
+            <a:noFill/>
+          </a:ln>
+        </p:spPr>
+        <p:txBody>
+          <a:bodyPr spcFirstLastPara="1" wrap="square" lIns="91425" tIns="45700" rIns="91425" bIns="45700" anchor="ctr" anchorCtr="0">
+            <a:noAutofit/>
+          </a:bodyPr>
+          <a:lstStyle/>
+          <a:p>
+            <a:pPr marL="0" marR="0" lvl="0" indent="0" algn="ctr" rtl="0">
+              <a:lnSpc>
+                <a:spcPct val="100000"/>
+              </a:lnSpc>
+              <a:spcBef>
+                <a:spcPts val="0"/>
+              </a:spcBef>
+              <a:spcAft>
+                <a:spcPts val="0"/>
+              </a:spcAft>
+              <a:buClr>
+                <a:srgbClr val="000000"/>
+              </a:buClr>
+              <a:buSzPts val="1800"/>
+              <a:buFont typeface="Arial"/>
+              <a:buNone/>
+            </a:pPr>
+            <a:endParaRPr sz="1800" b="0" i="0" u="none" strike="noStrike" cap="none">
+              <a:solidFill>
+                <a:schemeClr val="lt1"/>
+              </a:solidFill>
+              <a:latin typeface="Twentieth Century"/>
+              <a:ea typeface="Twentieth Century"/>
+              <a:cs typeface="Twentieth Century"/>
+              <a:sym typeface="Twentieth Century"/>
+            </a:endParaRPr>
+          </a:p>
+        </p:txBody>
+      </p:sp>
+      <p:sp>
+        <p:nvSpPr>
+          <p:cNvPr id="552" name="Google Shape;552;p26"/>
+          <p:cNvSpPr/>
+          <p:nvPr/>
+        </p:nvSpPr>
+        <p:spPr>
+          <a:xfrm>
+            <a:off x="6145936" y="3034572"/>
+            <a:ext cx="365760" cy="365760"/>
+          </a:xfrm>
+          <a:prstGeom prst="rect">
+            <a:avLst/>
+          </a:prstGeom>
+          <a:solidFill>
+            <a:srgbClr val="9EC0D5"/>
+          </a:solidFill>
+          <a:ln>
+            <a:noFill/>
+          </a:ln>
+        </p:spPr>
+        <p:txBody>
+          <a:bodyPr spcFirstLastPara="1" wrap="square" lIns="91425" tIns="45700" rIns="91425" bIns="45700" anchor="ctr" anchorCtr="0">
+            <a:noAutofit/>
+          </a:bodyPr>
+          <a:lstStyle/>
+          <a:p>
+            <a:pPr marL="0" marR="0" lvl="0" indent="0" algn="ctr" rtl="0">
+              <a:lnSpc>
+                <a:spcPct val="100000"/>
+              </a:lnSpc>
+              <a:spcBef>
+                <a:spcPts val="0"/>
+              </a:spcBef>
+              <a:spcAft>
+                <a:spcPts val="0"/>
+              </a:spcAft>
+              <a:buClr>
+                <a:srgbClr val="000000"/>
+              </a:buClr>
+              <a:buSzPts val="1800"/>
+              <a:buFont typeface="Arial"/>
+              <a:buNone/>
+            </a:pPr>
+            <a:endParaRPr sz="1800" b="0" i="0" u="none" strike="noStrike" cap="none">
+              <a:solidFill>
+                <a:schemeClr val="lt1"/>
+              </a:solidFill>
+              <a:latin typeface="Twentieth Century"/>
+              <a:ea typeface="Twentieth Century"/>
+              <a:cs typeface="Twentieth Century"/>
+              <a:sym typeface="Twentieth Century"/>
+            </a:endParaRPr>
+          </a:p>
+        </p:txBody>
+      </p:sp>
+      <p:sp>
+        <p:nvSpPr>
+          <p:cNvPr id="553" name="Google Shape;553;p26"/>
+          <p:cNvSpPr/>
+          <p:nvPr/>
+        </p:nvSpPr>
+        <p:spPr>
+          <a:xfrm flipH="1">
+            <a:off x="5797910" y="2665974"/>
+            <a:ext cx="1061359" cy="357006"/>
+          </a:xfrm>
+          <a:prstGeom prst="flowChartOnlineStorage">
+            <a:avLst/>
+          </a:prstGeom>
+          <a:solidFill>
+            <a:schemeClr val="accent6"/>
+          </a:solidFill>
+          <a:ln>
+            <a:noFill/>
+          </a:ln>
+        </p:spPr>
+        <p:txBody>
+          <a:bodyPr spcFirstLastPara="1" wrap="square" lIns="91425" tIns="45700" rIns="91425" bIns="45700" anchor="ctr" anchorCtr="0">
+            <a:noAutofit/>
+          </a:bodyPr>
+          <a:lstStyle/>
+          <a:p>
+            <a:pPr marL="0" marR="0" lvl="0" indent="0" algn="ctr" rtl="0">
+              <a:lnSpc>
+                <a:spcPct val="100000"/>
+              </a:lnSpc>
+              <a:spcBef>
+                <a:spcPts val="0"/>
+              </a:spcBef>
+              <a:spcAft>
+                <a:spcPts val="0"/>
+              </a:spcAft>
+              <a:buClr>
+                <a:srgbClr val="000000"/>
+              </a:buClr>
+              <a:buSzPts val="1800"/>
+              <a:buFont typeface="Arial"/>
+              <a:buNone/>
+            </a:pPr>
+            <a:endParaRPr sz="1800" b="0" i="0" u="none" strike="noStrike" cap="none">
+              <a:solidFill>
+                <a:schemeClr val="lt1"/>
+              </a:solidFill>
+              <a:latin typeface="Twentieth Century"/>
+              <a:ea typeface="Twentieth Century"/>
+              <a:cs typeface="Twentieth Century"/>
+              <a:sym typeface="Twentieth Century"/>
+            </a:endParaRPr>
+          </a:p>
+        </p:txBody>
+      </p:sp>
+      <p:sp>
+        <p:nvSpPr>
+          <p:cNvPr id="554" name="Google Shape;554;p26"/>
+          <p:cNvSpPr/>
+          <p:nvPr/>
+        </p:nvSpPr>
+        <p:spPr>
+          <a:xfrm flipH="1">
+            <a:off x="3870919" y="2660306"/>
+            <a:ext cx="965902" cy="381164"/>
+          </a:xfrm>
+          <a:prstGeom prst="flowChartOnlineStorage">
+            <a:avLst/>
+          </a:prstGeom>
+          <a:solidFill>
+            <a:srgbClr val="9EC0D5"/>
+          </a:solidFill>
+          <a:ln>
+            <a:noFill/>
+          </a:ln>
+        </p:spPr>
+        <p:txBody>
+          <a:bodyPr spcFirstLastPara="1" wrap="square" lIns="91425" tIns="45700" rIns="91425" bIns="45700" anchor="ctr" anchorCtr="0">
+            <a:noAutofit/>
+          </a:bodyPr>
+          <a:lstStyle/>
+          <a:p>
+            <a:pPr marL="0" marR="0" lvl="0" indent="0" algn="ctr" rtl="0">
+              <a:lnSpc>
+                <a:spcPct val="100000"/>
+              </a:lnSpc>
+              <a:spcBef>
+                <a:spcPts val="0"/>
+              </a:spcBef>
+              <a:spcAft>
+                <a:spcPts val="0"/>
+              </a:spcAft>
+              <a:buClr>
+                <a:srgbClr val="000000"/>
+              </a:buClr>
+              <a:buSzPts val="1800"/>
+              <a:buFont typeface="Arial"/>
+              <a:buNone/>
+            </a:pPr>
+            <a:endParaRPr sz="1800" b="0" i="0" u="none" strike="noStrike" cap="none">
+              <a:solidFill>
+                <a:schemeClr val="lt1"/>
+              </a:solidFill>
+              <a:latin typeface="Twentieth Century"/>
+              <a:ea typeface="Twentieth Century"/>
+              <a:cs typeface="Twentieth Century"/>
+              <a:sym typeface="Twentieth Century"/>
+            </a:endParaRPr>
+          </a:p>
+        </p:txBody>
+      </p:sp>
+      <p:sp>
+        <p:nvSpPr>
+          <p:cNvPr id="555" name="Google Shape;555;p26"/>
+          <p:cNvSpPr/>
+          <p:nvPr/>
+        </p:nvSpPr>
+        <p:spPr>
+          <a:xfrm flipH="1">
+            <a:off x="4652448" y="2657861"/>
+            <a:ext cx="1119941" cy="376711"/>
+          </a:xfrm>
+          <a:prstGeom prst="flowChartOnlineStorage">
+            <a:avLst/>
+          </a:prstGeom>
+          <a:solidFill>
+            <a:schemeClr val="accent6"/>
+          </a:solidFill>
+          <a:ln>
+            <a:noFill/>
+          </a:ln>
+        </p:spPr>
+        <p:txBody>
+          <a:bodyPr spcFirstLastPara="1" wrap="square" lIns="91425" tIns="45700" rIns="91425" bIns="45700" anchor="ctr" anchorCtr="0">
+            <a:noAutofit/>
+          </a:bodyPr>
+          <a:lstStyle/>
+          <a:p>
+            <a:pPr marL="0" marR="0" lvl="0" indent="0" algn="ctr" rtl="0">
+              <a:lnSpc>
+                <a:spcPct val="100000"/>
+              </a:lnSpc>
+              <a:spcBef>
+                <a:spcPts val="0"/>
+              </a:spcBef>
+              <a:spcAft>
+                <a:spcPts val="0"/>
+              </a:spcAft>
+              <a:buClr>
+                <a:srgbClr val="000000"/>
+              </a:buClr>
+              <a:buSzPts val="1800"/>
+              <a:buFont typeface="Arial"/>
+              <a:buNone/>
+            </a:pPr>
+            <a:endParaRPr sz="1800" b="0" i="0" u="none" strike="noStrike" cap="none">
+              <a:solidFill>
+                <a:schemeClr val="lt1"/>
+              </a:solidFill>
+              <a:latin typeface="Twentieth Century"/>
+              <a:ea typeface="Twentieth Century"/>
+              <a:cs typeface="Twentieth Century"/>
+              <a:sym typeface="Twentieth Century"/>
+            </a:endParaRPr>
+          </a:p>
+        </p:txBody>
+      </p:sp>
+      <p:sp>
+        <p:nvSpPr>
+          <p:cNvPr id="556" name="Google Shape;556;p26"/>
+          <p:cNvSpPr/>
+          <p:nvPr/>
+        </p:nvSpPr>
+        <p:spPr>
+          <a:xfrm>
+            <a:off x="4522564" y="2293324"/>
+            <a:ext cx="365760" cy="365760"/>
+          </a:xfrm>
+          <a:prstGeom prst="rect">
+            <a:avLst/>
+          </a:prstGeom>
+          <a:solidFill>
+            <a:schemeClr val="accent6"/>
+          </a:solidFill>
+          <a:ln>
+            <a:noFill/>
+          </a:ln>
+        </p:spPr>
+        <p:txBody>
+          <a:bodyPr spcFirstLastPara="1" wrap="square" lIns="91425" tIns="45700" rIns="91425" bIns="45700" anchor="ctr" anchorCtr="0">
+            <a:noAutofit/>
+          </a:bodyPr>
+          <a:lstStyle/>
+          <a:p>
+            <a:pPr marL="0" marR="0" lvl="0" indent="0" algn="ctr" rtl="0">
+              <a:lnSpc>
+                <a:spcPct val="100000"/>
+              </a:lnSpc>
+              <a:spcBef>
+                <a:spcPts val="0"/>
+              </a:spcBef>
+              <a:spcAft>
+                <a:spcPts val="0"/>
+              </a:spcAft>
+              <a:buClr>
+                <a:srgbClr val="000000"/>
+              </a:buClr>
+              <a:buSzPts val="1800"/>
+              <a:buFont typeface="Arial"/>
+              <a:buNone/>
+            </a:pPr>
+            <a:endParaRPr sz="1800" b="0" i="0" u="none" strike="noStrike" cap="none">
+              <a:solidFill>
+                <a:schemeClr val="lt1"/>
+              </a:solidFill>
+              <a:latin typeface="Twentieth Century"/>
+              <a:ea typeface="Twentieth Century"/>
+              <a:cs typeface="Twentieth Century"/>
+              <a:sym typeface="Twentieth Century"/>
+            </a:endParaRPr>
+          </a:p>
+        </p:txBody>
+      </p:sp>
+      <p:sp>
+        <p:nvSpPr>
+          <p:cNvPr id="557" name="Google Shape;557;p26"/>
+          <p:cNvSpPr/>
+          <p:nvPr/>
+        </p:nvSpPr>
+        <p:spPr>
+          <a:xfrm>
+            <a:off x="4522564" y="3034572"/>
+            <a:ext cx="365760" cy="365760"/>
+          </a:xfrm>
+          <a:prstGeom prst="rect">
+            <a:avLst/>
+          </a:prstGeom>
+          <a:solidFill>
+            <a:schemeClr val="accent6"/>
+          </a:solidFill>
+          <a:ln>
+            <a:noFill/>
+          </a:ln>
+        </p:spPr>
+        <p:txBody>
+          <a:bodyPr spcFirstLastPara="1" wrap="square" lIns="91425" tIns="45700" rIns="91425" bIns="45700" anchor="ctr" anchorCtr="0">
+            <a:noAutofit/>
+          </a:bodyPr>
+          <a:lstStyle/>
+          <a:p>
+            <a:pPr marL="0" marR="0" lvl="0" indent="0" algn="ctr" rtl="0">
+              <a:lnSpc>
+                <a:spcPct val="100000"/>
+              </a:lnSpc>
+              <a:spcBef>
+                <a:spcPts val="0"/>
+              </a:spcBef>
+              <a:spcAft>
+                <a:spcPts val="0"/>
+              </a:spcAft>
+              <a:buClr>
+                <a:srgbClr val="000000"/>
+              </a:buClr>
+              <a:buSzPts val="1800"/>
+              <a:buFont typeface="Arial"/>
+              <a:buNone/>
+            </a:pPr>
+            <a:endParaRPr sz="1800" b="0" i="0" u="none" strike="noStrike" cap="none">
+              <a:solidFill>
+                <a:schemeClr val="lt1"/>
+              </a:solidFill>
+              <a:latin typeface="Twentieth Century"/>
+              <a:ea typeface="Twentieth Century"/>
+              <a:cs typeface="Twentieth Century"/>
+              <a:sym typeface="Twentieth Century"/>
+            </a:endParaRPr>
+          </a:p>
+        </p:txBody>
+      </p:sp>
+      <p:sp>
+        <p:nvSpPr>
+          <p:cNvPr id="558" name="Google Shape;558;p26"/>
+          <p:cNvSpPr/>
+          <p:nvPr/>
+        </p:nvSpPr>
+        <p:spPr>
+          <a:xfrm>
+            <a:off x="589008" y="2294546"/>
+            <a:ext cx="1121652" cy="1105786"/>
+          </a:xfrm>
+          <a:prstGeom prst="rect">
+            <a:avLst/>
+          </a:prstGeom>
+          <a:solidFill>
+            <a:schemeClr val="accent2"/>
+          </a:solidFill>
+          <a:ln>
+            <a:noFill/>
+          </a:ln>
+        </p:spPr>
+        <p:txBody>
+          <a:bodyPr spcFirstLastPara="1" wrap="square" lIns="91425" tIns="45700" rIns="91425" bIns="45700" anchor="ctr" anchorCtr="0">
+            <a:noAutofit/>
+          </a:bodyPr>
+          <a:lstStyle/>
+          <a:p>
+            <a:pPr marL="0" marR="0" lvl="0" indent="0" algn="ctr" rtl="0">
+              <a:lnSpc>
+                <a:spcPct val="100000"/>
+              </a:lnSpc>
+              <a:spcBef>
+                <a:spcPts val="0"/>
+              </a:spcBef>
+              <a:spcAft>
+                <a:spcPts val="0"/>
+              </a:spcAft>
+              <a:buClr>
+                <a:srgbClr val="000000"/>
+              </a:buClr>
+              <a:buSzPts val="1800"/>
+              <a:buFont typeface="Arial"/>
+              <a:buNone/>
+            </a:pPr>
+            <a:r>
+              <a:rPr lang="en-US" sz="1800" b="1" i="0" u="none" strike="noStrike" cap="none">
+                <a:solidFill>
+                  <a:schemeClr val="lt1"/>
+                </a:solidFill>
+                <a:latin typeface="Twentieth Century"/>
+                <a:ea typeface="Twentieth Century"/>
+                <a:cs typeface="Twentieth Century"/>
+                <a:sym typeface="Twentieth Century"/>
+              </a:rPr>
+              <a:t>CODE</a:t>
+            </a:r>
+            <a:endParaRPr sz="1400" b="0" i="0" u="none" strike="noStrike" cap="none">
+              <a:solidFill>
+                <a:srgbClr val="000000"/>
+              </a:solidFill>
+              <a:latin typeface="Arial"/>
+              <a:ea typeface="Arial"/>
+              <a:cs typeface="Arial"/>
+              <a:sym typeface="Arial"/>
+            </a:endParaRPr>
+          </a:p>
+        </p:txBody>
+      </p:sp>
+      <p:sp>
+        <p:nvSpPr>
+          <p:cNvPr id="559" name="Google Shape;559;p26"/>
+          <p:cNvSpPr/>
+          <p:nvPr/>
+        </p:nvSpPr>
+        <p:spPr>
+          <a:xfrm>
+            <a:off x="1656936" y="2644252"/>
+            <a:ext cx="418989" cy="396807"/>
+          </a:xfrm>
+          <a:prstGeom prst="rect">
+            <a:avLst/>
+          </a:prstGeom>
+          <a:solidFill>
+            <a:schemeClr val="accent2"/>
+          </a:solidFill>
+          <a:ln>
+            <a:noFill/>
+          </a:ln>
+        </p:spPr>
+        <p:txBody>
+          <a:bodyPr spcFirstLastPara="1" wrap="square" lIns="91425" tIns="45700" rIns="91425" bIns="45700" anchor="ctr" anchorCtr="0">
+            <a:noAutofit/>
+          </a:bodyPr>
+          <a:lstStyle/>
+          <a:p>
+            <a:pPr marL="0" marR="0" lvl="0" indent="0" algn="ctr" rtl="0">
+              <a:lnSpc>
+                <a:spcPct val="100000"/>
+              </a:lnSpc>
+              <a:spcBef>
+                <a:spcPts val="0"/>
+              </a:spcBef>
+              <a:spcAft>
+                <a:spcPts val="0"/>
+              </a:spcAft>
+              <a:buClr>
+                <a:srgbClr val="000000"/>
+              </a:buClr>
+              <a:buSzPts val="1800"/>
+              <a:buFont typeface="Arial"/>
+              <a:buNone/>
+            </a:pPr>
+            <a:endParaRPr sz="1800" b="0" i="0" u="none" strike="noStrike" cap="none">
+              <a:solidFill>
+                <a:schemeClr val="lt1"/>
+              </a:solidFill>
+              <a:latin typeface="Twentieth Century"/>
+              <a:ea typeface="Twentieth Century"/>
+              <a:cs typeface="Twentieth Century"/>
+              <a:sym typeface="Twentieth Century"/>
+            </a:endParaRPr>
+          </a:p>
+        </p:txBody>
+      </p:sp>
+      <p:sp>
+        <p:nvSpPr>
+          <p:cNvPr id="560" name="Google Shape;560;p26"/>
+          <p:cNvSpPr/>
+          <p:nvPr/>
+        </p:nvSpPr>
+        <p:spPr>
+          <a:xfrm>
+            <a:off x="222748" y="2294546"/>
+            <a:ext cx="365760" cy="365760"/>
+          </a:xfrm>
+          <a:prstGeom prst="rect">
+            <a:avLst/>
+          </a:prstGeom>
+          <a:solidFill>
+            <a:schemeClr val="accent2"/>
+          </a:solidFill>
+          <a:ln>
+            <a:noFill/>
+          </a:ln>
+        </p:spPr>
+        <p:txBody>
+          <a:bodyPr spcFirstLastPara="1" wrap="square" lIns="91425" tIns="45700" rIns="91425" bIns="45700" anchor="ctr" anchorCtr="0">
+            <a:noAutofit/>
+          </a:bodyPr>
+          <a:lstStyle/>
+          <a:p>
+            <a:pPr marL="0" marR="0" lvl="0" indent="0" algn="ctr" rtl="0">
+              <a:lnSpc>
+                <a:spcPct val="100000"/>
+              </a:lnSpc>
+              <a:spcBef>
+                <a:spcPts val="0"/>
+              </a:spcBef>
+              <a:spcAft>
+                <a:spcPts val="0"/>
+              </a:spcAft>
+              <a:buClr>
+                <a:srgbClr val="000000"/>
+              </a:buClr>
+              <a:buSzPts val="1800"/>
+              <a:buFont typeface="Arial"/>
+              <a:buNone/>
+            </a:pPr>
+            <a:endParaRPr sz="1800" b="0" i="0" u="none" strike="noStrike" cap="none">
+              <a:solidFill>
+                <a:schemeClr val="lt1"/>
+              </a:solidFill>
+              <a:latin typeface="Twentieth Century"/>
+              <a:ea typeface="Twentieth Century"/>
+              <a:cs typeface="Twentieth Century"/>
+              <a:sym typeface="Twentieth Century"/>
+            </a:endParaRPr>
+          </a:p>
+        </p:txBody>
+      </p:sp>
+      <p:sp>
+        <p:nvSpPr>
+          <p:cNvPr id="561" name="Google Shape;561;p26"/>
+          <p:cNvSpPr/>
+          <p:nvPr/>
+        </p:nvSpPr>
+        <p:spPr>
+          <a:xfrm>
+            <a:off x="222747" y="3034572"/>
+            <a:ext cx="365760" cy="365760"/>
+          </a:xfrm>
+          <a:prstGeom prst="rect">
+            <a:avLst/>
+          </a:prstGeom>
+          <a:solidFill>
+            <a:schemeClr val="accent2"/>
+          </a:solidFill>
+          <a:ln>
+            <a:noFill/>
+          </a:ln>
+        </p:spPr>
+        <p:txBody>
+          <a:bodyPr spcFirstLastPara="1" wrap="square" lIns="91425" tIns="45700" rIns="91425" bIns="45700" anchor="ctr" anchorCtr="0">
+            <a:noAutofit/>
+          </a:bodyPr>
+          <a:lstStyle/>
+          <a:p>
+            <a:pPr marL="0" marR="0" lvl="0" indent="0" algn="ctr" rtl="0">
+              <a:lnSpc>
+                <a:spcPct val="100000"/>
+              </a:lnSpc>
+              <a:spcBef>
+                <a:spcPts val="0"/>
+              </a:spcBef>
+              <a:spcAft>
+                <a:spcPts val="0"/>
+              </a:spcAft>
+              <a:buClr>
+                <a:srgbClr val="000000"/>
+              </a:buClr>
+              <a:buSzPts val="1800"/>
+              <a:buFont typeface="Arial"/>
+              <a:buNone/>
+            </a:pPr>
+            <a:endParaRPr sz="1800" b="0" i="0" u="none" strike="noStrike" cap="none">
+              <a:solidFill>
+                <a:schemeClr val="lt1"/>
+              </a:solidFill>
+              <a:latin typeface="Twentieth Century"/>
+              <a:ea typeface="Twentieth Century"/>
+              <a:cs typeface="Twentieth Century"/>
+              <a:sym typeface="Twentieth Century"/>
+            </a:endParaRPr>
+          </a:p>
+        </p:txBody>
+      </p:sp>
+      <p:sp>
+        <p:nvSpPr>
+          <p:cNvPr id="562" name="Google Shape;562;p26"/>
+          <p:cNvSpPr/>
+          <p:nvPr/>
+        </p:nvSpPr>
+        <p:spPr>
+          <a:xfrm>
+            <a:off x="2294956" y="2436634"/>
+            <a:ext cx="2044962" cy="792969"/>
+          </a:xfrm>
+          <a:prstGeom prst="rightArrow">
+            <a:avLst>
+              <a:gd name="adj1" fmla="val 50000"/>
+              <a:gd name="adj2" fmla="val 50000"/>
+            </a:avLst>
+          </a:prstGeom>
+          <a:solidFill>
+            <a:srgbClr val="BAC7DA"/>
+          </a:solidFill>
+          <a:ln>
+            <a:noFill/>
+          </a:ln>
+        </p:spPr>
+        <p:txBody>
+          <a:bodyPr spcFirstLastPara="1" wrap="square" lIns="91425" tIns="45700" rIns="91425" bIns="45700" anchor="ctr" anchorCtr="0">
+            <a:noAutofit/>
+          </a:bodyPr>
+          <a:lstStyle/>
+          <a:p>
+            <a:pPr marL="0" marR="0" lvl="0" indent="0" algn="ctr" rtl="0">
+              <a:lnSpc>
+                <a:spcPct val="100000"/>
+              </a:lnSpc>
+              <a:spcBef>
+                <a:spcPts val="0"/>
+              </a:spcBef>
+              <a:spcAft>
+                <a:spcPts val="0"/>
+              </a:spcAft>
+              <a:buClr>
+                <a:srgbClr val="000000"/>
+              </a:buClr>
+              <a:buSzPts val="1800"/>
+              <a:buFont typeface="Arial"/>
+              <a:buNone/>
+            </a:pPr>
+            <a:endParaRPr sz="1800" b="0" i="0" u="none" strike="noStrike" cap="none">
+              <a:solidFill>
+                <a:schemeClr val="lt1"/>
+              </a:solidFill>
+              <a:latin typeface="Twentieth Century"/>
+              <a:ea typeface="Twentieth Century"/>
+              <a:cs typeface="Twentieth Century"/>
+              <a:sym typeface="Twentieth Century"/>
+            </a:endParaRPr>
+          </a:p>
+        </p:txBody>
+      </p:sp>
+      <p:sp>
+        <p:nvSpPr>
+          <p:cNvPr id="563" name="Google Shape;563;p26"/>
+          <p:cNvSpPr txBox="1"/>
+          <p:nvPr/>
+        </p:nvSpPr>
+        <p:spPr>
+          <a:xfrm>
+            <a:off x="2253974" y="2671728"/>
+            <a:ext cx="2120105" cy="369291"/>
+          </a:xfrm>
+          <a:prstGeom prst="rect">
+            <a:avLst/>
+          </a:prstGeom>
+          <a:noFill/>
+          <a:ln>
+            <a:noFill/>
+          </a:ln>
+        </p:spPr>
+        <p:txBody>
+          <a:bodyPr spcFirstLastPara="1" wrap="square" lIns="91425" tIns="45700" rIns="91425" bIns="45700" anchor="t" anchorCtr="0">
+            <a:spAutoFit/>
+          </a:bodyPr>
+          <a:lstStyle/>
+          <a:p>
+            <a:pPr marL="0" marR="0" lvl="0" indent="0" algn="l" rtl="0">
+              <a:lnSpc>
+                <a:spcPct val="100000"/>
+              </a:lnSpc>
+              <a:spcBef>
+                <a:spcPts val="0"/>
+              </a:spcBef>
+              <a:spcAft>
+                <a:spcPts val="0"/>
+              </a:spcAft>
+              <a:buClr>
+                <a:srgbClr val="000000"/>
+              </a:buClr>
+              <a:buSzPts val="1800"/>
+              <a:buFont typeface="Arial"/>
+              <a:buNone/>
+            </a:pPr>
+            <a:r>
+              <a:rPr lang="de-DE" sz="1800" b="1" i="0" u="none" strike="noStrike" cap="none" dirty="0">
+                <a:solidFill>
+                  <a:schemeClr val="dk1"/>
+                </a:solidFill>
+                <a:latin typeface="Twentieth Century"/>
+                <a:ea typeface="Twentieth Century"/>
+                <a:cs typeface="Twentieth Century"/>
+                <a:sym typeface="Twentieth Century"/>
+              </a:rPr>
+              <a:t>Code Modellierung</a:t>
+            </a:r>
+            <a:endParaRPr lang="de-DE" sz="1400" b="0" i="0" u="none" strike="noStrike" cap="none" dirty="0">
+              <a:solidFill>
+                <a:srgbClr val="000000"/>
+              </a:solidFill>
+              <a:latin typeface="Arial"/>
+              <a:ea typeface="Arial"/>
+              <a:cs typeface="Arial"/>
+              <a:sym typeface="Arial"/>
+            </a:endParaRPr>
+          </a:p>
+        </p:txBody>
+      </p:sp>
+      <p:sp>
+        <p:nvSpPr>
+          <p:cNvPr id="564" name="Google Shape;564;p26"/>
+          <p:cNvSpPr/>
+          <p:nvPr/>
+        </p:nvSpPr>
+        <p:spPr>
+          <a:xfrm flipH="1">
+            <a:off x="5385422" y="2655279"/>
+            <a:ext cx="1119941" cy="376711"/>
+          </a:xfrm>
+          <a:prstGeom prst="flowChartOnlineStorage">
+            <a:avLst/>
+          </a:prstGeom>
+          <a:solidFill>
+            <a:schemeClr val="accent3"/>
+          </a:solidFill>
+          <a:ln>
+            <a:noFill/>
+          </a:ln>
+        </p:spPr>
+        <p:txBody>
+          <a:bodyPr spcFirstLastPara="1" wrap="square" lIns="91425" tIns="45700" rIns="91425" bIns="45700" anchor="ctr" anchorCtr="0">
+            <a:noAutofit/>
+          </a:bodyPr>
+          <a:lstStyle/>
+          <a:p>
+            <a:pPr marL="0" marR="0" lvl="0" indent="0" algn="ctr" rtl="0">
+              <a:lnSpc>
+                <a:spcPct val="100000"/>
+              </a:lnSpc>
+              <a:spcBef>
+                <a:spcPts val="0"/>
+              </a:spcBef>
+              <a:spcAft>
+                <a:spcPts val="0"/>
+              </a:spcAft>
+              <a:buClr>
+                <a:srgbClr val="000000"/>
+              </a:buClr>
+              <a:buSzPts val="1800"/>
+              <a:buFont typeface="Arial"/>
+              <a:buNone/>
+            </a:pPr>
+            <a:endParaRPr sz="1800" b="0" i="0" u="none" strike="noStrike" cap="none">
+              <a:solidFill>
+                <a:schemeClr val="lt1"/>
+              </a:solidFill>
+              <a:latin typeface="Twentieth Century"/>
+              <a:ea typeface="Twentieth Century"/>
+              <a:cs typeface="Twentieth Century"/>
+              <a:sym typeface="Twentieth Century"/>
+            </a:endParaRPr>
+          </a:p>
+        </p:txBody>
+      </p:sp>
+      <p:sp>
+        <p:nvSpPr>
+          <p:cNvPr id="565" name="Google Shape;565;p26"/>
+          <p:cNvSpPr/>
+          <p:nvPr/>
+        </p:nvSpPr>
+        <p:spPr>
+          <a:xfrm>
+            <a:off x="4884702" y="2294546"/>
+            <a:ext cx="1662037" cy="1105786"/>
+          </a:xfrm>
+          <a:prstGeom prst="rect">
+            <a:avLst/>
+          </a:prstGeom>
+          <a:solidFill>
+            <a:schemeClr val="accent6"/>
+          </a:solidFill>
+          <a:ln>
+            <a:noFill/>
+          </a:ln>
+        </p:spPr>
+        <p:txBody>
+          <a:bodyPr spcFirstLastPara="1" wrap="square" lIns="91425" tIns="45700" rIns="91425" bIns="45700" anchor="ctr" anchorCtr="0">
+            <a:noAutofit/>
+          </a:bodyPr>
+          <a:lstStyle/>
+          <a:p>
+            <a:pPr marL="0" marR="0" lvl="0" indent="0" algn="ctr" rtl="0">
+              <a:lnSpc>
+                <a:spcPct val="100000"/>
+              </a:lnSpc>
+              <a:spcBef>
+                <a:spcPts val="0"/>
+              </a:spcBef>
+              <a:spcAft>
+                <a:spcPts val="0"/>
+              </a:spcAft>
+              <a:buClr>
+                <a:srgbClr val="000000"/>
+              </a:buClr>
+              <a:buSzPts val="1400"/>
+              <a:buFont typeface="Arial"/>
+              <a:buNone/>
+            </a:pPr>
+            <a:r>
+              <a:rPr lang="en-US" sz="1400" b="1" i="0" u="none" strike="noStrike" cap="none" dirty="0">
+                <a:solidFill>
+                  <a:schemeClr val="lt1"/>
+                </a:solidFill>
+                <a:latin typeface="Twentieth Century"/>
+                <a:ea typeface="Twentieth Century"/>
+                <a:cs typeface="Twentieth Century"/>
+                <a:sym typeface="Twentieth Century"/>
+              </a:rPr>
+              <a:t>LAUFZEIT</a:t>
+            </a:r>
+            <a:endParaRPr sz="1400" b="0" i="0" u="none" strike="noStrike" cap="none" dirty="0">
+              <a:solidFill>
+                <a:srgbClr val="000000"/>
+              </a:solidFill>
+              <a:latin typeface="Arial"/>
+              <a:ea typeface="Arial"/>
+              <a:cs typeface="Arial"/>
+              <a:sym typeface="Arial"/>
+            </a:endParaRPr>
+          </a:p>
+          <a:p>
+            <a:pPr marL="0" marR="0" lvl="0" indent="0" algn="ctr" rtl="0">
+              <a:lnSpc>
+                <a:spcPct val="100000"/>
+              </a:lnSpc>
+              <a:spcBef>
+                <a:spcPts val="0"/>
+              </a:spcBef>
+              <a:spcAft>
+                <a:spcPts val="0"/>
+              </a:spcAft>
+              <a:buClr>
+                <a:srgbClr val="000000"/>
+              </a:buClr>
+              <a:buSzPts val="1800"/>
+              <a:buFont typeface="Arial"/>
+              <a:buNone/>
+            </a:pPr>
+            <a:r>
+              <a:rPr lang="en-US" sz="1800" b="1" i="0" u="none" strike="noStrike" cap="none" dirty="0">
+                <a:solidFill>
+                  <a:schemeClr val="lt1"/>
+                </a:solidFill>
+                <a:latin typeface="Twentieth Century"/>
+                <a:ea typeface="Twentieth Century"/>
+                <a:cs typeface="Twentieth Century"/>
+                <a:sym typeface="Twentieth Century"/>
+              </a:rPr>
+              <a:t>FUNKTION</a:t>
+            </a:r>
+            <a:endParaRPr sz="1400" b="0" i="0" u="none" strike="noStrike" cap="none" dirty="0">
+              <a:solidFill>
+                <a:srgbClr val="000000"/>
+              </a:solidFill>
+              <a:latin typeface="Arial"/>
+              <a:ea typeface="Arial"/>
+              <a:cs typeface="Arial"/>
+              <a:sym typeface="Arial"/>
+            </a:endParaRPr>
+          </a:p>
+        </p:txBody>
+      </p:sp>
+      <p:sp>
+        <p:nvSpPr>
+          <p:cNvPr id="566" name="Google Shape;566;p26"/>
+          <p:cNvSpPr/>
+          <p:nvPr/>
+        </p:nvSpPr>
+        <p:spPr>
+          <a:xfrm>
+            <a:off x="2749804" y="1727882"/>
+            <a:ext cx="762636" cy="762636"/>
+          </a:xfrm>
+          <a:prstGeom prst="ellipse">
+            <a:avLst/>
+          </a:prstGeom>
+          <a:solidFill>
+            <a:srgbClr val="4C3282"/>
+          </a:solidFill>
+          <a:ln>
+            <a:noFill/>
+          </a:ln>
+        </p:spPr>
+        <p:txBody>
+          <a:bodyPr spcFirstLastPara="1" wrap="square" lIns="91425" tIns="45700" rIns="91425" bIns="45700" anchor="ctr" anchorCtr="0">
+            <a:noAutofit/>
+          </a:bodyPr>
+          <a:lstStyle/>
+          <a:p>
+            <a:pPr marL="0" marR="0" lvl="0" indent="0" algn="ctr" rtl="0">
+              <a:lnSpc>
+                <a:spcPct val="100000"/>
+              </a:lnSpc>
+              <a:spcBef>
+                <a:spcPts val="0"/>
+              </a:spcBef>
+              <a:spcAft>
+                <a:spcPts val="0"/>
+              </a:spcAft>
+              <a:buClr>
+                <a:srgbClr val="000000"/>
+              </a:buClr>
+              <a:buSzPts val="2800"/>
+              <a:buFont typeface="Arial"/>
+              <a:buNone/>
+            </a:pPr>
+            <a:r>
+              <a:rPr lang="en-US" sz="2800" b="1" i="0" u="none" strike="noStrike" cap="none">
+                <a:solidFill>
+                  <a:schemeClr val="lt1"/>
+                </a:solidFill>
+                <a:latin typeface="Montserrat"/>
+                <a:ea typeface="Montserrat"/>
+                <a:cs typeface="Montserrat"/>
+                <a:sym typeface="Montserrat"/>
+              </a:rPr>
+              <a:t>1</a:t>
+            </a:r>
+            <a:endParaRPr sz="1400" b="0" i="0" u="none" strike="noStrike" cap="none">
+              <a:solidFill>
+                <a:srgbClr val="000000"/>
+              </a:solidFill>
+              <a:latin typeface="Arial"/>
+              <a:ea typeface="Arial"/>
+              <a:cs typeface="Arial"/>
+              <a:sym typeface="Arial"/>
+            </a:endParaRPr>
+          </a:p>
+        </p:txBody>
+      </p:sp>
+      <p:sp>
+        <p:nvSpPr>
+          <p:cNvPr id="567" name="Google Shape;567;p26"/>
+          <p:cNvSpPr txBox="1"/>
+          <p:nvPr/>
+        </p:nvSpPr>
+        <p:spPr>
+          <a:xfrm>
+            <a:off x="180932" y="3478151"/>
+            <a:ext cx="2669320" cy="954107"/>
+          </a:xfrm>
+          <a:prstGeom prst="rect">
+            <a:avLst/>
+          </a:prstGeom>
+          <a:noFill/>
+          <a:ln>
+            <a:noFill/>
+          </a:ln>
+        </p:spPr>
+        <p:txBody>
+          <a:bodyPr spcFirstLastPara="1" wrap="square" lIns="91425" tIns="45700" rIns="91425" bIns="45700" anchor="t" anchorCtr="0">
+            <a:spAutoFit/>
+          </a:bodyPr>
+          <a:lstStyle/>
+          <a:p>
+            <a:pPr marL="0" marR="0" lvl="0" indent="0" algn="l" rtl="0">
+              <a:lnSpc>
+                <a:spcPct val="100000"/>
+              </a:lnSpc>
+              <a:spcBef>
+                <a:spcPts val="0"/>
+              </a:spcBef>
+              <a:spcAft>
+                <a:spcPts val="0"/>
+              </a:spcAft>
+              <a:buClr>
+                <a:srgbClr val="000000"/>
+              </a:buClr>
+              <a:buSzPts val="1400"/>
+              <a:buFont typeface="Arial"/>
+              <a:buNone/>
+            </a:pPr>
+            <a:r>
+              <a:rPr lang="en-US" sz="1400" b="0" i="0" u="none" strike="noStrike" cap="none">
+                <a:solidFill>
+                  <a:schemeClr val="dk1"/>
+                </a:solidFill>
+                <a:latin typeface="Consolas"/>
+                <a:ea typeface="Consolas"/>
+                <a:cs typeface="Consolas"/>
+                <a:sym typeface="Consolas"/>
+              </a:rPr>
+              <a:t>for (i = 0; i &lt; n; i++) {</a:t>
+            </a:r>
+            <a:endParaRPr sz="1400" b="0" i="0" u="none" strike="noStrike" cap="none">
+              <a:solidFill>
+                <a:srgbClr val="000000"/>
+              </a:solidFill>
+              <a:latin typeface="Arial"/>
+              <a:ea typeface="Arial"/>
+              <a:cs typeface="Arial"/>
+              <a:sym typeface="Arial"/>
+            </a:endParaRPr>
+          </a:p>
+          <a:p>
+            <a:pPr marL="0" marR="0" lvl="0" indent="0" algn="l" rtl="0">
+              <a:lnSpc>
+                <a:spcPct val="100000"/>
+              </a:lnSpc>
+              <a:spcBef>
+                <a:spcPts val="0"/>
+              </a:spcBef>
+              <a:spcAft>
+                <a:spcPts val="0"/>
+              </a:spcAft>
+              <a:buClr>
+                <a:srgbClr val="000000"/>
+              </a:buClr>
+              <a:buSzPts val="1400"/>
+              <a:buFont typeface="Arial"/>
+              <a:buNone/>
+            </a:pPr>
+            <a:r>
+              <a:rPr lang="en-US" sz="1400" b="0" i="0" u="none" strike="noStrike" cap="none">
+                <a:solidFill>
+                  <a:schemeClr val="dk1"/>
+                </a:solidFill>
+                <a:latin typeface="Consolas"/>
+                <a:ea typeface="Consolas"/>
+                <a:cs typeface="Consolas"/>
+                <a:sym typeface="Consolas"/>
+              </a:rPr>
+              <a:t>  a[i] = 1;</a:t>
+            </a:r>
+            <a:endParaRPr sz="1400" b="0" i="0" u="none" strike="noStrike" cap="none">
+              <a:solidFill>
+                <a:srgbClr val="000000"/>
+              </a:solidFill>
+              <a:latin typeface="Arial"/>
+              <a:ea typeface="Arial"/>
+              <a:cs typeface="Arial"/>
+              <a:sym typeface="Arial"/>
+            </a:endParaRPr>
+          </a:p>
+          <a:p>
+            <a:pPr marL="0" marR="0" lvl="0" indent="0" algn="l" rtl="0">
+              <a:lnSpc>
+                <a:spcPct val="100000"/>
+              </a:lnSpc>
+              <a:spcBef>
+                <a:spcPts val="0"/>
+              </a:spcBef>
+              <a:spcAft>
+                <a:spcPts val="0"/>
+              </a:spcAft>
+              <a:buClr>
+                <a:srgbClr val="000000"/>
+              </a:buClr>
+              <a:buSzPts val="1400"/>
+              <a:buFont typeface="Arial"/>
+              <a:buNone/>
+            </a:pPr>
+            <a:r>
+              <a:rPr lang="en-US" sz="1400" b="0" i="0" u="none" strike="noStrike" cap="none">
+                <a:solidFill>
+                  <a:schemeClr val="dk1"/>
+                </a:solidFill>
+                <a:latin typeface="Consolas"/>
+                <a:ea typeface="Consolas"/>
+                <a:cs typeface="Consolas"/>
+                <a:sym typeface="Consolas"/>
+              </a:rPr>
+              <a:t>  b[i] = 2;</a:t>
+            </a:r>
+            <a:endParaRPr sz="1400" b="0" i="0" u="none" strike="noStrike" cap="none">
+              <a:solidFill>
+                <a:srgbClr val="000000"/>
+              </a:solidFill>
+              <a:latin typeface="Arial"/>
+              <a:ea typeface="Arial"/>
+              <a:cs typeface="Arial"/>
+              <a:sym typeface="Arial"/>
+            </a:endParaRPr>
+          </a:p>
+          <a:p>
+            <a:pPr marL="0" marR="0" lvl="0" indent="0" algn="l" rtl="0">
+              <a:lnSpc>
+                <a:spcPct val="100000"/>
+              </a:lnSpc>
+              <a:spcBef>
+                <a:spcPts val="0"/>
+              </a:spcBef>
+              <a:spcAft>
+                <a:spcPts val="0"/>
+              </a:spcAft>
+              <a:buClr>
+                <a:srgbClr val="000000"/>
+              </a:buClr>
+              <a:buSzPts val="1400"/>
+              <a:buFont typeface="Arial"/>
+              <a:buNone/>
+            </a:pPr>
+            <a:r>
+              <a:rPr lang="en-US" sz="1400" b="0" i="0" u="none" strike="noStrike" cap="none">
+                <a:solidFill>
+                  <a:schemeClr val="dk1"/>
+                </a:solidFill>
+                <a:latin typeface="Consolas"/>
+                <a:ea typeface="Consolas"/>
+                <a:cs typeface="Consolas"/>
+                <a:sym typeface="Consolas"/>
+              </a:rPr>
+              <a:t>}</a:t>
+            </a:r>
+            <a:endParaRPr sz="1400" b="0" i="0" u="none" strike="noStrike" cap="none">
+              <a:solidFill>
+                <a:srgbClr val="000000"/>
+              </a:solidFill>
+              <a:latin typeface="Arial"/>
+              <a:ea typeface="Arial"/>
+              <a:cs typeface="Arial"/>
+              <a:sym typeface="Arial"/>
+            </a:endParaRPr>
+          </a:p>
+        </p:txBody>
+      </p:sp>
+      <p:sp>
+        <p:nvSpPr>
+          <p:cNvPr id="568" name="Google Shape;568;p26"/>
+          <p:cNvSpPr txBox="1"/>
+          <p:nvPr/>
+        </p:nvSpPr>
+        <p:spPr>
+          <a:xfrm>
+            <a:off x="5078903" y="3450674"/>
+            <a:ext cx="1236236" cy="400069"/>
+          </a:xfrm>
+          <a:prstGeom prst="rect">
+            <a:avLst/>
+          </a:prstGeom>
+          <a:noFill/>
+          <a:ln>
+            <a:noFill/>
+          </a:ln>
+        </p:spPr>
+        <p:txBody>
+          <a:bodyPr spcFirstLastPara="1" wrap="square" lIns="91425" tIns="45700" rIns="91425" bIns="45700" anchor="t" anchorCtr="0">
+            <a:spAutoFit/>
+          </a:bodyPr>
+          <a:lstStyle/>
+          <a:p>
+            <a:pPr marL="0" marR="0" lvl="0" indent="0" algn="l" rtl="0">
+              <a:lnSpc>
+                <a:spcPct val="100000"/>
+              </a:lnSpc>
+              <a:spcBef>
+                <a:spcPts val="0"/>
+              </a:spcBef>
+              <a:spcAft>
+                <a:spcPts val="0"/>
+              </a:spcAft>
+              <a:buClr>
+                <a:srgbClr val="000000"/>
+              </a:buClr>
+              <a:buSzPts val="2400"/>
+              <a:buFont typeface="Arial"/>
+              <a:buNone/>
+            </a:pPr>
+            <a:r>
+              <a:rPr lang="en-US" sz="2000" b="0" i="0" u="none" strike="noStrike" cap="none" dirty="0">
+                <a:solidFill>
+                  <a:schemeClr val="dk1"/>
+                </a:solidFill>
+                <a:latin typeface="Calibri"/>
+                <a:ea typeface="Calibri"/>
+                <a:cs typeface="Calibri"/>
+                <a:sym typeface="Calibri"/>
+              </a:rPr>
+              <a:t>f(n) = 2n</a:t>
+            </a:r>
+            <a:endParaRPr sz="1200" b="0" i="0" u="none" strike="noStrike" cap="none" dirty="0">
+              <a:solidFill>
+                <a:srgbClr val="000000"/>
+              </a:solidFill>
+              <a:latin typeface="Arial"/>
+              <a:ea typeface="Arial"/>
+              <a:cs typeface="Arial"/>
+              <a:sym typeface="Arial"/>
+            </a:endParaRPr>
+          </a:p>
+        </p:txBody>
+      </p:sp>
+      <p:sp>
+        <p:nvSpPr>
+          <p:cNvPr id="569" name="Google Shape;569;p26"/>
+          <p:cNvSpPr/>
+          <p:nvPr/>
+        </p:nvSpPr>
+        <p:spPr>
+          <a:xfrm rot="-5400000">
+            <a:off x="6102916" y="1750563"/>
+            <a:ext cx="3800753" cy="2201056"/>
+          </a:xfrm>
+          <a:prstGeom prst="trapezoid">
+            <a:avLst>
+              <a:gd name="adj" fmla="val 61673"/>
+            </a:avLst>
+          </a:prstGeom>
+          <a:solidFill>
+            <a:srgbClr val="9EC0D5"/>
+          </a:solidFill>
+          <a:ln>
+            <a:noFill/>
+          </a:ln>
+        </p:spPr>
+        <p:txBody>
+          <a:bodyPr spcFirstLastPara="1" wrap="square" lIns="91425" tIns="45700" rIns="91425" bIns="45700" anchor="ctr" anchorCtr="0">
+            <a:noAutofit/>
+          </a:bodyPr>
+          <a:lstStyle/>
+          <a:p>
+            <a:pPr marL="0" marR="0" lvl="0" indent="0" algn="ctr" rtl="0">
+              <a:lnSpc>
+                <a:spcPct val="100000"/>
+              </a:lnSpc>
+              <a:spcBef>
+                <a:spcPts val="0"/>
+              </a:spcBef>
+              <a:spcAft>
+                <a:spcPts val="0"/>
+              </a:spcAft>
+              <a:buClr>
+                <a:srgbClr val="000000"/>
+              </a:buClr>
+              <a:buSzPts val="1800"/>
+              <a:buFont typeface="Arial"/>
+              <a:buNone/>
+            </a:pPr>
+            <a:endParaRPr sz="1800" b="0" i="0" u="none" strike="noStrike" cap="none">
+              <a:solidFill>
+                <a:schemeClr val="lt1"/>
+              </a:solidFill>
+              <a:latin typeface="Twentieth Century"/>
+              <a:ea typeface="Twentieth Century"/>
+              <a:cs typeface="Twentieth Century"/>
+              <a:sym typeface="Twentieth Century"/>
+            </a:endParaRPr>
+          </a:p>
+        </p:txBody>
+      </p:sp>
+      <p:sp>
+        <p:nvSpPr>
+          <p:cNvPr id="570" name="Google Shape;570;p26"/>
+          <p:cNvSpPr/>
+          <p:nvPr/>
+        </p:nvSpPr>
+        <p:spPr>
+          <a:xfrm rot="5400000">
+            <a:off x="9795548" y="1388427"/>
+            <a:ext cx="385780" cy="284010"/>
+          </a:xfrm>
+          <a:prstGeom prst="triangle">
+            <a:avLst>
+              <a:gd name="adj" fmla="val 50000"/>
+            </a:avLst>
+          </a:prstGeom>
+          <a:solidFill>
+            <a:srgbClr val="9EC0D5"/>
+          </a:solidFill>
+          <a:ln>
+            <a:noFill/>
+          </a:ln>
+        </p:spPr>
+        <p:txBody>
+          <a:bodyPr spcFirstLastPara="1" wrap="square" lIns="91425" tIns="45700" rIns="91425" bIns="45700" anchor="ctr" anchorCtr="0">
+            <a:noAutofit/>
+          </a:bodyPr>
+          <a:lstStyle/>
+          <a:p>
+            <a:pPr marL="0" marR="0" lvl="0" indent="0" algn="ctr" rtl="0">
+              <a:lnSpc>
+                <a:spcPct val="100000"/>
+              </a:lnSpc>
+              <a:spcBef>
+                <a:spcPts val="0"/>
+              </a:spcBef>
+              <a:spcAft>
+                <a:spcPts val="0"/>
+              </a:spcAft>
+              <a:buClr>
+                <a:srgbClr val="000000"/>
+              </a:buClr>
+              <a:buSzPts val="1800"/>
+              <a:buFont typeface="Arial"/>
+              <a:buNone/>
+            </a:pPr>
+            <a:endParaRPr sz="1800" b="0" i="0" u="none" strike="noStrike" cap="none">
+              <a:solidFill>
+                <a:schemeClr val="lt1"/>
+              </a:solidFill>
+              <a:latin typeface="Twentieth Century"/>
+              <a:ea typeface="Twentieth Century"/>
+              <a:cs typeface="Twentieth Century"/>
+              <a:sym typeface="Twentieth Century"/>
+            </a:endParaRPr>
+          </a:p>
+        </p:txBody>
+      </p:sp>
+      <p:sp>
+        <p:nvSpPr>
+          <p:cNvPr id="571" name="Google Shape;571;p26"/>
+          <p:cNvSpPr/>
+          <p:nvPr/>
+        </p:nvSpPr>
+        <p:spPr>
+          <a:xfrm>
+            <a:off x="6541810" y="2306148"/>
+            <a:ext cx="365760" cy="365760"/>
+          </a:xfrm>
+          <a:prstGeom prst="rect">
+            <a:avLst/>
+          </a:prstGeom>
+          <a:solidFill>
+            <a:srgbClr val="9EC0D5"/>
+          </a:solidFill>
+          <a:ln>
+            <a:noFill/>
+          </a:ln>
+        </p:spPr>
+        <p:txBody>
+          <a:bodyPr spcFirstLastPara="1" wrap="square" lIns="91425" tIns="45700" rIns="91425" bIns="45700" anchor="ctr" anchorCtr="0">
+            <a:noAutofit/>
+          </a:bodyPr>
+          <a:lstStyle/>
+          <a:p>
+            <a:pPr marL="0" marR="0" lvl="0" indent="0" algn="ctr" rtl="0">
+              <a:lnSpc>
+                <a:spcPct val="100000"/>
+              </a:lnSpc>
+              <a:spcBef>
+                <a:spcPts val="0"/>
+              </a:spcBef>
+              <a:spcAft>
+                <a:spcPts val="0"/>
+              </a:spcAft>
+              <a:buClr>
+                <a:srgbClr val="000000"/>
+              </a:buClr>
+              <a:buSzPts val="1800"/>
+              <a:buFont typeface="Arial"/>
+              <a:buNone/>
+            </a:pPr>
+            <a:endParaRPr sz="1800" b="0" i="0" u="none" strike="noStrike" cap="none">
+              <a:solidFill>
+                <a:schemeClr val="lt1"/>
+              </a:solidFill>
+              <a:latin typeface="Twentieth Century"/>
+              <a:ea typeface="Twentieth Century"/>
+              <a:cs typeface="Twentieth Century"/>
+              <a:sym typeface="Twentieth Century"/>
+            </a:endParaRPr>
+          </a:p>
+        </p:txBody>
+      </p:sp>
+      <p:sp>
+        <p:nvSpPr>
+          <p:cNvPr id="572" name="Google Shape;572;p26"/>
+          <p:cNvSpPr/>
+          <p:nvPr/>
+        </p:nvSpPr>
+        <p:spPr>
+          <a:xfrm>
+            <a:off x="6541486" y="3034572"/>
+            <a:ext cx="365760" cy="365760"/>
+          </a:xfrm>
+          <a:prstGeom prst="rect">
+            <a:avLst/>
+          </a:prstGeom>
+          <a:solidFill>
+            <a:srgbClr val="9EC0D5"/>
+          </a:solidFill>
+          <a:ln>
+            <a:noFill/>
+          </a:ln>
+        </p:spPr>
+        <p:txBody>
+          <a:bodyPr spcFirstLastPara="1" wrap="square" lIns="91425" tIns="45700" rIns="91425" bIns="45700" anchor="ctr" anchorCtr="0">
+            <a:noAutofit/>
+          </a:bodyPr>
+          <a:lstStyle/>
+          <a:p>
+            <a:pPr marL="0" marR="0" lvl="0" indent="0" algn="ctr" rtl="0">
+              <a:lnSpc>
+                <a:spcPct val="100000"/>
+              </a:lnSpc>
+              <a:spcBef>
+                <a:spcPts val="0"/>
+              </a:spcBef>
+              <a:spcAft>
+                <a:spcPts val="0"/>
+              </a:spcAft>
+              <a:buClr>
+                <a:srgbClr val="000000"/>
+              </a:buClr>
+              <a:buSzPts val="1800"/>
+              <a:buFont typeface="Arial"/>
+              <a:buNone/>
+            </a:pPr>
+            <a:endParaRPr sz="1800" b="0" i="0" u="none" strike="noStrike" cap="none">
+              <a:solidFill>
+                <a:schemeClr val="lt1"/>
+              </a:solidFill>
+              <a:latin typeface="Twentieth Century"/>
+              <a:ea typeface="Twentieth Century"/>
+              <a:cs typeface="Twentieth Century"/>
+              <a:sym typeface="Twentieth Century"/>
+            </a:endParaRPr>
+          </a:p>
+        </p:txBody>
+      </p:sp>
+      <p:sp>
+        <p:nvSpPr>
+          <p:cNvPr id="573" name="Google Shape;573;p26"/>
+          <p:cNvSpPr/>
+          <p:nvPr/>
+        </p:nvSpPr>
+        <p:spPr>
+          <a:xfrm>
+            <a:off x="9087938" y="959933"/>
+            <a:ext cx="758495" cy="1105786"/>
+          </a:xfrm>
+          <a:prstGeom prst="rect">
+            <a:avLst/>
+          </a:prstGeom>
+          <a:solidFill>
+            <a:srgbClr val="9EC0D5"/>
+          </a:solidFill>
+          <a:ln>
+            <a:noFill/>
+          </a:ln>
+        </p:spPr>
+        <p:txBody>
+          <a:bodyPr spcFirstLastPara="1" wrap="square" lIns="91425" tIns="45700" rIns="91425" bIns="45700" anchor="ctr" anchorCtr="0">
+            <a:noAutofit/>
+          </a:bodyPr>
+          <a:lstStyle/>
+          <a:p>
+            <a:pPr marL="0" marR="0" lvl="0" indent="0" algn="ctr" rtl="0">
+              <a:lnSpc>
+                <a:spcPct val="100000"/>
+              </a:lnSpc>
+              <a:spcBef>
+                <a:spcPts val="0"/>
+              </a:spcBef>
+              <a:spcAft>
+                <a:spcPts val="0"/>
+              </a:spcAft>
+              <a:buClr>
+                <a:srgbClr val="000000"/>
+              </a:buClr>
+              <a:buSzPts val="1800"/>
+              <a:buFont typeface="Arial"/>
+              <a:buNone/>
+            </a:pPr>
+            <a:endParaRPr sz="1800" b="0" i="0" u="none" strike="noStrike" cap="none">
+              <a:solidFill>
+                <a:schemeClr val="lt1"/>
+              </a:solidFill>
+              <a:latin typeface="Twentieth Century"/>
+              <a:ea typeface="Twentieth Century"/>
+              <a:cs typeface="Twentieth Century"/>
+              <a:sym typeface="Twentieth Century"/>
+            </a:endParaRPr>
+          </a:p>
+        </p:txBody>
+      </p:sp>
+      <p:grpSp>
+        <p:nvGrpSpPr>
+          <p:cNvPr id="574" name="Google Shape;574;p26"/>
+          <p:cNvGrpSpPr/>
+          <p:nvPr/>
+        </p:nvGrpSpPr>
+        <p:grpSpPr>
+          <a:xfrm>
+            <a:off x="9836698" y="959407"/>
+            <a:ext cx="2343590" cy="1106838"/>
+            <a:chOff x="7012434" y="3614205"/>
+            <a:chExt cx="2343590" cy="1106838"/>
+          </a:xfrm>
+        </p:grpSpPr>
+        <p:sp>
+          <p:nvSpPr>
+            <p:cNvPr id="575" name="Google Shape;575;p26"/>
+            <p:cNvSpPr/>
+            <p:nvPr/>
+          </p:nvSpPr>
+          <p:spPr>
+            <a:xfrm>
+              <a:off x="7290111" y="3614205"/>
+              <a:ext cx="1700153" cy="1105786"/>
+            </a:xfrm>
+            <a:prstGeom prst="rect">
+              <a:avLst/>
+            </a:prstGeom>
+            <a:solidFill>
+              <a:srgbClr val="8BD6C0"/>
+            </a:solidFill>
+            <a:ln>
+              <a:noFill/>
+            </a:ln>
+          </p:spPr>
+          <p:txBody>
+            <a:bodyPr spcFirstLastPara="1" wrap="square" lIns="91425" tIns="45700" rIns="91425" bIns="45700" anchor="ctr" anchorCtr="0">
+              <a:noAutofit/>
+            </a:bodyPr>
+            <a:lstStyle/>
+            <a:p>
+              <a:pPr marL="0" marR="0" lvl="0" indent="0" algn="ctr" rtl="0">
+                <a:lnSpc>
+                  <a:spcPct val="100000"/>
+                </a:lnSpc>
+                <a:spcBef>
+                  <a:spcPts val="0"/>
+                </a:spcBef>
+                <a:spcAft>
+                  <a:spcPts val="0"/>
+                </a:spcAft>
+                <a:buClr>
+                  <a:srgbClr val="000000"/>
+                </a:buClr>
+                <a:buSzPts val="1400"/>
+                <a:buFont typeface="Arial"/>
+                <a:buNone/>
+              </a:pPr>
+              <a:r>
+                <a:rPr lang="de-DE" b="1" i="0" u="none" strike="noStrike" cap="none" dirty="0">
+                  <a:solidFill>
+                    <a:schemeClr val="lt1"/>
+                  </a:solidFill>
+                  <a:latin typeface="+mj-lt"/>
+                  <a:ea typeface="Twentieth Century"/>
+                  <a:cs typeface="Twentieth Century"/>
+                  <a:sym typeface="Twentieth Century"/>
+                </a:rPr>
+                <a:t>O-Notation</a:t>
+              </a:r>
+              <a:endParaRPr sz="2400" b="0" i="0" u="none" strike="noStrike" cap="none" dirty="0">
+                <a:solidFill>
+                  <a:schemeClr val="lt1"/>
+                </a:solidFill>
+                <a:latin typeface="+mj-lt"/>
+                <a:ea typeface="Twentieth Century"/>
+                <a:cs typeface="Twentieth Century"/>
+                <a:sym typeface="Twentieth Century"/>
+              </a:endParaRPr>
+            </a:p>
+          </p:txBody>
+        </p:sp>
+        <p:sp>
+          <p:nvSpPr>
+            <p:cNvPr id="576" name="Google Shape;576;p26"/>
+            <p:cNvSpPr/>
+            <p:nvPr/>
+          </p:nvSpPr>
+          <p:spPr>
+            <a:xfrm>
+              <a:off x="7012580" y="3974938"/>
+              <a:ext cx="532515" cy="385780"/>
+            </a:xfrm>
+            <a:prstGeom prst="flowChartCollate">
+              <a:avLst/>
+            </a:prstGeom>
+            <a:solidFill>
+              <a:srgbClr val="8BD6C0"/>
+            </a:solidFill>
+            <a:ln>
+              <a:noFill/>
+            </a:ln>
+          </p:spPr>
+          <p:txBody>
+            <a:bodyPr spcFirstLastPara="1" wrap="square" lIns="91425" tIns="45700" rIns="91425" bIns="45700" anchor="ctr" anchorCtr="0">
+              <a:noAutofit/>
+            </a:bodyPr>
+            <a:lstStyle/>
+            <a:p>
+              <a:pPr marL="0" marR="0" lvl="0" indent="0" algn="ctr" rtl="0">
+                <a:lnSpc>
+                  <a:spcPct val="100000"/>
+                </a:lnSpc>
+                <a:spcBef>
+                  <a:spcPts val="0"/>
+                </a:spcBef>
+                <a:spcAft>
+                  <a:spcPts val="0"/>
+                </a:spcAft>
+                <a:buClr>
+                  <a:srgbClr val="000000"/>
+                </a:buClr>
+                <a:buSzPts val="1800"/>
+                <a:buFont typeface="Arial"/>
+                <a:buNone/>
+              </a:pPr>
+              <a:endParaRPr sz="1800" b="0" i="0" u="none" strike="noStrike" cap="none">
+                <a:solidFill>
+                  <a:schemeClr val="dk1"/>
+                </a:solidFill>
+                <a:latin typeface="Twentieth Century"/>
+                <a:ea typeface="Twentieth Century"/>
+                <a:cs typeface="Twentieth Century"/>
+                <a:sym typeface="Twentieth Century"/>
+              </a:endParaRPr>
+            </a:p>
+          </p:txBody>
+        </p:sp>
+        <p:sp>
+          <p:nvSpPr>
+            <p:cNvPr id="577" name="Google Shape;577;p26"/>
+            <p:cNvSpPr/>
+            <p:nvPr/>
+          </p:nvSpPr>
+          <p:spPr>
+            <a:xfrm>
+              <a:off x="7012434" y="3616465"/>
+              <a:ext cx="365760" cy="365760"/>
+            </a:xfrm>
+            <a:prstGeom prst="rect">
+              <a:avLst/>
+            </a:prstGeom>
+            <a:solidFill>
+              <a:srgbClr val="8BD6C0"/>
+            </a:solidFill>
+            <a:ln>
+              <a:noFill/>
+            </a:ln>
+          </p:spPr>
+          <p:txBody>
+            <a:bodyPr spcFirstLastPara="1" wrap="square" lIns="91425" tIns="45700" rIns="91425" bIns="45700" anchor="ctr" anchorCtr="0">
+              <a:noAutofit/>
+            </a:bodyPr>
+            <a:lstStyle/>
+            <a:p>
+              <a:pPr marL="0" marR="0" lvl="0" indent="0" algn="ctr" rtl="0">
+                <a:lnSpc>
+                  <a:spcPct val="100000"/>
+                </a:lnSpc>
+                <a:spcBef>
+                  <a:spcPts val="0"/>
+                </a:spcBef>
+                <a:spcAft>
+                  <a:spcPts val="0"/>
+                </a:spcAft>
+                <a:buClr>
+                  <a:srgbClr val="000000"/>
+                </a:buClr>
+                <a:buSzPts val="1800"/>
+                <a:buFont typeface="Arial"/>
+                <a:buNone/>
+              </a:pPr>
+              <a:endParaRPr sz="1800" b="0" i="0" u="none" strike="noStrike" cap="none">
+                <a:solidFill>
+                  <a:schemeClr val="lt1"/>
+                </a:solidFill>
+                <a:latin typeface="Twentieth Century"/>
+                <a:ea typeface="Twentieth Century"/>
+                <a:cs typeface="Twentieth Century"/>
+                <a:sym typeface="Twentieth Century"/>
+              </a:endParaRPr>
+            </a:p>
+          </p:txBody>
+        </p:sp>
+        <p:sp>
+          <p:nvSpPr>
+            <p:cNvPr id="578" name="Google Shape;578;p26"/>
+            <p:cNvSpPr/>
+            <p:nvPr/>
+          </p:nvSpPr>
+          <p:spPr>
+            <a:xfrm>
+              <a:off x="7012434" y="4355283"/>
+              <a:ext cx="365760" cy="365760"/>
+            </a:xfrm>
+            <a:prstGeom prst="rect">
+              <a:avLst/>
+            </a:prstGeom>
+            <a:solidFill>
+              <a:srgbClr val="8BD6C0"/>
+            </a:solidFill>
+            <a:ln>
+              <a:noFill/>
+            </a:ln>
+          </p:spPr>
+          <p:txBody>
+            <a:bodyPr spcFirstLastPara="1" wrap="square" lIns="91425" tIns="45700" rIns="91425" bIns="45700" anchor="ctr" anchorCtr="0">
+              <a:noAutofit/>
+            </a:bodyPr>
+            <a:lstStyle/>
+            <a:p>
+              <a:pPr marL="0" marR="0" lvl="0" indent="0" algn="ctr" rtl="0">
+                <a:lnSpc>
+                  <a:spcPct val="100000"/>
+                </a:lnSpc>
+                <a:spcBef>
+                  <a:spcPts val="0"/>
+                </a:spcBef>
+                <a:spcAft>
+                  <a:spcPts val="0"/>
+                </a:spcAft>
+                <a:buClr>
+                  <a:srgbClr val="000000"/>
+                </a:buClr>
+                <a:buSzPts val="1800"/>
+                <a:buFont typeface="Arial"/>
+                <a:buNone/>
+              </a:pPr>
+              <a:endParaRPr sz="1800" b="0" i="0" u="none" strike="noStrike" cap="none">
+                <a:solidFill>
+                  <a:schemeClr val="lt1"/>
+                </a:solidFill>
+                <a:latin typeface="Twentieth Century"/>
+                <a:ea typeface="Twentieth Century"/>
+                <a:cs typeface="Twentieth Century"/>
+                <a:sym typeface="Twentieth Century"/>
+              </a:endParaRPr>
+            </a:p>
+          </p:txBody>
+        </p:sp>
+        <p:sp>
+          <p:nvSpPr>
+            <p:cNvPr id="579" name="Google Shape;579;p26"/>
+            <p:cNvSpPr/>
+            <p:nvPr/>
+          </p:nvSpPr>
+          <p:spPr>
+            <a:xfrm rot="5400000">
+              <a:off x="8961003" y="3993173"/>
+              <a:ext cx="424282" cy="365760"/>
+            </a:xfrm>
+            <a:prstGeom prst="triangle">
+              <a:avLst>
+                <a:gd name="adj" fmla="val 50000"/>
+              </a:avLst>
+            </a:prstGeom>
+            <a:solidFill>
+              <a:srgbClr val="8BD6C0"/>
+            </a:solidFill>
+            <a:ln>
+              <a:noFill/>
+            </a:ln>
+          </p:spPr>
+          <p:txBody>
+            <a:bodyPr spcFirstLastPara="1" wrap="square" lIns="91425" tIns="45700" rIns="91425" bIns="45700" anchor="ctr" anchorCtr="0">
+              <a:noAutofit/>
+            </a:bodyPr>
+            <a:lstStyle/>
+            <a:p>
+              <a:pPr marL="0" marR="0" lvl="0" indent="0" algn="ctr" rtl="0">
+                <a:lnSpc>
+                  <a:spcPct val="100000"/>
+                </a:lnSpc>
+                <a:spcBef>
+                  <a:spcPts val="0"/>
+                </a:spcBef>
+                <a:spcAft>
+                  <a:spcPts val="0"/>
+                </a:spcAft>
+                <a:buClr>
+                  <a:srgbClr val="000000"/>
+                </a:buClr>
+                <a:buSzPts val="1800"/>
+                <a:buFont typeface="Arial"/>
+                <a:buNone/>
+              </a:pPr>
+              <a:endParaRPr sz="1800" b="0" i="0" u="none" strike="noStrike" cap="none">
+                <a:solidFill>
+                  <a:schemeClr val="lt1"/>
+                </a:solidFill>
+                <a:latin typeface="Twentieth Century"/>
+                <a:ea typeface="Twentieth Century"/>
+                <a:cs typeface="Twentieth Century"/>
+                <a:sym typeface="Twentieth Century"/>
+              </a:endParaRPr>
+            </a:p>
+          </p:txBody>
+        </p:sp>
+      </p:grpSp>
+      <p:sp>
+        <p:nvSpPr>
+          <p:cNvPr id="580" name="Google Shape;580;p26"/>
+          <p:cNvSpPr/>
+          <p:nvPr/>
+        </p:nvSpPr>
+        <p:spPr>
+          <a:xfrm flipH="1">
+            <a:off x="6648574" y="2657796"/>
+            <a:ext cx="1119941" cy="376711"/>
+          </a:xfrm>
+          <a:prstGeom prst="flowChartOnlineStorage">
+            <a:avLst/>
+          </a:prstGeom>
+          <a:solidFill>
+            <a:srgbClr val="9EC0D5"/>
+          </a:solidFill>
+          <a:ln>
+            <a:noFill/>
+          </a:ln>
+        </p:spPr>
+        <p:txBody>
+          <a:bodyPr spcFirstLastPara="1" wrap="square" lIns="91425" tIns="45700" rIns="91425" bIns="45700" anchor="ctr" anchorCtr="0">
+            <a:noAutofit/>
+          </a:bodyPr>
+          <a:lstStyle/>
+          <a:p>
+            <a:pPr marL="0" marR="0" lvl="0" indent="0" algn="ctr" rtl="0">
+              <a:lnSpc>
+                <a:spcPct val="100000"/>
+              </a:lnSpc>
+              <a:spcBef>
+                <a:spcPts val="0"/>
+              </a:spcBef>
+              <a:spcAft>
+                <a:spcPts val="0"/>
+              </a:spcAft>
+              <a:buClr>
+                <a:srgbClr val="000000"/>
+              </a:buClr>
+              <a:buSzPts val="1800"/>
+              <a:buFont typeface="Arial"/>
+              <a:buNone/>
+            </a:pPr>
+            <a:endParaRPr sz="1800" b="0" i="0" u="none" strike="noStrike" cap="none">
+              <a:solidFill>
+                <a:schemeClr val="lt1"/>
+              </a:solidFill>
+              <a:latin typeface="Twentieth Century"/>
+              <a:ea typeface="Twentieth Century"/>
+              <a:cs typeface="Twentieth Century"/>
+              <a:sym typeface="Twentieth Century"/>
+            </a:endParaRPr>
+          </a:p>
+        </p:txBody>
+      </p:sp>
+      <p:sp>
+        <p:nvSpPr>
+          <p:cNvPr id="581" name="Google Shape;581;p26"/>
+          <p:cNvSpPr/>
+          <p:nvPr/>
+        </p:nvSpPr>
+        <p:spPr>
+          <a:xfrm>
+            <a:off x="7395369" y="2456012"/>
+            <a:ext cx="1573414" cy="792969"/>
+          </a:xfrm>
+          <a:prstGeom prst="rightArrow">
+            <a:avLst>
+              <a:gd name="adj1" fmla="val 50000"/>
+              <a:gd name="adj2" fmla="val 50000"/>
+            </a:avLst>
+          </a:prstGeom>
+          <a:solidFill>
+            <a:srgbClr val="BAC7DA"/>
+          </a:solidFill>
+          <a:ln>
+            <a:noFill/>
+          </a:ln>
+        </p:spPr>
+        <p:txBody>
+          <a:bodyPr spcFirstLastPara="1" wrap="square" lIns="91425" tIns="45700" rIns="91425" bIns="45700" anchor="ctr" anchorCtr="0">
+            <a:noAutofit/>
+          </a:bodyPr>
+          <a:lstStyle/>
+          <a:p>
+            <a:pPr marL="0" marR="0" lvl="0" indent="0" algn="ctr" rtl="0">
+              <a:lnSpc>
+                <a:spcPct val="100000"/>
+              </a:lnSpc>
+              <a:spcBef>
+                <a:spcPts val="0"/>
+              </a:spcBef>
+              <a:spcAft>
+                <a:spcPts val="0"/>
+              </a:spcAft>
+              <a:buClr>
+                <a:srgbClr val="000000"/>
+              </a:buClr>
+              <a:buSzPts val="1800"/>
+              <a:buFont typeface="Arial"/>
+              <a:buNone/>
+            </a:pPr>
+            <a:endParaRPr sz="1800" b="0" i="0" u="none" strike="noStrike" cap="none">
+              <a:solidFill>
+                <a:schemeClr val="lt1"/>
+              </a:solidFill>
+              <a:latin typeface="Twentieth Century"/>
+              <a:ea typeface="Twentieth Century"/>
+              <a:cs typeface="Twentieth Century"/>
+              <a:sym typeface="Twentieth Century"/>
+            </a:endParaRPr>
+          </a:p>
+        </p:txBody>
+      </p:sp>
+      <p:sp>
+        <p:nvSpPr>
+          <p:cNvPr id="582" name="Google Shape;582;p26"/>
+          <p:cNvSpPr txBox="1"/>
+          <p:nvPr/>
+        </p:nvSpPr>
+        <p:spPr>
+          <a:xfrm>
+            <a:off x="7384459" y="2488858"/>
+            <a:ext cx="1818422" cy="707846"/>
+          </a:xfrm>
+          <a:prstGeom prst="rect">
+            <a:avLst/>
+          </a:prstGeom>
+          <a:noFill/>
+          <a:ln>
+            <a:noFill/>
+          </a:ln>
+        </p:spPr>
+        <p:txBody>
+          <a:bodyPr spcFirstLastPara="1" wrap="square" lIns="91425" tIns="45700" rIns="91425" bIns="45700" anchor="t" anchorCtr="0">
+            <a:spAutoFit/>
+          </a:bodyPr>
+          <a:lstStyle/>
+          <a:p>
+            <a:pPr marL="0" marR="0" lvl="0" indent="0" algn="l" rtl="0">
+              <a:lnSpc>
+                <a:spcPct val="100000"/>
+              </a:lnSpc>
+              <a:spcBef>
+                <a:spcPts val="0"/>
+              </a:spcBef>
+              <a:spcAft>
+                <a:spcPts val="0"/>
+              </a:spcAft>
+              <a:buClr>
+                <a:srgbClr val="000000"/>
+              </a:buClr>
+              <a:buSzPts val="2000"/>
+              <a:buFont typeface="Arial"/>
+              <a:buNone/>
+            </a:pPr>
+            <a:r>
+              <a:rPr lang="de-DE" sz="2000" b="1" i="0" u="none" strike="noStrike" cap="none" dirty="0">
+                <a:solidFill>
+                  <a:schemeClr val="dk1"/>
+                </a:solidFill>
+                <a:latin typeface="Twentieth Century"/>
+                <a:ea typeface="Twentieth Century"/>
+                <a:cs typeface="Twentieth Century"/>
+                <a:sym typeface="Twentieth Century"/>
+              </a:rPr>
+              <a:t>Asymptotische</a:t>
+            </a:r>
+            <a:endParaRPr lang="de-DE" sz="1400" b="0" i="0" u="none" strike="noStrike" cap="none" dirty="0">
+              <a:solidFill>
+                <a:srgbClr val="000000"/>
+              </a:solidFill>
+              <a:latin typeface="Arial"/>
+              <a:ea typeface="Arial"/>
+              <a:cs typeface="Arial"/>
+              <a:sym typeface="Arial"/>
+            </a:endParaRPr>
+          </a:p>
+          <a:p>
+            <a:pPr marL="0" marR="0" lvl="0" indent="0" algn="l" rtl="0">
+              <a:lnSpc>
+                <a:spcPct val="100000"/>
+              </a:lnSpc>
+              <a:spcBef>
+                <a:spcPts val="0"/>
+              </a:spcBef>
+              <a:spcAft>
+                <a:spcPts val="0"/>
+              </a:spcAft>
+              <a:buClr>
+                <a:srgbClr val="000000"/>
+              </a:buClr>
+              <a:buSzPts val="2000"/>
+              <a:buFont typeface="Arial"/>
+              <a:buNone/>
+            </a:pPr>
+            <a:r>
+              <a:rPr lang="de-DE" sz="2000" b="1" i="0" u="none" strike="noStrike" cap="none" dirty="0">
+                <a:solidFill>
+                  <a:schemeClr val="dk1"/>
+                </a:solidFill>
+                <a:latin typeface="Twentieth Century"/>
+                <a:ea typeface="Twentieth Century"/>
+                <a:cs typeface="Twentieth Century"/>
+                <a:sym typeface="Twentieth Century"/>
+              </a:rPr>
+              <a:t>Analyse</a:t>
+            </a:r>
+            <a:endParaRPr lang="de-DE" sz="1400" b="0" i="0" u="none" strike="noStrike" cap="none" dirty="0">
+              <a:solidFill>
+                <a:srgbClr val="000000"/>
+              </a:solidFill>
+              <a:latin typeface="Arial"/>
+              <a:ea typeface="Arial"/>
+              <a:cs typeface="Arial"/>
+              <a:sym typeface="Arial"/>
+            </a:endParaRPr>
+          </a:p>
+        </p:txBody>
+      </p:sp>
+      <p:sp>
+        <p:nvSpPr>
+          <p:cNvPr id="583" name="Google Shape;583;p26"/>
+          <p:cNvSpPr/>
+          <p:nvPr/>
+        </p:nvSpPr>
+        <p:spPr>
+          <a:xfrm>
+            <a:off x="7555278" y="1315044"/>
+            <a:ext cx="762636" cy="762636"/>
+          </a:xfrm>
+          <a:prstGeom prst="ellipse">
+            <a:avLst/>
+          </a:prstGeom>
+          <a:solidFill>
+            <a:srgbClr val="4C3282"/>
+          </a:solidFill>
+          <a:ln>
+            <a:noFill/>
+          </a:ln>
+        </p:spPr>
+        <p:txBody>
+          <a:bodyPr spcFirstLastPara="1" wrap="square" lIns="91425" tIns="45700" rIns="91425" bIns="45700" anchor="ctr" anchorCtr="0">
+            <a:noAutofit/>
+          </a:bodyPr>
+          <a:lstStyle/>
+          <a:p>
+            <a:pPr marL="0" marR="0" lvl="0" indent="0" algn="ctr" rtl="0">
+              <a:lnSpc>
+                <a:spcPct val="100000"/>
+              </a:lnSpc>
+              <a:spcBef>
+                <a:spcPts val="0"/>
+              </a:spcBef>
+              <a:spcAft>
+                <a:spcPts val="0"/>
+              </a:spcAft>
+              <a:buClr>
+                <a:srgbClr val="000000"/>
+              </a:buClr>
+              <a:buSzPts val="2800"/>
+              <a:buFont typeface="Arial"/>
+              <a:buNone/>
+            </a:pPr>
+            <a:r>
+              <a:rPr lang="en-US" sz="2800" b="1" i="0" u="none" strike="noStrike" cap="none">
+                <a:solidFill>
+                  <a:schemeClr val="lt1"/>
+                </a:solidFill>
+                <a:latin typeface="Montserrat"/>
+                <a:ea typeface="Montserrat"/>
+                <a:cs typeface="Montserrat"/>
+                <a:sym typeface="Montserrat"/>
+              </a:rPr>
+              <a:t>2</a:t>
+            </a:r>
+            <a:endParaRPr sz="1400" b="0" i="0" u="none" strike="noStrike" cap="none">
+              <a:solidFill>
+                <a:srgbClr val="000000"/>
+              </a:solidFill>
+              <a:latin typeface="Arial"/>
+              <a:ea typeface="Arial"/>
+              <a:cs typeface="Arial"/>
+              <a:sym typeface="Arial"/>
+            </a:endParaRPr>
+          </a:p>
+        </p:txBody>
+      </p:sp>
+      <p:sp>
+        <p:nvSpPr>
+          <p:cNvPr id="584" name="Google Shape;584;p26"/>
+          <p:cNvSpPr/>
+          <p:nvPr/>
+        </p:nvSpPr>
+        <p:spPr>
+          <a:xfrm rot="5400000">
+            <a:off x="9785813" y="2735694"/>
+            <a:ext cx="385780" cy="284010"/>
+          </a:xfrm>
+          <a:prstGeom prst="triangle">
+            <a:avLst>
+              <a:gd name="adj" fmla="val 50000"/>
+            </a:avLst>
+          </a:prstGeom>
+          <a:solidFill>
+            <a:srgbClr val="9EC0D5"/>
+          </a:solidFill>
+          <a:ln>
+            <a:noFill/>
+          </a:ln>
+        </p:spPr>
+        <p:txBody>
+          <a:bodyPr spcFirstLastPara="1" wrap="square" lIns="91425" tIns="45700" rIns="91425" bIns="45700" anchor="ctr" anchorCtr="0">
+            <a:noAutofit/>
+          </a:bodyPr>
+          <a:lstStyle/>
+          <a:p>
+            <a:pPr marL="0" marR="0" lvl="0" indent="0" algn="ctr" rtl="0">
+              <a:lnSpc>
+                <a:spcPct val="100000"/>
+              </a:lnSpc>
+              <a:spcBef>
+                <a:spcPts val="0"/>
+              </a:spcBef>
+              <a:spcAft>
+                <a:spcPts val="0"/>
+              </a:spcAft>
+              <a:buClr>
+                <a:srgbClr val="000000"/>
+              </a:buClr>
+              <a:buSzPts val="1800"/>
+              <a:buFont typeface="Arial"/>
+              <a:buNone/>
+            </a:pPr>
+            <a:endParaRPr sz="1800" b="0" i="0" u="none" strike="noStrike" cap="none">
+              <a:solidFill>
+                <a:schemeClr val="lt1"/>
+              </a:solidFill>
+              <a:latin typeface="Twentieth Century"/>
+              <a:ea typeface="Twentieth Century"/>
+              <a:cs typeface="Twentieth Century"/>
+              <a:sym typeface="Twentieth Century"/>
+            </a:endParaRPr>
+          </a:p>
+        </p:txBody>
+      </p:sp>
+      <p:sp>
+        <p:nvSpPr>
+          <p:cNvPr id="585" name="Google Shape;585;p26"/>
+          <p:cNvSpPr/>
+          <p:nvPr/>
+        </p:nvSpPr>
+        <p:spPr>
+          <a:xfrm>
+            <a:off x="9078203" y="2307200"/>
+            <a:ext cx="758495" cy="1105786"/>
+          </a:xfrm>
+          <a:prstGeom prst="rect">
+            <a:avLst/>
+          </a:prstGeom>
+          <a:solidFill>
+            <a:srgbClr val="9EC0D5"/>
+          </a:solidFill>
+          <a:ln>
+            <a:noFill/>
+          </a:ln>
+        </p:spPr>
+        <p:txBody>
+          <a:bodyPr spcFirstLastPara="1" wrap="square" lIns="91425" tIns="45700" rIns="91425" bIns="45700" anchor="ctr" anchorCtr="0">
+            <a:noAutofit/>
+          </a:bodyPr>
+          <a:lstStyle/>
+          <a:p>
+            <a:pPr marL="0" marR="0" lvl="0" indent="0" algn="ctr" rtl="0">
+              <a:lnSpc>
+                <a:spcPct val="100000"/>
+              </a:lnSpc>
+              <a:spcBef>
+                <a:spcPts val="0"/>
+              </a:spcBef>
+              <a:spcAft>
+                <a:spcPts val="0"/>
+              </a:spcAft>
+              <a:buClr>
+                <a:srgbClr val="000000"/>
+              </a:buClr>
+              <a:buSzPts val="1800"/>
+              <a:buFont typeface="Arial"/>
+              <a:buNone/>
+            </a:pPr>
+            <a:endParaRPr sz="1800" b="0" i="0" u="none" strike="noStrike" cap="none">
+              <a:solidFill>
+                <a:schemeClr val="lt1"/>
+              </a:solidFill>
+              <a:latin typeface="Twentieth Century"/>
+              <a:ea typeface="Twentieth Century"/>
+              <a:cs typeface="Twentieth Century"/>
+              <a:sym typeface="Twentieth Century"/>
+            </a:endParaRPr>
+          </a:p>
+        </p:txBody>
+      </p:sp>
+      <p:sp>
+        <p:nvSpPr>
+          <p:cNvPr id="586" name="Google Shape;586;p26"/>
+          <p:cNvSpPr/>
+          <p:nvPr/>
+        </p:nvSpPr>
+        <p:spPr>
+          <a:xfrm rot="5400000">
+            <a:off x="9795548" y="4083394"/>
+            <a:ext cx="385780" cy="284010"/>
+          </a:xfrm>
+          <a:prstGeom prst="triangle">
+            <a:avLst>
+              <a:gd name="adj" fmla="val 50000"/>
+            </a:avLst>
+          </a:prstGeom>
+          <a:solidFill>
+            <a:srgbClr val="9EC0D5"/>
+          </a:solidFill>
+          <a:ln>
+            <a:noFill/>
+          </a:ln>
+        </p:spPr>
+        <p:txBody>
+          <a:bodyPr spcFirstLastPara="1" wrap="square" lIns="91425" tIns="45700" rIns="91425" bIns="45700" anchor="ctr" anchorCtr="0">
+            <a:noAutofit/>
+          </a:bodyPr>
+          <a:lstStyle/>
+          <a:p>
+            <a:pPr marL="0" marR="0" lvl="0" indent="0" algn="ctr" rtl="0">
+              <a:lnSpc>
+                <a:spcPct val="100000"/>
+              </a:lnSpc>
+              <a:spcBef>
+                <a:spcPts val="0"/>
+              </a:spcBef>
+              <a:spcAft>
+                <a:spcPts val="0"/>
+              </a:spcAft>
+              <a:buClr>
+                <a:srgbClr val="000000"/>
+              </a:buClr>
+              <a:buSzPts val="1800"/>
+              <a:buFont typeface="Arial"/>
+              <a:buNone/>
+            </a:pPr>
+            <a:endParaRPr sz="1800" b="0" i="0" u="none" strike="noStrike" cap="none">
+              <a:solidFill>
+                <a:schemeClr val="lt1"/>
+              </a:solidFill>
+              <a:latin typeface="Twentieth Century"/>
+              <a:ea typeface="Twentieth Century"/>
+              <a:cs typeface="Twentieth Century"/>
+              <a:sym typeface="Twentieth Century"/>
+            </a:endParaRPr>
+          </a:p>
+        </p:txBody>
+      </p:sp>
+      <p:sp>
+        <p:nvSpPr>
+          <p:cNvPr id="587" name="Google Shape;587;p26"/>
+          <p:cNvSpPr/>
+          <p:nvPr/>
+        </p:nvSpPr>
+        <p:spPr>
+          <a:xfrm>
+            <a:off x="9087938" y="3654900"/>
+            <a:ext cx="758495" cy="1105786"/>
+          </a:xfrm>
+          <a:prstGeom prst="rect">
+            <a:avLst/>
+          </a:prstGeom>
+          <a:solidFill>
+            <a:srgbClr val="9EC0D5"/>
+          </a:solidFill>
+          <a:ln>
+            <a:noFill/>
+          </a:ln>
+        </p:spPr>
+        <p:txBody>
+          <a:bodyPr spcFirstLastPara="1" wrap="square" lIns="91425" tIns="45700" rIns="91425" bIns="45700" anchor="ctr" anchorCtr="0">
+            <a:noAutofit/>
+          </a:bodyPr>
+          <a:lstStyle/>
+          <a:p>
+            <a:pPr marL="0" marR="0" lvl="0" indent="0" algn="ctr" rtl="0">
+              <a:lnSpc>
+                <a:spcPct val="100000"/>
+              </a:lnSpc>
+              <a:spcBef>
+                <a:spcPts val="0"/>
+              </a:spcBef>
+              <a:spcAft>
+                <a:spcPts val="0"/>
+              </a:spcAft>
+              <a:buClr>
+                <a:srgbClr val="000000"/>
+              </a:buClr>
+              <a:buSzPts val="1800"/>
+              <a:buFont typeface="Arial"/>
+              <a:buNone/>
+            </a:pPr>
+            <a:endParaRPr sz="1800" b="0" i="0" u="none" strike="noStrike" cap="none">
+              <a:solidFill>
+                <a:schemeClr val="lt1"/>
+              </a:solidFill>
+              <a:latin typeface="Twentieth Century"/>
+              <a:ea typeface="Twentieth Century"/>
+              <a:cs typeface="Twentieth Century"/>
+              <a:sym typeface="Twentieth Century"/>
+            </a:endParaRPr>
+          </a:p>
+        </p:txBody>
+      </p:sp>
+      <p:grpSp>
+        <p:nvGrpSpPr>
+          <p:cNvPr id="588" name="Google Shape;588;p26"/>
+          <p:cNvGrpSpPr/>
+          <p:nvPr/>
+        </p:nvGrpSpPr>
+        <p:grpSpPr>
+          <a:xfrm>
+            <a:off x="9846433" y="3669616"/>
+            <a:ext cx="2343590" cy="1106838"/>
+            <a:chOff x="7012434" y="3614205"/>
+            <a:chExt cx="2343590" cy="1106838"/>
+          </a:xfrm>
+        </p:grpSpPr>
+        <p:sp>
+          <p:nvSpPr>
+            <p:cNvPr id="589" name="Google Shape;589;p26"/>
+            <p:cNvSpPr/>
+            <p:nvPr/>
+          </p:nvSpPr>
+          <p:spPr>
+            <a:xfrm>
+              <a:off x="7290111" y="3614205"/>
+              <a:ext cx="1700153" cy="1105786"/>
+            </a:xfrm>
+            <a:prstGeom prst="rect">
+              <a:avLst/>
+            </a:prstGeom>
+            <a:solidFill>
+              <a:srgbClr val="E6AC00"/>
+            </a:solidFill>
+            <a:ln>
+              <a:noFill/>
+            </a:ln>
+          </p:spPr>
+          <p:txBody>
+            <a:bodyPr spcFirstLastPara="1" wrap="square" lIns="91425" tIns="45700" rIns="91425" bIns="45700" anchor="ctr" anchorCtr="0">
+              <a:noAutofit/>
+            </a:bodyPr>
+            <a:lstStyle/>
+            <a:p>
+              <a:pPr lvl="0" algn="ctr">
+                <a:spcBef>
+                  <a:spcPts val="0"/>
+                </a:spcBef>
+                <a:spcAft>
+                  <a:spcPts val="0"/>
+                </a:spcAft>
+                <a:buClr>
+                  <a:srgbClr val="000000"/>
+                </a:buClr>
+                <a:buSzPts val="1400"/>
+              </a:pPr>
+              <a:r>
+                <a:rPr lang="el-GR" b="1" dirty="0"/>
+                <a:t>Ω-</a:t>
+              </a:r>
+              <a:r>
+                <a:rPr lang="de-DE" b="1" dirty="0"/>
+                <a:t>Notation</a:t>
+              </a:r>
+              <a:endParaRPr lang="de-DE" b="1" dirty="0">
+                <a:solidFill>
+                  <a:schemeClr val="lt1"/>
+                </a:solidFill>
+                <a:latin typeface="Twentieth Century"/>
+                <a:ea typeface="Twentieth Century"/>
+                <a:cs typeface="Twentieth Century"/>
+                <a:sym typeface="Twentieth Century"/>
+              </a:endParaRPr>
+            </a:p>
+          </p:txBody>
+        </p:sp>
+        <p:sp>
+          <p:nvSpPr>
+            <p:cNvPr id="590" name="Google Shape;590;p26"/>
+            <p:cNvSpPr/>
+            <p:nvPr/>
+          </p:nvSpPr>
+          <p:spPr>
+            <a:xfrm>
+              <a:off x="7012580" y="3974938"/>
+              <a:ext cx="532515" cy="385780"/>
+            </a:xfrm>
+            <a:prstGeom prst="flowChartCollate">
+              <a:avLst/>
+            </a:prstGeom>
+            <a:solidFill>
+              <a:srgbClr val="E6AC00"/>
+            </a:solidFill>
+            <a:ln>
+              <a:noFill/>
+            </a:ln>
+          </p:spPr>
+          <p:txBody>
+            <a:bodyPr spcFirstLastPara="1" wrap="square" lIns="91425" tIns="45700" rIns="91425" bIns="45700" anchor="ctr" anchorCtr="0">
+              <a:noAutofit/>
+            </a:bodyPr>
+            <a:lstStyle/>
+            <a:p>
+              <a:pPr marL="0" marR="0" lvl="0" indent="0" algn="ctr" rtl="0">
+                <a:lnSpc>
+                  <a:spcPct val="100000"/>
+                </a:lnSpc>
+                <a:spcBef>
+                  <a:spcPts val="0"/>
+                </a:spcBef>
+                <a:spcAft>
+                  <a:spcPts val="0"/>
+                </a:spcAft>
+                <a:buClr>
+                  <a:srgbClr val="000000"/>
+                </a:buClr>
+                <a:buSzPts val="1800"/>
+                <a:buFont typeface="Arial"/>
+                <a:buNone/>
+              </a:pPr>
+              <a:endParaRPr sz="1800" b="0" i="0" u="none" strike="noStrike" cap="none">
+                <a:solidFill>
+                  <a:schemeClr val="dk1"/>
+                </a:solidFill>
+                <a:latin typeface="Twentieth Century"/>
+                <a:ea typeface="Twentieth Century"/>
+                <a:cs typeface="Twentieth Century"/>
+                <a:sym typeface="Twentieth Century"/>
+              </a:endParaRPr>
+            </a:p>
+          </p:txBody>
+        </p:sp>
+        <p:sp>
+          <p:nvSpPr>
+            <p:cNvPr id="591" name="Google Shape;591;p26"/>
+            <p:cNvSpPr/>
+            <p:nvPr/>
+          </p:nvSpPr>
+          <p:spPr>
+            <a:xfrm>
+              <a:off x="7012434" y="3616465"/>
+              <a:ext cx="365760" cy="365760"/>
+            </a:xfrm>
+            <a:prstGeom prst="rect">
+              <a:avLst/>
+            </a:prstGeom>
+            <a:solidFill>
+              <a:srgbClr val="E6AC00"/>
+            </a:solidFill>
+            <a:ln>
+              <a:noFill/>
+            </a:ln>
+          </p:spPr>
+          <p:txBody>
+            <a:bodyPr spcFirstLastPara="1" wrap="square" lIns="91425" tIns="45700" rIns="91425" bIns="45700" anchor="ctr" anchorCtr="0">
+              <a:noAutofit/>
+            </a:bodyPr>
+            <a:lstStyle/>
+            <a:p>
+              <a:pPr marL="0" marR="0" lvl="0" indent="0" algn="ctr" rtl="0">
+                <a:lnSpc>
+                  <a:spcPct val="100000"/>
+                </a:lnSpc>
+                <a:spcBef>
+                  <a:spcPts val="0"/>
+                </a:spcBef>
+                <a:spcAft>
+                  <a:spcPts val="0"/>
+                </a:spcAft>
+                <a:buClr>
+                  <a:srgbClr val="000000"/>
+                </a:buClr>
+                <a:buSzPts val="1800"/>
+                <a:buFont typeface="Arial"/>
+                <a:buNone/>
+              </a:pPr>
+              <a:endParaRPr sz="1800" b="0" i="0" u="none" strike="noStrike" cap="none">
+                <a:solidFill>
+                  <a:schemeClr val="lt1"/>
+                </a:solidFill>
+                <a:latin typeface="Twentieth Century"/>
+                <a:ea typeface="Twentieth Century"/>
+                <a:cs typeface="Twentieth Century"/>
+                <a:sym typeface="Twentieth Century"/>
+              </a:endParaRPr>
+            </a:p>
+          </p:txBody>
+        </p:sp>
+        <p:sp>
+          <p:nvSpPr>
+            <p:cNvPr id="592" name="Google Shape;592;p26"/>
+            <p:cNvSpPr/>
+            <p:nvPr/>
+          </p:nvSpPr>
+          <p:spPr>
+            <a:xfrm>
+              <a:off x="7012434" y="4355283"/>
+              <a:ext cx="365760" cy="365760"/>
+            </a:xfrm>
+            <a:prstGeom prst="rect">
+              <a:avLst/>
+            </a:prstGeom>
+            <a:solidFill>
+              <a:srgbClr val="E6AC00"/>
+            </a:solidFill>
+            <a:ln>
+              <a:noFill/>
+            </a:ln>
+          </p:spPr>
+          <p:txBody>
+            <a:bodyPr spcFirstLastPara="1" wrap="square" lIns="91425" tIns="45700" rIns="91425" bIns="45700" anchor="ctr" anchorCtr="0">
+              <a:noAutofit/>
+            </a:bodyPr>
+            <a:lstStyle/>
+            <a:p>
+              <a:pPr marL="0" marR="0" lvl="0" indent="0" algn="ctr" rtl="0">
+                <a:lnSpc>
+                  <a:spcPct val="100000"/>
+                </a:lnSpc>
+                <a:spcBef>
+                  <a:spcPts val="0"/>
+                </a:spcBef>
+                <a:spcAft>
+                  <a:spcPts val="0"/>
+                </a:spcAft>
+                <a:buClr>
+                  <a:srgbClr val="000000"/>
+                </a:buClr>
+                <a:buSzPts val="1800"/>
+                <a:buFont typeface="Arial"/>
+                <a:buNone/>
+              </a:pPr>
+              <a:endParaRPr sz="1800" b="0" i="0" u="none" strike="noStrike" cap="none">
+                <a:solidFill>
+                  <a:schemeClr val="lt1"/>
+                </a:solidFill>
+                <a:latin typeface="Twentieth Century"/>
+                <a:ea typeface="Twentieth Century"/>
+                <a:cs typeface="Twentieth Century"/>
+                <a:sym typeface="Twentieth Century"/>
+              </a:endParaRPr>
+            </a:p>
+          </p:txBody>
+        </p:sp>
+        <p:sp>
+          <p:nvSpPr>
+            <p:cNvPr id="593" name="Google Shape;593;p26"/>
+            <p:cNvSpPr/>
+            <p:nvPr/>
+          </p:nvSpPr>
+          <p:spPr>
+            <a:xfrm rot="5400000">
+              <a:off x="8961003" y="3993173"/>
+              <a:ext cx="424282" cy="365760"/>
+            </a:xfrm>
+            <a:prstGeom prst="triangle">
+              <a:avLst>
+                <a:gd name="adj" fmla="val 50000"/>
+              </a:avLst>
+            </a:prstGeom>
+            <a:solidFill>
+              <a:srgbClr val="E6AC00"/>
+            </a:solidFill>
+            <a:ln>
+              <a:noFill/>
+            </a:ln>
+          </p:spPr>
+          <p:txBody>
+            <a:bodyPr spcFirstLastPara="1" wrap="square" lIns="91425" tIns="45700" rIns="91425" bIns="45700" anchor="ctr" anchorCtr="0">
+              <a:noAutofit/>
+            </a:bodyPr>
+            <a:lstStyle/>
+            <a:p>
+              <a:pPr marL="0" marR="0" lvl="0" indent="0" algn="ctr" rtl="0">
+                <a:lnSpc>
+                  <a:spcPct val="100000"/>
+                </a:lnSpc>
+                <a:spcBef>
+                  <a:spcPts val="0"/>
+                </a:spcBef>
+                <a:spcAft>
+                  <a:spcPts val="0"/>
+                </a:spcAft>
+                <a:buClr>
+                  <a:srgbClr val="000000"/>
+                </a:buClr>
+                <a:buSzPts val="1800"/>
+                <a:buFont typeface="Arial"/>
+                <a:buNone/>
+              </a:pPr>
+              <a:endParaRPr sz="1800" b="0" i="0" u="none" strike="noStrike" cap="none">
+                <a:solidFill>
+                  <a:schemeClr val="lt1"/>
+                </a:solidFill>
+                <a:latin typeface="Twentieth Century"/>
+                <a:ea typeface="Twentieth Century"/>
+                <a:cs typeface="Twentieth Century"/>
+                <a:sym typeface="Twentieth Century"/>
+              </a:endParaRPr>
+            </a:p>
+          </p:txBody>
+        </p:sp>
+      </p:grpSp>
+      <p:grpSp>
+        <p:nvGrpSpPr>
+          <p:cNvPr id="594" name="Google Shape;594;p26"/>
+          <p:cNvGrpSpPr/>
+          <p:nvPr/>
+        </p:nvGrpSpPr>
+        <p:grpSpPr>
+          <a:xfrm>
+            <a:off x="9802391" y="2306148"/>
+            <a:ext cx="2343590" cy="1106838"/>
+            <a:chOff x="7012434" y="3614205"/>
+            <a:chExt cx="2343590" cy="1106838"/>
+          </a:xfrm>
+        </p:grpSpPr>
+        <p:sp>
+          <p:nvSpPr>
+            <p:cNvPr id="595" name="Google Shape;595;p26"/>
+            <p:cNvSpPr/>
+            <p:nvPr/>
+          </p:nvSpPr>
+          <p:spPr>
+            <a:xfrm>
+              <a:off x="7290111" y="3614205"/>
+              <a:ext cx="1700153" cy="1105786"/>
+            </a:xfrm>
+            <a:prstGeom prst="rect">
+              <a:avLst/>
+            </a:prstGeom>
+            <a:solidFill>
+              <a:schemeClr val="accent4"/>
+            </a:solidFill>
+            <a:ln>
+              <a:noFill/>
+            </a:ln>
+          </p:spPr>
+          <p:txBody>
+            <a:bodyPr spcFirstLastPara="1" wrap="square" lIns="91425" tIns="45700" rIns="91425" bIns="45700" anchor="ctr" anchorCtr="0">
+              <a:noAutofit/>
+            </a:bodyPr>
+            <a:lstStyle/>
+            <a:p>
+              <a:pPr lvl="0" algn="ctr">
+                <a:spcBef>
+                  <a:spcPts val="0"/>
+                </a:spcBef>
+                <a:spcAft>
+                  <a:spcPts val="0"/>
+                </a:spcAft>
+                <a:buClr>
+                  <a:srgbClr val="000000"/>
+                </a:buClr>
+                <a:buSzPts val="1800"/>
+              </a:pPr>
+              <a:r>
+                <a:rPr lang="el-GR" b="1" dirty="0"/>
+                <a:t>Θ-</a:t>
+              </a:r>
+              <a:r>
+                <a:rPr lang="de-DE" b="1" dirty="0"/>
+                <a:t>Notation</a:t>
+              </a:r>
+              <a:endParaRPr lang="de-DE" b="1" dirty="0">
+                <a:solidFill>
+                  <a:schemeClr val="lt1"/>
+                </a:solidFill>
+                <a:latin typeface="Twentieth Century"/>
+                <a:ea typeface="Twentieth Century"/>
+                <a:cs typeface="Twentieth Century"/>
+                <a:sym typeface="Twentieth Century"/>
+              </a:endParaRPr>
+            </a:p>
+          </p:txBody>
+        </p:sp>
+        <p:sp>
+          <p:nvSpPr>
+            <p:cNvPr id="596" name="Google Shape;596;p26"/>
+            <p:cNvSpPr/>
+            <p:nvPr/>
+          </p:nvSpPr>
+          <p:spPr>
+            <a:xfrm>
+              <a:off x="7012580" y="3974938"/>
+              <a:ext cx="532515" cy="385780"/>
+            </a:xfrm>
+            <a:prstGeom prst="flowChartCollate">
+              <a:avLst/>
+            </a:prstGeom>
+            <a:solidFill>
+              <a:schemeClr val="accent4"/>
+            </a:solidFill>
+            <a:ln>
+              <a:noFill/>
+            </a:ln>
+          </p:spPr>
+          <p:txBody>
+            <a:bodyPr spcFirstLastPara="1" wrap="square" lIns="91425" tIns="45700" rIns="91425" bIns="45700" anchor="ctr" anchorCtr="0">
+              <a:noAutofit/>
+            </a:bodyPr>
+            <a:lstStyle/>
+            <a:p>
+              <a:pPr marL="0" marR="0" lvl="0" indent="0" algn="ctr" rtl="0">
+                <a:lnSpc>
+                  <a:spcPct val="100000"/>
+                </a:lnSpc>
+                <a:spcBef>
+                  <a:spcPts val="0"/>
+                </a:spcBef>
+                <a:spcAft>
+                  <a:spcPts val="0"/>
+                </a:spcAft>
+                <a:buClr>
+                  <a:srgbClr val="000000"/>
+                </a:buClr>
+                <a:buSzPts val="1800"/>
+                <a:buFont typeface="Arial"/>
+                <a:buNone/>
+              </a:pPr>
+              <a:endParaRPr sz="1800" b="0" i="0" u="none" strike="noStrike" cap="none">
+                <a:solidFill>
+                  <a:schemeClr val="dk1"/>
+                </a:solidFill>
+                <a:latin typeface="Twentieth Century"/>
+                <a:ea typeface="Twentieth Century"/>
+                <a:cs typeface="Twentieth Century"/>
+                <a:sym typeface="Twentieth Century"/>
+              </a:endParaRPr>
+            </a:p>
+          </p:txBody>
+        </p:sp>
+        <p:sp>
+          <p:nvSpPr>
+            <p:cNvPr id="597" name="Google Shape;597;p26"/>
+            <p:cNvSpPr/>
+            <p:nvPr/>
+          </p:nvSpPr>
+          <p:spPr>
+            <a:xfrm>
+              <a:off x="7012434" y="3616465"/>
+              <a:ext cx="365760" cy="365760"/>
+            </a:xfrm>
+            <a:prstGeom prst="rect">
+              <a:avLst/>
+            </a:prstGeom>
+            <a:solidFill>
+              <a:schemeClr val="accent4"/>
+            </a:solidFill>
+            <a:ln>
+              <a:noFill/>
+            </a:ln>
+          </p:spPr>
+          <p:txBody>
+            <a:bodyPr spcFirstLastPara="1" wrap="square" lIns="91425" tIns="45700" rIns="91425" bIns="45700" anchor="ctr" anchorCtr="0">
+              <a:noAutofit/>
+            </a:bodyPr>
+            <a:lstStyle/>
+            <a:p>
+              <a:pPr marL="0" marR="0" lvl="0" indent="0" algn="ctr" rtl="0">
+                <a:lnSpc>
+                  <a:spcPct val="100000"/>
+                </a:lnSpc>
+                <a:spcBef>
+                  <a:spcPts val="0"/>
+                </a:spcBef>
+                <a:spcAft>
+                  <a:spcPts val="0"/>
+                </a:spcAft>
+                <a:buClr>
+                  <a:srgbClr val="000000"/>
+                </a:buClr>
+                <a:buSzPts val="1800"/>
+                <a:buFont typeface="Arial"/>
+                <a:buNone/>
+              </a:pPr>
+              <a:endParaRPr sz="1800" b="0" i="0" u="none" strike="noStrike" cap="none">
+                <a:solidFill>
+                  <a:schemeClr val="lt1"/>
+                </a:solidFill>
+                <a:latin typeface="Twentieth Century"/>
+                <a:ea typeface="Twentieth Century"/>
+                <a:cs typeface="Twentieth Century"/>
+                <a:sym typeface="Twentieth Century"/>
+              </a:endParaRPr>
+            </a:p>
+          </p:txBody>
+        </p:sp>
+        <p:sp>
+          <p:nvSpPr>
+            <p:cNvPr id="598" name="Google Shape;598;p26"/>
+            <p:cNvSpPr/>
+            <p:nvPr/>
+          </p:nvSpPr>
+          <p:spPr>
+            <a:xfrm>
+              <a:off x="7012434" y="4355283"/>
+              <a:ext cx="365760" cy="365760"/>
+            </a:xfrm>
+            <a:prstGeom prst="rect">
+              <a:avLst/>
+            </a:prstGeom>
+            <a:solidFill>
+              <a:schemeClr val="accent4"/>
+            </a:solidFill>
+            <a:ln>
+              <a:noFill/>
+            </a:ln>
+          </p:spPr>
+          <p:txBody>
+            <a:bodyPr spcFirstLastPara="1" wrap="square" lIns="91425" tIns="45700" rIns="91425" bIns="45700" anchor="ctr" anchorCtr="0">
+              <a:noAutofit/>
+            </a:bodyPr>
+            <a:lstStyle/>
+            <a:p>
+              <a:pPr marL="0" marR="0" lvl="0" indent="0" algn="ctr" rtl="0">
+                <a:lnSpc>
+                  <a:spcPct val="100000"/>
+                </a:lnSpc>
+                <a:spcBef>
+                  <a:spcPts val="0"/>
+                </a:spcBef>
+                <a:spcAft>
+                  <a:spcPts val="0"/>
+                </a:spcAft>
+                <a:buClr>
+                  <a:srgbClr val="000000"/>
+                </a:buClr>
+                <a:buSzPts val="1800"/>
+                <a:buFont typeface="Arial"/>
+                <a:buNone/>
+              </a:pPr>
+              <a:endParaRPr sz="1800" b="0" i="0" u="none" strike="noStrike" cap="none">
+                <a:solidFill>
+                  <a:schemeClr val="lt1"/>
+                </a:solidFill>
+                <a:latin typeface="Twentieth Century"/>
+                <a:ea typeface="Twentieth Century"/>
+                <a:cs typeface="Twentieth Century"/>
+                <a:sym typeface="Twentieth Century"/>
+              </a:endParaRPr>
+            </a:p>
+          </p:txBody>
+        </p:sp>
+        <p:sp>
+          <p:nvSpPr>
+            <p:cNvPr id="599" name="Google Shape;599;p26"/>
+            <p:cNvSpPr/>
+            <p:nvPr/>
+          </p:nvSpPr>
+          <p:spPr>
+            <a:xfrm rot="5400000">
+              <a:off x="8961003" y="3993173"/>
+              <a:ext cx="424282" cy="365760"/>
+            </a:xfrm>
+            <a:prstGeom prst="triangle">
+              <a:avLst>
+                <a:gd name="adj" fmla="val 50000"/>
+              </a:avLst>
+            </a:prstGeom>
+            <a:solidFill>
+              <a:schemeClr val="accent4"/>
+            </a:solidFill>
+            <a:ln>
+              <a:noFill/>
+            </a:ln>
+          </p:spPr>
+          <p:txBody>
+            <a:bodyPr spcFirstLastPara="1" wrap="square" lIns="91425" tIns="45700" rIns="91425" bIns="45700" anchor="ctr" anchorCtr="0">
+              <a:noAutofit/>
+            </a:bodyPr>
+            <a:lstStyle/>
+            <a:p>
+              <a:pPr marL="0" marR="0" lvl="0" indent="0" algn="ctr" rtl="0">
+                <a:lnSpc>
+                  <a:spcPct val="100000"/>
+                </a:lnSpc>
+                <a:spcBef>
+                  <a:spcPts val="0"/>
+                </a:spcBef>
+                <a:spcAft>
+                  <a:spcPts val="0"/>
+                </a:spcAft>
+                <a:buClr>
+                  <a:srgbClr val="000000"/>
+                </a:buClr>
+                <a:buSzPts val="1800"/>
+                <a:buFont typeface="Arial"/>
+                <a:buNone/>
+              </a:pPr>
+              <a:endParaRPr sz="1800" b="0" i="0" u="none" strike="noStrike" cap="none">
+                <a:solidFill>
+                  <a:schemeClr val="lt1"/>
+                </a:solidFill>
+                <a:latin typeface="Twentieth Century"/>
+                <a:ea typeface="Twentieth Century"/>
+                <a:cs typeface="Twentieth Century"/>
+                <a:sym typeface="Twentieth Century"/>
+              </a:endParaRPr>
+            </a:p>
+          </p:txBody>
+        </p:sp>
+      </p:grpSp>
+      <p:sp>
+        <p:nvSpPr>
+          <p:cNvPr id="600" name="Google Shape;600;p26"/>
+          <p:cNvSpPr txBox="1"/>
+          <p:nvPr/>
+        </p:nvSpPr>
+        <p:spPr>
+          <a:xfrm>
+            <a:off x="11349728" y="1700485"/>
+            <a:ext cx="840295" cy="461665"/>
+          </a:xfrm>
+          <a:prstGeom prst="rect">
+            <a:avLst/>
+          </a:prstGeom>
+          <a:noFill/>
+          <a:ln>
+            <a:noFill/>
+          </a:ln>
+        </p:spPr>
+        <p:txBody>
+          <a:bodyPr spcFirstLastPara="1" wrap="square" lIns="91425" tIns="45700" rIns="91425" bIns="45700" anchor="t" anchorCtr="0">
+            <a:spAutoFit/>
+          </a:bodyPr>
+          <a:lstStyle/>
+          <a:p>
+            <a:pPr marL="0" marR="0" lvl="0" indent="0" algn="l" rtl="0">
+              <a:lnSpc>
+                <a:spcPct val="100000"/>
+              </a:lnSpc>
+              <a:spcBef>
+                <a:spcPts val="0"/>
+              </a:spcBef>
+              <a:spcAft>
+                <a:spcPts val="0"/>
+              </a:spcAft>
+              <a:buClr>
+                <a:srgbClr val="000000"/>
+              </a:buClr>
+              <a:buSzPts val="2400"/>
+              <a:buFont typeface="Arial"/>
+              <a:buNone/>
+            </a:pPr>
+            <a:r>
+              <a:rPr lang="en-US" sz="2400" b="0" i="0" u="none" strike="noStrike" cap="none">
+                <a:solidFill>
+                  <a:schemeClr val="dk1"/>
+                </a:solidFill>
+                <a:latin typeface="Calibri"/>
+                <a:ea typeface="Calibri"/>
+                <a:cs typeface="Calibri"/>
+                <a:sym typeface="Calibri"/>
+              </a:rPr>
+              <a:t>O(n)</a:t>
+            </a:r>
+            <a:endParaRPr sz="1400" b="0" i="0" u="none" strike="noStrike" cap="none">
+              <a:solidFill>
+                <a:srgbClr val="000000"/>
+              </a:solidFill>
+              <a:latin typeface="Arial"/>
+              <a:ea typeface="Arial"/>
+              <a:cs typeface="Arial"/>
+              <a:sym typeface="Arial"/>
+            </a:endParaRPr>
+          </a:p>
+        </p:txBody>
+      </p:sp>
+      <p:sp>
+        <p:nvSpPr>
+          <p:cNvPr id="601" name="Google Shape;601;p26"/>
+          <p:cNvSpPr txBox="1"/>
+          <p:nvPr/>
+        </p:nvSpPr>
+        <p:spPr>
+          <a:xfrm>
+            <a:off x="11377186" y="4375642"/>
+            <a:ext cx="845103" cy="461665"/>
+          </a:xfrm>
+          <a:prstGeom prst="rect">
+            <a:avLst/>
+          </a:prstGeom>
+          <a:blipFill rotWithShape="1">
+            <a:blip r:embed="rId3">
+              <a:alphaModFix/>
+            </a:blip>
+            <a:stretch>
+              <a:fillRect l="-1469" t="-7892" b="-26310"/>
+            </a:stretch>
+          </a:blipFill>
+          <a:ln>
+            <a:noFill/>
+          </a:ln>
+        </p:spPr>
+        <p:txBody>
+          <a:bodyPr spcFirstLastPara="1" wrap="square" lIns="91425" tIns="45700" rIns="91425" bIns="45700" anchor="t" anchorCtr="0">
+            <a:noAutofit/>
+          </a:bodyPr>
+          <a:lstStyle/>
+          <a:p>
+            <a:pPr marL="0" marR="0" lvl="0" indent="0" algn="l" rtl="0">
+              <a:lnSpc>
+                <a:spcPct val="100000"/>
+              </a:lnSpc>
+              <a:spcBef>
+                <a:spcPts val="0"/>
+              </a:spcBef>
+              <a:spcAft>
+                <a:spcPts val="0"/>
+              </a:spcAft>
+              <a:buClr>
+                <a:srgbClr val="000000"/>
+              </a:buClr>
+              <a:buSzPts val="1800"/>
+              <a:buFont typeface="Arial"/>
+              <a:buNone/>
+            </a:pPr>
+            <a:r>
+              <a:rPr lang="en-US" sz="1800" b="0" i="0" u="none" strike="noStrike" cap="none" dirty="0">
+                <a:solidFill>
+                  <a:srgbClr val="000000"/>
+                </a:solidFill>
+                <a:latin typeface="Twentieth Century"/>
+                <a:ea typeface="Twentieth Century"/>
+                <a:cs typeface="Twentieth Century"/>
+                <a:sym typeface="Twentieth Century"/>
+              </a:rPr>
+              <a:t> </a:t>
+            </a:r>
+            <a:endParaRPr sz="1400" b="0" i="0" u="none" strike="noStrike" cap="none" dirty="0">
+              <a:solidFill>
+                <a:srgbClr val="000000"/>
+              </a:solidFill>
+              <a:latin typeface="Arial"/>
+              <a:ea typeface="Arial"/>
+              <a:cs typeface="Arial"/>
+              <a:sym typeface="Arial"/>
+            </a:endParaRPr>
+          </a:p>
+        </p:txBody>
+      </p:sp>
+      <p:sp>
+        <p:nvSpPr>
+          <p:cNvPr id="602" name="Google Shape;602;p26"/>
+          <p:cNvSpPr txBox="1"/>
+          <p:nvPr/>
+        </p:nvSpPr>
+        <p:spPr>
+          <a:xfrm>
+            <a:off x="11349728" y="3063078"/>
+            <a:ext cx="862653" cy="461665"/>
+          </a:xfrm>
+          <a:prstGeom prst="rect">
+            <a:avLst/>
+          </a:prstGeom>
+          <a:noFill/>
+          <a:ln>
+            <a:noFill/>
+          </a:ln>
+        </p:spPr>
+        <p:txBody>
+          <a:bodyPr spcFirstLastPara="1" wrap="square" lIns="91425" tIns="45700" rIns="91425" bIns="45700" anchor="t" anchorCtr="0">
+            <a:spAutoFit/>
+          </a:bodyPr>
+          <a:lstStyle/>
+          <a:p>
+            <a:pPr marL="0" marR="0" lvl="0" indent="0" algn="l" rtl="0">
+              <a:lnSpc>
+                <a:spcPct val="100000"/>
+              </a:lnSpc>
+              <a:spcBef>
+                <a:spcPts val="0"/>
+              </a:spcBef>
+              <a:spcAft>
+                <a:spcPts val="0"/>
+              </a:spcAft>
+              <a:buClr>
+                <a:srgbClr val="000000"/>
+              </a:buClr>
+              <a:buSzPts val="2400"/>
+              <a:buFont typeface="Arial"/>
+              <a:buNone/>
+            </a:pPr>
+            <a:r>
+              <a:rPr lang="en-US" sz="2400" b="0" i="0" u="none" strike="noStrike" cap="none">
+                <a:solidFill>
+                  <a:schemeClr val="dk1"/>
+                </a:solidFill>
+                <a:latin typeface="Calibri"/>
+                <a:ea typeface="Calibri"/>
+                <a:cs typeface="Calibri"/>
+                <a:sym typeface="Calibri"/>
+              </a:rPr>
+              <a:t>Θ(n)</a:t>
+            </a:r>
+            <a:endParaRPr sz="1400" b="0" i="0" u="none" strike="noStrike" cap="none">
+              <a:solidFill>
+                <a:srgbClr val="000000"/>
+              </a:solidFill>
+              <a:latin typeface="Arial"/>
+              <a:ea typeface="Arial"/>
+              <a:cs typeface="Arial"/>
+              <a:sym typeface="Arial"/>
+            </a:endParaRPr>
+          </a:p>
+        </p:txBody>
+      </p:sp>
+      <p:sp>
+        <p:nvSpPr>
+          <p:cNvPr id="603" name="Google Shape;603;p26"/>
+          <p:cNvSpPr txBox="1"/>
+          <p:nvPr/>
+        </p:nvSpPr>
+        <p:spPr>
+          <a:xfrm>
+            <a:off x="5715720" y="4886865"/>
+            <a:ext cx="5477055" cy="923289"/>
+          </a:xfrm>
+          <a:prstGeom prst="rect">
+            <a:avLst/>
+          </a:prstGeom>
+          <a:noFill/>
+          <a:ln>
+            <a:noFill/>
+          </a:ln>
+        </p:spPr>
+        <p:txBody>
+          <a:bodyPr spcFirstLastPara="1" wrap="square" lIns="91425" tIns="45700" rIns="91425" bIns="45700" anchor="t" anchorCtr="0">
+            <a:spAutoFit/>
+          </a:bodyPr>
+          <a:lstStyle/>
+          <a:p>
+            <a:pPr lvl="0">
+              <a:spcBef>
+                <a:spcPts val="0"/>
+              </a:spcBef>
+              <a:spcAft>
+                <a:spcPts val="0"/>
+              </a:spcAft>
+              <a:buClr>
+                <a:srgbClr val="000000"/>
+              </a:buClr>
+              <a:buSzPts val="2400"/>
+            </a:pPr>
+            <a:r>
+              <a:rPr lang="de-DE" dirty="0">
+                <a:solidFill>
+                  <a:schemeClr val="dk1"/>
+                </a:solidFill>
+                <a:latin typeface="+mj-lt"/>
+                <a:ea typeface="Calibri"/>
+                <a:cs typeface="Calibri"/>
+                <a:sym typeface="Calibri"/>
+              </a:rPr>
+              <a:t>Wir haben gerade dieses Werkzeug fertiggestellt, um eine Funktion anhand einiger nützlicher Schranken zu charakterisieren!</a:t>
+            </a:r>
+            <a:endParaRPr b="0" i="0" u="none" strike="noStrike" cap="none" dirty="0">
+              <a:solidFill>
+                <a:srgbClr val="000000"/>
+              </a:solidFill>
+              <a:latin typeface="+mj-lt"/>
+              <a:ea typeface="Arial"/>
+              <a:cs typeface="Arial"/>
+              <a:sym typeface="Arial"/>
+            </a:endParaRPr>
+          </a:p>
+        </p:txBody>
+      </p:sp>
+      <p:sp>
+        <p:nvSpPr>
+          <p:cNvPr id="604" name="Google Shape;604;p26"/>
+          <p:cNvSpPr txBox="1"/>
+          <p:nvPr/>
+        </p:nvSpPr>
+        <p:spPr>
+          <a:xfrm>
+            <a:off x="661599" y="4886865"/>
+            <a:ext cx="4550819" cy="923289"/>
+          </a:xfrm>
+          <a:prstGeom prst="rect">
+            <a:avLst/>
+          </a:prstGeom>
+          <a:noFill/>
+          <a:ln>
+            <a:noFill/>
+          </a:ln>
+        </p:spPr>
+        <p:txBody>
+          <a:bodyPr spcFirstLastPara="1" wrap="square" lIns="91425" tIns="45700" rIns="91425" bIns="45700" anchor="t" anchorCtr="0">
+            <a:spAutoFit/>
+          </a:bodyPr>
+          <a:lstStyle/>
+          <a:p>
+            <a:pPr lvl="0">
+              <a:spcBef>
+                <a:spcPts val="0"/>
+              </a:spcBef>
+              <a:spcAft>
+                <a:spcPts val="0"/>
+              </a:spcAft>
+              <a:buClr>
+                <a:srgbClr val="000000"/>
+              </a:buClr>
+              <a:buSzPts val="2400"/>
+            </a:pPr>
+            <a:r>
+              <a:rPr lang="de-DE" dirty="0">
+                <a:solidFill>
+                  <a:schemeClr val="dk1"/>
+                </a:solidFill>
+                <a:latin typeface="+mj-lt"/>
+                <a:ea typeface="Calibri"/>
+                <a:cs typeface="Calibri"/>
+                <a:sym typeface="Calibri"/>
+              </a:rPr>
+              <a:t>Schauen wir uns dieses Werkzeug nun genauer an. Wie genau kommen wir zu dieser Funktion?</a:t>
+            </a:r>
+            <a:endParaRPr b="0" i="0" u="none" strike="noStrike" cap="none" dirty="0">
+              <a:solidFill>
+                <a:srgbClr val="000000"/>
+              </a:solidFill>
+              <a:latin typeface="+mj-lt"/>
+              <a:ea typeface="Arial"/>
+              <a:cs typeface="Arial"/>
+              <a:sym typeface="Arial"/>
+            </a:endParaRPr>
+          </a:p>
+        </p:txBody>
+      </p:sp>
+      <p:cxnSp>
+        <p:nvCxnSpPr>
+          <p:cNvPr id="605" name="Google Shape;605;p26"/>
+          <p:cNvCxnSpPr>
+            <a:cxnSpLocks/>
+          </p:cNvCxnSpPr>
+          <p:nvPr/>
+        </p:nvCxnSpPr>
+        <p:spPr>
+          <a:xfrm flipH="1">
+            <a:off x="7900090" y="4285728"/>
+            <a:ext cx="698" cy="551579"/>
+          </a:xfrm>
+          <a:prstGeom prst="straightConnector1">
+            <a:avLst/>
+          </a:prstGeom>
+          <a:noFill/>
+          <a:ln w="57150" cap="flat" cmpd="sng">
+            <a:solidFill>
+              <a:srgbClr val="4C3282"/>
+            </a:solidFill>
+            <a:prstDash val="solid"/>
+            <a:round/>
+            <a:headEnd type="none" w="sm" len="sm"/>
+            <a:tailEnd type="none" w="sm" len="sm"/>
+          </a:ln>
+        </p:spPr>
+      </p:cxnSp>
+      <p:cxnSp>
+        <p:nvCxnSpPr>
+          <p:cNvPr id="606" name="Google Shape;606;p26"/>
+          <p:cNvCxnSpPr>
+            <a:cxnSpLocks/>
+          </p:cNvCxnSpPr>
+          <p:nvPr/>
+        </p:nvCxnSpPr>
+        <p:spPr>
+          <a:xfrm>
+            <a:off x="3125875" y="3605978"/>
+            <a:ext cx="0" cy="1231329"/>
+          </a:xfrm>
+          <a:prstGeom prst="straightConnector1">
+            <a:avLst/>
+          </a:prstGeom>
+          <a:noFill/>
+          <a:ln w="57150" cap="flat" cmpd="sng">
+            <a:solidFill>
+              <a:srgbClr val="4C3282"/>
+            </a:solidFill>
+            <a:prstDash val="solid"/>
+            <a:round/>
+            <a:headEnd type="none" w="sm" len="sm"/>
+            <a:tailEnd type="none" w="sm" len="sm"/>
+          </a:ln>
+        </p:spPr>
+      </p:cxnSp>
+      <p:sp>
+        <p:nvSpPr>
+          <p:cNvPr id="5" name="Titel 4">
+            <a:extLst>
+              <a:ext uri="{FF2B5EF4-FFF2-40B4-BE49-F238E27FC236}">
+                <a16:creationId xmlns:a16="http://schemas.microsoft.com/office/drawing/2014/main" id="{E642F3E5-05DE-44F9-869F-E8B20341141A}"/>
+              </a:ext>
+            </a:extLst>
+          </p:cNvPr>
+          <p:cNvSpPr>
+            <a:spLocks noGrp="1"/>
+          </p:cNvSpPr>
+          <p:nvPr>
+            <p:ph type="title"/>
+          </p:nvPr>
+        </p:nvSpPr>
+        <p:spPr/>
+        <p:txBody>
+          <a:bodyPr/>
+          <a:lstStyle/>
+          <a:p>
+            <a:r>
+              <a:rPr lang="de-DE" noProof="0" dirty="0"/>
+              <a:t>Analyse von Algorithmen</a:t>
+            </a:r>
+          </a:p>
+        </p:txBody>
+      </p:sp>
+      <p:sp>
+        <p:nvSpPr>
+          <p:cNvPr id="65" name="Google Shape;257;p13">
+            <a:extLst>
+              <a:ext uri="{FF2B5EF4-FFF2-40B4-BE49-F238E27FC236}">
+                <a16:creationId xmlns:a16="http://schemas.microsoft.com/office/drawing/2014/main" id="{5B2E0C48-0BFC-43A7-B0EE-62CDC60B704D}"/>
+              </a:ext>
+            </a:extLst>
+          </p:cNvPr>
+          <p:cNvSpPr txBox="1">
+            <a:spLocks/>
+          </p:cNvSpPr>
+          <p:nvPr/>
+        </p:nvSpPr>
+        <p:spPr>
+          <a:xfrm>
+            <a:off x="6881091" y="6349134"/>
+            <a:ext cx="2812473" cy="219798"/>
+          </a:xfrm>
+          <a:prstGeom prst="rect">
+            <a:avLst/>
+          </a:prstGeom>
+          <a:noFill/>
+          <a:ln>
+            <a:noFill/>
+          </a:ln>
+        </p:spPr>
+        <p:txBody>
+          <a:bodyPr spcFirstLastPara="1" wrap="square" lIns="91425" tIns="45700" rIns="91425" bIns="45700" anchor="ctr" anchorCtr="0">
+            <a:noAutofit/>
+          </a:bodyPr>
+          <a:lstStyle>
+            <a:defPPr>
+              <a:defRPr lang="de-DE"/>
+            </a:defPPr>
+            <a:lvl1pPr algn="l" defTabSz="457200" rtl="0" fontAlgn="base">
+              <a:spcBef>
+                <a:spcPct val="0"/>
+              </a:spcBef>
+              <a:spcAft>
+                <a:spcPct val="0"/>
+              </a:spcAft>
+              <a:defRPr kern="1200">
+                <a:solidFill>
+                  <a:schemeClr val="tx1"/>
+                </a:solidFill>
+                <a:latin typeface="Arial" pitchFamily="34" charset="0"/>
+                <a:ea typeface="+mn-ea"/>
+                <a:cs typeface="Arial" pitchFamily="34" charset="0"/>
+              </a:defRPr>
+            </a:lvl1pPr>
+            <a:lvl2pPr marL="457200" algn="l" defTabSz="457200" rtl="0" fontAlgn="base">
+              <a:spcBef>
+                <a:spcPct val="0"/>
+              </a:spcBef>
+              <a:spcAft>
+                <a:spcPct val="0"/>
+              </a:spcAft>
+              <a:defRPr kern="1200">
+                <a:solidFill>
+                  <a:schemeClr val="tx1"/>
+                </a:solidFill>
+                <a:latin typeface="Arial" pitchFamily="34" charset="0"/>
+                <a:ea typeface="+mn-ea"/>
+                <a:cs typeface="Arial" pitchFamily="34" charset="0"/>
+              </a:defRPr>
+            </a:lvl2pPr>
+            <a:lvl3pPr marL="914400" algn="l" defTabSz="457200" rtl="0" fontAlgn="base">
+              <a:spcBef>
+                <a:spcPct val="0"/>
+              </a:spcBef>
+              <a:spcAft>
+                <a:spcPct val="0"/>
+              </a:spcAft>
+              <a:defRPr kern="1200">
+                <a:solidFill>
+                  <a:schemeClr val="tx1"/>
+                </a:solidFill>
+                <a:latin typeface="Arial" pitchFamily="34" charset="0"/>
+                <a:ea typeface="+mn-ea"/>
+                <a:cs typeface="Arial" pitchFamily="34" charset="0"/>
+              </a:defRPr>
+            </a:lvl3pPr>
+            <a:lvl4pPr marL="1371600" algn="l" defTabSz="457200" rtl="0" fontAlgn="base">
+              <a:spcBef>
+                <a:spcPct val="0"/>
+              </a:spcBef>
+              <a:spcAft>
+                <a:spcPct val="0"/>
+              </a:spcAft>
+              <a:defRPr kern="1200">
+                <a:solidFill>
+                  <a:schemeClr val="tx1"/>
+                </a:solidFill>
+                <a:latin typeface="Arial" pitchFamily="34" charset="0"/>
+                <a:ea typeface="+mn-ea"/>
+                <a:cs typeface="Arial" pitchFamily="34" charset="0"/>
+              </a:defRPr>
+            </a:lvl4pPr>
+            <a:lvl5pPr marL="1828800" algn="l" defTabSz="457200" rtl="0" fontAlgn="base">
+              <a:spcBef>
+                <a:spcPct val="0"/>
+              </a:spcBef>
+              <a:spcAft>
+                <a:spcPct val="0"/>
+              </a:spcAft>
+              <a:defRPr kern="1200">
+                <a:solidFill>
+                  <a:schemeClr val="tx1"/>
+                </a:solidFill>
+                <a:latin typeface="Arial" pitchFamily="34" charset="0"/>
+                <a:ea typeface="+mn-ea"/>
+                <a:cs typeface="Arial" pitchFamily="34" charset="0"/>
+              </a:defRPr>
+            </a:lvl5pPr>
+            <a:lvl6pPr marL="2286000" algn="l" defTabSz="914400" rtl="0" eaLnBrk="1" latinLnBrk="0" hangingPunct="1">
+              <a:defRPr kern="1200">
+                <a:solidFill>
+                  <a:schemeClr val="tx1"/>
+                </a:solidFill>
+                <a:latin typeface="Arial" pitchFamily="34" charset="0"/>
+                <a:ea typeface="+mn-ea"/>
+                <a:cs typeface="Arial" pitchFamily="34" charset="0"/>
+              </a:defRPr>
+            </a:lvl6pPr>
+            <a:lvl7pPr marL="2743200" algn="l" defTabSz="914400" rtl="0" eaLnBrk="1" latinLnBrk="0" hangingPunct="1">
+              <a:defRPr kern="1200">
+                <a:solidFill>
+                  <a:schemeClr val="tx1"/>
+                </a:solidFill>
+                <a:latin typeface="Arial" pitchFamily="34" charset="0"/>
+                <a:ea typeface="+mn-ea"/>
+                <a:cs typeface="Arial" pitchFamily="34" charset="0"/>
+              </a:defRPr>
+            </a:lvl7pPr>
+            <a:lvl8pPr marL="3200400" algn="l" defTabSz="914400" rtl="0" eaLnBrk="1" latinLnBrk="0" hangingPunct="1">
+              <a:defRPr kern="1200">
+                <a:solidFill>
+                  <a:schemeClr val="tx1"/>
+                </a:solidFill>
+                <a:latin typeface="Arial" pitchFamily="34" charset="0"/>
+                <a:ea typeface="+mn-ea"/>
+                <a:cs typeface="Arial" pitchFamily="34" charset="0"/>
+              </a:defRPr>
+            </a:lvl8pPr>
+            <a:lvl9pPr marL="3657600" algn="l" defTabSz="914400" rtl="0" eaLnBrk="1" latinLnBrk="0" hangingPunct="1">
+              <a:defRPr kern="1200">
+                <a:solidFill>
+                  <a:schemeClr val="tx1"/>
+                </a:solidFill>
+                <a:latin typeface="Arial" pitchFamily="34" charset="0"/>
+                <a:ea typeface="+mn-ea"/>
+                <a:cs typeface="Arial" pitchFamily="34" charset="0"/>
+              </a:defRPr>
+            </a:lvl9pPr>
+          </a:lstStyle>
+          <a:p>
+            <a:pPr algn="r">
+              <a:spcBef>
+                <a:spcPts val="0"/>
+              </a:spcBef>
+              <a:spcAft>
+                <a:spcPts val="0"/>
+              </a:spcAft>
+            </a:pPr>
+            <a:r>
+              <a:rPr lang="fr-FR" sz="800" dirty="0"/>
+              <a:t>Quelle: Data Structures and </a:t>
+            </a:r>
+            <a:r>
+              <a:rPr lang="fr-FR" sz="800" dirty="0" err="1"/>
+              <a:t>Algorithms</a:t>
+            </a:r>
+            <a:r>
+              <a:rPr lang="fr-FR" sz="800" dirty="0"/>
+              <a:t> (CSE 373), University of Washington, Spring 2022</a:t>
+            </a:r>
+          </a:p>
+        </p:txBody>
+      </p:sp>
+      <p:sp>
+        <p:nvSpPr>
+          <p:cNvPr id="68" name="Datumsplatzhalter 4">
+            <a:extLst>
+              <a:ext uri="{FF2B5EF4-FFF2-40B4-BE49-F238E27FC236}">
+                <a16:creationId xmlns:a16="http://schemas.microsoft.com/office/drawing/2014/main" id="{64EDBB06-6632-4697-912B-2FABD050E425}"/>
+              </a:ext>
+            </a:extLst>
+          </p:cNvPr>
+          <p:cNvSpPr>
+            <a:spLocks noGrp="1"/>
+          </p:cNvSpPr>
+          <p:nvPr>
+            <p:ph type="dt" sz="half" idx="14"/>
+          </p:nvPr>
+        </p:nvSpPr>
+        <p:spPr>
+          <a:xfrm>
+            <a:off x="1206500" y="6011863"/>
+            <a:ext cx="1295400" cy="179387"/>
+          </a:xfrm>
+        </p:spPr>
+        <p:txBody>
+          <a:bodyPr/>
+          <a:lstStyle/>
+          <a:p>
+            <a:fld id="{F2D06E3F-368B-43DC-96F3-4B8E65027050}" type="datetime1">
+              <a:rPr lang="de-DE" smtClean="0"/>
+              <a:pPr/>
+              <a:t>05.02.2026</a:t>
+            </a:fld>
+            <a:endParaRPr lang="de-DE" dirty="0"/>
+          </a:p>
+        </p:txBody>
+      </p:sp>
+      <p:sp>
+        <p:nvSpPr>
+          <p:cNvPr id="69" name="Foliennummernplatzhalter 5">
+            <a:extLst>
+              <a:ext uri="{FF2B5EF4-FFF2-40B4-BE49-F238E27FC236}">
+                <a16:creationId xmlns:a16="http://schemas.microsoft.com/office/drawing/2014/main" id="{7CAE0784-6486-4B55-8D34-1DBF71301261}"/>
+              </a:ext>
+            </a:extLst>
+          </p:cNvPr>
+          <p:cNvSpPr>
+            <a:spLocks noGrp="1"/>
+          </p:cNvSpPr>
+          <p:nvPr>
+            <p:ph type="sldNum" sz="quarter" idx="15"/>
+          </p:nvPr>
+        </p:nvSpPr>
+        <p:spPr>
+          <a:xfrm>
+            <a:off x="1206500" y="6361113"/>
+            <a:ext cx="1295400" cy="214312"/>
+          </a:xfrm>
+        </p:spPr>
+        <p:txBody>
+          <a:bodyPr/>
+          <a:lstStyle/>
+          <a:p>
+            <a:r>
+              <a:rPr lang="de-DE" dirty="0"/>
+              <a:t>Seite </a:t>
+            </a:r>
+            <a:fld id="{43310F81-32EE-4F95-9E9C-0BDC6AD52EEC}" type="slidenum">
+              <a:rPr lang="de-DE" smtClean="0"/>
+              <a:pPr/>
+              <a:t>8</a:t>
+            </a:fld>
+            <a:endParaRPr lang="de-DE" dirty="0"/>
+          </a:p>
+        </p:txBody>
+      </p:sp>
+    </p:spTree>
+  </p:cSld>
+  <p:clrMapOvr>
+    <a:masterClrMapping/>
+  </p:clrMapOvr>
+  <p:timing>
+    <p:tnLst>
+      <p:par>
+        <p:cTn id="1" dur="indefinite" restart="never" nodeType="tmRoot">
+          <p:childTnLst>
+            <p:seq concurrent="1" nextAc="seek">
+              <p:cTn id="2" dur="indefinite" nodeType="mainSeq">
+                <p:childTnLst>
+                  <p:par>
+                    <p:cTn id="3" fill="hold">
+                      <p:stCondLst>
+                        <p:cond delay="indefinite"/>
+                      </p:stCondLst>
+                      <p:childTnLst>
+                        <p:par>
+                          <p:cTn id="4" fill="hold">
+                            <p:stCondLst>
+                              <p:cond delay="0"/>
+                            </p:stCondLst>
+                            <p:childTnLst>
+                              <p:par>
+                                <p:cTn id="5" presetID="1" presetClass="entr" presetSubtype="0" fill="hold" nodeType="clickEffect">
+                                  <p:stCondLst>
+                                    <p:cond delay="0"/>
+                                  </p:stCondLst>
+                                  <p:childTnLst>
+                                    <p:set>
+                                      <p:cBhvr>
+                                        <p:cTn id="6" dur="1" fill="hold">
+                                          <p:stCondLst>
+                                            <p:cond delay="0"/>
+                                          </p:stCondLst>
+                                        </p:cTn>
+                                        <p:tgtEl>
+                                          <p:spTgt spid="603"/>
+                                        </p:tgtEl>
+                                        <p:attrNameLst>
+                                          <p:attrName>style.visibility</p:attrName>
+                                        </p:attrNameLst>
+                                      </p:cBhvr>
+                                      <p:to>
+                                        <p:strVal val="visible"/>
+                                      </p:to>
+                                    </p:set>
+                                  </p:childTnLst>
+                                </p:cTn>
+                              </p:par>
+                              <p:par>
+                                <p:cTn id="7" presetID="1" presetClass="entr" presetSubtype="0" fill="hold" nodeType="withEffect">
+                                  <p:stCondLst>
+                                    <p:cond delay="0"/>
+                                  </p:stCondLst>
+                                  <p:childTnLst>
+                                    <p:set>
+                                      <p:cBhvr>
+                                        <p:cTn id="8" dur="1" fill="hold">
+                                          <p:stCondLst>
+                                            <p:cond delay="0"/>
+                                          </p:stCondLst>
+                                        </p:cTn>
+                                        <p:tgtEl>
+                                          <p:spTgt spid="605"/>
+                                        </p:tgtEl>
+                                        <p:attrNameLst>
+                                          <p:attrName>style.visibility</p:attrName>
+                                        </p:attrNameLst>
+                                      </p:cBhvr>
+                                      <p:to>
+                                        <p:strVal val="visible"/>
+                                      </p:to>
+                                    </p:set>
+                                  </p:childTnLst>
+                                </p:cTn>
+                              </p:par>
+                            </p:childTnLst>
+                          </p:cTn>
+                        </p:par>
+                      </p:childTnLst>
+                    </p:cTn>
+                  </p:par>
+                  <p:par>
+                    <p:cTn id="9" fill="hold">
+                      <p:stCondLst>
+                        <p:cond delay="indefinite"/>
+                      </p:stCondLst>
+                      <p:childTnLst>
+                        <p:par>
+                          <p:cTn id="10" fill="hold">
+                            <p:stCondLst>
+                              <p:cond delay="0"/>
+                            </p:stCondLst>
+                            <p:childTnLst>
+                              <p:par>
+                                <p:cTn id="11" presetID="1" presetClass="entr" presetSubtype="0" fill="hold" nodeType="clickEffect">
+                                  <p:stCondLst>
+                                    <p:cond delay="0"/>
+                                  </p:stCondLst>
+                                  <p:childTnLst>
+                                    <p:set>
+                                      <p:cBhvr>
+                                        <p:cTn id="12" dur="1" fill="hold">
+                                          <p:stCondLst>
+                                            <p:cond delay="0"/>
+                                          </p:stCondLst>
+                                        </p:cTn>
+                                        <p:tgtEl>
+                                          <p:spTgt spid="606"/>
+                                        </p:tgtEl>
+                                        <p:attrNameLst>
+                                          <p:attrName>style.visibility</p:attrName>
+                                        </p:attrNameLst>
+                                      </p:cBhvr>
+                                      <p:to>
+                                        <p:strVal val="visible"/>
+                                      </p:to>
+                                    </p:set>
+                                  </p:childTnLst>
+                                </p:cTn>
+                              </p:par>
+                              <p:par>
+                                <p:cTn id="13" presetID="1" presetClass="entr" presetSubtype="0" fill="hold" nodeType="withEffect">
+                                  <p:stCondLst>
+                                    <p:cond delay="0"/>
+                                  </p:stCondLst>
+                                  <p:childTnLst>
+                                    <p:set>
+                                      <p:cBhvr>
+                                        <p:cTn id="14" dur="1" fill="hold">
+                                          <p:stCondLst>
+                                            <p:cond delay="0"/>
+                                          </p:stCondLst>
+                                        </p:cTn>
+                                        <p:tgtEl>
+                                          <p:spTgt spid="604"/>
+                                        </p:tgtEl>
+                                        <p:attrNameLst>
+                                          <p:attrName>style.visibility</p:attrName>
+                                        </p:attrNameLst>
+                                      </p:cBhvr>
+                                      <p:to>
+                                        <p:strVal val="visible"/>
+                                      </p:to>
+                                    </p:set>
                                   </p:childTnLst>
                                 </p:cTn>
                               </p:par>

--- a/input/Algorithmik.pptx
+++ b/input/Algorithmik.pptx
@@ -819,7 +819,7 @@
                 </a:lnSpc>
                 <a:defRPr/>
               </a:pPr>
-              <a:t>05.02.2026</a:t>
+              <a:t>21.11.2025</a:t>
             </a:fld>
             <a:endParaRPr lang="de-DE" sz="900" dirty="0"/>
           </a:p>
@@ -1804,7 +1804,7 @@
                 </a:lnSpc>
                 <a:defRPr/>
               </a:pPr>
-              <a:t>05.02.2026</a:t>
+              <a:t>21.11.2025</a:t>
             </a:fld>
             <a:endParaRPr lang="de-DE" sz="900" dirty="0"/>
           </a:p>
@@ -3318,7 +3318,7 @@
             </a:pPr>
             <a:fld id="{C9048784-7281-4837-A1AE-FC4A34A747D6}" type="datetime1">
               <a:rPr lang="de-DE" smtClean="0"/>
-              <a:t>05.02.2026</a:t>
+              <a:t>21.11.2025</a:t>
             </a:fld>
             <a:endParaRPr lang="de-DE" dirty="0"/>
           </a:p>
@@ -4799,7 +4799,7 @@
             </a:pPr>
             <a:fld id="{29E1D907-3A8C-4FA0-AF32-FB476100B44A}" type="datetime1">
               <a:rPr lang="de-DE" smtClean="0"/>
-              <a:t>05.02.2026</a:t>
+              <a:t>21.11.2025</a:t>
             </a:fld>
             <a:endParaRPr lang="de-DE" dirty="0"/>
           </a:p>
@@ -5210,7 +5210,7 @@
             </a:pPr>
             <a:fld id="{0D5930E3-AAC2-4ADF-925B-A037BED539BF}" type="datetime1">
               <a:rPr lang="de-DE" smtClean="0"/>
-              <a:t>05.02.2026</a:t>
+              <a:t>21.11.2025</a:t>
             </a:fld>
             <a:endParaRPr lang="en-US"/>
           </a:p>
@@ -5519,7 +5519,7 @@
             </a:pPr>
             <a:fld id="{77078B80-CC76-49E8-922A-90B2CBA19035}" type="datetime1">
               <a:rPr lang="de-DE" smtClean="0"/>
-              <a:t>05.02.2026</a:t>
+              <a:t>21.11.2025</a:t>
             </a:fld>
             <a:endParaRPr lang="en-US"/>
           </a:p>
@@ -6020,7 +6020,7 @@
             </a:pPr>
             <a:fld id="{410F1620-6991-468A-986C-DEA71AF2A6A8}" type="datetime1">
               <a:rPr lang="de-DE" smtClean="0"/>
-              <a:t>05.02.2026</a:t>
+              <a:t>21.11.2025</a:t>
             </a:fld>
             <a:endParaRPr lang="en-US"/>
           </a:p>
@@ -6418,7 +6418,7 @@
             </a:pPr>
             <a:fld id="{2A021128-E3BC-4510-A597-24FCB75D3A75}" type="datetime1">
               <a:rPr lang="de-DE" smtClean="0"/>
-              <a:t>05.02.2026</a:t>
+              <a:t>21.11.2025</a:t>
             </a:fld>
             <a:endParaRPr lang="de-DE" dirty="0"/>
           </a:p>
@@ -6675,7 +6675,7 @@
             </a:pPr>
             <a:fld id="{204B419C-6100-4ECC-A14C-29389AFC3646}" type="datetime1">
               <a:rPr lang="de-DE" smtClean="0"/>
-              <a:t>05.02.2026</a:t>
+              <a:t>21.11.2025</a:t>
             </a:fld>
             <a:endParaRPr lang="de-DE" dirty="0"/>
           </a:p>
@@ -7066,7 +7066,7 @@
             </a:pPr>
             <a:fld id="{17D379B7-331E-424B-A45F-F03D5981C976}" type="datetime1">
               <a:rPr lang="de-DE" smtClean="0"/>
-              <a:t>05.02.2026</a:t>
+              <a:t>21.11.2025</a:t>
             </a:fld>
             <a:endParaRPr lang="de-DE" dirty="0"/>
           </a:p>
@@ -7608,7 +7608,7 @@
             </a:pPr>
             <a:fld id="{F95F7EFE-EEF9-40C5-9AEC-F07BD35586E4}" type="datetime1">
               <a:rPr lang="de-DE" smtClean="0"/>
-              <a:t>05.02.2026</a:t>
+              <a:t>21.11.2025</a:t>
             </a:fld>
             <a:endParaRPr lang="de-DE" dirty="0"/>
           </a:p>
@@ -7864,7 +7864,7 @@
             </a:pPr>
             <a:fld id="{29F603B7-878E-43D0-A9A1-FA3C2AF87C58}" type="datetime1">
               <a:rPr lang="de-DE" smtClean="0"/>
-              <a:t>05.02.2026</a:t>
+              <a:t>21.11.2025</a:t>
             </a:fld>
             <a:endParaRPr lang="de-DE" dirty="0"/>
           </a:p>
@@ -7961,7 +7961,7 @@
             </a:pPr>
             <a:fld id="{64985212-05E7-49A7-ABD6-673A483CDAE3}" type="datetime1">
               <a:rPr lang="de-DE" smtClean="0"/>
-              <a:t>05.02.2026</a:t>
+              <a:t>21.11.2025</a:t>
             </a:fld>
             <a:endParaRPr lang="de-DE" dirty="0"/>
           </a:p>
@@ -8931,7 +8931,7 @@
             </a:pPr>
             <a:fld id="{8ED535EE-90AE-4348-98D3-AFE064A78180}" type="datetime1">
               <a:rPr lang="de-DE" smtClean="0"/>
-              <a:t>05.02.2026</a:t>
+              <a:t>21.11.2025</a:t>
             </a:fld>
             <a:endParaRPr lang="de-DE" dirty="0"/>
           </a:p>
@@ -9701,7 +9701,7 @@
             </a:pPr>
             <a:fld id="{9C590BB0-1566-4728-8689-C18D1116058A}" type="datetime1">
               <a:rPr lang="de-DE" smtClean="0"/>
-              <a:t>05.02.2026</a:t>
+              <a:t>21.11.2025</a:t>
             </a:fld>
             <a:endParaRPr lang="de-DE" dirty="0"/>
           </a:p>
@@ -10434,7 +10434,7 @@
             <a:fld id="{97C55095-590B-4AAB-8606-0F86796D070A}" type="datetime1">
               <a:rPr lang="de-DE" smtClean="0"/>
               <a:pPr/>
-              <a:t>05.02.2026</a:t>
+              <a:t>21.11.2025</a:t>
             </a:fld>
             <a:endParaRPr lang="de-DE" dirty="0"/>
           </a:p>
@@ -10990,7 +10990,7 @@
             <a:fld id="{F2D06E3F-368B-43DC-96F3-4B8E65027050}" type="datetime1">
               <a:rPr lang="de-DE" smtClean="0"/>
               <a:pPr/>
-              <a:t>05.02.2026</a:t>
+              <a:t>21.11.2025</a:t>
             </a:fld>
             <a:endParaRPr lang="de-DE" dirty="0"/>
           </a:p>
@@ -11034,7 +11034,9 @@
         <p:nvGraphicFramePr>
           <p:cNvPr id="762" name="Google Shape;762;g118b4eb0048_0_551"/>
           <p:cNvGraphicFramePr/>
-          <p:nvPr/>
+          <p:nvPr>
+            <p:extLst/>
+          </p:nvPr>
         </p:nvGraphicFramePr>
         <p:xfrm>
           <a:off x="323539" y="2398763"/>
@@ -14240,7 +14242,7 @@
             <a:fld id="{97C55095-590B-4AAB-8606-0F86796D070A}" type="datetime1">
               <a:rPr lang="de-DE" smtClean="0"/>
               <a:pPr/>
-              <a:t>05.02.2026</a:t>
+              <a:t>21.11.2025</a:t>
             </a:fld>
             <a:endParaRPr lang="de-DE" dirty="0"/>
           </a:p>
@@ -15429,7 +15431,7 @@
             <a:fld id="{97C55095-590B-4AAB-8606-0F86796D070A}" type="datetime1">
               <a:rPr lang="de-DE" smtClean="0"/>
               <a:pPr/>
-              <a:t>05.02.2026</a:t>
+              <a:t>21.11.2025</a:t>
             </a:fld>
             <a:endParaRPr lang="de-DE" dirty="0"/>
           </a:p>
@@ -18058,7 +18060,7 @@
             <a:fld id="{97C55095-590B-4AAB-8606-0F86796D070A}" type="datetime1">
               <a:rPr lang="de-DE" smtClean="0"/>
               <a:pPr/>
-              <a:t>05.02.2026</a:t>
+              <a:t>21.11.2025</a:t>
             </a:fld>
             <a:endParaRPr lang="de-DE" dirty="0"/>
           </a:p>
@@ -21777,7 +21779,7 @@
             <a:fld id="{97C55095-590B-4AAB-8606-0F86796D070A}" type="datetime1">
               <a:rPr lang="de-DE" smtClean="0"/>
               <a:pPr/>
-              <a:t>05.02.2026</a:t>
+              <a:t>21.11.2025</a:t>
             </a:fld>
             <a:endParaRPr lang="de-DE" dirty="0"/>
           </a:p>
@@ -22696,74 +22698,126 @@
           <a:chExt cx="0" cy="0"/>
         </a:xfrm>
       </p:grpSpPr>
-      <p:sp>
-        <p:nvSpPr>
-          <p:cNvPr id="40" name="Google Shape;921;p27">
+      <p:grpSp>
+        <p:nvGrpSpPr>
+          <p:cNvPr id="38" name="Gruppieren 37">
             <a:extLst>
               <a:ext uri="{FF2B5EF4-FFF2-40B4-BE49-F238E27FC236}">
-                <a16:creationId xmlns:a16="http://schemas.microsoft.com/office/drawing/2014/main" id="{3CE34F02-980A-4D8E-8EB6-8116A1140FFC}"/>
+                <a16:creationId xmlns:a16="http://schemas.microsoft.com/office/drawing/2014/main" id="{3E20075B-7A52-4F26-A090-9C63D480AAF3}"/>
               </a:ext>
             </a:extLst>
           </p:cNvPr>
-          <p:cNvSpPr/>
+          <p:cNvGrpSpPr>
+            <a:grpSpLocks noChangeAspect="1"/>
+          </p:cNvGrpSpPr>
           <p:nvPr/>
-        </p:nvSpPr>
-        <p:spPr>
+        </p:nvGrpSpPr>
+        <p:grpSpPr>
           <a:xfrm>
             <a:off x="5766996" y="4028691"/>
-            <a:ext cx="6238094" cy="441868"/>
+            <a:ext cx="6238094" cy="1872049"/>
+            <a:chOff x="5281611" y="520700"/>
+            <a:chExt cx="6723479" cy="2017713"/>
           </a:xfrm>
-          <a:prstGeom prst="rect">
-            <a:avLst/>
-          </a:prstGeom>
-          <a:solidFill>
-            <a:srgbClr val="4C3282"/>
-          </a:solidFill>
-          <a:ln>
-            <a:noFill/>
-          </a:ln>
-        </p:spPr>
-        <p:txBody>
-          <a:bodyPr spcFirstLastPara="1" wrap="square" lIns="91425" tIns="45700" rIns="91425" bIns="45700" anchor="ctr" anchorCtr="0">
-            <a:noAutofit/>
-          </a:bodyPr>
-          <a:lstStyle/>
-          <a:p>
-            <a:pPr marL="0" marR="0" lvl="0" indent="0" algn="l" rtl="0">
-              <a:spcBef>
-                <a:spcPts val="0"/>
-              </a:spcBef>
-              <a:spcAft>
-                <a:spcPts val="0"/>
-              </a:spcAft>
-              <a:buNone/>
-            </a:pPr>
-            <a:r>
-              <a:rPr lang="el-GR" sz="2400" dirty="0">
-                <a:solidFill>
-                  <a:schemeClr val="lt1"/>
-                </a:solidFill>
-                <a:ea typeface="Quattrocento Sans"/>
-                <a:sym typeface="Quattrocento Sans"/>
-              </a:rPr>
-              <a:t>Θ</a:t>
-            </a:r>
-            <a:r>
-              <a:rPr lang="en-US" sz="2400" dirty="0">
-                <a:solidFill>
-                  <a:schemeClr val="lt1"/>
-                </a:solidFill>
-                <a:latin typeface="Quattrocento Sans"/>
-                <a:ea typeface="Quattrocento Sans"/>
-                <a:cs typeface="Quattrocento Sans"/>
-                <a:sym typeface="Quattrocento Sans"/>
-              </a:rPr>
-              <a:t>-Notation</a:t>
-            </a:r>
-            <a:endParaRPr dirty="0"/>
-          </a:p>
-        </p:txBody>
-      </p:sp>
+        </p:grpSpPr>
+        <p:pic>
+          <p:nvPicPr>
+            <p:cNvPr id="39" name="Grafik 38">
+              <a:extLst>
+                <a:ext uri="{FF2B5EF4-FFF2-40B4-BE49-F238E27FC236}">
+                  <a16:creationId xmlns:a16="http://schemas.microsoft.com/office/drawing/2014/main" id="{E9773847-59E5-4A70-94A9-D503A9497FE0}"/>
+                </a:ext>
+              </a:extLst>
+            </p:cNvPr>
+            <p:cNvPicPr>
+              <a:picLocks noChangeAspect="1"/>
+            </p:cNvPicPr>
+            <p:nvPr/>
+          </p:nvPicPr>
+          <p:blipFill rotWithShape="1">
+            <a:blip r:embed="rId3"/>
+            <a:srcRect l="1289" r="768" b="4434"/>
+            <a:stretch/>
+          </p:blipFill>
+          <p:spPr>
+            <a:xfrm>
+              <a:off x="5281613" y="996950"/>
+              <a:ext cx="6723477" cy="1541463"/>
+            </a:xfrm>
+            <a:prstGeom prst="rect">
+              <a:avLst/>
+            </a:prstGeom>
+          </p:spPr>
+        </p:pic>
+        <p:sp>
+          <p:nvSpPr>
+            <p:cNvPr id="40" name="Google Shape;921;p27">
+              <a:extLst>
+                <a:ext uri="{FF2B5EF4-FFF2-40B4-BE49-F238E27FC236}">
+                  <a16:creationId xmlns:a16="http://schemas.microsoft.com/office/drawing/2014/main" id="{3CE34F02-980A-4D8E-8EB6-8116A1140FFC}"/>
+                </a:ext>
+              </a:extLst>
+            </p:cNvPr>
+            <p:cNvSpPr/>
+            <p:nvPr/>
+          </p:nvSpPr>
+          <p:spPr>
+            <a:xfrm>
+              <a:off x="5281611" y="520700"/>
+              <a:ext cx="6723479" cy="476250"/>
+            </a:xfrm>
+            <a:prstGeom prst="rect">
+              <a:avLst/>
+            </a:prstGeom>
+            <a:solidFill>
+              <a:srgbClr val="4C3282"/>
+            </a:solidFill>
+            <a:ln>
+              <a:noFill/>
+            </a:ln>
+          </p:spPr>
+          <p:txBody>
+            <a:bodyPr spcFirstLastPara="1" wrap="square" lIns="91425" tIns="45700" rIns="91425" bIns="45700" anchor="ctr" anchorCtr="0">
+              <a:noAutofit/>
+            </a:bodyPr>
+            <a:lstStyle/>
+            <a:p>
+              <a:pPr marL="0" marR="0" lvl="0" indent="0" algn="l" rtl="0">
+                <a:spcBef>
+                  <a:spcPts val="0"/>
+                </a:spcBef>
+                <a:spcAft>
+                  <a:spcPts val="0"/>
+                </a:spcAft>
+                <a:buNone/>
+              </a:pPr>
+              <a:r>
+                <a:rPr lang="el-GR" sz="2400" dirty="0">
+                  <a:solidFill>
+                    <a:schemeClr val="lt1"/>
+                  </a:solidFill>
+                  <a:ea typeface="Quattrocento Sans"/>
+                  <a:sym typeface="Quattrocento Sans"/>
+                </a:rPr>
+                <a:t>Θ</a:t>
+              </a:r>
+              <a:r>
+                <a:rPr lang="en-US" sz="2400" dirty="0">
+                  <a:solidFill>
+                    <a:schemeClr val="lt1"/>
+                  </a:solidFill>
+                  <a:latin typeface="Quattrocento Sans"/>
+                  <a:ea typeface="Quattrocento Sans"/>
+                  <a:cs typeface="Quattrocento Sans"/>
+                  <a:sym typeface="Quattrocento Sans"/>
+                </a:rPr>
+                <a:t>-Notation</a:t>
+              </a:r>
+              <a:endParaRPr dirty="0"/>
+            </a:p>
+          </p:txBody>
+        </p:sp>
+      </p:grpSp>
       <p:sp>
         <p:nvSpPr>
           <p:cNvPr id="5" name="Titel 4">
@@ -22880,7 +22934,7 @@
             <a:avLst/>
           </a:prstGeom>
           <a:blipFill rotWithShape="1">
-            <a:blip r:embed="rId3">
+            <a:blip r:embed="rId4">
               <a:alphaModFix/>
             </a:blip>
             <a:stretch>
@@ -22953,7 +23007,7 @@
             <a:avLst/>
           </a:prstGeom>
           <a:blipFill rotWithShape="1">
-            <a:blip r:embed="rId4">
+            <a:blip r:embed="rId5">
               <a:alphaModFix/>
             </a:blip>
             <a:stretch>
@@ -23026,7 +23080,7 @@
             <a:avLst/>
           </a:prstGeom>
           <a:blipFill rotWithShape="1">
-            <a:blip r:embed="rId5">
+            <a:blip r:embed="rId6">
               <a:alphaModFix/>
             </a:blip>
             <a:stretch>
@@ -23099,7 +23153,7 @@
             <a:avLst/>
           </a:prstGeom>
           <a:blipFill rotWithShape="1">
-            <a:blip r:embed="rId6">
+            <a:blip r:embed="rId7">
               <a:alphaModFix/>
             </a:blip>
             <a:stretch>
@@ -23172,7 +23226,7 @@
             <a:avLst/>
           </a:prstGeom>
           <a:blipFill rotWithShape="1">
-            <a:blip r:embed="rId7">
+            <a:blip r:embed="rId8">
               <a:alphaModFix/>
             </a:blip>
             <a:stretch>
@@ -24543,134 +24597,240 @@
           </a:p>
         </p:txBody>
       </p:sp>
-      <p:sp>
-        <p:nvSpPr>
-          <p:cNvPr id="36" name="Google Shape;921;p27">
+      <p:grpSp>
+        <p:nvGrpSpPr>
+          <p:cNvPr id="35" name="Gruppieren 34">
             <a:extLst>
               <a:ext uri="{FF2B5EF4-FFF2-40B4-BE49-F238E27FC236}">
-                <a16:creationId xmlns:a16="http://schemas.microsoft.com/office/drawing/2014/main" id="{91FDE9D0-1D09-45E3-927C-0BE69EC5823B}"/>
+                <a16:creationId xmlns:a16="http://schemas.microsoft.com/office/drawing/2014/main" id="{F2260CFE-E139-45C1-A92C-17B8F5C84E3E}"/>
               </a:ext>
             </a:extLst>
           </p:cNvPr>
-          <p:cNvSpPr/>
+          <p:cNvGrpSpPr>
+            <a:grpSpLocks noChangeAspect="1"/>
+          </p:cNvGrpSpPr>
           <p:nvPr/>
-        </p:nvSpPr>
-        <p:spPr>
+        </p:nvGrpSpPr>
+        <p:grpSpPr>
           <a:xfrm>
             <a:off x="7426683" y="453359"/>
-            <a:ext cx="4577992" cy="441868"/>
+            <a:ext cx="4578455" cy="1579001"/>
+            <a:chOff x="1206001" y="3141826"/>
+            <a:chExt cx="4934703" cy="1701863"/>
           </a:xfrm>
-          <a:prstGeom prst="rect">
-            <a:avLst/>
-          </a:prstGeom>
-          <a:solidFill>
-            <a:srgbClr val="4C3282"/>
-          </a:solidFill>
-          <a:ln>
-            <a:noFill/>
-          </a:ln>
-        </p:spPr>
-        <p:txBody>
-          <a:bodyPr spcFirstLastPara="1" wrap="square" lIns="91425" tIns="45700" rIns="91425" bIns="45700" anchor="ctr" anchorCtr="0">
-            <a:noAutofit/>
-          </a:bodyPr>
-          <a:lstStyle/>
-          <a:p>
-            <a:pPr marL="0" marR="0" lvl="0" indent="0" algn="l" rtl="0">
-              <a:spcBef>
-                <a:spcPts val="0"/>
-              </a:spcBef>
-              <a:spcAft>
-                <a:spcPts val="0"/>
-              </a:spcAft>
-              <a:buNone/>
-            </a:pPr>
-            <a:r>
-              <a:rPr lang="en-US" sz="2400" dirty="0">
-                <a:solidFill>
-                  <a:schemeClr val="lt1"/>
-                </a:solidFill>
-                <a:latin typeface="Quattrocento Sans"/>
-                <a:ea typeface="Quattrocento Sans"/>
-                <a:cs typeface="Quattrocento Sans"/>
-                <a:sym typeface="Quattrocento Sans"/>
-              </a:rPr>
-              <a:t>O-Notation</a:t>
-            </a:r>
-            <a:endParaRPr dirty="0"/>
-          </a:p>
-        </p:txBody>
-      </p:sp>
-      <p:sp>
-        <p:nvSpPr>
-          <p:cNvPr id="43" name="Google Shape;921;p27">
+        </p:grpSpPr>
+        <p:sp>
+          <p:nvSpPr>
+            <p:cNvPr id="36" name="Google Shape;921;p27">
+              <a:extLst>
+                <a:ext uri="{FF2B5EF4-FFF2-40B4-BE49-F238E27FC236}">
+                  <a16:creationId xmlns:a16="http://schemas.microsoft.com/office/drawing/2014/main" id="{91FDE9D0-1D09-45E3-927C-0BE69EC5823B}"/>
+                </a:ext>
+              </a:extLst>
+            </p:cNvPr>
+            <p:cNvSpPr/>
+            <p:nvPr/>
+          </p:nvSpPr>
+          <p:spPr>
+            <a:xfrm>
+              <a:off x="1206001" y="3141826"/>
+              <a:ext cx="4934204" cy="476250"/>
+            </a:xfrm>
+            <a:prstGeom prst="rect">
+              <a:avLst/>
+            </a:prstGeom>
+            <a:solidFill>
+              <a:srgbClr val="4C3282"/>
+            </a:solidFill>
+            <a:ln>
+              <a:noFill/>
+            </a:ln>
+          </p:spPr>
+          <p:txBody>
+            <a:bodyPr spcFirstLastPara="1" wrap="square" lIns="91425" tIns="45700" rIns="91425" bIns="45700" anchor="ctr" anchorCtr="0">
+              <a:noAutofit/>
+            </a:bodyPr>
+            <a:lstStyle/>
+            <a:p>
+              <a:pPr marL="0" marR="0" lvl="0" indent="0" algn="l" rtl="0">
+                <a:spcBef>
+                  <a:spcPts val="0"/>
+                </a:spcBef>
+                <a:spcAft>
+                  <a:spcPts val="0"/>
+                </a:spcAft>
+                <a:buNone/>
+              </a:pPr>
+              <a:r>
+                <a:rPr lang="en-US" sz="2400" dirty="0">
+                  <a:solidFill>
+                    <a:schemeClr val="lt1"/>
+                  </a:solidFill>
+                  <a:latin typeface="Quattrocento Sans"/>
+                  <a:ea typeface="Quattrocento Sans"/>
+                  <a:cs typeface="Quattrocento Sans"/>
+                  <a:sym typeface="Quattrocento Sans"/>
+                </a:rPr>
+                <a:t>O-Notation</a:t>
+              </a:r>
+              <a:endParaRPr dirty="0"/>
+            </a:p>
+          </p:txBody>
+        </p:sp>
+        <p:pic>
+          <p:nvPicPr>
+            <p:cNvPr id="37" name="Grafik 36">
+              <a:extLst>
+                <a:ext uri="{FF2B5EF4-FFF2-40B4-BE49-F238E27FC236}">
+                  <a16:creationId xmlns:a16="http://schemas.microsoft.com/office/drawing/2014/main" id="{A7ED0E79-083D-43DE-BF6F-D2510335E980}"/>
+                </a:ext>
+              </a:extLst>
+            </p:cNvPr>
+            <p:cNvPicPr>
+              <a:picLocks noChangeAspect="1"/>
+            </p:cNvPicPr>
+            <p:nvPr/>
+          </p:nvPicPr>
+          <p:blipFill>
+            <a:blip r:embed="rId9"/>
+            <a:stretch>
+              <a:fillRect/>
+            </a:stretch>
+          </p:blipFill>
+          <p:spPr>
+            <a:xfrm>
+              <a:off x="1206500" y="3618076"/>
+              <a:ext cx="4934204" cy="1225613"/>
+            </a:xfrm>
+            <a:prstGeom prst="rect">
+              <a:avLst/>
+            </a:prstGeom>
+          </p:spPr>
+        </p:pic>
+      </p:grpSp>
+      <p:grpSp>
+        <p:nvGrpSpPr>
+          <p:cNvPr id="41" name="Gruppieren 40">
             <a:extLst>
               <a:ext uri="{FF2B5EF4-FFF2-40B4-BE49-F238E27FC236}">
-                <a16:creationId xmlns:a16="http://schemas.microsoft.com/office/drawing/2014/main" id="{6175ED36-3BA6-42D3-9AE7-600DB9E0CDE3}"/>
+                <a16:creationId xmlns:a16="http://schemas.microsoft.com/office/drawing/2014/main" id="{473FB23C-EE1B-490F-B7E1-8188A689BFA1}"/>
               </a:ext>
             </a:extLst>
           </p:cNvPr>
-          <p:cNvSpPr/>
+          <p:cNvGrpSpPr>
+            <a:grpSpLocks noChangeAspect="1"/>
+          </p:cNvGrpSpPr>
           <p:nvPr/>
-        </p:nvSpPr>
-        <p:spPr>
+        </p:nvGrpSpPr>
+        <p:grpSpPr>
           <a:xfrm>
             <a:off x="7426683" y="2256772"/>
-            <a:ext cx="4577992" cy="441868"/>
+            <a:ext cx="4577992" cy="1567217"/>
+            <a:chOff x="7056771" y="520700"/>
+            <a:chExt cx="4934204" cy="1689162"/>
           </a:xfrm>
-          <a:prstGeom prst="rect">
-            <a:avLst/>
-          </a:prstGeom>
-          <a:solidFill>
-            <a:srgbClr val="4C3282"/>
-          </a:solidFill>
-          <a:ln>
-            <a:noFill/>
-          </a:ln>
-        </p:spPr>
-        <p:txBody>
-          <a:bodyPr spcFirstLastPara="1" wrap="square" lIns="91425" tIns="45700" rIns="91425" bIns="45700" anchor="ctr" anchorCtr="0">
-            <a:noAutofit/>
-          </a:bodyPr>
-          <a:lstStyle/>
-          <a:p>
-            <a:pPr marL="0" marR="0" lvl="0" indent="0" algn="l" rtl="0">
-              <a:spcBef>
-                <a:spcPts val="0"/>
-              </a:spcBef>
-              <a:spcAft>
-                <a:spcPts val="0"/>
-              </a:spcAft>
-              <a:buNone/>
-            </a:pPr>
-            <a:r>
-              <a:rPr lang="el-GR" sz="2400" dirty="0">
-                <a:solidFill>
-                  <a:schemeClr val="lt1"/>
-                </a:solidFill>
-                <a:latin typeface="Quattrocento Sans"/>
-                <a:ea typeface="Quattrocento Sans"/>
-                <a:cs typeface="Quattrocento Sans"/>
-                <a:sym typeface="Quattrocento Sans"/>
-              </a:rPr>
-              <a:t>Ω</a:t>
-            </a:r>
-            <a:r>
-              <a:rPr lang="en-US" sz="2400" dirty="0">
-                <a:solidFill>
-                  <a:schemeClr val="lt1"/>
-                </a:solidFill>
-                <a:latin typeface="Quattrocento Sans"/>
-                <a:ea typeface="Quattrocento Sans"/>
-                <a:cs typeface="Quattrocento Sans"/>
-                <a:sym typeface="Quattrocento Sans"/>
-              </a:rPr>
-              <a:t>-Notation</a:t>
-            </a:r>
-            <a:endParaRPr dirty="0"/>
-          </a:p>
-        </p:txBody>
-      </p:sp>
+        </p:grpSpPr>
+        <p:pic>
+          <p:nvPicPr>
+            <p:cNvPr id="42" name="Grafik 41">
+              <a:extLst>
+                <a:ext uri="{FF2B5EF4-FFF2-40B4-BE49-F238E27FC236}">
+                  <a16:creationId xmlns:a16="http://schemas.microsoft.com/office/drawing/2014/main" id="{DCB8ECC9-E778-453F-96C0-40163BFBBE40}"/>
+                </a:ext>
+              </a:extLst>
+            </p:cNvPr>
+            <p:cNvPicPr>
+              <a:picLocks noChangeAspect="1"/>
+            </p:cNvPicPr>
+            <p:nvPr/>
+          </p:nvPicPr>
+          <p:blipFill>
+            <a:blip r:embed="rId10"/>
+            <a:stretch>
+              <a:fillRect/>
+            </a:stretch>
+          </p:blipFill>
+          <p:spPr>
+            <a:xfrm>
+              <a:off x="7104399" y="996950"/>
+              <a:ext cx="4838949" cy="1212912"/>
+            </a:xfrm>
+            <a:prstGeom prst="rect">
+              <a:avLst/>
+            </a:prstGeom>
+          </p:spPr>
+        </p:pic>
+        <p:sp>
+          <p:nvSpPr>
+            <p:cNvPr id="43" name="Google Shape;921;p27">
+              <a:extLst>
+                <a:ext uri="{FF2B5EF4-FFF2-40B4-BE49-F238E27FC236}">
+                  <a16:creationId xmlns:a16="http://schemas.microsoft.com/office/drawing/2014/main" id="{6175ED36-3BA6-42D3-9AE7-600DB9E0CDE3}"/>
+                </a:ext>
+              </a:extLst>
+            </p:cNvPr>
+            <p:cNvSpPr/>
+            <p:nvPr/>
+          </p:nvSpPr>
+          <p:spPr>
+            <a:xfrm>
+              <a:off x="7056771" y="520700"/>
+              <a:ext cx="4934204" cy="476250"/>
+            </a:xfrm>
+            <a:prstGeom prst="rect">
+              <a:avLst/>
+            </a:prstGeom>
+            <a:solidFill>
+              <a:srgbClr val="4C3282"/>
+            </a:solidFill>
+            <a:ln>
+              <a:noFill/>
+            </a:ln>
+          </p:spPr>
+          <p:txBody>
+            <a:bodyPr spcFirstLastPara="1" wrap="square" lIns="91425" tIns="45700" rIns="91425" bIns="45700" anchor="ctr" anchorCtr="0">
+              <a:noAutofit/>
+            </a:bodyPr>
+            <a:lstStyle/>
+            <a:p>
+              <a:pPr marL="0" marR="0" lvl="0" indent="0" algn="l" rtl="0">
+                <a:spcBef>
+                  <a:spcPts val="0"/>
+                </a:spcBef>
+                <a:spcAft>
+                  <a:spcPts val="0"/>
+                </a:spcAft>
+                <a:buNone/>
+              </a:pPr>
+              <a:r>
+                <a:rPr lang="el-GR" sz="2400" dirty="0">
+                  <a:solidFill>
+                    <a:schemeClr val="lt1"/>
+                  </a:solidFill>
+                  <a:latin typeface="Quattrocento Sans"/>
+                  <a:ea typeface="Quattrocento Sans"/>
+                  <a:cs typeface="Quattrocento Sans"/>
+                  <a:sym typeface="Quattrocento Sans"/>
+                </a:rPr>
+                <a:t>Ω</a:t>
+              </a:r>
+              <a:r>
+                <a:rPr lang="en-US" sz="2400" dirty="0">
+                  <a:solidFill>
+                    <a:schemeClr val="lt1"/>
+                  </a:solidFill>
+                  <a:latin typeface="Quattrocento Sans"/>
+                  <a:ea typeface="Quattrocento Sans"/>
+                  <a:cs typeface="Quattrocento Sans"/>
+                  <a:sym typeface="Quattrocento Sans"/>
+                </a:rPr>
+                <a:t>-Notation</a:t>
+              </a:r>
+              <a:endParaRPr dirty="0"/>
+            </a:p>
+          </p:txBody>
+        </p:sp>
+      </p:grpSp>
       <p:sp>
         <p:nvSpPr>
           <p:cNvPr id="46" name="Datumsplatzhalter 4">
@@ -24700,7 +24860,7 @@
             <a:fld id="{F2D06E3F-368B-43DC-96F3-4B8E65027050}" type="datetime1">
               <a:rPr lang="de-DE" smtClean="0"/>
               <a:pPr/>
-              <a:t>05.02.2026</a:t>
+              <a:t>21.11.2025</a:t>
             </a:fld>
             <a:endParaRPr lang="de-DE" dirty="0"/>
           </a:p>
@@ -24745,95 +24905,6 @@
           </a:p>
         </p:txBody>
       </p:sp>
-      <p:pic>
-        <p:nvPicPr>
-          <p:cNvPr id="2" name="Grafik 1">
-            <a:extLst>
-              <a:ext uri="{FF2B5EF4-FFF2-40B4-BE49-F238E27FC236}">
-                <a16:creationId xmlns:a16="http://schemas.microsoft.com/office/drawing/2014/main" id="{DCB8ECC9-E778-453F-96C0-40163BFBBE40}"/>
-              </a:ext>
-            </a:extLst>
-          </p:cNvPr>
-          <p:cNvPicPr>
-            <a:picLocks noChangeAspect="1"/>
-          </p:cNvPicPr>
-          <p:nvPr/>
-        </p:nvPicPr>
-        <p:blipFill>
-          <a:blip r:embed="rId8"/>
-          <a:stretch>
-            <a:fillRect/>
-          </a:stretch>
-        </p:blipFill>
-        <p:spPr>
-          <a:xfrm>
-            <a:off x="7470873" y="2698640"/>
-            <a:ext cx="4489614" cy="1125349"/>
-          </a:xfrm>
-          <a:prstGeom prst="rect">
-            <a:avLst/>
-          </a:prstGeom>
-        </p:spPr>
-      </p:pic>
-      <p:pic>
-        <p:nvPicPr>
-          <p:cNvPr id="4" name="Grafik 3">
-            <a:extLst>
-              <a:ext uri="{FF2B5EF4-FFF2-40B4-BE49-F238E27FC236}">
-                <a16:creationId xmlns:a16="http://schemas.microsoft.com/office/drawing/2014/main" id="{A7ED0E79-083D-43DE-BF6F-D2510335E980}"/>
-              </a:ext>
-            </a:extLst>
-          </p:cNvPr>
-          <p:cNvPicPr>
-            <a:picLocks noChangeAspect="1"/>
-          </p:cNvPicPr>
-          <p:nvPr/>
-        </p:nvPicPr>
-        <p:blipFill>
-          <a:blip r:embed="rId9"/>
-          <a:stretch>
-            <a:fillRect/>
-          </a:stretch>
-        </p:blipFill>
-        <p:spPr>
-          <a:xfrm>
-            <a:off x="7427146" y="895227"/>
-            <a:ext cx="4577992" cy="1137133"/>
-          </a:xfrm>
-          <a:prstGeom prst="rect">
-            <a:avLst/>
-          </a:prstGeom>
-        </p:spPr>
-      </p:pic>
-      <p:pic>
-        <p:nvPicPr>
-          <p:cNvPr id="7" name="Grafik 6">
-            <a:extLst>
-              <a:ext uri="{FF2B5EF4-FFF2-40B4-BE49-F238E27FC236}">
-                <a16:creationId xmlns:a16="http://schemas.microsoft.com/office/drawing/2014/main" id="{E9773847-59E5-4A70-94A9-D503A9497FE0}"/>
-              </a:ext>
-            </a:extLst>
-          </p:cNvPr>
-          <p:cNvPicPr>
-            <a:picLocks noChangeAspect="1"/>
-          </p:cNvPicPr>
-          <p:nvPr/>
-        </p:nvPicPr>
-        <p:blipFill rotWithShape="1">
-          <a:blip r:embed="rId10"/>
-          <a:srcRect l="1289" r="768" b="4434"/>
-          <a:stretch/>
-        </p:blipFill>
-        <p:spPr>
-          <a:xfrm>
-            <a:off x="5766998" y="4470559"/>
-            <a:ext cx="6238092" cy="1430181"/>
-          </a:xfrm>
-          <a:prstGeom prst="rect">
-            <a:avLst/>
-          </a:prstGeom>
-        </p:spPr>
-      </p:pic>
     </p:spTree>
   </p:cSld>
   <p:clrMapOvr>
@@ -29048,7 +29119,7 @@
             <a:fld id="{F2D06E3F-368B-43DC-96F3-4B8E65027050}" type="datetime1">
               <a:rPr lang="de-DE" smtClean="0"/>
               <a:pPr/>
-              <a:t>05.02.2026</a:t>
+              <a:t>21.11.2025</a:t>
             </a:fld>
             <a:endParaRPr lang="de-DE" dirty="0"/>
           </a:p>
